--- a/micro/book/downloads/slides/ch01_thinking_like_an_economist.pptx
+++ b/micro/book/downloads/slides/ch01_thinking_like_an_economist.pptx
@@ -2,33 +2,34 @@
 <file path=ppt/presentation.xml><?xml version="1.0" encoding="utf-8"?>
 <p:presentation xmlns:p="http://schemas.openxmlformats.org/presentationml/2006/main">
   <p:sldMasterIdLst>
-    <p:sldMasterId xmlns:r="http://schemas.openxmlformats.org/officeDocument/2006/relationships" id="2147483648" r:id="R4fde1166804a4a47"/>
+    <p:sldMasterId xmlns:r="http://schemas.openxmlformats.org/officeDocument/2006/relationships" id="2147483648" r:id="Re957f65e3aa2498a"/>
   </p:sldMasterIdLst>
   <p:notesMasterIdLst>
-    <p:notesMasterId xmlns:r="http://schemas.openxmlformats.org/officeDocument/2006/relationships" r:id="R599c1a37bc0c4ad6"/>
+    <p:notesMasterId xmlns:r="http://schemas.openxmlformats.org/officeDocument/2006/relationships" r:id="R0b74962a8cb34106"/>
   </p:notesMasterIdLst>
   <p:sldIdLst>
-    <p:sldId xmlns:r="http://schemas.openxmlformats.org/officeDocument/2006/relationships" id="256" r:id="R91a8d606958c44d3"/>
-    <p:sldId xmlns:r="http://schemas.openxmlformats.org/officeDocument/2006/relationships" id="257" r:id="Rb1669b5895064b6a"/>
-    <p:sldId xmlns:r="http://schemas.openxmlformats.org/officeDocument/2006/relationships" id="258" r:id="R3236863c11ae4e60"/>
-    <p:sldId xmlns:r="http://schemas.openxmlformats.org/officeDocument/2006/relationships" id="259" r:id="R34735c525be34900"/>
-    <p:sldId xmlns:r="http://schemas.openxmlformats.org/officeDocument/2006/relationships" id="260" r:id="Re264661bd14c43c9"/>
-    <p:sldId xmlns:r="http://schemas.openxmlformats.org/officeDocument/2006/relationships" id="261" r:id="R96487d9d39ec456a"/>
-    <p:sldId xmlns:r="http://schemas.openxmlformats.org/officeDocument/2006/relationships" id="262" r:id="R8ccfde3410564640"/>
-    <p:sldId xmlns:r="http://schemas.openxmlformats.org/officeDocument/2006/relationships" id="263" r:id="Rf75315b423bc4565"/>
-    <p:sldId xmlns:r="http://schemas.openxmlformats.org/officeDocument/2006/relationships" id="264" r:id="Rd4264498ce3f4fc5"/>
-    <p:sldId xmlns:r="http://schemas.openxmlformats.org/officeDocument/2006/relationships" id="265" r:id="R4d126de94168459c"/>
-    <p:sldId xmlns:r="http://schemas.openxmlformats.org/officeDocument/2006/relationships" id="266" r:id="R96a58ba0ccf345c7"/>
-    <p:sldId xmlns:r="http://schemas.openxmlformats.org/officeDocument/2006/relationships" id="267" r:id="R98648825e1b241fd"/>
-    <p:sldId xmlns:r="http://schemas.openxmlformats.org/officeDocument/2006/relationships" id="268" r:id="Rf38692d09070426e"/>
-    <p:sldId xmlns:r="http://schemas.openxmlformats.org/officeDocument/2006/relationships" id="269" r:id="Rbc72d0d6592143e4"/>
-    <p:sldId xmlns:r="http://schemas.openxmlformats.org/officeDocument/2006/relationships" id="270" r:id="R9385a52d564d4b8c"/>
-    <p:sldId xmlns:r="http://schemas.openxmlformats.org/officeDocument/2006/relationships" id="271" r:id="Re881210be1dd4596"/>
-    <p:sldId xmlns:r="http://schemas.openxmlformats.org/officeDocument/2006/relationships" id="272" r:id="R432ee87c664f43ed"/>
-    <p:sldId xmlns:r="http://schemas.openxmlformats.org/officeDocument/2006/relationships" id="273" r:id="R1cf0c945f2964383"/>
-    <p:sldId xmlns:r="http://schemas.openxmlformats.org/officeDocument/2006/relationships" id="274" r:id="R1a4972ab78dd4b1c"/>
-    <p:sldId xmlns:r="http://schemas.openxmlformats.org/officeDocument/2006/relationships" id="275" r:id="R3e41a265c43e4b48"/>
-    <p:sldId xmlns:r="http://schemas.openxmlformats.org/officeDocument/2006/relationships" id="276" r:id="Ra0cdf5e3d678458a"/>
+    <p:sldId xmlns:r="http://schemas.openxmlformats.org/officeDocument/2006/relationships" id="256" r:id="R6c92b0c598a64654"/>
+    <p:sldId xmlns:r="http://schemas.openxmlformats.org/officeDocument/2006/relationships" id="257" r:id="Re20f1bd7c2014e22"/>
+    <p:sldId xmlns:r="http://schemas.openxmlformats.org/officeDocument/2006/relationships" id="258" r:id="Recee97b531ce4556"/>
+    <p:sldId xmlns:r="http://schemas.openxmlformats.org/officeDocument/2006/relationships" id="259" r:id="Re1971e243fbf4fdc"/>
+    <p:sldId xmlns:r="http://schemas.openxmlformats.org/officeDocument/2006/relationships" id="260" r:id="R563f28b791ad4a9a"/>
+    <p:sldId xmlns:r="http://schemas.openxmlformats.org/officeDocument/2006/relationships" id="261" r:id="R9ff964f09d634009"/>
+    <p:sldId xmlns:r="http://schemas.openxmlformats.org/officeDocument/2006/relationships" id="262" r:id="R54cf1f4574f4442e"/>
+    <p:sldId xmlns:r="http://schemas.openxmlformats.org/officeDocument/2006/relationships" id="263" r:id="Ra3d7416a1a2746ee"/>
+    <p:sldId xmlns:r="http://schemas.openxmlformats.org/officeDocument/2006/relationships" id="264" r:id="Raef97e9c433f4780"/>
+    <p:sldId xmlns:r="http://schemas.openxmlformats.org/officeDocument/2006/relationships" id="265" r:id="R30eca37e19f945ba"/>
+    <p:sldId xmlns:r="http://schemas.openxmlformats.org/officeDocument/2006/relationships" id="266" r:id="R03a9a38b6bf04629"/>
+    <p:sldId xmlns:r="http://schemas.openxmlformats.org/officeDocument/2006/relationships" id="267" r:id="R58b894aa3251437f"/>
+    <p:sldId xmlns:r="http://schemas.openxmlformats.org/officeDocument/2006/relationships" id="268" r:id="R721dc115c6f0467d"/>
+    <p:sldId xmlns:r="http://schemas.openxmlformats.org/officeDocument/2006/relationships" id="269" r:id="Rd635b66c70ff427c"/>
+    <p:sldId xmlns:r="http://schemas.openxmlformats.org/officeDocument/2006/relationships" id="270" r:id="R19ebbeec13f54f1e"/>
+    <p:sldId xmlns:r="http://schemas.openxmlformats.org/officeDocument/2006/relationships" id="271" r:id="R815a98d9e35b425e"/>
+    <p:sldId xmlns:r="http://schemas.openxmlformats.org/officeDocument/2006/relationships" id="272" r:id="R1f59d893037248e4"/>
+    <p:sldId xmlns:r="http://schemas.openxmlformats.org/officeDocument/2006/relationships" id="273" r:id="Rab710e5818c14e45"/>
+    <p:sldId xmlns:r="http://schemas.openxmlformats.org/officeDocument/2006/relationships" id="274" r:id="R533f8667a9164a2c"/>
+    <p:sldId xmlns:r="http://schemas.openxmlformats.org/officeDocument/2006/relationships" id="275" r:id="R652279aa53e84fdc"/>
+    <p:sldId xmlns:r="http://schemas.openxmlformats.org/officeDocument/2006/relationships" id="276" r:id="Rcf2141b3380e49ce"/>
+    <p:sldId xmlns:r="http://schemas.openxmlformats.org/officeDocument/2006/relationships" id="277" r:id="R97a1bb825e654516"/>
   </p:sldIdLst>
   <p:sldSz cx="12192000" cy="6858000"/>
   <p:notesSz cx="6858000" cy="9144000"/>
@@ -1197,7 +1198,7 @@
           <a:lstStyle xmlns:a="http://schemas.openxmlformats.org/drawingml/2006/main"/>
           <a:p xmlns:a="http://schemas.openxmlformats.org/drawingml/2006/main">
             <a:r>
-              <a:t>Do not teach an estimator. The sole purpose is to show why one observation before and one after can mix the policy with many other changes. A similar untreated location can strengthen the comparison.</a:t>
+              <a:t>Begin with the headline, then ask students why the ranking does not by itself prove that choosing economics caused the earnings difference. Mention that several highly selective schools lack an undergraduate business major, so business-oriented students may sort into economics. Then explain why the grade-cutoff comparison is stronger evidence while remaining cautious about generalizing from one university.</a:t>
             </a:r>
           </a:p>
           <a:p xmlns:a="http://schemas.openxmlformats.org/drawingml/2006/main">
@@ -1213,6 +1214,16 @@
           <a:p xmlns:a="http://schemas.openxmlformats.org/drawingml/2006/main">
             <a:r>
               <a:t>- Principles of Micro, Chapter 1: Thinking Like an Economist (current project draft).</a:t>
+            </a:r>
+          </a:p>
+          <a:p xmlns:a="http://schemas.openxmlformats.org/drawingml/2006/main">
+            <a:r>
+              <a:t>- David Waldron, ‘The Highest- and Lowest-Paid College Majors,’ based on IPUMS-USA ACS 2020-2024, circulated by Crémieux on August 3, 2026. https://x.com/cremieuxrecueil/status/2084314749651599433</a:t>
+            </a:r>
+          </a:p>
+          <a:p xmlns:a="http://schemas.openxmlformats.org/drawingml/2006/main">
+            <a:r>
+              <a:t>- Zachary Bleemer and Aashish Mehta, ‘Will Studying Economics Make You Rich?’ American Economic Journal: Applied Economics 14(2), 2022, 1-22. https://doi.org/10.1257/app.20200447</a:t>
             </a:r>
           </a:p>
           <a:p xmlns:a="http://schemas.openxmlformats.org/drawingml/2006/main">
@@ -1287,7 +1298,7 @@
           <a:lstStyle xmlns:a="http://schemas.openxmlformats.org/drawingml/2006/main"/>
           <a:p xmlns:a="http://schemas.openxmlformats.org/drawingml/2006/main">
             <a:r>
-              <a:t>Focus on research design, not the percentages. The program areas changed more than price, so the study does not isolate a pure price effect. It does show that search declined more in the program areas than in comparison areas.</a:t>
+              <a:t>Do not teach an estimator. The sole purpose is to show why one observation before and one after can mix the policy with many other changes. A similar untreated location can strengthen the comparison.</a:t>
             </a:r>
           </a:p>
           <a:p xmlns:a="http://schemas.openxmlformats.org/drawingml/2006/main">
@@ -1303,16 +1314,6 @@
           <a:p xmlns:a="http://schemas.openxmlformats.org/drawingml/2006/main">
             <a:r>
               <a:t>- Principles of Micro, Chapter 1: Thinking Like an Economist (current project draft).</a:t>
-            </a:r>
-          </a:p>
-          <a:p xmlns:a="http://schemas.openxmlformats.org/drawingml/2006/main">
-            <a:r>
-              <a:t>- San Francisco Municipal Transportation Agency, SFpark Pilot Project Evaluation (2014). https://www.sfmta.com/sites/default/files/reports-and-documents/2018/08/sfpark_pilot_project_evaluation.pdf</a:t>
-            </a:r>
-          </a:p>
-          <a:p xmlns:a="http://schemas.openxmlformats.org/drawingml/2006/main">
-            <a:r>
-              <a:t>- Farzad Alemi, Caroline J. Rodier, and Christiana Drake, ‘Cruising and On-Street Parking Pricing,’ Transportation Research Part A 111 (2018): 187–198. https://doi.org/10.1016/j.tra.2018.03.007</a:t>
             </a:r>
           </a:p>
           <a:p xmlns:a="http://schemas.openxmlformats.org/drawingml/2006/main">
@@ -1387,7 +1388,7 @@
           <a:lstStyle xmlns:a="http://schemas.openxmlformats.org/drawingml/2006/main"/>
           <a:p xmlns:a="http://schemas.openxmlformats.org/drawingml/2006/main">
             <a:r>
-              <a:t>Use parking: ‘Charging will reduce some parking demand’ is positive. ‘The university should charge’ is normative. Students may agree about effects and disagree about goals, or disagree about the size of the effect itself.</a:t>
+              <a:t>Focus on research design, not the percentages. The program areas changed more than price, so the study does not isolate a pure price effect. It does show that search declined more in the program areas than in comparison areas.</a:t>
             </a:r>
           </a:p>
           <a:p xmlns:a="http://schemas.openxmlformats.org/drawingml/2006/main">
@@ -1403,6 +1404,16 @@
           <a:p xmlns:a="http://schemas.openxmlformats.org/drawingml/2006/main">
             <a:r>
               <a:t>- Principles of Micro, Chapter 1: Thinking Like an Economist (current project draft).</a:t>
+            </a:r>
+          </a:p>
+          <a:p xmlns:a="http://schemas.openxmlformats.org/drawingml/2006/main">
+            <a:r>
+              <a:t>- San Francisco Municipal Transportation Agency, SFpark Pilot Project Evaluation (2014). https://www.sfmta.com/sites/default/files/reports-and-documents/2018/08/sfpark_pilot_project_evaluation.pdf</a:t>
+            </a:r>
+          </a:p>
+          <a:p xmlns:a="http://schemas.openxmlformats.org/drawingml/2006/main">
+            <a:r>
+              <a:t>- Farzad Alemi, Caroline J. Rodier, and Christiana Drake, ‘Cruising and On-Street Parking Pricing,’ Transportation Research Part A 111 (2018): 187–198. https://doi.org/10.1016/j.tra.2018.03.007</a:t>
             </a:r>
           </a:p>
           <a:p xmlns:a="http://schemas.openxmlformats.org/drawingml/2006/main">
@@ -1572,7 +1583,7 @@
           <a:lstStyle xmlns:a="http://schemas.openxmlformats.org/drawingml/2006/main"/>
           <a:p xmlns:a="http://schemas.openxmlformats.org/drawingml/2006/main">
             <a:r>
-              <a:t>Use Bastiat to reinforce opportunity cost and secondary consequences, not as a detached biography. Looking for the unseen does not dictate a policy conclusion; it prevents us from counting only the most visible benefit or cost.</a:t>
+              <a:t>Use parking: ‘Charging will reduce some parking demand’ is positive. ‘The university should charge’ is normative. Students may agree about effects and disagree about goals, or disagree about the size of the effect itself.</a:t>
             </a:r>
           </a:p>
           <a:p xmlns:a="http://schemas.openxmlformats.org/drawingml/2006/main">
@@ -1588,11 +1599,6 @@
           <a:p xmlns:a="http://schemas.openxmlformats.org/drawingml/2006/main">
             <a:r>
               <a:t>- Principles of Micro, Chapter 1: Thinking Like an Economist (current project draft).</a:t>
-            </a:r>
-          </a:p>
-          <a:p xmlns:a="http://schemas.openxmlformats.org/drawingml/2006/main">
-            <a:r>
-              <a:t>- Frédéric Bastiat, ‘What Is Seen and What Is Not Seen’ (1850), in Selected Essays on Political Economy, trans. Seymour Cain. https://oll.libertyfund.org/titles/bastiat-selected-essays-on-political-economy</a:t>
             </a:r>
           </a:p>
           <a:p xmlns:a="http://schemas.openxmlformats.org/drawingml/2006/main">
@@ -1628,6 +1634,101 @@
 </file>
 
 <file path=ppt/notesSlides/notesSlide21.xml><?xml version="1.0" encoding="utf-8"?>
+<p:notes xmlns:p="http://schemas.openxmlformats.org/presentationml/2006/main">
+  <p:cSld>
+    <p:spTree>
+      <p:nvGrpSpPr>
+        <p:cNvPr id="1" name=""/>
+        <p:cNvGrpSpPr/>
+        <p:nvPr/>
+      </p:nvGrpSpPr>
+      <p:grpSpPr>
+        <a:xfrm xmlns:a="http://schemas.openxmlformats.org/drawingml/2006/main"/>
+      </p:grpSpPr>
+      <p:sp>
+        <p:nvSpPr>
+          <p:cNvPr id="2" name="Slide Image Placeholder 1"/>
+          <p:cNvSpPr>
+            <a:spLocks xmlns:a="http://schemas.openxmlformats.org/drawingml/2006/main" noGrp="1"/>
+          </p:cNvSpPr>
+          <p:nvPr>
+            <p:ph type="sldImg" idx="0"/>
+          </p:nvPr>
+        </p:nvSpPr>
+        <p:spPr/>
+      </p:sp>
+      <p:sp>
+        <p:nvSpPr>
+          <p:cNvPr id="3" name="Notes Placeholder 2"/>
+          <p:cNvSpPr>
+            <a:spLocks xmlns:a="http://schemas.openxmlformats.org/drawingml/2006/main" noGrp="1"/>
+          </p:cNvSpPr>
+          <p:nvPr>
+            <p:ph type="body" idx="1"/>
+          </p:nvPr>
+        </p:nvSpPr>
+        <p:spPr/>
+        <p:txBody>
+          <a:bodyPr xmlns:a="http://schemas.openxmlformats.org/drawingml/2006/main"/>
+          <a:lstStyle xmlns:a="http://schemas.openxmlformats.org/drawingml/2006/main"/>
+          <a:p xmlns:a="http://schemas.openxmlformats.org/drawingml/2006/main">
+            <a:r>
+              <a:t>Use Bastiat to reinforce opportunity cost and secondary consequences, not as a detached biography. Looking for the unseen does not dictate a policy conclusion; it prevents us from counting only the most visible benefit or cost.</a:t>
+            </a:r>
+          </a:p>
+          <a:p xmlns:a="http://schemas.openxmlformats.org/drawingml/2006/main">
+            <a:r>
+              <a:t/>
+            </a:r>
+          </a:p>
+          <a:p xmlns:a="http://schemas.openxmlformats.org/drawingml/2006/main">
+            <a:r>
+              <a:t>[Sources]</a:t>
+            </a:r>
+          </a:p>
+          <a:p xmlns:a="http://schemas.openxmlformats.org/drawingml/2006/main">
+            <a:r>
+              <a:t>- Principles of Micro, Chapter 1: Thinking Like an Economist (current project draft).</a:t>
+            </a:r>
+          </a:p>
+          <a:p xmlns:a="http://schemas.openxmlformats.org/drawingml/2006/main">
+            <a:r>
+              <a:t>- Frédéric Bastiat, ‘What Is Seen and What Is Not Seen’ (1850), in Selected Essays on Political Economy, trans. Seymour Cain. https://oll.libertyfund.org/titles/bastiat-selected-essays-on-political-economy</a:t>
+            </a:r>
+          </a:p>
+          <a:p xmlns:a="http://schemas.openxmlformats.org/drawingml/2006/main">
+            <a:r>
+              <a:t>[/Sources]</a:t>
+            </a:r>
+          </a:p>
+        </p:txBody>
+      </p:sp>
+      <p:sp>
+        <p:nvSpPr>
+          <p:cNvPr id="4" name="Slide Number Placeholder 3"/>
+          <p:cNvSpPr>
+            <a:spLocks xmlns:a="http://schemas.openxmlformats.org/drawingml/2006/main" noGrp="1"/>
+          </p:cNvSpPr>
+          <p:nvPr>
+            <p:ph type="sldNum" idx="5"/>
+          </p:nvPr>
+        </p:nvSpPr>
+        <p:spPr/>
+        <p:txBody>
+          <a:bodyPr xmlns:a="http://schemas.openxmlformats.org/drawingml/2006/main"/>
+          <a:lstStyle xmlns:a="http://schemas.openxmlformats.org/drawingml/2006/main"/>
+          <a:p xmlns:a="http://schemas.openxmlformats.org/drawingml/2006/main"/>
+        </p:txBody>
+      </p:sp>
+    </p:spTree>
+  </p:cSld>
+  <p:clrMapOvr>
+    <a:masterClrMapping xmlns:a="http://schemas.openxmlformats.org/drawingml/2006/main"/>
+  </p:clrMapOvr>
+</p:notes>
+</file>
+
+<file path=ppt/notesSlides/notesSlide22.xml><?xml version="1.0" encoding="utf-8"?>
 <p:notes xmlns:p="http://schemas.openxmlformats.org/presentationml/2006/main">
   <p:cSld>
     <p:spTree>
@@ -2385,7 +2486,7 @@
   </p:cSld>
   <p:clrMap bg1="lt1" tx1="dk1" bg2="lt2" tx2="dk2" accent1="accent1" accent2="accent2" accent3="accent3" accent4="accent4" accent5="accent5" accent6="accent6" hlink="hlink" folHlink="folHlink"/>
   <p:sldLayoutIdLst>
-    <p:sldLayoutId xmlns:r="http://schemas.openxmlformats.org/officeDocument/2006/relationships" id="2147483649" r:id="Re59e8f6a98964615"/>
+    <p:sldLayoutId xmlns:r="http://schemas.openxmlformats.org/officeDocument/2006/relationships" id="2147483649" r:id="Rc7b9ac28d5d04d97"/>
   </p:sldLayoutIdLst>
   <p:txStyles>
     <p:titleStyle>
@@ -2936,7 +3037,7 @@
           <p:cNvPr id="9" name="title-field">
             <a:extLst xmlns:a="http://schemas.openxmlformats.org/drawingml/2006/main">
               <a:ext uri="{FF2B5EF4-FFF2-40B4-BE49-F238E27FC236}">
-                <a16:creationId xmlns:a16="http://schemas.microsoft.com/office/drawing/2014/main" id="{A8A02223-DE96-4498-9AAC-FE96915F8124}"/>
+                <a16:creationId xmlns:a16="http://schemas.microsoft.com/office/drawing/2014/main" id="{AFB6D4CF-0B02-4A61-840E-914981D76EBD}"/>
               </a:ext>
             </a:extLst>
           </p:cNvPr>
@@ -2967,7 +3068,7 @@
           <p:cNvPr id="2" name="title-accent">
             <a:extLst xmlns:a="http://schemas.openxmlformats.org/drawingml/2006/main">
               <a:ext uri="{FF2B5EF4-FFF2-40B4-BE49-F238E27FC236}">
-                <a16:creationId xmlns:a16="http://schemas.microsoft.com/office/drawing/2014/main" id="{59251B19-32A0-4E0A-967C-0A53DA79D385}"/>
+                <a16:creationId xmlns:a16="http://schemas.microsoft.com/office/drawing/2014/main" id="{2DB37398-2DE1-4155-9128-958EE68EC6EE}"/>
               </a:ext>
             </a:extLst>
           </p:cNvPr>
@@ -2998,7 +3099,7 @@
           <p:cNvPr id="3" name="deck-title">
             <a:extLst xmlns:a="http://schemas.openxmlformats.org/drawingml/2006/main">
               <a:ext uri="{FF2B5EF4-FFF2-40B4-BE49-F238E27FC236}">
-                <a16:creationId xmlns:a16="http://schemas.microsoft.com/office/drawing/2014/main" id="{BF21C6AC-37DA-44B2-B320-A7F5B8E61E8C}"/>
+                <a16:creationId xmlns:a16="http://schemas.microsoft.com/office/drawing/2014/main" id="{A28F8EF3-103D-4746-A7A9-5567A8C24D41}"/>
               </a:ext>
             </a:extLst>
           </p:cNvPr>
@@ -3087,7 +3188,7 @@
           <p:cNvPr id="4" name="deck-chapter">
             <a:extLst xmlns:a="http://schemas.openxmlformats.org/drawingml/2006/main">
               <a:ext uri="{FF2B5EF4-FFF2-40B4-BE49-F238E27FC236}">
-                <a16:creationId xmlns:a16="http://schemas.microsoft.com/office/drawing/2014/main" id="{573D49A4-37C0-4716-B3F9-F3EC2F7F748D}"/>
+                <a16:creationId xmlns:a16="http://schemas.microsoft.com/office/drawing/2014/main" id="{24A3D9CB-D85A-4C3A-9AB4-AC432EFC99F9}"/>
               </a:ext>
             </a:extLst>
           </p:cNvPr>
@@ -3149,7 +3250,7 @@
           <p:cNvPr id="5" name="deck-book">
             <a:extLst xmlns:a="http://schemas.openxmlformats.org/drawingml/2006/main">
               <a:ext uri="{FF2B5EF4-FFF2-40B4-BE49-F238E27FC236}">
-                <a16:creationId xmlns:a16="http://schemas.microsoft.com/office/drawing/2014/main" id="{DCFB6FBF-0EC5-46E0-B502-01B6CA66EDB1}"/>
+                <a16:creationId xmlns:a16="http://schemas.microsoft.com/office/drawing/2014/main" id="{C6F96476-6ACF-4AD3-8318-0F6F5BAF1E13}"/>
               </a:ext>
             </a:extLst>
           </p:cNvPr>
@@ -3211,7 +3312,7 @@
           <p:cNvPr id="6" name="deck-author">
             <a:extLst xmlns:a="http://schemas.openxmlformats.org/drawingml/2006/main">
               <a:ext uri="{FF2B5EF4-FFF2-40B4-BE49-F238E27FC236}">
-                <a16:creationId xmlns:a16="http://schemas.microsoft.com/office/drawing/2014/main" id="{40BBD47F-C646-48E6-8CD7-DC7B44F30211}"/>
+                <a16:creationId xmlns:a16="http://schemas.microsoft.com/office/drawing/2014/main" id="{F3D8948C-6311-4836-8906-3808CE39CB58}"/>
               </a:ext>
             </a:extLst>
           </p:cNvPr>
@@ -3277,7 +3378,7 @@
           <p:nvPr/>
         </p:nvPicPr>
         <p:blipFill>
-          <a:blip xmlns:r="http://schemas.openxmlformats.org/officeDocument/2006/relationships" xmlns:a="http://schemas.openxmlformats.org/drawingml/2006/main" r:embed="Rc871046f84d7448c"/>
+          <a:blip xmlns:r="http://schemas.openxmlformats.org/officeDocument/2006/relationships" xmlns:a="http://schemas.openxmlformats.org/drawingml/2006/main" r:embed="R9b3d51169dfe46d5"/>
           <a:stretch xmlns:a="http://schemas.openxmlformats.org/drawingml/2006/main"/>
         </p:blipFill>
         <p:spPr>
@@ -3295,7 +3396,7 @@
           <p:cNvPr id="8" name="deck-theme">
             <a:extLst xmlns:a="http://schemas.openxmlformats.org/drawingml/2006/main">
               <a:ext uri="{FF2B5EF4-FFF2-40B4-BE49-F238E27FC236}">
-                <a16:creationId xmlns:a16="http://schemas.microsoft.com/office/drawing/2014/main" id="{0C818EAA-A55B-4E6B-A4DC-D0FE49170DE3}"/>
+                <a16:creationId xmlns:a16="http://schemas.microsoft.com/office/drawing/2014/main" id="{BA566984-FBE8-42B7-8347-562F8F7C542B}"/>
               </a:ext>
             </a:extLst>
           </p:cNvPr>
@@ -3355,7 +3456,7 @@
     </p:spTree>
     <p:extLst>
       <p:ext uri="{BB962C8B-B14F-4D97-AF65-F5344CB8AC3E}">
-        <p14:creationId xmlns:p14="http://schemas.microsoft.com/office/powerpoint/2010/main" val="1624701174"/>
+        <p14:creationId xmlns:p14="http://schemas.microsoft.com/office/powerpoint/2010/main" val="136376234"/>
       </p:ext>
     </p:extLst>
   </p:cSld>
@@ -3386,7 +3487,7 @@
           <p:cNvPr id="15" name="accent-rule">
             <a:extLst xmlns:a="http://schemas.openxmlformats.org/drawingml/2006/main">
               <a:ext uri="{FF2B5EF4-FFF2-40B4-BE49-F238E27FC236}">
-                <a16:creationId xmlns:a16="http://schemas.microsoft.com/office/drawing/2014/main" id="{38797ACD-BA34-45A6-8C92-8C3676A0EF58}"/>
+                <a16:creationId xmlns:a16="http://schemas.microsoft.com/office/drawing/2014/main" id="{0FAF6B7E-189E-4EBB-90C0-977D0BB65A0C}"/>
               </a:ext>
             </a:extLst>
           </p:cNvPr>
@@ -3417,7 +3518,7 @@
           <p:cNvPr id="2" name="chapter-label">
             <a:extLst xmlns:a="http://schemas.openxmlformats.org/drawingml/2006/main">
               <a:ext uri="{FF2B5EF4-FFF2-40B4-BE49-F238E27FC236}">
-                <a16:creationId xmlns:a16="http://schemas.microsoft.com/office/drawing/2014/main" id="{66A90415-4C05-4B93-82DE-6A792299A8EF}"/>
+                <a16:creationId xmlns:a16="http://schemas.microsoft.com/office/drawing/2014/main" id="{A85185E3-937A-47D0-8A49-4675B4796739}"/>
               </a:ext>
             </a:extLst>
           </p:cNvPr>
@@ -3479,7 +3580,7 @@
           <p:cNvPr id="3" name="slide-title">
             <a:extLst xmlns:a="http://schemas.openxmlformats.org/drawingml/2006/main">
               <a:ext uri="{FF2B5EF4-FFF2-40B4-BE49-F238E27FC236}">
-                <a16:creationId xmlns:a16="http://schemas.microsoft.com/office/drawing/2014/main" id="{BA1E1517-3CE8-4B33-A758-B7CC4650498D}"/>
+                <a16:creationId xmlns:a16="http://schemas.microsoft.com/office/drawing/2014/main" id="{189A4106-64FE-4AD4-9442-440EDB8C4873}"/>
               </a:ext>
             </a:extLst>
           </p:cNvPr>
@@ -3541,7 +3642,7 @@
           <p:cNvPr id="4" name="footer-rule">
             <a:extLst xmlns:a="http://schemas.openxmlformats.org/drawingml/2006/main">
               <a:ext uri="{FF2B5EF4-FFF2-40B4-BE49-F238E27FC236}">
-                <a16:creationId xmlns:a16="http://schemas.microsoft.com/office/drawing/2014/main" id="{613FB4CA-5984-447D-A9E7-BE4C0E5BEBBE}"/>
+                <a16:creationId xmlns:a16="http://schemas.microsoft.com/office/drawing/2014/main" id="{381FEC48-936F-47D2-89CE-A0753874D06E}"/>
               </a:ext>
             </a:extLst>
           </p:cNvPr>
@@ -3572,7 +3673,7 @@
           <p:cNvPr id="5" name="footer-book">
             <a:extLst xmlns:a="http://schemas.openxmlformats.org/drawingml/2006/main">
               <a:ext uri="{FF2B5EF4-FFF2-40B4-BE49-F238E27FC236}">
-                <a16:creationId xmlns:a16="http://schemas.microsoft.com/office/drawing/2014/main" id="{559DDFD0-64D3-44F4-A023-6DF5DC7127F4}"/>
+                <a16:creationId xmlns:a16="http://schemas.microsoft.com/office/drawing/2014/main" id="{8F8F960D-E97F-454D-AD52-94CD76566A4D}"/>
               </a:ext>
             </a:extLst>
           </p:cNvPr>
@@ -3634,7 +3735,7 @@
           <p:cNvPr id="6" name="footer-number">
             <a:extLst xmlns:a="http://schemas.openxmlformats.org/drawingml/2006/main">
               <a:ext uri="{FF2B5EF4-FFF2-40B4-BE49-F238E27FC236}">
-                <a16:creationId xmlns:a16="http://schemas.microsoft.com/office/drawing/2014/main" id="{5A1DCFED-4B7A-4CE9-AC05-3CA6EDD0DD8E}"/>
+                <a16:creationId xmlns:a16="http://schemas.microsoft.com/office/drawing/2014/main" id="{FEC1CF34-F833-406C-B8B4-B4F3B9992D72}"/>
               </a:ext>
             </a:extLst>
           </p:cNvPr>
@@ -3696,7 +3797,7 @@
           <p:cNvPr id="7" name="rationality-definition">
             <a:extLst xmlns:a="http://schemas.openxmlformats.org/drawingml/2006/main">
               <a:ext uri="{FF2B5EF4-FFF2-40B4-BE49-F238E27FC236}">
-                <a16:creationId xmlns:a16="http://schemas.microsoft.com/office/drawing/2014/main" id="{8CC1B122-1D60-4FE5-B5C9-30C6A84AD490}"/>
+                <a16:creationId xmlns:a16="http://schemas.microsoft.com/office/drawing/2014/main" id="{DF3F1E62-8833-4A0E-84DB-D4283A26D0FE}"/>
               </a:ext>
             </a:extLst>
           </p:cNvPr>
@@ -3758,7 +3859,7 @@
           <p:cNvPr id="8" name="rationality-rule">
             <a:extLst xmlns:a="http://schemas.openxmlformats.org/drawingml/2006/main">
               <a:ext uri="{FF2B5EF4-FFF2-40B4-BE49-F238E27FC236}">
-                <a16:creationId xmlns:a16="http://schemas.microsoft.com/office/drawing/2014/main" id="{983DD2CE-E78C-4F20-80C2-F393876471B1}"/>
+                <a16:creationId xmlns:a16="http://schemas.microsoft.com/office/drawing/2014/main" id="{736A9546-18EB-4C22-B03E-71849F68DFC9}"/>
               </a:ext>
             </a:extLst>
           </p:cNvPr>
@@ -3789,7 +3890,7 @@
           <p:cNvPr id="9" name="rationality-mark-1">
             <a:extLst xmlns:a="http://schemas.openxmlformats.org/drawingml/2006/main">
               <a:ext uri="{FF2B5EF4-FFF2-40B4-BE49-F238E27FC236}">
-                <a16:creationId xmlns:a16="http://schemas.microsoft.com/office/drawing/2014/main" id="{A0533BE8-AA0B-4EC5-B0E1-A41D5D0C911E}"/>
+                <a16:creationId xmlns:a16="http://schemas.microsoft.com/office/drawing/2014/main" id="{5B7E1B96-88EA-461D-8A0F-EF9D046A95D3}"/>
               </a:ext>
             </a:extLst>
           </p:cNvPr>
@@ -3851,7 +3952,7 @@
           <p:cNvPr id="10" name="rationality-1">
             <a:extLst xmlns:a="http://schemas.openxmlformats.org/drawingml/2006/main">
               <a:ext uri="{FF2B5EF4-FFF2-40B4-BE49-F238E27FC236}">
-                <a16:creationId xmlns:a16="http://schemas.microsoft.com/office/drawing/2014/main" id="{D694E0EB-89B6-4F06-A96C-0D53460013EB}"/>
+                <a16:creationId xmlns:a16="http://schemas.microsoft.com/office/drawing/2014/main" id="{1267E615-6AE3-481D-B72B-D611744A7FE3}"/>
               </a:ext>
             </a:extLst>
           </p:cNvPr>
@@ -3913,7 +4014,7 @@
           <p:cNvPr id="11" name="rationality-mark-2">
             <a:extLst xmlns:a="http://schemas.openxmlformats.org/drawingml/2006/main">
               <a:ext uri="{FF2B5EF4-FFF2-40B4-BE49-F238E27FC236}">
-                <a16:creationId xmlns:a16="http://schemas.microsoft.com/office/drawing/2014/main" id="{570DC26F-0535-40A8-865B-3D97244B314D}"/>
+                <a16:creationId xmlns:a16="http://schemas.microsoft.com/office/drawing/2014/main" id="{381F0140-4D0D-4612-A876-AFB67074F060}"/>
               </a:ext>
             </a:extLst>
           </p:cNvPr>
@@ -3975,7 +4076,7 @@
           <p:cNvPr id="12" name="rationality-2">
             <a:extLst xmlns:a="http://schemas.openxmlformats.org/drawingml/2006/main">
               <a:ext uri="{FF2B5EF4-FFF2-40B4-BE49-F238E27FC236}">
-                <a16:creationId xmlns:a16="http://schemas.microsoft.com/office/drawing/2014/main" id="{7FB8A338-5231-4DA9-8DEC-471FD12B36A2}"/>
+                <a16:creationId xmlns:a16="http://schemas.microsoft.com/office/drawing/2014/main" id="{37DFA432-E888-4842-9392-3D58B06383EA}"/>
               </a:ext>
             </a:extLst>
           </p:cNvPr>
@@ -4037,7 +4138,7 @@
           <p:cNvPr id="13" name="rationality-mark-3">
             <a:extLst xmlns:a="http://schemas.openxmlformats.org/drawingml/2006/main">
               <a:ext uri="{FF2B5EF4-FFF2-40B4-BE49-F238E27FC236}">
-                <a16:creationId xmlns:a16="http://schemas.microsoft.com/office/drawing/2014/main" id="{C843A571-1493-4B5B-BE06-F31CA7B8F0CC}"/>
+                <a16:creationId xmlns:a16="http://schemas.microsoft.com/office/drawing/2014/main" id="{3008DCC0-2379-4FF0-B7C1-E635BB736E7A}"/>
               </a:ext>
             </a:extLst>
           </p:cNvPr>
@@ -4099,7 +4200,7 @@
           <p:cNvPr id="14" name="rationality-3">
             <a:extLst xmlns:a="http://schemas.openxmlformats.org/drawingml/2006/main">
               <a:ext uri="{FF2B5EF4-FFF2-40B4-BE49-F238E27FC236}">
-                <a16:creationId xmlns:a16="http://schemas.microsoft.com/office/drawing/2014/main" id="{7ED44355-BD76-4FEB-8109-40D86CF377E0}"/>
+                <a16:creationId xmlns:a16="http://schemas.microsoft.com/office/drawing/2014/main" id="{29F4E61D-048F-4DFE-87C8-06A47B7E8C70}"/>
               </a:ext>
             </a:extLst>
           </p:cNvPr>
@@ -4159,7 +4260,7 @@
     </p:spTree>
     <p:extLst>
       <p:ext uri="{BB962C8B-B14F-4D97-AF65-F5344CB8AC3E}">
-        <p14:creationId xmlns:p14="http://schemas.microsoft.com/office/powerpoint/2010/main" val="629662381"/>
+        <p14:creationId xmlns:p14="http://schemas.microsoft.com/office/powerpoint/2010/main" val="1460303425"/>
       </p:ext>
     </p:extLst>
   </p:cSld>
@@ -4190,7 +4291,7 @@
           <p:cNvPr id="14" name="accent-rule">
             <a:extLst xmlns:a="http://schemas.openxmlformats.org/drawingml/2006/main">
               <a:ext uri="{FF2B5EF4-FFF2-40B4-BE49-F238E27FC236}">
-                <a16:creationId xmlns:a16="http://schemas.microsoft.com/office/drawing/2014/main" id="{DE8053B7-5ED3-4EC1-885C-AEB9918867BF}"/>
+                <a16:creationId xmlns:a16="http://schemas.microsoft.com/office/drawing/2014/main" id="{06AD7567-7794-41F7-9E97-2AD5F74B887C}"/>
               </a:ext>
             </a:extLst>
           </p:cNvPr>
@@ -4221,7 +4322,7 @@
           <p:cNvPr id="2" name="chapter-label">
             <a:extLst xmlns:a="http://schemas.openxmlformats.org/drawingml/2006/main">
               <a:ext uri="{FF2B5EF4-FFF2-40B4-BE49-F238E27FC236}">
-                <a16:creationId xmlns:a16="http://schemas.microsoft.com/office/drawing/2014/main" id="{60B96383-E746-4976-AFB1-FAE69A934EEF}"/>
+                <a16:creationId xmlns:a16="http://schemas.microsoft.com/office/drawing/2014/main" id="{B5356FEC-5FCF-413F-9D8B-9DAD391C076A}"/>
               </a:ext>
             </a:extLst>
           </p:cNvPr>
@@ -4283,7 +4384,7 @@
           <p:cNvPr id="3" name="slide-title">
             <a:extLst xmlns:a="http://schemas.openxmlformats.org/drawingml/2006/main">
               <a:ext uri="{FF2B5EF4-FFF2-40B4-BE49-F238E27FC236}">
-                <a16:creationId xmlns:a16="http://schemas.microsoft.com/office/drawing/2014/main" id="{776EDC12-AA1D-4FEA-975E-567E527E21CE}"/>
+                <a16:creationId xmlns:a16="http://schemas.microsoft.com/office/drawing/2014/main" id="{E016117F-ACAB-4891-B46E-683FB9BA2B31}"/>
               </a:ext>
             </a:extLst>
           </p:cNvPr>
@@ -4345,7 +4446,7 @@
           <p:cNvPr id="4" name="footer-rule">
             <a:extLst xmlns:a="http://schemas.openxmlformats.org/drawingml/2006/main">
               <a:ext uri="{FF2B5EF4-FFF2-40B4-BE49-F238E27FC236}">
-                <a16:creationId xmlns:a16="http://schemas.microsoft.com/office/drawing/2014/main" id="{2FB2D81D-92E9-4F22-AD7D-14563F845788}"/>
+                <a16:creationId xmlns:a16="http://schemas.microsoft.com/office/drawing/2014/main" id="{B20BC719-C45B-4BFE-91FD-56B4A1F6C01D}"/>
               </a:ext>
             </a:extLst>
           </p:cNvPr>
@@ -4376,7 +4477,7 @@
           <p:cNvPr id="5" name="footer-book">
             <a:extLst xmlns:a="http://schemas.openxmlformats.org/drawingml/2006/main">
               <a:ext uri="{FF2B5EF4-FFF2-40B4-BE49-F238E27FC236}">
-                <a16:creationId xmlns:a16="http://schemas.microsoft.com/office/drawing/2014/main" id="{BB980A6A-1E24-484F-95FF-D67539685B15}"/>
+                <a16:creationId xmlns:a16="http://schemas.microsoft.com/office/drawing/2014/main" id="{C8FAC82B-A877-414C-A241-A03F91F983E0}"/>
               </a:ext>
             </a:extLst>
           </p:cNvPr>
@@ -4438,7 +4539,7 @@
           <p:cNvPr id="6" name="footer-number">
             <a:extLst xmlns:a="http://schemas.openxmlformats.org/drawingml/2006/main">
               <a:ext uri="{FF2B5EF4-FFF2-40B4-BE49-F238E27FC236}">
-                <a16:creationId xmlns:a16="http://schemas.microsoft.com/office/drawing/2014/main" id="{9BDC6FAF-EBAC-4B80-94BE-25D5815025AF}"/>
+                <a16:creationId xmlns:a16="http://schemas.microsoft.com/office/drawing/2014/main" id="{9F6D400E-FC8F-4E6E-AEC9-C0427838EB8F}"/>
               </a:ext>
             </a:extLst>
           </p:cNvPr>
@@ -4500,7 +4601,7 @@
           <p:cNvPr id="7" name="one-more-hour">
             <a:extLst xmlns:a="http://schemas.openxmlformats.org/drawingml/2006/main">
               <a:ext uri="{FF2B5EF4-FFF2-40B4-BE49-F238E27FC236}">
-                <a16:creationId xmlns:a16="http://schemas.microsoft.com/office/drawing/2014/main" id="{A9FD3D2D-04E3-4F10-AE30-793F9659BDF5}"/>
+                <a16:creationId xmlns:a16="http://schemas.microsoft.com/office/drawing/2014/main" id="{13B207B8-3365-474B-94C6-CE9FE86A23EF}"/>
               </a:ext>
             </a:extLst>
           </p:cNvPr>
@@ -4562,7 +4663,7 @@
           <p:cNvPr id="8" name="">
             <a:extLst xmlns:a="http://schemas.openxmlformats.org/drawingml/2006/main">
               <a:ext uri="{FF2B5EF4-FFF2-40B4-BE49-F238E27FC236}">
-                <a16:creationId xmlns:a16="http://schemas.microsoft.com/office/drawing/2014/main" id="{65C596F2-7AEA-44FD-B12F-8027CC0818D8}"/>
+                <a16:creationId xmlns:a16="http://schemas.microsoft.com/office/drawing/2014/main" id="{C29D9187-A887-4A12-AFA4-90ED7B178C19}"/>
               </a:ext>
             </a:extLst>
           </p:cNvPr>
@@ -4624,7 +4725,7 @@
           <p:cNvPr id="9" name="marginal-benefit-copy">
             <a:extLst xmlns:a="http://schemas.openxmlformats.org/drawingml/2006/main">
               <a:ext uri="{FF2B5EF4-FFF2-40B4-BE49-F238E27FC236}">
-                <a16:creationId xmlns:a16="http://schemas.microsoft.com/office/drawing/2014/main" id="{9C2D3CC3-D7C7-4682-A0F9-DEF86E8E184F}"/>
+                <a16:creationId xmlns:a16="http://schemas.microsoft.com/office/drawing/2014/main" id="{F2661266-08DF-4689-B6E0-FBAD508A52C4}"/>
               </a:ext>
             </a:extLst>
           </p:cNvPr>
@@ -4713,7 +4814,7 @@
           <p:cNvPr id="10" name="margin-versus">
             <a:extLst xmlns:a="http://schemas.openxmlformats.org/drawingml/2006/main">
               <a:ext uri="{FF2B5EF4-FFF2-40B4-BE49-F238E27FC236}">
-                <a16:creationId xmlns:a16="http://schemas.microsoft.com/office/drawing/2014/main" id="{E651BEAD-C58D-4D7C-B26C-5D3330A7511B}"/>
+                <a16:creationId xmlns:a16="http://schemas.microsoft.com/office/drawing/2014/main" id="{5C67EA86-0CF0-4662-AA04-BBDC269ACB79}"/>
               </a:ext>
             </a:extLst>
           </p:cNvPr>
@@ -4775,7 +4876,7 @@
           <p:cNvPr id="11" name="">
             <a:extLst xmlns:a="http://schemas.openxmlformats.org/drawingml/2006/main">
               <a:ext uri="{FF2B5EF4-FFF2-40B4-BE49-F238E27FC236}">
-                <a16:creationId xmlns:a16="http://schemas.microsoft.com/office/drawing/2014/main" id="{31B95515-813E-42F7-B0CB-A9316DE41CA9}"/>
+                <a16:creationId xmlns:a16="http://schemas.microsoft.com/office/drawing/2014/main" id="{84ADCA96-AA7F-4EEE-8884-B24D9FBBD12C}"/>
               </a:ext>
             </a:extLst>
           </p:cNvPr>
@@ -4837,7 +4938,7 @@
           <p:cNvPr id="12" name="marginal-cost-copy">
             <a:extLst xmlns:a="http://schemas.openxmlformats.org/drawingml/2006/main">
               <a:ext uri="{FF2B5EF4-FFF2-40B4-BE49-F238E27FC236}">
-                <a16:creationId xmlns:a16="http://schemas.microsoft.com/office/drawing/2014/main" id="{E1F27FDD-6CF0-4B04-9D94-F060AF755968}"/>
+                <a16:creationId xmlns:a16="http://schemas.microsoft.com/office/drawing/2014/main" id="{D15E20FC-2BFE-4D93-9666-8FE1514370EC}"/>
               </a:ext>
             </a:extLst>
           </p:cNvPr>
@@ -4926,7 +5027,7 @@
           <p:cNvPr id="13" name="marginal-definition">
             <a:extLst xmlns:a="http://schemas.openxmlformats.org/drawingml/2006/main">
               <a:ext uri="{FF2B5EF4-FFF2-40B4-BE49-F238E27FC236}">
-                <a16:creationId xmlns:a16="http://schemas.microsoft.com/office/drawing/2014/main" id="{DEFEF1C9-A7CF-4E6B-99DA-278A813251F3}"/>
+                <a16:creationId xmlns:a16="http://schemas.microsoft.com/office/drawing/2014/main" id="{3F19778B-AFBC-405F-98B5-E1199259BD7E}"/>
               </a:ext>
             </a:extLst>
           </p:cNvPr>
@@ -4986,7 +5087,7 @@
     </p:spTree>
     <p:extLst>
       <p:ext uri="{BB962C8B-B14F-4D97-AF65-F5344CB8AC3E}">
-        <p14:creationId xmlns:p14="http://schemas.microsoft.com/office/powerpoint/2010/main" val="290210103"/>
+        <p14:creationId xmlns:p14="http://schemas.microsoft.com/office/powerpoint/2010/main" val="1604892490"/>
       </p:ext>
     </p:extLst>
   </p:cSld>
@@ -5017,7 +5118,7 @@
           <p:cNvPr id="8" name="accent-rule">
             <a:extLst xmlns:a="http://schemas.openxmlformats.org/drawingml/2006/main">
               <a:ext uri="{FF2B5EF4-FFF2-40B4-BE49-F238E27FC236}">
-                <a16:creationId xmlns:a16="http://schemas.microsoft.com/office/drawing/2014/main" id="{7D47930E-30B0-4893-8BC4-4FDD034CAD17}"/>
+                <a16:creationId xmlns:a16="http://schemas.microsoft.com/office/drawing/2014/main" id="{51027227-C0EE-4E0E-9F04-91C38D93ACAB}"/>
               </a:ext>
             </a:extLst>
           </p:cNvPr>
@@ -5048,7 +5149,7 @@
           <p:cNvPr id="2" name="chapter-label">
             <a:extLst xmlns:a="http://schemas.openxmlformats.org/drawingml/2006/main">
               <a:ext uri="{FF2B5EF4-FFF2-40B4-BE49-F238E27FC236}">
-                <a16:creationId xmlns:a16="http://schemas.microsoft.com/office/drawing/2014/main" id="{9323B26F-14C5-428E-9DA4-B7F07FE6F708}"/>
+                <a16:creationId xmlns:a16="http://schemas.microsoft.com/office/drawing/2014/main" id="{7B40077B-FE75-4D7E-BD28-A7F35599AD77}"/>
               </a:ext>
             </a:extLst>
           </p:cNvPr>
@@ -5110,7 +5211,7 @@
           <p:cNvPr id="3" name="slide-title">
             <a:extLst xmlns:a="http://schemas.openxmlformats.org/drawingml/2006/main">
               <a:ext uri="{FF2B5EF4-FFF2-40B4-BE49-F238E27FC236}">
-                <a16:creationId xmlns:a16="http://schemas.microsoft.com/office/drawing/2014/main" id="{3DF280C8-0C21-479B-AD45-C1DFA20272F0}"/>
+                <a16:creationId xmlns:a16="http://schemas.microsoft.com/office/drawing/2014/main" id="{E33DA090-2AE4-4A7C-87F6-5D265243CAC1}"/>
               </a:ext>
             </a:extLst>
           </p:cNvPr>
@@ -5172,7 +5273,7 @@
           <p:cNvPr id="4" name="footer-rule">
             <a:extLst xmlns:a="http://schemas.openxmlformats.org/drawingml/2006/main">
               <a:ext uri="{FF2B5EF4-FFF2-40B4-BE49-F238E27FC236}">
-                <a16:creationId xmlns:a16="http://schemas.microsoft.com/office/drawing/2014/main" id="{86A8EF70-86B2-4E79-9AED-BC6FB819757A}"/>
+                <a16:creationId xmlns:a16="http://schemas.microsoft.com/office/drawing/2014/main" id="{D63FD58D-CC50-40C1-B744-1E260575A0A6}"/>
               </a:ext>
             </a:extLst>
           </p:cNvPr>
@@ -5203,7 +5304,7 @@
           <p:cNvPr id="5" name="footer-book">
             <a:extLst xmlns:a="http://schemas.openxmlformats.org/drawingml/2006/main">
               <a:ext uri="{FF2B5EF4-FFF2-40B4-BE49-F238E27FC236}">
-                <a16:creationId xmlns:a16="http://schemas.microsoft.com/office/drawing/2014/main" id="{B57E1FCF-A206-44F5-96D2-1DA4761BE48A}"/>
+                <a16:creationId xmlns:a16="http://schemas.microsoft.com/office/drawing/2014/main" id="{AADD68A1-8AA4-406B-B97E-DA5DA5FF1845}"/>
               </a:ext>
             </a:extLst>
           </p:cNvPr>
@@ -5265,7 +5366,7 @@
           <p:cNvPr id="6" name="footer-number">
             <a:extLst xmlns:a="http://schemas.openxmlformats.org/drawingml/2006/main">
               <a:ext uri="{FF2B5EF4-FFF2-40B4-BE49-F238E27FC236}">
-                <a16:creationId xmlns:a16="http://schemas.microsoft.com/office/drawing/2014/main" id="{1A56CA56-8460-4214-891A-1E03CA6FD31A}"/>
+                <a16:creationId xmlns:a16="http://schemas.microsoft.com/office/drawing/2014/main" id="{6B9C8BA7-AB6D-442A-9D70-D4F6B7C283A2}"/>
               </a:ext>
             </a:extLst>
           </p:cNvPr>
@@ -5331,7 +5432,7 @@
           <p:nvPr/>
         </p:nvPicPr>
         <p:blipFill>
-          <a:blip xmlns:r="http://schemas.openxmlformats.org/officeDocument/2006/relationships" xmlns:a="http://schemas.openxmlformats.org/drawingml/2006/main" r:embed="R0d139184026948c3"/>
+          <a:blip xmlns:r="http://schemas.openxmlformats.org/officeDocument/2006/relationships" xmlns:a="http://schemas.openxmlformats.org/drawingml/2006/main" r:embed="R85297c823cc24e8a"/>
           <a:stretch xmlns:a="http://schemas.openxmlformats.org/drawingml/2006/main"/>
         </p:blipFill>
         <p:spPr>
@@ -5347,7 +5448,7 @@
     </p:spTree>
     <p:extLst>
       <p:ext uri="{BB962C8B-B14F-4D97-AF65-F5344CB8AC3E}">
-        <p14:creationId xmlns:p14="http://schemas.microsoft.com/office/powerpoint/2010/main" val="1362986699"/>
+        <p14:creationId xmlns:p14="http://schemas.microsoft.com/office/powerpoint/2010/main" val="191702535"/>
       </p:ext>
     </p:extLst>
   </p:cSld>
@@ -5378,7 +5479,7 @@
           <p:cNvPr id="15" name="accent-rule">
             <a:extLst xmlns:a="http://schemas.openxmlformats.org/drawingml/2006/main">
               <a:ext uri="{FF2B5EF4-FFF2-40B4-BE49-F238E27FC236}">
-                <a16:creationId xmlns:a16="http://schemas.microsoft.com/office/drawing/2014/main" id="{0E60B510-83A5-41C1-A199-D6BDE0A9C171}"/>
+                <a16:creationId xmlns:a16="http://schemas.microsoft.com/office/drawing/2014/main" id="{100B041F-A43C-4DD1-A81A-FA72D767A4C9}"/>
               </a:ext>
             </a:extLst>
           </p:cNvPr>
@@ -5409,7 +5510,7 @@
           <p:cNvPr id="2" name="chapter-label">
             <a:extLst xmlns:a="http://schemas.openxmlformats.org/drawingml/2006/main">
               <a:ext uri="{FF2B5EF4-FFF2-40B4-BE49-F238E27FC236}">
-                <a16:creationId xmlns:a16="http://schemas.microsoft.com/office/drawing/2014/main" id="{4D0525EC-1787-41F2-9480-803772086847}"/>
+                <a16:creationId xmlns:a16="http://schemas.microsoft.com/office/drawing/2014/main" id="{F8504C43-616B-487E-8AA2-699AAA77BF2E}"/>
               </a:ext>
             </a:extLst>
           </p:cNvPr>
@@ -5471,7 +5572,7 @@
           <p:cNvPr id="3" name="slide-title">
             <a:extLst xmlns:a="http://schemas.openxmlformats.org/drawingml/2006/main">
               <a:ext uri="{FF2B5EF4-FFF2-40B4-BE49-F238E27FC236}">
-                <a16:creationId xmlns:a16="http://schemas.microsoft.com/office/drawing/2014/main" id="{1D56C8B6-FBCF-4216-9081-45B8B19EB2CF}"/>
+                <a16:creationId xmlns:a16="http://schemas.microsoft.com/office/drawing/2014/main" id="{22F2BD2D-30EB-4B62-BCE8-3185E792251A}"/>
               </a:ext>
             </a:extLst>
           </p:cNvPr>
@@ -5533,7 +5634,7 @@
           <p:cNvPr id="4" name="footer-rule">
             <a:extLst xmlns:a="http://schemas.openxmlformats.org/drawingml/2006/main">
               <a:ext uri="{FF2B5EF4-FFF2-40B4-BE49-F238E27FC236}">
-                <a16:creationId xmlns:a16="http://schemas.microsoft.com/office/drawing/2014/main" id="{8BCBC1D2-7792-42B2-896C-001A07E5EF8E}"/>
+                <a16:creationId xmlns:a16="http://schemas.microsoft.com/office/drawing/2014/main" id="{AFFC069C-B10F-4E25-B88F-19D205F0B7D7}"/>
               </a:ext>
             </a:extLst>
           </p:cNvPr>
@@ -5564,7 +5665,7 @@
           <p:cNvPr id="5" name="footer-book">
             <a:extLst xmlns:a="http://schemas.openxmlformats.org/drawingml/2006/main">
               <a:ext uri="{FF2B5EF4-FFF2-40B4-BE49-F238E27FC236}">
-                <a16:creationId xmlns:a16="http://schemas.microsoft.com/office/drawing/2014/main" id="{9482D84F-4DF2-44A5-AD52-3C6CD4C24E38}"/>
+                <a16:creationId xmlns:a16="http://schemas.microsoft.com/office/drawing/2014/main" id="{20983E5D-117E-4AB3-AA4A-E900FFA49EEC}"/>
               </a:ext>
             </a:extLst>
           </p:cNvPr>
@@ -5626,7 +5727,7 @@
           <p:cNvPr id="6" name="footer-number">
             <a:extLst xmlns:a="http://schemas.openxmlformats.org/drawingml/2006/main">
               <a:ext uri="{FF2B5EF4-FFF2-40B4-BE49-F238E27FC236}">
-                <a16:creationId xmlns:a16="http://schemas.microsoft.com/office/drawing/2014/main" id="{EAE76518-2CFB-44C3-BD57-73DD931B0D0B}"/>
+                <a16:creationId xmlns:a16="http://schemas.microsoft.com/office/drawing/2014/main" id="{E3786F4C-2434-49BF-8E82-95294E28C24D}"/>
               </a:ext>
             </a:extLst>
           </p:cNvPr>
@@ -5688,7 +5789,7 @@
           <p:cNvPr id="7" name="equal-margins">
             <a:extLst xmlns:a="http://schemas.openxmlformats.org/drawingml/2006/main">
               <a:ext uri="{FF2B5EF4-FFF2-40B4-BE49-F238E27FC236}">
-                <a16:creationId xmlns:a16="http://schemas.microsoft.com/office/drawing/2014/main" id="{1501434A-B780-4B0A-80EC-B8DA11E13233}"/>
+                <a16:creationId xmlns:a16="http://schemas.microsoft.com/office/drawing/2014/main" id="{D675A017-AD45-47FC-8BCE-3D4BF1A8095E}"/>
               </a:ext>
             </a:extLst>
           </p:cNvPr>
@@ -5750,7 +5851,7 @@
           <p:cNvPr id="8" name="equal-margins-mark-1">
             <a:extLst xmlns:a="http://schemas.openxmlformats.org/drawingml/2006/main">
               <a:ext uri="{FF2B5EF4-FFF2-40B4-BE49-F238E27FC236}">
-                <a16:creationId xmlns:a16="http://schemas.microsoft.com/office/drawing/2014/main" id="{7685C099-D42D-45D4-827F-7158657250A1}"/>
+                <a16:creationId xmlns:a16="http://schemas.microsoft.com/office/drawing/2014/main" id="{53BB49EA-EA5F-489C-82DE-C54504DC1D33}"/>
               </a:ext>
             </a:extLst>
           </p:cNvPr>
@@ -5812,7 +5913,7 @@
           <p:cNvPr id="9" name="equal-margins-1">
             <a:extLst xmlns:a="http://schemas.openxmlformats.org/drawingml/2006/main">
               <a:ext uri="{FF2B5EF4-FFF2-40B4-BE49-F238E27FC236}">
-                <a16:creationId xmlns:a16="http://schemas.microsoft.com/office/drawing/2014/main" id="{A583DD0C-3533-40F5-93E0-74039F1F5A2D}"/>
+                <a16:creationId xmlns:a16="http://schemas.microsoft.com/office/drawing/2014/main" id="{886E2D88-7D32-404A-9625-26CF86DE00DC}"/>
               </a:ext>
             </a:extLst>
           </p:cNvPr>
@@ -5874,7 +5975,7 @@
           <p:cNvPr id="10" name="equal-margins-mark-2">
             <a:extLst xmlns:a="http://schemas.openxmlformats.org/drawingml/2006/main">
               <a:ext uri="{FF2B5EF4-FFF2-40B4-BE49-F238E27FC236}">
-                <a16:creationId xmlns:a16="http://schemas.microsoft.com/office/drawing/2014/main" id="{E2C96E66-7E63-412B-BE26-C986DFCD5A46}"/>
+                <a16:creationId xmlns:a16="http://schemas.microsoft.com/office/drawing/2014/main" id="{F4216ECD-0C30-4E45-98DE-D957EE7817C2}"/>
               </a:ext>
             </a:extLst>
           </p:cNvPr>
@@ -5936,7 +6037,7 @@
           <p:cNvPr id="11" name="equal-margins-2">
             <a:extLst xmlns:a="http://schemas.openxmlformats.org/drawingml/2006/main">
               <a:ext uri="{FF2B5EF4-FFF2-40B4-BE49-F238E27FC236}">
-                <a16:creationId xmlns:a16="http://schemas.microsoft.com/office/drawing/2014/main" id="{09161798-FAE8-470C-9B75-6FA1C31E39A2}"/>
+                <a16:creationId xmlns:a16="http://schemas.microsoft.com/office/drawing/2014/main" id="{43380801-1B67-4BBC-85F6-F44FCCE7CDF4}"/>
               </a:ext>
             </a:extLst>
           </p:cNvPr>
@@ -5998,7 +6099,7 @@
           <p:cNvPr id="12" name="equal-margins-mark-3">
             <a:extLst xmlns:a="http://schemas.openxmlformats.org/drawingml/2006/main">
               <a:ext uri="{FF2B5EF4-FFF2-40B4-BE49-F238E27FC236}">
-                <a16:creationId xmlns:a16="http://schemas.microsoft.com/office/drawing/2014/main" id="{C9B0AFB0-B090-453F-89F5-06E94AB1D96A}"/>
+                <a16:creationId xmlns:a16="http://schemas.microsoft.com/office/drawing/2014/main" id="{AEB54B57-6775-43CB-B630-E8530CA29436}"/>
               </a:ext>
             </a:extLst>
           </p:cNvPr>
@@ -6060,7 +6161,7 @@
           <p:cNvPr id="13" name="equal-margins-3">
             <a:extLst xmlns:a="http://schemas.openxmlformats.org/drawingml/2006/main">
               <a:ext uri="{FF2B5EF4-FFF2-40B4-BE49-F238E27FC236}">
-                <a16:creationId xmlns:a16="http://schemas.microsoft.com/office/drawing/2014/main" id="{0754E6DB-E463-4AD5-BCEB-22A1B5BA0DA2}"/>
+                <a16:creationId xmlns:a16="http://schemas.microsoft.com/office/drawing/2014/main" id="{42E904A7-F186-40FC-9BFE-883931BD449B}"/>
               </a:ext>
             </a:extLst>
           </p:cNvPr>
@@ -6122,7 +6223,7 @@
           <p:cNvPr id="14" name="equal-margins-close">
             <a:extLst xmlns:a="http://schemas.openxmlformats.org/drawingml/2006/main">
               <a:ext uri="{FF2B5EF4-FFF2-40B4-BE49-F238E27FC236}">
-                <a16:creationId xmlns:a16="http://schemas.microsoft.com/office/drawing/2014/main" id="{E5497F7C-24BF-4549-97BD-90761D18B349}"/>
+                <a16:creationId xmlns:a16="http://schemas.microsoft.com/office/drawing/2014/main" id="{D60B5BE8-563B-4520-9A48-AD7F81003C17}"/>
               </a:ext>
             </a:extLst>
           </p:cNvPr>
@@ -6182,7 +6283,7 @@
     </p:spTree>
     <p:extLst>
       <p:ext uri="{BB962C8B-B14F-4D97-AF65-F5344CB8AC3E}">
-        <p14:creationId xmlns:p14="http://schemas.microsoft.com/office/powerpoint/2010/main" val="2031328625"/>
+        <p14:creationId xmlns:p14="http://schemas.microsoft.com/office/powerpoint/2010/main" val="1792855419"/>
       </p:ext>
     </p:extLst>
   </p:cSld>
@@ -6213,7 +6314,7 @@
           <p:cNvPr id="12" name="accent-rule">
             <a:extLst xmlns:a="http://schemas.openxmlformats.org/drawingml/2006/main">
               <a:ext uri="{FF2B5EF4-FFF2-40B4-BE49-F238E27FC236}">
-                <a16:creationId xmlns:a16="http://schemas.microsoft.com/office/drawing/2014/main" id="{306C8487-A3F5-4CE0-A31E-2EA05BADD2D5}"/>
+                <a16:creationId xmlns:a16="http://schemas.microsoft.com/office/drawing/2014/main" id="{8D881594-1C9F-463E-A14A-040604947FC3}"/>
               </a:ext>
             </a:extLst>
           </p:cNvPr>
@@ -6244,7 +6345,7 @@
           <p:cNvPr id="2" name="chapter-label">
             <a:extLst xmlns:a="http://schemas.openxmlformats.org/drawingml/2006/main">
               <a:ext uri="{FF2B5EF4-FFF2-40B4-BE49-F238E27FC236}">
-                <a16:creationId xmlns:a16="http://schemas.microsoft.com/office/drawing/2014/main" id="{39F544CD-2FCF-45EE-B047-D4ED458E3251}"/>
+                <a16:creationId xmlns:a16="http://schemas.microsoft.com/office/drawing/2014/main" id="{5C21E488-913F-49A9-9419-2F33E6618A61}"/>
               </a:ext>
             </a:extLst>
           </p:cNvPr>
@@ -6306,7 +6407,7 @@
           <p:cNvPr id="3" name="slide-title">
             <a:extLst xmlns:a="http://schemas.openxmlformats.org/drawingml/2006/main">
               <a:ext uri="{FF2B5EF4-FFF2-40B4-BE49-F238E27FC236}">
-                <a16:creationId xmlns:a16="http://schemas.microsoft.com/office/drawing/2014/main" id="{CF88EC77-F351-4840-A90E-B7E593D5B0E8}"/>
+                <a16:creationId xmlns:a16="http://schemas.microsoft.com/office/drawing/2014/main" id="{5EE1D545-71D7-44FD-94A6-38B9C2062824}"/>
               </a:ext>
             </a:extLst>
           </p:cNvPr>
@@ -6368,7 +6469,7 @@
           <p:cNvPr id="4" name="footer-rule">
             <a:extLst xmlns:a="http://schemas.openxmlformats.org/drawingml/2006/main">
               <a:ext uri="{FF2B5EF4-FFF2-40B4-BE49-F238E27FC236}">
-                <a16:creationId xmlns:a16="http://schemas.microsoft.com/office/drawing/2014/main" id="{A8BF90DD-A5A7-4E4D-8917-635B69128701}"/>
+                <a16:creationId xmlns:a16="http://schemas.microsoft.com/office/drawing/2014/main" id="{29907233-925C-4CF3-9E20-2F91333DC255}"/>
               </a:ext>
             </a:extLst>
           </p:cNvPr>
@@ -6399,7 +6500,7 @@
           <p:cNvPr id="5" name="footer-book">
             <a:extLst xmlns:a="http://schemas.openxmlformats.org/drawingml/2006/main">
               <a:ext uri="{FF2B5EF4-FFF2-40B4-BE49-F238E27FC236}">
-                <a16:creationId xmlns:a16="http://schemas.microsoft.com/office/drawing/2014/main" id="{FCB1CA00-4793-4885-8351-B039D13C03AD}"/>
+                <a16:creationId xmlns:a16="http://schemas.microsoft.com/office/drawing/2014/main" id="{AAB13EE8-8B12-4FFA-8944-19B3B180015B}"/>
               </a:ext>
             </a:extLst>
           </p:cNvPr>
@@ -6461,7 +6562,7 @@
           <p:cNvPr id="6" name="footer-number">
             <a:extLst xmlns:a="http://schemas.openxmlformats.org/drawingml/2006/main">
               <a:ext uri="{FF2B5EF4-FFF2-40B4-BE49-F238E27FC236}">
-                <a16:creationId xmlns:a16="http://schemas.microsoft.com/office/drawing/2014/main" id="{7FEB9525-B0B8-4814-BADE-C253DFFA1A7B}"/>
+                <a16:creationId xmlns:a16="http://schemas.microsoft.com/office/drawing/2014/main" id="{6F528B28-0F0C-4BE1-8BAF-D13062298219}"/>
               </a:ext>
             </a:extLst>
           </p:cNvPr>
@@ -6523,7 +6624,7 @@
           <p:cNvPr id="7" name="before-fee">
             <a:extLst xmlns:a="http://schemas.openxmlformats.org/drawingml/2006/main">
               <a:ext uri="{FF2B5EF4-FFF2-40B4-BE49-F238E27FC236}">
-                <a16:creationId xmlns:a16="http://schemas.microsoft.com/office/drawing/2014/main" id="{8A3CAA5F-2C9E-4319-A63A-ADBFFDF33180}"/>
+                <a16:creationId xmlns:a16="http://schemas.microsoft.com/office/drawing/2014/main" id="{023FE34D-B959-4C8E-A765-2488ABC4687A}"/>
               </a:ext>
             </a:extLst>
           </p:cNvPr>
@@ -6585,7 +6686,7 @@
           <p:cNvPr id="8" name="initial-bags">
             <a:extLst xmlns:a="http://schemas.openxmlformats.org/drawingml/2006/main">
               <a:ext uri="{FF2B5EF4-FFF2-40B4-BE49-F238E27FC236}">
-                <a16:creationId xmlns:a16="http://schemas.microsoft.com/office/drawing/2014/main" id="{C64E0A28-6CCC-4DD4-A81F-A844DBC74425}"/>
+                <a16:creationId xmlns:a16="http://schemas.microsoft.com/office/drawing/2014/main" id="{8208C9C5-35EB-42B2-A8AA-DCAAF7647135}"/>
               </a:ext>
             </a:extLst>
           </p:cNvPr>
@@ -6647,7 +6748,7 @@
           <p:cNvPr id="9" name="after-fee">
             <a:extLst xmlns:a="http://schemas.openxmlformats.org/drawingml/2006/main">
               <a:ext uri="{FF2B5EF4-FFF2-40B4-BE49-F238E27FC236}">
-                <a16:creationId xmlns:a16="http://schemas.microsoft.com/office/drawing/2014/main" id="{CBAD83B6-2530-4823-ACF4-390921282D4D}"/>
+                <a16:creationId xmlns:a16="http://schemas.microsoft.com/office/drawing/2014/main" id="{C4DABC75-8A0E-4D5F-84B7-E642B85D7695}"/>
               </a:ext>
             </a:extLst>
           </p:cNvPr>
@@ -6709,7 +6810,7 @@
           <p:cNvPr id="10" name="new-bags">
             <a:extLst xmlns:a="http://schemas.openxmlformats.org/drawingml/2006/main">
               <a:ext uri="{FF2B5EF4-FFF2-40B4-BE49-F238E27FC236}">
-                <a16:creationId xmlns:a16="http://schemas.microsoft.com/office/drawing/2014/main" id="{A8B5CA88-AFD6-4933-8E2A-5C728459D119}"/>
+                <a16:creationId xmlns:a16="http://schemas.microsoft.com/office/drawing/2014/main" id="{D31E23B7-E961-4236-9573-48D086958032}"/>
               </a:ext>
             </a:extLst>
           </p:cNvPr>
@@ -6775,7 +6876,7 @@
           <p:nvPr/>
         </p:nvPicPr>
         <p:blipFill>
-          <a:blip xmlns:r="http://schemas.openxmlformats.org/officeDocument/2006/relationships" xmlns:a="http://schemas.openxmlformats.org/drawingml/2006/main" r:embed="R93971205b9c04726"/>
+          <a:blip xmlns:r="http://schemas.openxmlformats.org/officeDocument/2006/relationships" xmlns:a="http://schemas.openxmlformats.org/drawingml/2006/main" r:embed="R5041a7279e734a4c"/>
           <a:stretch xmlns:a="http://schemas.openxmlformats.org/drawingml/2006/main"/>
         </p:blipFill>
         <p:spPr>
@@ -6791,7 +6892,7 @@
     </p:spTree>
     <p:extLst>
       <p:ext uri="{BB962C8B-B14F-4D97-AF65-F5344CB8AC3E}">
-        <p14:creationId xmlns:p14="http://schemas.microsoft.com/office/powerpoint/2010/main" val="1661851029"/>
+        <p14:creationId xmlns:p14="http://schemas.microsoft.com/office/powerpoint/2010/main" val="1509456239"/>
       </p:ext>
     </p:extLst>
   </p:cSld>
@@ -6822,7 +6923,7 @@
           <p:cNvPr id="21" name="accent-rule">
             <a:extLst xmlns:a="http://schemas.openxmlformats.org/drawingml/2006/main">
               <a:ext uri="{FF2B5EF4-FFF2-40B4-BE49-F238E27FC236}">
-                <a16:creationId xmlns:a16="http://schemas.microsoft.com/office/drawing/2014/main" id="{33874074-28C8-4D8F-B064-E3D5F528961F}"/>
+                <a16:creationId xmlns:a16="http://schemas.microsoft.com/office/drawing/2014/main" id="{3BB2146D-5321-4319-953B-C6C8B86842CB}"/>
               </a:ext>
             </a:extLst>
           </p:cNvPr>
@@ -6853,7 +6954,7 @@
           <p:cNvPr id="2" name="chapter-label">
             <a:extLst xmlns:a="http://schemas.openxmlformats.org/drawingml/2006/main">
               <a:ext uri="{FF2B5EF4-FFF2-40B4-BE49-F238E27FC236}">
-                <a16:creationId xmlns:a16="http://schemas.microsoft.com/office/drawing/2014/main" id="{F94B4A71-10B4-427B-B262-730AD17775DD}"/>
+                <a16:creationId xmlns:a16="http://schemas.microsoft.com/office/drawing/2014/main" id="{9DD36773-E4D7-4F73-919E-A3DF9CD9EC63}"/>
               </a:ext>
             </a:extLst>
           </p:cNvPr>
@@ -6915,7 +7016,7 @@
           <p:cNvPr id="3" name="slide-title">
             <a:extLst xmlns:a="http://schemas.openxmlformats.org/drawingml/2006/main">
               <a:ext uri="{FF2B5EF4-FFF2-40B4-BE49-F238E27FC236}">
-                <a16:creationId xmlns:a16="http://schemas.microsoft.com/office/drawing/2014/main" id="{DCE86569-1E9C-44DA-8775-C6B90FFDF2FD}"/>
+                <a16:creationId xmlns:a16="http://schemas.microsoft.com/office/drawing/2014/main" id="{5439E1BE-9A59-4BA7-B8F9-05AA026BB6B4}"/>
               </a:ext>
             </a:extLst>
           </p:cNvPr>
@@ -6977,7 +7078,7 @@
           <p:cNvPr id="4" name="footer-rule">
             <a:extLst xmlns:a="http://schemas.openxmlformats.org/drawingml/2006/main">
               <a:ext uri="{FF2B5EF4-FFF2-40B4-BE49-F238E27FC236}">
-                <a16:creationId xmlns:a16="http://schemas.microsoft.com/office/drawing/2014/main" id="{7AF30FFB-F681-488B-95A0-2DAEC50DB5F1}"/>
+                <a16:creationId xmlns:a16="http://schemas.microsoft.com/office/drawing/2014/main" id="{A5E5B945-855F-49F3-8552-DE78AC9CE4BB}"/>
               </a:ext>
             </a:extLst>
           </p:cNvPr>
@@ -7008,7 +7109,7 @@
           <p:cNvPr id="5" name="footer-book">
             <a:extLst xmlns:a="http://schemas.openxmlformats.org/drawingml/2006/main">
               <a:ext uri="{FF2B5EF4-FFF2-40B4-BE49-F238E27FC236}">
-                <a16:creationId xmlns:a16="http://schemas.microsoft.com/office/drawing/2014/main" id="{C2545264-7A5A-4B8B-9909-07EE3C7927F6}"/>
+                <a16:creationId xmlns:a16="http://schemas.microsoft.com/office/drawing/2014/main" id="{8E592CFF-0B9D-4687-BBC8-82AF6E49C3FC}"/>
               </a:ext>
             </a:extLst>
           </p:cNvPr>
@@ -7070,7 +7171,7 @@
           <p:cNvPr id="6" name="footer-number">
             <a:extLst xmlns:a="http://schemas.openxmlformats.org/drawingml/2006/main">
               <a:ext uri="{FF2B5EF4-FFF2-40B4-BE49-F238E27FC236}">
-                <a16:creationId xmlns:a16="http://schemas.microsoft.com/office/drawing/2014/main" id="{0A5C1791-596D-4687-A5A6-86E229069341}"/>
+                <a16:creationId xmlns:a16="http://schemas.microsoft.com/office/drawing/2014/main" id="{0AB27252-4ACC-48F5-A6D6-58BC878076D4}"/>
               </a:ext>
             </a:extLst>
           </p:cNvPr>
@@ -7132,7 +7233,7 @@
           <p:cNvPr id="7" name="direct-response">
             <a:extLst xmlns:a="http://schemas.openxmlformats.org/drawingml/2006/main">
               <a:ext uri="{FF2B5EF4-FFF2-40B4-BE49-F238E27FC236}">
-                <a16:creationId xmlns:a16="http://schemas.microsoft.com/office/drawing/2014/main" id="{14884267-69AB-4646-AFC5-5484F0DD1D86}"/>
+                <a16:creationId xmlns:a16="http://schemas.microsoft.com/office/drawing/2014/main" id="{11A0D63F-7354-47C0-B651-0D0E6CC128DE}"/>
               </a:ext>
             </a:extLst>
           </p:cNvPr>
@@ -7194,7 +7295,7 @@
           <p:cNvPr id="8" name="first-response">
             <a:extLst xmlns:a="http://schemas.openxmlformats.org/drawingml/2006/main">
               <a:ext uri="{FF2B5EF4-FFF2-40B4-BE49-F238E27FC236}">
-                <a16:creationId xmlns:a16="http://schemas.microsoft.com/office/drawing/2014/main" id="{EF357982-03C5-46AE-9B64-EB573A971FDF}"/>
+                <a16:creationId xmlns:a16="http://schemas.microsoft.com/office/drawing/2014/main" id="{C85A6E76-FFC4-485E-A4BF-8CFA113B2729}"/>
               </a:ext>
             </a:extLst>
           </p:cNvPr>
@@ -7256,7 +7357,7 @@
           <p:cNvPr id="9" name="adjustment-divider">
             <a:extLst xmlns:a="http://schemas.openxmlformats.org/drawingml/2006/main">
               <a:ext uri="{FF2B5EF4-FFF2-40B4-BE49-F238E27FC236}">
-                <a16:creationId xmlns:a16="http://schemas.microsoft.com/office/drawing/2014/main" id="{A7A69A6C-2088-456B-AAC4-A60342F2D098}"/>
+                <a16:creationId xmlns:a16="http://schemas.microsoft.com/office/drawing/2014/main" id="{00E50A29-3FBC-45B5-9392-4F3CC0C0443C}"/>
               </a:ext>
             </a:extLst>
           </p:cNvPr>
@@ -7287,7 +7388,7 @@
           <p:cNvPr id="10" name="adjustment-mark-1">
             <a:extLst xmlns:a="http://schemas.openxmlformats.org/drawingml/2006/main">
               <a:ext uri="{FF2B5EF4-FFF2-40B4-BE49-F238E27FC236}">
-                <a16:creationId xmlns:a16="http://schemas.microsoft.com/office/drawing/2014/main" id="{C9B8375D-43FF-4C16-A77F-05B00795FF2F}"/>
+                <a16:creationId xmlns:a16="http://schemas.microsoft.com/office/drawing/2014/main" id="{BC7E745D-C0F4-42AE-9F19-4AFE13DA7797}"/>
               </a:ext>
             </a:extLst>
           </p:cNvPr>
@@ -7349,7 +7450,7 @@
           <p:cNvPr id="11" name="adjustment-1">
             <a:extLst xmlns:a="http://schemas.openxmlformats.org/drawingml/2006/main">
               <a:ext uri="{FF2B5EF4-FFF2-40B4-BE49-F238E27FC236}">
-                <a16:creationId xmlns:a16="http://schemas.microsoft.com/office/drawing/2014/main" id="{888C6D4E-7090-4B30-9585-495F2B784B6A}"/>
+                <a16:creationId xmlns:a16="http://schemas.microsoft.com/office/drawing/2014/main" id="{E8771AD9-8A40-40D4-989A-9597D4286E85}"/>
               </a:ext>
             </a:extLst>
           </p:cNvPr>
@@ -7411,7 +7512,7 @@
           <p:cNvPr id="12" name="adjustment-mark-2">
             <a:extLst xmlns:a="http://schemas.openxmlformats.org/drawingml/2006/main">
               <a:ext uri="{FF2B5EF4-FFF2-40B4-BE49-F238E27FC236}">
-                <a16:creationId xmlns:a16="http://schemas.microsoft.com/office/drawing/2014/main" id="{8C3317E5-4BD3-4C17-A646-93EF5D031C17}"/>
+                <a16:creationId xmlns:a16="http://schemas.microsoft.com/office/drawing/2014/main" id="{7D378085-8370-42D4-8589-BE075A47078C}"/>
               </a:ext>
             </a:extLst>
           </p:cNvPr>
@@ -7473,7 +7574,7 @@
           <p:cNvPr id="13" name="adjustment-2">
             <a:extLst xmlns:a="http://schemas.openxmlformats.org/drawingml/2006/main">
               <a:ext uri="{FF2B5EF4-FFF2-40B4-BE49-F238E27FC236}">
-                <a16:creationId xmlns:a16="http://schemas.microsoft.com/office/drawing/2014/main" id="{667EC228-7F41-49DF-9B83-9CB1CF4A03B2}"/>
+                <a16:creationId xmlns:a16="http://schemas.microsoft.com/office/drawing/2014/main" id="{944FCB55-C30E-4083-9909-AF41D186B2A6}"/>
               </a:ext>
             </a:extLst>
           </p:cNvPr>
@@ -7535,7 +7636,7 @@
           <p:cNvPr id="14" name="adjustment-mark-3">
             <a:extLst xmlns:a="http://schemas.openxmlformats.org/drawingml/2006/main">
               <a:ext uri="{FF2B5EF4-FFF2-40B4-BE49-F238E27FC236}">
-                <a16:creationId xmlns:a16="http://schemas.microsoft.com/office/drawing/2014/main" id="{F301384A-CCCA-4DBC-AC05-F80493EEEAC0}"/>
+                <a16:creationId xmlns:a16="http://schemas.microsoft.com/office/drawing/2014/main" id="{1CC07162-532C-41D8-A1F4-9AC8A870D48C}"/>
               </a:ext>
             </a:extLst>
           </p:cNvPr>
@@ -7597,7 +7698,7 @@
           <p:cNvPr id="15" name="adjustment-3">
             <a:extLst xmlns:a="http://schemas.openxmlformats.org/drawingml/2006/main">
               <a:ext uri="{FF2B5EF4-FFF2-40B4-BE49-F238E27FC236}">
-                <a16:creationId xmlns:a16="http://schemas.microsoft.com/office/drawing/2014/main" id="{A1295A8E-930C-4C00-931E-8F2DB4122E91}"/>
+                <a16:creationId xmlns:a16="http://schemas.microsoft.com/office/drawing/2014/main" id="{38ED7CD1-F62E-4ADA-9DF4-BF4E3D87300C}"/>
               </a:ext>
             </a:extLst>
           </p:cNvPr>
@@ -7659,7 +7760,7 @@
           <p:cNvPr id="16" name="adjustment-mark-4">
             <a:extLst xmlns:a="http://schemas.openxmlformats.org/drawingml/2006/main">
               <a:ext uri="{FF2B5EF4-FFF2-40B4-BE49-F238E27FC236}">
-                <a16:creationId xmlns:a16="http://schemas.microsoft.com/office/drawing/2014/main" id="{B255B93C-9865-4DB9-9D1C-FBD06BBEAE5F}"/>
+                <a16:creationId xmlns:a16="http://schemas.microsoft.com/office/drawing/2014/main" id="{C91C4812-5C0E-485B-9210-9131C402E8C7}"/>
               </a:ext>
             </a:extLst>
           </p:cNvPr>
@@ -7721,7 +7822,7 @@
           <p:cNvPr id="17" name="adjustment-4">
             <a:extLst xmlns:a="http://schemas.openxmlformats.org/drawingml/2006/main">
               <a:ext uri="{FF2B5EF4-FFF2-40B4-BE49-F238E27FC236}">
-                <a16:creationId xmlns:a16="http://schemas.microsoft.com/office/drawing/2014/main" id="{31B17C20-0461-4441-94F9-04D8A9B0F873}"/>
+                <a16:creationId xmlns:a16="http://schemas.microsoft.com/office/drawing/2014/main" id="{C3E2023A-BCAA-4436-AC2A-3A46B7C113E6}"/>
               </a:ext>
             </a:extLst>
           </p:cNvPr>
@@ -7783,7 +7884,7 @@
           <p:cNvPr id="18" name="adjustment-mark-5">
             <a:extLst xmlns:a="http://schemas.openxmlformats.org/drawingml/2006/main">
               <a:ext uri="{FF2B5EF4-FFF2-40B4-BE49-F238E27FC236}">
-                <a16:creationId xmlns:a16="http://schemas.microsoft.com/office/drawing/2014/main" id="{BDD0004C-0567-496E-8B90-925DC7FFB568}"/>
+                <a16:creationId xmlns:a16="http://schemas.microsoft.com/office/drawing/2014/main" id="{5CC516CA-86A6-4D8A-B5ED-15DC56948C8C}"/>
               </a:ext>
             </a:extLst>
           </p:cNvPr>
@@ -7845,7 +7946,7 @@
           <p:cNvPr id="19" name="adjustment-5">
             <a:extLst xmlns:a="http://schemas.openxmlformats.org/drawingml/2006/main">
               <a:ext uri="{FF2B5EF4-FFF2-40B4-BE49-F238E27FC236}">
-                <a16:creationId xmlns:a16="http://schemas.microsoft.com/office/drawing/2014/main" id="{ECCCE0B8-AFBB-4F36-A515-3B44A458B6C9}"/>
+                <a16:creationId xmlns:a16="http://schemas.microsoft.com/office/drawing/2014/main" id="{0624E791-E1E4-49AA-AB88-BE619FFA39E0}"/>
               </a:ext>
             </a:extLst>
           </p:cNvPr>
@@ -7907,7 +8008,7 @@
           <p:cNvPr id="20" name="adjustment-close">
             <a:extLst xmlns:a="http://schemas.openxmlformats.org/drawingml/2006/main">
               <a:ext uri="{FF2B5EF4-FFF2-40B4-BE49-F238E27FC236}">
-                <a16:creationId xmlns:a16="http://schemas.microsoft.com/office/drawing/2014/main" id="{488E9975-D106-4FE9-B2F2-79AA94ED1381}"/>
+                <a16:creationId xmlns:a16="http://schemas.microsoft.com/office/drawing/2014/main" id="{CFCC0163-C309-4762-B355-A54199D965C7}"/>
               </a:ext>
             </a:extLst>
           </p:cNvPr>
@@ -7967,7 +8068,7 @@
     </p:spTree>
     <p:extLst>
       <p:ext uri="{BB962C8B-B14F-4D97-AF65-F5344CB8AC3E}">
-        <p14:creationId xmlns:p14="http://schemas.microsoft.com/office/powerpoint/2010/main" val="345285404"/>
+        <p14:creationId xmlns:p14="http://schemas.microsoft.com/office/powerpoint/2010/main" val="1029280796"/>
       </p:ext>
     </p:extLst>
   </p:cSld>
@@ -7998,7 +8099,7 @@
           <p:cNvPr id="16" name="accent-rule">
             <a:extLst xmlns:a="http://schemas.openxmlformats.org/drawingml/2006/main">
               <a:ext uri="{FF2B5EF4-FFF2-40B4-BE49-F238E27FC236}">
-                <a16:creationId xmlns:a16="http://schemas.microsoft.com/office/drawing/2014/main" id="{16D64F04-1470-41C6-8044-9C539F8C2CDF}"/>
+                <a16:creationId xmlns:a16="http://schemas.microsoft.com/office/drawing/2014/main" id="{7C95ADEF-E3E6-460B-B34A-72A09CD30541}"/>
               </a:ext>
             </a:extLst>
           </p:cNvPr>
@@ -8029,7 +8130,7 @@
           <p:cNvPr id="2" name="chapter-label">
             <a:extLst xmlns:a="http://schemas.openxmlformats.org/drawingml/2006/main">
               <a:ext uri="{FF2B5EF4-FFF2-40B4-BE49-F238E27FC236}">
-                <a16:creationId xmlns:a16="http://schemas.microsoft.com/office/drawing/2014/main" id="{D31CF847-0FA0-4475-B9C2-92565D4E8F73}"/>
+                <a16:creationId xmlns:a16="http://schemas.microsoft.com/office/drawing/2014/main" id="{47014F66-9F9A-4769-86B9-5090368D3DBF}"/>
               </a:ext>
             </a:extLst>
           </p:cNvPr>
@@ -8091,7 +8192,7 @@
           <p:cNvPr id="3" name="slide-title">
             <a:extLst xmlns:a="http://schemas.openxmlformats.org/drawingml/2006/main">
               <a:ext uri="{FF2B5EF4-FFF2-40B4-BE49-F238E27FC236}">
-                <a16:creationId xmlns:a16="http://schemas.microsoft.com/office/drawing/2014/main" id="{3DA90855-028A-465C-8AEF-7E94E0EDAAAF}"/>
+                <a16:creationId xmlns:a16="http://schemas.microsoft.com/office/drawing/2014/main" id="{AB6F9370-3299-4862-9B6A-6D4CFF6B9381}"/>
               </a:ext>
             </a:extLst>
           </p:cNvPr>
@@ -8153,7 +8254,7 @@
           <p:cNvPr id="4" name="footer-rule">
             <a:extLst xmlns:a="http://schemas.openxmlformats.org/drawingml/2006/main">
               <a:ext uri="{FF2B5EF4-FFF2-40B4-BE49-F238E27FC236}">
-                <a16:creationId xmlns:a16="http://schemas.microsoft.com/office/drawing/2014/main" id="{EC12D336-96D8-42BB-93D5-BA5E2E6F2335}"/>
+                <a16:creationId xmlns:a16="http://schemas.microsoft.com/office/drawing/2014/main" id="{8334E410-C8FE-4FCC-9BBD-01DDD81DA73A}"/>
               </a:ext>
             </a:extLst>
           </p:cNvPr>
@@ -8184,7 +8285,7 @@
           <p:cNvPr id="5" name="footer-book">
             <a:extLst xmlns:a="http://schemas.openxmlformats.org/drawingml/2006/main">
               <a:ext uri="{FF2B5EF4-FFF2-40B4-BE49-F238E27FC236}">
-                <a16:creationId xmlns:a16="http://schemas.microsoft.com/office/drawing/2014/main" id="{EB2FCA36-FA87-41DE-8B1A-190A7568CA77}"/>
+                <a16:creationId xmlns:a16="http://schemas.microsoft.com/office/drawing/2014/main" id="{66C147F6-E1AD-423F-B134-19AA160AE3AB}"/>
               </a:ext>
             </a:extLst>
           </p:cNvPr>
@@ -8246,7 +8347,7 @@
           <p:cNvPr id="6" name="footer-number">
             <a:extLst xmlns:a="http://schemas.openxmlformats.org/drawingml/2006/main">
               <a:ext uri="{FF2B5EF4-FFF2-40B4-BE49-F238E27FC236}">
-                <a16:creationId xmlns:a16="http://schemas.microsoft.com/office/drawing/2014/main" id="{E4D3FCD3-E8DF-47BA-B103-F4C60C204486}"/>
+                <a16:creationId xmlns:a16="http://schemas.microsoft.com/office/drawing/2014/main" id="{BF81DC95-E086-487E-BAD5-CA3309912D4E}"/>
               </a:ext>
             </a:extLst>
           </p:cNvPr>
@@ -8308,7 +8409,7 @@
           <p:cNvPr id="7" name="map-analogy">
             <a:extLst xmlns:a="http://schemas.openxmlformats.org/drawingml/2006/main">
               <a:ext uri="{FF2B5EF4-FFF2-40B4-BE49-F238E27FC236}">
-                <a16:creationId xmlns:a16="http://schemas.microsoft.com/office/drawing/2014/main" id="{1993FB33-F5E0-4DBD-991E-C8E9F715C8CB}"/>
+                <a16:creationId xmlns:a16="http://schemas.microsoft.com/office/drawing/2014/main" id="{AEFE17DA-BA1C-4990-BA14-2A0769DED1B3}"/>
               </a:ext>
             </a:extLst>
           </p:cNvPr>
@@ -8370,7 +8471,7 @@
           <p:cNvPr id="8" name="model-question">
             <a:extLst xmlns:a="http://schemas.openxmlformats.org/drawingml/2006/main">
               <a:ext uri="{FF2B5EF4-FFF2-40B4-BE49-F238E27FC236}">
-                <a16:creationId xmlns:a16="http://schemas.microsoft.com/office/drawing/2014/main" id="{532D780C-9CD2-4124-A8A0-A03C8E60DFB0}"/>
+                <a16:creationId xmlns:a16="http://schemas.microsoft.com/office/drawing/2014/main" id="{27E0B012-65D9-4FF2-A247-55DA6F2B0332}"/>
               </a:ext>
             </a:extLst>
           </p:cNvPr>
@@ -8432,7 +8533,7 @@
           <p:cNvPr id="9" name="model-rule">
             <a:extLst xmlns:a="http://schemas.openxmlformats.org/drawingml/2006/main">
               <a:ext uri="{FF2B5EF4-FFF2-40B4-BE49-F238E27FC236}">
-                <a16:creationId xmlns:a16="http://schemas.microsoft.com/office/drawing/2014/main" id="{1B66D31F-0960-4DD1-9DE4-E280EB914863}"/>
+                <a16:creationId xmlns:a16="http://schemas.microsoft.com/office/drawing/2014/main" id="{8D4F001F-E74A-40C6-8079-668569AE752E}"/>
               </a:ext>
             </a:extLst>
           </p:cNvPr>
@@ -8463,7 +8564,7 @@
           <p:cNvPr id="10" name="model-check-mark-1">
             <a:extLst xmlns:a="http://schemas.openxmlformats.org/drawingml/2006/main">
               <a:ext uri="{FF2B5EF4-FFF2-40B4-BE49-F238E27FC236}">
-                <a16:creationId xmlns:a16="http://schemas.microsoft.com/office/drawing/2014/main" id="{03ABC6F1-DFF0-4911-8A80-224E9B92957F}"/>
+                <a16:creationId xmlns:a16="http://schemas.microsoft.com/office/drawing/2014/main" id="{D339C94E-6C15-4DB4-97C7-A1ABBBC244F3}"/>
               </a:ext>
             </a:extLst>
           </p:cNvPr>
@@ -8525,7 +8626,7 @@
           <p:cNvPr id="11" name="model-check-1">
             <a:extLst xmlns:a="http://schemas.openxmlformats.org/drawingml/2006/main">
               <a:ext uri="{FF2B5EF4-FFF2-40B4-BE49-F238E27FC236}">
-                <a16:creationId xmlns:a16="http://schemas.microsoft.com/office/drawing/2014/main" id="{0AECF042-936D-40D0-9F15-9AEDA1F03777}"/>
+                <a16:creationId xmlns:a16="http://schemas.microsoft.com/office/drawing/2014/main" id="{566DDD21-7578-4E95-9199-E14A2F858CD6}"/>
               </a:ext>
             </a:extLst>
           </p:cNvPr>
@@ -8587,7 +8688,7 @@
           <p:cNvPr id="12" name="model-check-mark-2">
             <a:extLst xmlns:a="http://schemas.openxmlformats.org/drawingml/2006/main">
               <a:ext uri="{FF2B5EF4-FFF2-40B4-BE49-F238E27FC236}">
-                <a16:creationId xmlns:a16="http://schemas.microsoft.com/office/drawing/2014/main" id="{FD618983-567A-43BA-8F77-FF637B08B85C}"/>
+                <a16:creationId xmlns:a16="http://schemas.microsoft.com/office/drawing/2014/main" id="{95E4722C-160B-4336-A01D-FF0624BEE16F}"/>
               </a:ext>
             </a:extLst>
           </p:cNvPr>
@@ -8649,7 +8750,7 @@
           <p:cNvPr id="13" name="model-check-2">
             <a:extLst xmlns:a="http://schemas.openxmlformats.org/drawingml/2006/main">
               <a:ext uri="{FF2B5EF4-FFF2-40B4-BE49-F238E27FC236}">
-                <a16:creationId xmlns:a16="http://schemas.microsoft.com/office/drawing/2014/main" id="{3DFEA78B-760C-460E-AD8E-9227CEF3D25A}"/>
+                <a16:creationId xmlns:a16="http://schemas.microsoft.com/office/drawing/2014/main" id="{19A1B2C8-2FB1-468D-BFB0-0B99F0A5F540}"/>
               </a:ext>
             </a:extLst>
           </p:cNvPr>
@@ -8711,7 +8812,7 @@
           <p:cNvPr id="14" name="model-check-mark-3">
             <a:extLst xmlns:a="http://schemas.openxmlformats.org/drawingml/2006/main">
               <a:ext uri="{FF2B5EF4-FFF2-40B4-BE49-F238E27FC236}">
-                <a16:creationId xmlns:a16="http://schemas.microsoft.com/office/drawing/2014/main" id="{64667392-9C8E-43CA-9921-72D12BC5A478}"/>
+                <a16:creationId xmlns:a16="http://schemas.microsoft.com/office/drawing/2014/main" id="{7DEA6183-64CB-40B2-9CFF-65BBC529E831}"/>
               </a:ext>
             </a:extLst>
           </p:cNvPr>
@@ -8773,7 +8874,7 @@
           <p:cNvPr id="15" name="model-check-3">
             <a:extLst xmlns:a="http://schemas.openxmlformats.org/drawingml/2006/main">
               <a:ext uri="{FF2B5EF4-FFF2-40B4-BE49-F238E27FC236}">
-                <a16:creationId xmlns:a16="http://schemas.microsoft.com/office/drawing/2014/main" id="{1CCD3831-7561-40FC-AFEC-936C5E7C7C28}"/>
+                <a16:creationId xmlns:a16="http://schemas.microsoft.com/office/drawing/2014/main" id="{14D0AF50-565F-4075-9F64-94CA40A3E70F}"/>
               </a:ext>
             </a:extLst>
           </p:cNvPr>
@@ -8833,7 +8934,7 @@
     </p:spTree>
     <p:extLst>
       <p:ext uri="{BB962C8B-B14F-4D97-AF65-F5344CB8AC3E}">
-        <p14:creationId xmlns:p14="http://schemas.microsoft.com/office/powerpoint/2010/main" val="945096972"/>
+        <p14:creationId xmlns:p14="http://schemas.microsoft.com/office/powerpoint/2010/main" val="960916248"/>
       </p:ext>
     </p:extLst>
   </p:cSld>
@@ -8861,10 +8962,10 @@
       </p:grpSpPr>
       <p:sp>
         <p:nvSpPr>
-          <p:cNvPr id="19" name="accent-rule">
-            <a:extLst xmlns:a="http://schemas.openxmlformats.org/drawingml/2006/main">
-              <a:ext uri="{FF2B5EF4-FFF2-40B4-BE49-F238E27FC236}">
-                <a16:creationId xmlns:a16="http://schemas.microsoft.com/office/drawing/2014/main" id="{8AAD81E5-27F8-483B-A458-12EEEE6547EF}"/>
+          <p:cNvPr id="22" name="accent-rule">
+            <a:extLst xmlns:a="http://schemas.openxmlformats.org/drawingml/2006/main">
+              <a:ext uri="{FF2B5EF4-FFF2-40B4-BE49-F238E27FC236}">
+                <a16:creationId xmlns:a16="http://schemas.microsoft.com/office/drawing/2014/main" id="{8836C3BC-CFF4-4CEF-B3E3-59205744AE82}"/>
               </a:ext>
             </a:extLst>
           </p:cNvPr>
@@ -8895,7 +8996,7 @@
           <p:cNvPr id="2" name="chapter-label">
             <a:extLst xmlns:a="http://schemas.openxmlformats.org/drawingml/2006/main">
               <a:ext uri="{FF2B5EF4-FFF2-40B4-BE49-F238E27FC236}">
-                <a16:creationId xmlns:a16="http://schemas.microsoft.com/office/drawing/2014/main" id="{E0E15E96-7B84-438A-84AF-E0C5264E831E}"/>
+                <a16:creationId xmlns:a16="http://schemas.microsoft.com/office/drawing/2014/main" id="{118AF5A6-4CC2-4D5D-BB4A-A44ACA4C0151}"/>
               </a:ext>
             </a:extLst>
           </p:cNvPr>
@@ -8957,7 +9058,7 @@
           <p:cNvPr id="3" name="slide-title">
             <a:extLst xmlns:a="http://schemas.openxmlformats.org/drawingml/2006/main">
               <a:ext uri="{FF2B5EF4-FFF2-40B4-BE49-F238E27FC236}">
-                <a16:creationId xmlns:a16="http://schemas.microsoft.com/office/drawing/2014/main" id="{197D7DFF-BAFA-4A06-8F56-13EED419B206}"/>
+                <a16:creationId xmlns:a16="http://schemas.microsoft.com/office/drawing/2014/main" id="{A9E1ED3F-1CD2-4A5E-9C99-E1D484BF7687}"/>
               </a:ext>
             </a:extLst>
           </p:cNvPr>
@@ -9009,7 +9110,7 @@
                 <a:ea typeface="Georgia"/>
                 <a:cs typeface="Georgia"/>
               </a:rPr>
-              <a:t>A before-and-after change is not enough</a:t>
+              <a:t>Does studying economics pay?</a:t>
             </a:r>
           </a:p>
         </p:txBody>
@@ -9019,7 +9120,7 @@
           <p:cNvPr id="4" name="footer-rule">
             <a:extLst xmlns:a="http://schemas.openxmlformats.org/drawingml/2006/main">
               <a:ext uri="{FF2B5EF4-FFF2-40B4-BE49-F238E27FC236}">
-                <a16:creationId xmlns:a16="http://schemas.microsoft.com/office/drawing/2014/main" id="{6DFF33E9-3CA0-4FF8-A273-E395445DBD4B}"/>
+                <a16:creationId xmlns:a16="http://schemas.microsoft.com/office/drawing/2014/main" id="{2676F94F-18C5-467B-9844-35CE5EBFA0B3}"/>
               </a:ext>
             </a:extLst>
           </p:cNvPr>
@@ -9050,7 +9151,7 @@
           <p:cNvPr id="5" name="footer-book">
             <a:extLst xmlns:a="http://schemas.openxmlformats.org/drawingml/2006/main">
               <a:ext uri="{FF2B5EF4-FFF2-40B4-BE49-F238E27FC236}">
-                <a16:creationId xmlns:a16="http://schemas.microsoft.com/office/drawing/2014/main" id="{79CD6F3D-3D4D-40F6-A182-87CA2B1269FB}"/>
+                <a16:creationId xmlns:a16="http://schemas.microsoft.com/office/drawing/2014/main" id="{FA9D7FC0-577E-485F-8E95-17888C3C517C}"/>
               </a:ext>
             </a:extLst>
           </p:cNvPr>
@@ -9112,7 +9213,7 @@
           <p:cNvPr id="6" name="footer-number">
             <a:extLst xmlns:a="http://schemas.openxmlformats.org/drawingml/2006/main">
               <a:ext uri="{FF2B5EF4-FFF2-40B4-BE49-F238E27FC236}">
-                <a16:creationId xmlns:a16="http://schemas.microsoft.com/office/drawing/2014/main" id="{BAEA83F4-9BFE-429C-8B45-0D592A88094D}"/>
+                <a16:creationId xmlns:a16="http://schemas.microsoft.com/office/drawing/2014/main" id="{25C59FF1-DAF1-44D5-95B5-D3972E8B977A}"/>
               </a:ext>
             </a:extLst>
           </p:cNvPr>
@@ -9171,22 +9272,53 @@
       </p:sp>
       <p:sp>
         <p:nvSpPr>
-          <p:cNvPr id="7" name="parking-falls">
-            <a:extLst xmlns:a="http://schemas.openxmlformats.org/drawingml/2006/main">
-              <a:ext uri="{FF2B5EF4-FFF2-40B4-BE49-F238E27FC236}">
-                <a16:creationId xmlns:a16="http://schemas.microsoft.com/office/drawing/2014/main" id="{02FE5F10-AEA2-431B-B549-E60DBE9DD4A2}"/>
-              </a:ext>
-            </a:extLst>
-          </p:cNvPr>
-          <p:cNvSpPr>
-            <a:spLocks xmlns:a="http://schemas.openxmlformats.org/drawingml/2006/main" noGrp="1"/>
-          </p:cNvSpPr>
-          <p:nvPr/>
-        </p:nvSpPr>
-        <p:spPr>
-          <a:xfrm xmlns:a="http://schemas.openxmlformats.org/drawingml/2006/main">
-            <a:off x="971550" y="1771650"/>
-            <a:ext cx="4000500" cy="552450"/>
+          <p:cNvPr id="7" name="earnings-result-field">
+            <a:extLst xmlns:a="http://schemas.openxmlformats.org/drawingml/2006/main">
+              <a:ext uri="{FF2B5EF4-FFF2-40B4-BE49-F238E27FC236}">
+                <a16:creationId xmlns:a16="http://schemas.microsoft.com/office/drawing/2014/main" id="{7D283FC9-7366-4776-BF2B-5C255D19425B}"/>
+              </a:ext>
+            </a:extLst>
+          </p:cNvPr>
+          <p:cNvSpPr>
+            <a:spLocks xmlns:a="http://schemas.openxmlformats.org/drawingml/2006/main" noGrp="1"/>
+          </p:cNvSpPr>
+          <p:nvPr/>
+        </p:nvSpPr>
+        <p:spPr>
+          <a:xfrm xmlns:a="http://schemas.openxmlformats.org/drawingml/2006/main">
+            <a:off x="685800" y="1600200"/>
+            <a:ext cx="4953000" cy="2647950"/>
+          </a:xfrm>
+          <a:prstGeom xmlns:a="http://schemas.openxmlformats.org/drawingml/2006/main" prst="rect">
+            <a:avLst/>
+          </a:prstGeom>
+          <a:solidFill xmlns:a="http://schemas.openxmlformats.org/drawingml/2006/main">
+            <a:srgbClr val="EAF5F6"/>
+          </a:solidFill>
+          <a:ln xmlns:a="http://schemas.openxmlformats.org/drawingml/2006/main" w="0">
+            <a:noFill/>
+            <a:prstDash val="solid"/>
+          </a:ln>
+        </p:spPr>
+      </p:sp>
+      <p:sp>
+        <p:nvSpPr>
+          <p:cNvPr id="8" name="">
+            <a:extLst xmlns:a="http://schemas.openxmlformats.org/drawingml/2006/main">
+              <a:ext uri="{FF2B5EF4-FFF2-40B4-BE49-F238E27FC236}">
+                <a16:creationId xmlns:a16="http://schemas.microsoft.com/office/drawing/2014/main" id="{5BC9BF95-6158-4C57-ABD4-C08C0447DFE6}"/>
+              </a:ext>
+            </a:extLst>
+          </p:cNvPr>
+          <p:cNvSpPr>
+            <a:spLocks xmlns:a="http://schemas.openxmlformats.org/drawingml/2006/main" noGrp="1"/>
+          </p:cNvSpPr>
+          <p:nvPr/>
+        </p:nvSpPr>
+        <p:spPr>
+          <a:xfrm xmlns:a="http://schemas.openxmlformats.org/drawingml/2006/main">
+            <a:off x="990600" y="1866900"/>
+            <a:ext cx="3429000" cy="228600"/>
           </a:xfrm>
           <a:prstGeom xmlns:a="http://schemas.openxmlformats.org/drawingml/2006/main" prst="rect">
             <a:avLst/>
@@ -9208,7 +9340,69 @@
                 <a:spcPct val="108000"/>
               </a:lnSpc>
               <a:buNone/>
-              <a:defRPr sz="2775" b="1" i="0">
+              <a:defRPr sz="1050" b="1" i="0">
+                <a:solidFill>
+                  <a:srgbClr val="1E6675"/>
+                </a:solidFill>
+                <a:latin typeface="Aptos"/>
+                <a:ea typeface="Aptos"/>
+                <a:cs typeface="Aptos"/>
+              </a:defRPr>
+            </a:pPr>
+            <a:r>
+              <a:rPr sz="1050" b="1" i="0">
+                <a:solidFill>
+                  <a:srgbClr val="1E6675"/>
+                </a:solidFill>
+                <a:latin typeface="Aptos"/>
+                <a:ea typeface="Aptos"/>
+                <a:cs typeface="Aptos"/>
+              </a:rPr>
+              <a:t>A RECENT DESCRIPTIVE ESTIMATE</a:t>
+            </a:r>
+          </a:p>
+        </p:txBody>
+      </p:sp>
+      <p:sp>
+        <p:nvSpPr>
+          <p:cNvPr id="9" name="economics-worklife-earnings">
+            <a:extLst xmlns:a="http://schemas.openxmlformats.org/drawingml/2006/main">
+              <a:ext uri="{FF2B5EF4-FFF2-40B4-BE49-F238E27FC236}">
+                <a16:creationId xmlns:a16="http://schemas.microsoft.com/office/drawing/2014/main" id="{C1717F48-16CA-46E7-A913-31AD24614719}"/>
+              </a:ext>
+            </a:extLst>
+          </p:cNvPr>
+          <p:cNvSpPr>
+            <a:spLocks xmlns:a="http://schemas.openxmlformats.org/drawingml/2006/main" noGrp="1"/>
+          </p:cNvSpPr>
+          <p:nvPr/>
+        </p:nvSpPr>
+        <p:spPr>
+          <a:xfrm xmlns:a="http://schemas.openxmlformats.org/drawingml/2006/main">
+            <a:off x="990600" y="2305050"/>
+            <a:ext cx="4095750" cy="876300"/>
+          </a:xfrm>
+          <a:prstGeom xmlns:a="http://schemas.openxmlformats.org/drawingml/2006/main" prst="rect">
+            <a:avLst/>
+          </a:prstGeom>
+          <a:noFill xmlns:a="http://schemas.openxmlformats.org/drawingml/2006/main"/>
+          <a:ln xmlns:a="http://schemas.openxmlformats.org/drawingml/2006/main" w="0">
+            <a:noFill/>
+            <a:prstDash val="solid"/>
+          </a:ln>
+        </p:spPr>
+        <p:txBody>
+          <a:bodyPr xmlns:a="http://schemas.openxmlformats.org/drawingml/2006/main" lIns="0" tIns="0" rIns="0" bIns="0" anchor="t">
+            <a:normAutofit fontScale="100000"/>
+          </a:bodyPr>
+          <a:lstStyle xmlns:a="http://schemas.openxmlformats.org/drawingml/2006/main"/>
+          <a:p xmlns:a="http://schemas.openxmlformats.org/drawingml/2006/main">
+            <a:pPr algn="l">
+              <a:lnSpc>
+                <a:spcPct val="108000"/>
+              </a:lnSpc>
+              <a:buNone/>
+              <a:defRPr sz="4650" b="1" i="0">
                 <a:solidFill>
                   <a:srgbClr val="1E6675"/>
                 </a:solidFill>
@@ -9218,7 +9412,7 @@
               </a:defRPr>
             </a:pPr>
             <a:r>
-              <a:rPr sz="2775" b="1" i="0">
+              <a:rPr sz="4650" b="1" i="0">
                 <a:solidFill>
                   <a:srgbClr val="1E6675"/>
                 </a:solidFill>
@@ -9226,42 +9420,42 @@
                 <a:ea typeface="Georgia"/>
                 <a:cs typeface="Georgia"/>
               </a:rPr>
-              <a:t>Parking search falls</a:t>
-            </a:r>
-          </a:p>
-        </p:txBody>
-      </p:sp>
-      <p:sp>
-        <p:nvSpPr>
-          <p:cNvPr id="8" name="after-charge">
-            <a:extLst xmlns:a="http://schemas.openxmlformats.org/drawingml/2006/main">
-              <a:ext uri="{FF2B5EF4-FFF2-40B4-BE49-F238E27FC236}">
-                <a16:creationId xmlns:a16="http://schemas.microsoft.com/office/drawing/2014/main" id="{8E1F84EE-838B-4AD3-8609-B3D112086BAF}"/>
-              </a:ext>
-            </a:extLst>
-          </p:cNvPr>
-          <p:cNvSpPr>
-            <a:spLocks xmlns:a="http://schemas.openxmlformats.org/drawingml/2006/main" noGrp="1"/>
-          </p:cNvSpPr>
-          <p:nvPr/>
-        </p:nvSpPr>
-        <p:spPr>
-          <a:xfrm xmlns:a="http://schemas.openxmlformats.org/drawingml/2006/main">
-            <a:off x="990600" y="2400300"/>
-            <a:ext cx="4000500" cy="685800"/>
-          </a:xfrm>
-          <a:prstGeom xmlns:a="http://schemas.openxmlformats.org/drawingml/2006/main" prst="rect">
-            <a:avLst/>
-          </a:prstGeom>
-          <a:noFill xmlns:a="http://schemas.openxmlformats.org/drawingml/2006/main"/>
-          <a:ln xmlns:a="http://schemas.openxmlformats.org/drawingml/2006/main" w="0">
-            <a:noFill/>
-            <a:prstDash val="solid"/>
-          </a:ln>
-        </p:spPr>
-        <p:txBody>
-          <a:bodyPr xmlns:a="http://schemas.openxmlformats.org/drawingml/2006/main" lIns="0" tIns="0" rIns="0" bIns="0" anchor="t">
-            <a:normAutofit fontScale="100000"/>
+              <a:t>$6.90M</a:t>
+            </a:r>
+          </a:p>
+        </p:txBody>
+      </p:sp>
+      <p:sp>
+        <p:nvSpPr>
+          <p:cNvPr id="10" name="earnings-description">
+            <a:extLst xmlns:a="http://schemas.openxmlformats.org/drawingml/2006/main">
+              <a:ext uri="{FF2B5EF4-FFF2-40B4-BE49-F238E27FC236}">
+                <a16:creationId xmlns:a16="http://schemas.microsoft.com/office/drawing/2014/main" id="{ECE39B5E-30CE-41CB-B8BC-5BA3540024DB}"/>
+              </a:ext>
+            </a:extLst>
+          </p:cNvPr>
+          <p:cNvSpPr>
+            <a:spLocks xmlns:a="http://schemas.openxmlformats.org/drawingml/2006/main" noGrp="1"/>
+          </p:cNvSpPr>
+          <p:nvPr/>
+        </p:nvSpPr>
+        <p:spPr>
+          <a:xfrm xmlns:a="http://schemas.openxmlformats.org/drawingml/2006/main">
+            <a:off x="1009650" y="3181350"/>
+            <a:ext cx="4095750" cy="514350"/>
+          </a:xfrm>
+          <a:prstGeom xmlns:a="http://schemas.openxmlformats.org/drawingml/2006/main" prst="rect">
+            <a:avLst/>
+          </a:prstGeom>
+          <a:noFill xmlns:a="http://schemas.openxmlformats.org/drawingml/2006/main"/>
+          <a:ln xmlns:a="http://schemas.openxmlformats.org/drawingml/2006/main" w="0">
+            <a:noFill/>
+            <a:prstDash val="solid"/>
+          </a:ln>
+        </p:spPr>
+        <p:txBody>
+          <a:bodyPr xmlns:a="http://schemas.openxmlformats.org/drawingml/2006/main" lIns="0" tIns="0" rIns="0" bIns="0" anchor="t">
+            <a:normAutofit fontScale="86806"/>
           </a:bodyPr>
           <a:lstStyle xmlns:a="http://schemas.openxmlformats.org/drawingml/2006/main"/>
           <a:p xmlns:a="http://schemas.openxmlformats.org/drawingml/2006/main">
@@ -9270,9 +9464,288 @@
                 <a:spcPct val="108000"/>
               </a:lnSpc>
               <a:buNone/>
+              <a:defRPr sz="1800" b="1" i="0">
+                <a:solidFill>
+                  <a:srgbClr val="172126"/>
+                </a:solidFill>
+                <a:latin typeface="Aptos"/>
+                <a:ea typeface="Aptos"/>
+                <a:cs typeface="Aptos"/>
+              </a:defRPr>
+            </a:pPr>
+            <a:r>
+              <a:rPr sz="1800" b="1" i="0">
+                <a:solidFill>
+                  <a:srgbClr val="172126"/>
+                </a:solidFill>
+                <a:latin typeface="Aptos"/>
+                <a:ea typeface="Aptos"/>
+                <a:cs typeface="Aptos"/>
+              </a:rPr>
+              <a:t>Estimated work-life earnings for economics majors</a:t>
+            </a:r>
+          </a:p>
+        </p:txBody>
+      </p:sp>
+      <p:sp>
+        <p:nvSpPr>
+          <p:cNvPr id="11" name="earnings-sample">
+            <a:extLst xmlns:a="http://schemas.openxmlformats.org/drawingml/2006/main">
+              <a:ext uri="{FF2B5EF4-FFF2-40B4-BE49-F238E27FC236}">
+                <a16:creationId xmlns:a16="http://schemas.microsoft.com/office/drawing/2014/main" id="{86222A24-10D2-4AE2-AB36-02FF5787FEF2}"/>
+              </a:ext>
+            </a:extLst>
+          </p:cNvPr>
+          <p:cNvSpPr>
+            <a:spLocks xmlns:a="http://schemas.openxmlformats.org/drawingml/2006/main" noGrp="1"/>
+          </p:cNvSpPr>
+          <p:nvPr/>
+        </p:nvSpPr>
+        <p:spPr>
+          <a:xfrm xmlns:a="http://schemas.openxmlformats.org/drawingml/2006/main">
+            <a:off x="1009650" y="3752850"/>
+            <a:ext cx="4095750" cy="266700"/>
+          </a:xfrm>
+          <a:prstGeom xmlns:a="http://schemas.openxmlformats.org/drawingml/2006/main" prst="rect">
+            <a:avLst/>
+          </a:prstGeom>
+          <a:noFill xmlns:a="http://schemas.openxmlformats.org/drawingml/2006/main"/>
+          <a:ln xmlns:a="http://schemas.openxmlformats.org/drawingml/2006/main" w="0">
+            <a:noFill/>
+            <a:prstDash val="solid"/>
+          </a:ln>
+        </p:spPr>
+        <p:txBody>
+          <a:bodyPr xmlns:a="http://schemas.openxmlformats.org/drawingml/2006/main" lIns="0" tIns="0" rIns="0" bIns="0" anchor="t">
+            <a:normAutofit fontScale="100000"/>
+          </a:bodyPr>
+          <a:lstStyle xmlns:a="http://schemas.openxmlformats.org/drawingml/2006/main"/>
+          <a:p xmlns:a="http://schemas.openxmlformats.org/drawingml/2006/main">
+            <a:pPr algn="l">
+              <a:lnSpc>
+                <a:spcPct val="108000"/>
+              </a:lnSpc>
+              <a:buNone/>
+              <a:defRPr sz="1275" b="0" i="0">
+                <a:solidFill>
+                  <a:srgbClr val="56636A"/>
+                </a:solidFill>
+                <a:latin typeface="Aptos"/>
+                <a:ea typeface="Aptos"/>
+                <a:cs typeface="Aptos"/>
+              </a:defRPr>
+            </a:pPr>
+            <a:r>
+              <a:rPr sz="1275" b="0" i="0">
+                <a:solidFill>
+                  <a:srgbClr val="56636A"/>
+                </a:solidFill>
+                <a:latin typeface="Aptos"/>
+                <a:ea typeface="Aptos"/>
+                <a:cs typeface="Aptos"/>
+              </a:rPr>
+              <a:t>Full-time workers ages 25-64 • ACS 2020-2024</a:t>
+            </a:r>
+          </a:p>
+        </p:txBody>
+      </p:sp>
+      <p:sp>
+        <p:nvSpPr>
+          <p:cNvPr id="12" name="earnings-caution-field">
+            <a:extLst xmlns:a="http://schemas.openxmlformats.org/drawingml/2006/main">
+              <a:ext uri="{FF2B5EF4-FFF2-40B4-BE49-F238E27FC236}">
+                <a16:creationId xmlns:a16="http://schemas.microsoft.com/office/drawing/2014/main" id="{CB50E15A-61DF-4AA0-9C77-755CE434C0FE}"/>
+              </a:ext>
+            </a:extLst>
+          </p:cNvPr>
+          <p:cNvSpPr>
+            <a:spLocks xmlns:a="http://schemas.openxmlformats.org/drawingml/2006/main" noGrp="1"/>
+          </p:cNvSpPr>
+          <p:nvPr/>
+        </p:nvSpPr>
+        <p:spPr>
+          <a:xfrm xmlns:a="http://schemas.openxmlformats.org/drawingml/2006/main">
+            <a:off x="5981700" y="1600200"/>
+            <a:ext cx="4953000" cy="2647950"/>
+          </a:xfrm>
+          <a:prstGeom xmlns:a="http://schemas.openxmlformats.org/drawingml/2006/main" prst="rect">
+            <a:avLst/>
+          </a:prstGeom>
+          <a:solidFill xmlns:a="http://schemas.openxmlformats.org/drawingml/2006/main">
+            <a:srgbClr val="F8EFEA"/>
+          </a:solidFill>
+          <a:ln xmlns:a="http://schemas.openxmlformats.org/drawingml/2006/main" w="0">
+            <a:noFill/>
+            <a:prstDash val="solid"/>
+          </a:ln>
+        </p:spPr>
+      </p:sp>
+      <p:sp>
+        <p:nvSpPr>
+          <p:cNvPr id="13" name="">
+            <a:extLst xmlns:a="http://schemas.openxmlformats.org/drawingml/2006/main">
+              <a:ext uri="{FF2B5EF4-FFF2-40B4-BE49-F238E27FC236}">
+                <a16:creationId xmlns:a16="http://schemas.microsoft.com/office/drawing/2014/main" id="{8DF8C8B3-A775-4345-B931-317C97284A48}"/>
+              </a:ext>
+            </a:extLst>
+          </p:cNvPr>
+          <p:cNvSpPr>
+            <a:spLocks xmlns:a="http://schemas.openxmlformats.org/drawingml/2006/main" noGrp="1"/>
+          </p:cNvSpPr>
+          <p:nvPr/>
+        </p:nvSpPr>
+        <p:spPr>
+          <a:xfrm xmlns:a="http://schemas.openxmlformats.org/drawingml/2006/main">
+            <a:off x="6286500" y="1866900"/>
+            <a:ext cx="3429000" cy="228600"/>
+          </a:xfrm>
+          <a:prstGeom xmlns:a="http://schemas.openxmlformats.org/drawingml/2006/main" prst="rect">
+            <a:avLst/>
+          </a:prstGeom>
+          <a:noFill xmlns:a="http://schemas.openxmlformats.org/drawingml/2006/main"/>
+          <a:ln xmlns:a="http://schemas.openxmlformats.org/drawingml/2006/main" w="0">
+            <a:noFill/>
+            <a:prstDash val="solid"/>
+          </a:ln>
+        </p:spPr>
+        <p:txBody>
+          <a:bodyPr xmlns:a="http://schemas.openxmlformats.org/drawingml/2006/main" lIns="0" tIns="0" rIns="0" bIns="0" anchor="t">
+            <a:normAutofit fontScale="100000"/>
+          </a:bodyPr>
+          <a:lstStyle xmlns:a="http://schemas.openxmlformats.org/drawingml/2006/main"/>
+          <a:p xmlns:a="http://schemas.openxmlformats.org/drawingml/2006/main">
+            <a:pPr algn="l">
+              <a:lnSpc>
+                <a:spcPct val="108000"/>
+              </a:lnSpc>
+              <a:buNone/>
+              <a:defRPr sz="1050" b="1" i="0">
+                <a:solidFill>
+                  <a:srgbClr val="9A3B35"/>
+                </a:solidFill>
+                <a:latin typeface="Aptos"/>
+                <a:ea typeface="Aptos"/>
+                <a:cs typeface="Aptos"/>
+              </a:defRPr>
+            </a:pPr>
+            <a:r>
+              <a:rPr sz="1050" b="1" i="0">
+                <a:solidFill>
+                  <a:srgbClr val="9A3B35"/>
+                </a:solidFill>
+                <a:latin typeface="Aptos"/>
+                <a:ea typeface="Aptos"/>
+                <a:cs typeface="Aptos"/>
+              </a:rPr>
+              <a:t>WHAT ELSE COULD EXPLAIN IT?</a:t>
+            </a:r>
+          </a:p>
+        </p:txBody>
+      </p:sp>
+      <p:sp>
+        <p:nvSpPr>
+          <p:cNvPr id="14" name="earnings-caution-mark-1">
+            <a:extLst xmlns:a="http://schemas.openxmlformats.org/drawingml/2006/main">
+              <a:ext uri="{FF2B5EF4-FFF2-40B4-BE49-F238E27FC236}">
+                <a16:creationId xmlns:a16="http://schemas.microsoft.com/office/drawing/2014/main" id="{FFEB3801-A1E6-447D-8A58-DE0B527512A8}"/>
+              </a:ext>
+            </a:extLst>
+          </p:cNvPr>
+          <p:cNvSpPr>
+            <a:spLocks xmlns:a="http://schemas.openxmlformats.org/drawingml/2006/main" noGrp="1"/>
+          </p:cNvSpPr>
+          <p:nvPr/>
+        </p:nvSpPr>
+        <p:spPr>
+          <a:xfrm xmlns:a="http://schemas.openxmlformats.org/drawingml/2006/main">
+            <a:off x="6286500" y="2466975"/>
+            <a:ext cx="228600" cy="495300"/>
+          </a:xfrm>
+          <a:prstGeom xmlns:a="http://schemas.openxmlformats.org/drawingml/2006/main" prst="rect">
+            <a:avLst/>
+          </a:prstGeom>
+          <a:noFill xmlns:a="http://schemas.openxmlformats.org/drawingml/2006/main"/>
+          <a:ln xmlns:a="http://schemas.openxmlformats.org/drawingml/2006/main" w="0">
+            <a:noFill/>
+            <a:prstDash val="solid"/>
+          </a:ln>
+        </p:spPr>
+        <p:txBody>
+          <a:bodyPr xmlns:a="http://schemas.openxmlformats.org/drawingml/2006/main" lIns="0" tIns="0" rIns="0" bIns="0" anchor="t">
+            <a:normAutofit fontScale="100000"/>
+          </a:bodyPr>
+          <a:lstStyle xmlns:a="http://schemas.openxmlformats.org/drawingml/2006/main"/>
+          <a:p xmlns:a="http://schemas.openxmlformats.org/drawingml/2006/main">
+            <a:pPr algn="l">
+              <a:lnSpc>
+                <a:spcPct val="108000"/>
+              </a:lnSpc>
+              <a:buNone/>
+              <a:defRPr sz="1875" b="1" i="0">
+                <a:solidFill>
+                  <a:srgbClr val="9A3B35"/>
+                </a:solidFill>
+                <a:latin typeface="Aptos"/>
+                <a:ea typeface="Aptos"/>
+                <a:cs typeface="Aptos"/>
+              </a:defRPr>
+            </a:pPr>
+            <a:r>
+              <a:rPr sz="1875" b="1" i="0">
+                <a:solidFill>
+                  <a:srgbClr val="9A3B35"/>
+                </a:solidFill>
+                <a:latin typeface="Aptos"/>
+                <a:ea typeface="Aptos"/>
+                <a:cs typeface="Aptos"/>
+              </a:rPr>
+              <a:t>•</a:t>
+            </a:r>
+          </a:p>
+        </p:txBody>
+      </p:sp>
+      <p:sp>
+        <p:nvSpPr>
+          <p:cNvPr id="15" name="earnings-caution-1">
+            <a:extLst xmlns:a="http://schemas.openxmlformats.org/drawingml/2006/main">
+              <a:ext uri="{FF2B5EF4-FFF2-40B4-BE49-F238E27FC236}">
+                <a16:creationId xmlns:a16="http://schemas.microsoft.com/office/drawing/2014/main" id="{CBE8D187-FDC6-4763-9147-E4776D2F587B}"/>
+              </a:ext>
+            </a:extLst>
+          </p:cNvPr>
+          <p:cNvSpPr>
+            <a:spLocks xmlns:a="http://schemas.openxmlformats.org/drawingml/2006/main" noGrp="1"/>
+          </p:cNvSpPr>
+          <p:nvPr/>
+        </p:nvSpPr>
+        <p:spPr>
+          <a:xfrm xmlns:a="http://schemas.openxmlformats.org/drawingml/2006/main">
+            <a:off x="6610350" y="2476500"/>
+            <a:ext cx="3848100" cy="495300"/>
+          </a:xfrm>
+          <a:prstGeom xmlns:a="http://schemas.openxmlformats.org/drawingml/2006/main" prst="rect">
+            <a:avLst/>
+          </a:prstGeom>
+          <a:noFill xmlns:a="http://schemas.openxmlformats.org/drawingml/2006/main"/>
+          <a:ln xmlns:a="http://schemas.openxmlformats.org/drawingml/2006/main" w="0">
+            <a:noFill/>
+            <a:prstDash val="solid"/>
+          </a:ln>
+        </p:spPr>
+        <p:txBody>
+          <a:bodyPr xmlns:a="http://schemas.openxmlformats.org/drawingml/2006/main" lIns="0" tIns="0" rIns="0" bIns="0" anchor="t">
+            <a:normAutofit fontScale="100000"/>
+          </a:bodyPr>
+          <a:lstStyle xmlns:a="http://schemas.openxmlformats.org/drawingml/2006/main"/>
+          <a:p xmlns:a="http://schemas.openxmlformats.org/drawingml/2006/main">
+            <a:pPr algn="l">
+              <a:lnSpc>
+                <a:spcPct val="108000"/>
+              </a:lnSpc>
+              <a:buNone/>
               <a:defRPr sz="1875" b="0" i="0">
                 <a:solidFill>
-                  <a:srgbClr val="56636A"/>
+                  <a:srgbClr val="172126"/>
                 </a:solidFill>
                 <a:latin typeface="Aptos"/>
                 <a:ea typeface="Aptos"/>
@@ -9282,35 +9755,35 @@
             <a:r>
               <a:rPr sz="1875" b="0" i="0">
                 <a:solidFill>
-                  <a:srgbClr val="56636A"/>
-                </a:solidFill>
-                <a:latin typeface="Aptos"/>
-                <a:ea typeface="Aptos"/>
-                <a:cs typeface="Aptos"/>
-              </a:rPr>
-              <a:t>after a university begins charging</a:t>
-            </a:r>
-          </a:p>
-        </p:txBody>
-      </p:sp>
-      <p:sp>
-        <p:nvSpPr>
-          <p:cNvPr id="9" name="what-else">
-            <a:extLst xmlns:a="http://schemas.openxmlformats.org/drawingml/2006/main">
-              <a:ext uri="{FF2B5EF4-FFF2-40B4-BE49-F238E27FC236}">
-                <a16:creationId xmlns:a16="http://schemas.microsoft.com/office/drawing/2014/main" id="{1BBB034D-54EC-40FF-82F6-15F7AF6A8D7E}"/>
-              </a:ext>
-            </a:extLst>
-          </p:cNvPr>
-          <p:cNvSpPr>
-            <a:spLocks xmlns:a="http://schemas.openxmlformats.org/drawingml/2006/main" noGrp="1"/>
-          </p:cNvSpPr>
-          <p:nvPr/>
-        </p:nvSpPr>
-        <p:spPr>
-          <a:xfrm xmlns:a="http://schemas.openxmlformats.org/drawingml/2006/main">
-            <a:off x="6191250" y="1790700"/>
-            <a:ext cx="4572000" cy="552450"/>
+                  <a:srgbClr val="172126"/>
+                </a:solidFill>
+                <a:latin typeface="Aptos"/>
+                <a:ea typeface="Aptos"/>
+                <a:cs typeface="Aptos"/>
+              </a:rPr>
+              <a:t>Who chooses economics</a:t>
+            </a:r>
+          </a:p>
+        </p:txBody>
+      </p:sp>
+      <p:sp>
+        <p:nvSpPr>
+          <p:cNvPr id="16" name="earnings-caution-mark-2">
+            <a:extLst xmlns:a="http://schemas.openxmlformats.org/drawingml/2006/main">
+              <a:ext uri="{FF2B5EF4-FFF2-40B4-BE49-F238E27FC236}">
+                <a16:creationId xmlns:a16="http://schemas.microsoft.com/office/drawing/2014/main" id="{2E479F90-10D3-4BBB-85B1-DCFBB951361A}"/>
+              </a:ext>
+            </a:extLst>
+          </p:cNvPr>
+          <p:cNvSpPr>
+            <a:spLocks xmlns:a="http://schemas.openxmlformats.org/drawingml/2006/main" noGrp="1"/>
+          </p:cNvSpPr>
+          <p:nvPr/>
+        </p:nvSpPr>
+        <p:spPr>
+          <a:xfrm xmlns:a="http://schemas.openxmlformats.org/drawingml/2006/main">
+            <a:off x="6286500" y="3028950"/>
+            <a:ext cx="228600" cy="495300"/>
           </a:xfrm>
           <a:prstGeom xmlns:a="http://schemas.openxmlformats.org/drawingml/2006/main" prst="rect">
             <a:avLst/>
@@ -9332,9 +9805,257 @@
                 <a:spcPct val="108000"/>
               </a:lnSpc>
               <a:buNone/>
-              <a:defRPr sz="2700" b="1" i="0">
+              <a:defRPr sz="1875" b="1" i="0">
                 <a:solidFill>
                   <a:srgbClr val="9A3B35"/>
+                </a:solidFill>
+                <a:latin typeface="Aptos"/>
+                <a:ea typeface="Aptos"/>
+                <a:cs typeface="Aptos"/>
+              </a:defRPr>
+            </a:pPr>
+            <a:r>
+              <a:rPr sz="1875" b="1" i="0">
+                <a:solidFill>
+                  <a:srgbClr val="9A3B35"/>
+                </a:solidFill>
+                <a:latin typeface="Aptos"/>
+                <a:ea typeface="Aptos"/>
+                <a:cs typeface="Aptos"/>
+              </a:rPr>
+              <a:t>•</a:t>
+            </a:r>
+          </a:p>
+        </p:txBody>
+      </p:sp>
+      <p:sp>
+        <p:nvSpPr>
+          <p:cNvPr id="17" name="earnings-caution-2">
+            <a:extLst xmlns:a="http://schemas.openxmlformats.org/drawingml/2006/main">
+              <a:ext uri="{FF2B5EF4-FFF2-40B4-BE49-F238E27FC236}">
+                <a16:creationId xmlns:a16="http://schemas.microsoft.com/office/drawing/2014/main" id="{D330E708-35F8-4494-90A8-C0C7312F82EE}"/>
+              </a:ext>
+            </a:extLst>
+          </p:cNvPr>
+          <p:cNvSpPr>
+            <a:spLocks xmlns:a="http://schemas.openxmlformats.org/drawingml/2006/main" noGrp="1"/>
+          </p:cNvSpPr>
+          <p:nvPr/>
+        </p:nvSpPr>
+        <p:spPr>
+          <a:xfrm xmlns:a="http://schemas.openxmlformats.org/drawingml/2006/main">
+            <a:off x="6610350" y="3038475"/>
+            <a:ext cx="3848100" cy="495300"/>
+          </a:xfrm>
+          <a:prstGeom xmlns:a="http://schemas.openxmlformats.org/drawingml/2006/main" prst="rect">
+            <a:avLst/>
+          </a:prstGeom>
+          <a:noFill xmlns:a="http://schemas.openxmlformats.org/drawingml/2006/main"/>
+          <a:ln xmlns:a="http://schemas.openxmlformats.org/drawingml/2006/main" w="0">
+            <a:noFill/>
+            <a:prstDash val="solid"/>
+          </a:ln>
+        </p:spPr>
+        <p:txBody>
+          <a:bodyPr xmlns:a="http://schemas.openxmlformats.org/drawingml/2006/main" lIns="0" tIns="0" rIns="0" bIns="0" anchor="t">
+            <a:normAutofit fontScale="100000"/>
+          </a:bodyPr>
+          <a:lstStyle xmlns:a="http://schemas.openxmlformats.org/drawingml/2006/main"/>
+          <a:p xmlns:a="http://schemas.openxmlformats.org/drawingml/2006/main">
+            <a:pPr algn="l">
+              <a:lnSpc>
+                <a:spcPct val="108000"/>
+              </a:lnSpc>
+              <a:buNone/>
+              <a:defRPr sz="1875" b="0" i="0">
+                <a:solidFill>
+                  <a:srgbClr val="172126"/>
+                </a:solidFill>
+                <a:latin typeface="Aptos"/>
+                <a:ea typeface="Aptos"/>
+                <a:cs typeface="Aptos"/>
+              </a:defRPr>
+            </a:pPr>
+            <a:r>
+              <a:rPr sz="1875" b="0" i="0">
+                <a:solidFill>
+                  <a:srgbClr val="172126"/>
+                </a:solidFill>
+                <a:latin typeface="Aptos"/>
+                <a:ea typeface="Aptos"/>
+                <a:cs typeface="Aptos"/>
+              </a:rPr>
+              <a:t>Schools without a business major</a:t>
+            </a:r>
+          </a:p>
+        </p:txBody>
+      </p:sp>
+      <p:sp>
+        <p:nvSpPr>
+          <p:cNvPr id="18" name="earnings-caution-mark-3">
+            <a:extLst xmlns:a="http://schemas.openxmlformats.org/drawingml/2006/main">
+              <a:ext uri="{FF2B5EF4-FFF2-40B4-BE49-F238E27FC236}">
+                <a16:creationId xmlns:a16="http://schemas.microsoft.com/office/drawing/2014/main" id="{B72724AA-ED6D-457D-B647-25376893405B}"/>
+              </a:ext>
+            </a:extLst>
+          </p:cNvPr>
+          <p:cNvSpPr>
+            <a:spLocks xmlns:a="http://schemas.openxmlformats.org/drawingml/2006/main" noGrp="1"/>
+          </p:cNvSpPr>
+          <p:nvPr/>
+        </p:nvSpPr>
+        <p:spPr>
+          <a:xfrm xmlns:a="http://schemas.openxmlformats.org/drawingml/2006/main">
+            <a:off x="6286500" y="3590925"/>
+            <a:ext cx="228600" cy="495300"/>
+          </a:xfrm>
+          <a:prstGeom xmlns:a="http://schemas.openxmlformats.org/drawingml/2006/main" prst="rect">
+            <a:avLst/>
+          </a:prstGeom>
+          <a:noFill xmlns:a="http://schemas.openxmlformats.org/drawingml/2006/main"/>
+          <a:ln xmlns:a="http://schemas.openxmlformats.org/drawingml/2006/main" w="0">
+            <a:noFill/>
+            <a:prstDash val="solid"/>
+          </a:ln>
+        </p:spPr>
+        <p:txBody>
+          <a:bodyPr xmlns:a="http://schemas.openxmlformats.org/drawingml/2006/main" lIns="0" tIns="0" rIns="0" bIns="0" anchor="t">
+            <a:normAutofit fontScale="100000"/>
+          </a:bodyPr>
+          <a:lstStyle xmlns:a="http://schemas.openxmlformats.org/drawingml/2006/main"/>
+          <a:p xmlns:a="http://schemas.openxmlformats.org/drawingml/2006/main">
+            <a:pPr algn="l">
+              <a:lnSpc>
+                <a:spcPct val="108000"/>
+              </a:lnSpc>
+              <a:buNone/>
+              <a:defRPr sz="1875" b="1" i="0">
+                <a:solidFill>
+                  <a:srgbClr val="9A3B35"/>
+                </a:solidFill>
+                <a:latin typeface="Aptos"/>
+                <a:ea typeface="Aptos"/>
+                <a:cs typeface="Aptos"/>
+              </a:defRPr>
+            </a:pPr>
+            <a:r>
+              <a:rPr sz="1875" b="1" i="0">
+                <a:solidFill>
+                  <a:srgbClr val="9A3B35"/>
+                </a:solidFill>
+                <a:latin typeface="Aptos"/>
+                <a:ea typeface="Aptos"/>
+                <a:cs typeface="Aptos"/>
+              </a:rPr>
+              <a:t>•</a:t>
+            </a:r>
+          </a:p>
+        </p:txBody>
+      </p:sp>
+      <p:sp>
+        <p:nvSpPr>
+          <p:cNvPr id="19" name="earnings-caution-3">
+            <a:extLst xmlns:a="http://schemas.openxmlformats.org/drawingml/2006/main">
+              <a:ext uri="{FF2B5EF4-FFF2-40B4-BE49-F238E27FC236}">
+                <a16:creationId xmlns:a16="http://schemas.microsoft.com/office/drawing/2014/main" id="{7F198305-26C3-4016-B30D-5B36472852AB}"/>
+              </a:ext>
+            </a:extLst>
+          </p:cNvPr>
+          <p:cNvSpPr>
+            <a:spLocks xmlns:a="http://schemas.openxmlformats.org/drawingml/2006/main" noGrp="1"/>
+          </p:cNvSpPr>
+          <p:nvPr/>
+        </p:nvSpPr>
+        <p:spPr>
+          <a:xfrm xmlns:a="http://schemas.openxmlformats.org/drawingml/2006/main">
+            <a:off x="6610350" y="3600450"/>
+            <a:ext cx="3848100" cy="495300"/>
+          </a:xfrm>
+          <a:prstGeom xmlns:a="http://schemas.openxmlformats.org/drawingml/2006/main" prst="rect">
+            <a:avLst/>
+          </a:prstGeom>
+          <a:noFill xmlns:a="http://schemas.openxmlformats.org/drawingml/2006/main"/>
+          <a:ln xmlns:a="http://schemas.openxmlformats.org/drawingml/2006/main" w="0">
+            <a:noFill/>
+            <a:prstDash val="solid"/>
+          </a:ln>
+        </p:spPr>
+        <p:txBody>
+          <a:bodyPr xmlns:a="http://schemas.openxmlformats.org/drawingml/2006/main" lIns="0" tIns="0" rIns="0" bIns="0" anchor="t">
+            <a:normAutofit fontScale="100000"/>
+          </a:bodyPr>
+          <a:lstStyle xmlns:a="http://schemas.openxmlformats.org/drawingml/2006/main"/>
+          <a:p xmlns:a="http://schemas.openxmlformats.org/drawingml/2006/main">
+            <a:pPr algn="l">
+              <a:lnSpc>
+                <a:spcPct val="108000"/>
+              </a:lnSpc>
+              <a:buNone/>
+              <a:defRPr sz="1875" b="0" i="0">
+                <a:solidFill>
+                  <a:srgbClr val="172126"/>
+                </a:solidFill>
+                <a:latin typeface="Aptos"/>
+                <a:ea typeface="Aptos"/>
+                <a:cs typeface="Aptos"/>
+              </a:defRPr>
+            </a:pPr>
+            <a:r>
+              <a:rPr sz="1875" b="0" i="0">
+                <a:solidFill>
+                  <a:srgbClr val="172126"/>
+                </a:solidFill>
+                <a:latin typeface="Aptos"/>
+                <a:ea typeface="Aptos"/>
+                <a:cs typeface="Aptos"/>
+              </a:rPr>
+              <a:t>Career plans and full-time work</a:t>
+            </a:r>
+          </a:p>
+        </p:txBody>
+      </p:sp>
+      <p:sp>
+        <p:nvSpPr>
+          <p:cNvPr id="20" name="earnings-causal-evidence">
+            <a:extLst xmlns:a="http://schemas.openxmlformats.org/drawingml/2006/main">
+              <a:ext uri="{FF2B5EF4-FFF2-40B4-BE49-F238E27FC236}">
+                <a16:creationId xmlns:a16="http://schemas.microsoft.com/office/drawing/2014/main" id="{40810D89-B8E0-4264-8E8C-FEA9A86643F2}"/>
+              </a:ext>
+            </a:extLst>
+          </p:cNvPr>
+          <p:cNvSpPr>
+            <a:spLocks xmlns:a="http://schemas.openxmlformats.org/drawingml/2006/main" noGrp="1"/>
+          </p:cNvSpPr>
+          <p:nvPr/>
+        </p:nvSpPr>
+        <p:spPr>
+          <a:xfrm xmlns:a="http://schemas.openxmlformats.org/drawingml/2006/main">
+            <a:off x="1066800" y="4610100"/>
+            <a:ext cx="10058400" cy="704850"/>
+          </a:xfrm>
+          <a:prstGeom xmlns:a="http://schemas.openxmlformats.org/drawingml/2006/main" prst="rect">
+            <a:avLst/>
+          </a:prstGeom>
+          <a:noFill xmlns:a="http://schemas.openxmlformats.org/drawingml/2006/main"/>
+          <a:ln xmlns:a="http://schemas.openxmlformats.org/drawingml/2006/main" w="0">
+            <a:noFill/>
+            <a:prstDash val="solid"/>
+          </a:ln>
+        </p:spPr>
+        <p:txBody>
+          <a:bodyPr xmlns:a="http://schemas.openxmlformats.org/drawingml/2006/main" lIns="0" tIns="0" rIns="0" bIns="0" anchor="t">
+            <a:normAutofit fontScale="100000"/>
+          </a:bodyPr>
+          <a:lstStyle xmlns:a="http://schemas.openxmlformats.org/drawingml/2006/main"/>
+          <a:p xmlns:a="http://schemas.openxmlformats.org/drawingml/2006/main">
+            <a:pPr algn="ctr">
+              <a:lnSpc>
+                <a:spcPct val="108000"/>
+              </a:lnSpc>
+              <a:buNone/>
+              <a:defRPr sz="2025" b="1" i="0">
+                <a:solidFill>
+                  <a:srgbClr val="172126"/>
                 </a:solidFill>
                 <a:latin typeface="Georgia"/>
                 <a:ea typeface="Georgia"/>
@@ -9342,59 +10063,59 @@
               </a:defRPr>
             </a:pPr>
             <a:r>
-              <a:rPr sz="2700" b="1" i="0">
-                <a:solidFill>
-                  <a:srgbClr val="9A3B35"/>
+              <a:rPr sz="2025" b="1" i="0">
+                <a:solidFill>
+                  <a:srgbClr val="172126"/>
                 </a:solidFill>
                 <a:latin typeface="Georgia"/>
                 <a:ea typeface="Georgia"/>
                 <a:cs typeface="Georgia"/>
               </a:rPr>
-              <a:t>But what else changed?</a:t>
-            </a:r>
-          </a:p>
-        </p:txBody>
-      </p:sp>
-      <p:sp>
-        <p:nvSpPr>
-          <p:cNvPr id="10" name="alternative-explanation-mark-1">
-            <a:extLst xmlns:a="http://schemas.openxmlformats.org/drawingml/2006/main">
-              <a:ext uri="{FF2B5EF4-FFF2-40B4-BE49-F238E27FC236}">
-                <a16:creationId xmlns:a16="http://schemas.microsoft.com/office/drawing/2014/main" id="{C3327F21-6454-4B8B-A8BB-D837077DAEA9}"/>
-              </a:ext>
-            </a:extLst>
-          </p:cNvPr>
-          <p:cNvSpPr>
-            <a:spLocks xmlns:a="http://schemas.openxmlformats.org/drawingml/2006/main" noGrp="1"/>
-          </p:cNvSpPr>
-          <p:nvPr/>
-        </p:nvSpPr>
-        <p:spPr>
-          <a:xfrm xmlns:a="http://schemas.openxmlformats.org/drawingml/2006/main">
-            <a:off x="6191250" y="2581275"/>
-            <a:ext cx="228600" cy="495300"/>
-          </a:xfrm>
-          <a:prstGeom xmlns:a="http://schemas.openxmlformats.org/drawingml/2006/main" prst="rect">
-            <a:avLst/>
-          </a:prstGeom>
-          <a:noFill xmlns:a="http://schemas.openxmlformats.org/drawingml/2006/main"/>
-          <a:ln xmlns:a="http://schemas.openxmlformats.org/drawingml/2006/main" w="0">
-            <a:noFill/>
-            <a:prstDash val="solid"/>
-          </a:ln>
-        </p:spPr>
-        <p:txBody>
-          <a:bodyPr xmlns:a="http://schemas.openxmlformats.org/drawingml/2006/main" lIns="0" tIns="0" rIns="0" bIns="0" anchor="t">
-            <a:normAutofit fontScale="100000"/>
-          </a:bodyPr>
-          <a:lstStyle xmlns:a="http://schemas.openxmlformats.org/drawingml/2006/main"/>
-          <a:p xmlns:a="http://schemas.openxmlformats.org/drawingml/2006/main">
-            <a:pPr algn="l">
-              <a:lnSpc>
-                <a:spcPct val="108000"/>
-              </a:lnSpc>
-              <a:buNone/>
-              <a:defRPr sz="1950" b="1" i="0">
+              <a:t>Stronger evidence: in one grade-cutoff study, access to the economics major raised annual early-career wages by about $22,000.</a:t>
+            </a:r>
+          </a:p>
+        </p:txBody>
+      </p:sp>
+      <p:sp>
+        <p:nvSpPr>
+          <p:cNvPr id="21" name="earnings-close">
+            <a:extLst xmlns:a="http://schemas.openxmlformats.org/drawingml/2006/main">
+              <a:ext uri="{FF2B5EF4-FFF2-40B4-BE49-F238E27FC236}">
+                <a16:creationId xmlns:a16="http://schemas.microsoft.com/office/drawing/2014/main" id="{EE3874E9-2E98-4017-91BD-C3C5155ED72D}"/>
+              </a:ext>
+            </a:extLst>
+          </p:cNvPr>
+          <p:cNvSpPr>
+            <a:spLocks xmlns:a="http://schemas.openxmlformats.org/drawingml/2006/main" noGrp="1"/>
+          </p:cNvSpPr>
+          <p:nvPr/>
+        </p:nvSpPr>
+        <p:spPr>
+          <a:xfrm xmlns:a="http://schemas.openxmlformats.org/drawingml/2006/main">
+            <a:off x="1562100" y="5581650"/>
+            <a:ext cx="9067800" cy="400050"/>
+          </a:xfrm>
+          <a:prstGeom xmlns:a="http://schemas.openxmlformats.org/drawingml/2006/main" prst="rect">
+            <a:avLst/>
+          </a:prstGeom>
+          <a:noFill xmlns:a="http://schemas.openxmlformats.org/drawingml/2006/main"/>
+          <a:ln xmlns:a="http://schemas.openxmlformats.org/drawingml/2006/main" w="0">
+            <a:noFill/>
+            <a:prstDash val="solid"/>
+          </a:ln>
+        </p:spPr>
+        <p:txBody>
+          <a:bodyPr xmlns:a="http://schemas.openxmlformats.org/drawingml/2006/main" lIns="0" tIns="0" rIns="0" bIns="0" anchor="t">
+            <a:normAutofit fontScale="100000"/>
+          </a:bodyPr>
+          <a:lstStyle xmlns:a="http://schemas.openxmlformats.org/drawingml/2006/main"/>
+          <a:p xmlns:a="http://schemas.openxmlformats.org/drawingml/2006/main">
+            <a:pPr algn="ctr">
+              <a:lnSpc>
+                <a:spcPct val="108000"/>
+              </a:lnSpc>
+              <a:buNone/>
+              <a:defRPr sz="2025" b="1" i="0">
                 <a:solidFill>
                   <a:srgbClr val="9A3B35"/>
                 </a:solidFill>
@@ -9404,7 +10125,7 @@
               </a:defRPr>
             </a:pPr>
             <a:r>
-              <a:rPr sz="1950" b="1" i="0">
+              <a:rPr sz="2025" b="1" i="0">
                 <a:solidFill>
                   <a:srgbClr val="9A3B35"/>
                 </a:solidFill>
@@ -9412,503 +10133,7 @@
                 <a:ea typeface="Aptos"/>
                 <a:cs typeface="Aptos"/>
               </a:rPr>
-              <a:t>•</a:t>
-            </a:r>
-          </a:p>
-        </p:txBody>
-      </p:sp>
-      <p:sp>
-        <p:nvSpPr>
-          <p:cNvPr id="11" name="alternative-explanation-1">
-            <a:extLst xmlns:a="http://schemas.openxmlformats.org/drawingml/2006/main">
-              <a:ext uri="{FF2B5EF4-FFF2-40B4-BE49-F238E27FC236}">
-                <a16:creationId xmlns:a16="http://schemas.microsoft.com/office/drawing/2014/main" id="{3058DDE3-B454-455C-B61B-DA702861A648}"/>
-              </a:ext>
-            </a:extLst>
-          </p:cNvPr>
-          <p:cNvSpPr>
-            <a:spLocks xmlns:a="http://schemas.openxmlformats.org/drawingml/2006/main" noGrp="1"/>
-          </p:cNvSpPr>
-          <p:nvPr/>
-        </p:nvSpPr>
-        <p:spPr>
-          <a:xfrm xmlns:a="http://schemas.openxmlformats.org/drawingml/2006/main">
-            <a:off x="6515100" y="2590800"/>
-            <a:ext cx="4152900" cy="495300"/>
-          </a:xfrm>
-          <a:prstGeom xmlns:a="http://schemas.openxmlformats.org/drawingml/2006/main" prst="rect">
-            <a:avLst/>
-          </a:prstGeom>
-          <a:noFill xmlns:a="http://schemas.openxmlformats.org/drawingml/2006/main"/>
-          <a:ln xmlns:a="http://schemas.openxmlformats.org/drawingml/2006/main" w="0">
-            <a:noFill/>
-            <a:prstDash val="solid"/>
-          </a:ln>
-        </p:spPr>
-        <p:txBody>
-          <a:bodyPr xmlns:a="http://schemas.openxmlformats.org/drawingml/2006/main" lIns="0" tIns="0" rIns="0" bIns="0" anchor="t">
-            <a:normAutofit fontScale="100000"/>
-          </a:bodyPr>
-          <a:lstStyle xmlns:a="http://schemas.openxmlformats.org/drawingml/2006/main"/>
-          <a:p xmlns:a="http://schemas.openxmlformats.org/drawingml/2006/main">
-            <a:pPr algn="l">
-              <a:lnSpc>
-                <a:spcPct val="108000"/>
-              </a:lnSpc>
-              <a:buNone/>
-              <a:defRPr sz="1950" b="0" i="0">
-                <a:solidFill>
-                  <a:srgbClr val="172126"/>
-                </a:solidFill>
-                <a:latin typeface="Aptos"/>
-                <a:ea typeface="Aptos"/>
-                <a:cs typeface="Aptos"/>
-              </a:defRPr>
-            </a:pPr>
-            <a:r>
-              <a:rPr sz="1950" b="0" i="0">
-                <a:solidFill>
-                  <a:srgbClr val="172126"/>
-                </a:solidFill>
-                <a:latin typeface="Aptos"/>
-                <a:ea typeface="Aptos"/>
-                <a:cs typeface="Aptos"/>
-              </a:rPr>
-              <a:t>Enrollment</a:t>
-            </a:r>
-          </a:p>
-        </p:txBody>
-      </p:sp>
-      <p:sp>
-        <p:nvSpPr>
-          <p:cNvPr id="12" name="alternative-explanation-mark-2">
-            <a:extLst xmlns:a="http://schemas.openxmlformats.org/drawingml/2006/main">
-              <a:ext uri="{FF2B5EF4-FFF2-40B4-BE49-F238E27FC236}">
-                <a16:creationId xmlns:a16="http://schemas.microsoft.com/office/drawing/2014/main" id="{856547B7-D657-4ACC-91B5-14BAC248C57A}"/>
-              </a:ext>
-            </a:extLst>
-          </p:cNvPr>
-          <p:cNvSpPr>
-            <a:spLocks xmlns:a="http://schemas.openxmlformats.org/drawingml/2006/main" noGrp="1"/>
-          </p:cNvSpPr>
-          <p:nvPr/>
-        </p:nvSpPr>
-        <p:spPr>
-          <a:xfrm xmlns:a="http://schemas.openxmlformats.org/drawingml/2006/main">
-            <a:off x="6191250" y="3095625"/>
-            <a:ext cx="228600" cy="495300"/>
-          </a:xfrm>
-          <a:prstGeom xmlns:a="http://schemas.openxmlformats.org/drawingml/2006/main" prst="rect">
-            <a:avLst/>
-          </a:prstGeom>
-          <a:noFill xmlns:a="http://schemas.openxmlformats.org/drawingml/2006/main"/>
-          <a:ln xmlns:a="http://schemas.openxmlformats.org/drawingml/2006/main" w="0">
-            <a:noFill/>
-            <a:prstDash val="solid"/>
-          </a:ln>
-        </p:spPr>
-        <p:txBody>
-          <a:bodyPr xmlns:a="http://schemas.openxmlformats.org/drawingml/2006/main" lIns="0" tIns="0" rIns="0" bIns="0" anchor="t">
-            <a:normAutofit fontScale="100000"/>
-          </a:bodyPr>
-          <a:lstStyle xmlns:a="http://schemas.openxmlformats.org/drawingml/2006/main"/>
-          <a:p xmlns:a="http://schemas.openxmlformats.org/drawingml/2006/main">
-            <a:pPr algn="l">
-              <a:lnSpc>
-                <a:spcPct val="108000"/>
-              </a:lnSpc>
-              <a:buNone/>
-              <a:defRPr sz="1950" b="1" i="0">
-                <a:solidFill>
-                  <a:srgbClr val="9A3B35"/>
-                </a:solidFill>
-                <a:latin typeface="Aptos"/>
-                <a:ea typeface="Aptos"/>
-                <a:cs typeface="Aptos"/>
-              </a:defRPr>
-            </a:pPr>
-            <a:r>
-              <a:rPr sz="1950" b="1" i="0">
-                <a:solidFill>
-                  <a:srgbClr val="9A3B35"/>
-                </a:solidFill>
-                <a:latin typeface="Aptos"/>
-                <a:ea typeface="Aptos"/>
-                <a:cs typeface="Aptos"/>
-              </a:rPr>
-              <a:t>•</a:t>
-            </a:r>
-          </a:p>
-        </p:txBody>
-      </p:sp>
-      <p:sp>
-        <p:nvSpPr>
-          <p:cNvPr id="13" name="alternative-explanation-2">
-            <a:extLst xmlns:a="http://schemas.openxmlformats.org/drawingml/2006/main">
-              <a:ext uri="{FF2B5EF4-FFF2-40B4-BE49-F238E27FC236}">
-                <a16:creationId xmlns:a16="http://schemas.microsoft.com/office/drawing/2014/main" id="{FB41B8C6-7977-411A-9D27-CDD18BC25DA5}"/>
-              </a:ext>
-            </a:extLst>
-          </p:cNvPr>
-          <p:cNvSpPr>
-            <a:spLocks xmlns:a="http://schemas.openxmlformats.org/drawingml/2006/main" noGrp="1"/>
-          </p:cNvSpPr>
-          <p:nvPr/>
-        </p:nvSpPr>
-        <p:spPr>
-          <a:xfrm xmlns:a="http://schemas.openxmlformats.org/drawingml/2006/main">
-            <a:off x="6515100" y="3105150"/>
-            <a:ext cx="4152900" cy="495300"/>
-          </a:xfrm>
-          <a:prstGeom xmlns:a="http://schemas.openxmlformats.org/drawingml/2006/main" prst="rect">
-            <a:avLst/>
-          </a:prstGeom>
-          <a:noFill xmlns:a="http://schemas.openxmlformats.org/drawingml/2006/main"/>
-          <a:ln xmlns:a="http://schemas.openxmlformats.org/drawingml/2006/main" w="0">
-            <a:noFill/>
-            <a:prstDash val="solid"/>
-          </a:ln>
-        </p:spPr>
-        <p:txBody>
-          <a:bodyPr xmlns:a="http://schemas.openxmlformats.org/drawingml/2006/main" lIns="0" tIns="0" rIns="0" bIns="0" anchor="t">
-            <a:normAutofit fontScale="100000"/>
-          </a:bodyPr>
-          <a:lstStyle xmlns:a="http://schemas.openxmlformats.org/drawingml/2006/main"/>
-          <a:p xmlns:a="http://schemas.openxmlformats.org/drawingml/2006/main">
-            <a:pPr algn="l">
-              <a:lnSpc>
-                <a:spcPct val="108000"/>
-              </a:lnSpc>
-              <a:buNone/>
-              <a:defRPr sz="1950" b="0" i="0">
-                <a:solidFill>
-                  <a:srgbClr val="172126"/>
-                </a:solidFill>
-                <a:latin typeface="Aptos"/>
-                <a:ea typeface="Aptos"/>
-                <a:cs typeface="Aptos"/>
-              </a:defRPr>
-            </a:pPr>
-            <a:r>
-              <a:rPr sz="1950" b="0" i="0">
-                <a:solidFill>
-                  <a:srgbClr val="172126"/>
-                </a:solidFill>
-                <a:latin typeface="Aptos"/>
-                <a:ea typeface="Aptos"/>
-                <a:cs typeface="Aptos"/>
-              </a:rPr>
-              <a:t>A new parking lot</a:t>
-            </a:r>
-          </a:p>
-        </p:txBody>
-      </p:sp>
-      <p:sp>
-        <p:nvSpPr>
-          <p:cNvPr id="14" name="alternative-explanation-mark-3">
-            <a:extLst xmlns:a="http://schemas.openxmlformats.org/drawingml/2006/main">
-              <a:ext uri="{FF2B5EF4-FFF2-40B4-BE49-F238E27FC236}">
-                <a16:creationId xmlns:a16="http://schemas.microsoft.com/office/drawing/2014/main" id="{D642CEE5-E1DE-411C-89D1-E7ED3BAEC8F8}"/>
-              </a:ext>
-            </a:extLst>
-          </p:cNvPr>
-          <p:cNvSpPr>
-            <a:spLocks xmlns:a="http://schemas.openxmlformats.org/drawingml/2006/main" noGrp="1"/>
-          </p:cNvSpPr>
-          <p:nvPr/>
-        </p:nvSpPr>
-        <p:spPr>
-          <a:xfrm xmlns:a="http://schemas.openxmlformats.org/drawingml/2006/main">
-            <a:off x="6191250" y="3609975"/>
-            <a:ext cx="228600" cy="495300"/>
-          </a:xfrm>
-          <a:prstGeom xmlns:a="http://schemas.openxmlformats.org/drawingml/2006/main" prst="rect">
-            <a:avLst/>
-          </a:prstGeom>
-          <a:noFill xmlns:a="http://schemas.openxmlformats.org/drawingml/2006/main"/>
-          <a:ln xmlns:a="http://schemas.openxmlformats.org/drawingml/2006/main" w="0">
-            <a:noFill/>
-            <a:prstDash val="solid"/>
-          </a:ln>
-        </p:spPr>
-        <p:txBody>
-          <a:bodyPr xmlns:a="http://schemas.openxmlformats.org/drawingml/2006/main" lIns="0" tIns="0" rIns="0" bIns="0" anchor="t">
-            <a:normAutofit fontScale="100000"/>
-          </a:bodyPr>
-          <a:lstStyle xmlns:a="http://schemas.openxmlformats.org/drawingml/2006/main"/>
-          <a:p xmlns:a="http://schemas.openxmlformats.org/drawingml/2006/main">
-            <a:pPr algn="l">
-              <a:lnSpc>
-                <a:spcPct val="108000"/>
-              </a:lnSpc>
-              <a:buNone/>
-              <a:defRPr sz="1950" b="1" i="0">
-                <a:solidFill>
-                  <a:srgbClr val="9A3B35"/>
-                </a:solidFill>
-                <a:latin typeface="Aptos"/>
-                <a:ea typeface="Aptos"/>
-                <a:cs typeface="Aptos"/>
-              </a:defRPr>
-            </a:pPr>
-            <a:r>
-              <a:rPr sz="1950" b="1" i="0">
-                <a:solidFill>
-                  <a:srgbClr val="9A3B35"/>
-                </a:solidFill>
-                <a:latin typeface="Aptos"/>
-                <a:ea typeface="Aptos"/>
-                <a:cs typeface="Aptos"/>
-              </a:rPr>
-              <a:t>•</a:t>
-            </a:r>
-          </a:p>
-        </p:txBody>
-      </p:sp>
-      <p:sp>
-        <p:nvSpPr>
-          <p:cNvPr id="15" name="alternative-explanation-3">
-            <a:extLst xmlns:a="http://schemas.openxmlformats.org/drawingml/2006/main">
-              <a:ext uri="{FF2B5EF4-FFF2-40B4-BE49-F238E27FC236}">
-                <a16:creationId xmlns:a16="http://schemas.microsoft.com/office/drawing/2014/main" id="{EEFED044-6093-41AF-B0C2-94B594C82A53}"/>
-              </a:ext>
-            </a:extLst>
-          </p:cNvPr>
-          <p:cNvSpPr>
-            <a:spLocks xmlns:a="http://schemas.openxmlformats.org/drawingml/2006/main" noGrp="1"/>
-          </p:cNvSpPr>
-          <p:nvPr/>
-        </p:nvSpPr>
-        <p:spPr>
-          <a:xfrm xmlns:a="http://schemas.openxmlformats.org/drawingml/2006/main">
-            <a:off x="6515100" y="3619500"/>
-            <a:ext cx="4152900" cy="495300"/>
-          </a:xfrm>
-          <a:prstGeom xmlns:a="http://schemas.openxmlformats.org/drawingml/2006/main" prst="rect">
-            <a:avLst/>
-          </a:prstGeom>
-          <a:noFill xmlns:a="http://schemas.openxmlformats.org/drawingml/2006/main"/>
-          <a:ln xmlns:a="http://schemas.openxmlformats.org/drawingml/2006/main" w="0">
-            <a:noFill/>
-            <a:prstDash val="solid"/>
-          </a:ln>
-        </p:spPr>
-        <p:txBody>
-          <a:bodyPr xmlns:a="http://schemas.openxmlformats.org/drawingml/2006/main" lIns="0" tIns="0" rIns="0" bIns="0" anchor="t">
-            <a:normAutofit fontScale="100000"/>
-          </a:bodyPr>
-          <a:lstStyle xmlns:a="http://schemas.openxmlformats.org/drawingml/2006/main"/>
-          <a:p xmlns:a="http://schemas.openxmlformats.org/drawingml/2006/main">
-            <a:pPr algn="l">
-              <a:lnSpc>
-                <a:spcPct val="108000"/>
-              </a:lnSpc>
-              <a:buNone/>
-              <a:defRPr sz="1950" b="0" i="0">
-                <a:solidFill>
-                  <a:srgbClr val="172126"/>
-                </a:solidFill>
-                <a:latin typeface="Aptos"/>
-                <a:ea typeface="Aptos"/>
-                <a:cs typeface="Aptos"/>
-              </a:defRPr>
-            </a:pPr>
-            <a:r>
-              <a:rPr sz="1950" b="0" i="0">
-                <a:solidFill>
-                  <a:srgbClr val="172126"/>
-                </a:solidFill>
-                <a:latin typeface="Aptos"/>
-                <a:ea typeface="Aptos"/>
-                <a:cs typeface="Aptos"/>
-              </a:rPr>
-              <a:t>Online classes</a:t>
-            </a:r>
-          </a:p>
-        </p:txBody>
-      </p:sp>
-      <p:sp>
-        <p:nvSpPr>
-          <p:cNvPr id="16" name="alternative-explanation-mark-4">
-            <a:extLst xmlns:a="http://schemas.openxmlformats.org/drawingml/2006/main">
-              <a:ext uri="{FF2B5EF4-FFF2-40B4-BE49-F238E27FC236}">
-                <a16:creationId xmlns:a16="http://schemas.microsoft.com/office/drawing/2014/main" id="{B800C6D5-B005-4E37-A5F7-0671A2C117F1}"/>
-              </a:ext>
-            </a:extLst>
-          </p:cNvPr>
-          <p:cNvSpPr>
-            <a:spLocks xmlns:a="http://schemas.openxmlformats.org/drawingml/2006/main" noGrp="1"/>
-          </p:cNvSpPr>
-          <p:nvPr/>
-        </p:nvSpPr>
-        <p:spPr>
-          <a:xfrm xmlns:a="http://schemas.openxmlformats.org/drawingml/2006/main">
-            <a:off x="6191250" y="4124325"/>
-            <a:ext cx="228600" cy="495300"/>
-          </a:xfrm>
-          <a:prstGeom xmlns:a="http://schemas.openxmlformats.org/drawingml/2006/main" prst="rect">
-            <a:avLst/>
-          </a:prstGeom>
-          <a:noFill xmlns:a="http://schemas.openxmlformats.org/drawingml/2006/main"/>
-          <a:ln xmlns:a="http://schemas.openxmlformats.org/drawingml/2006/main" w="0">
-            <a:noFill/>
-            <a:prstDash val="solid"/>
-          </a:ln>
-        </p:spPr>
-        <p:txBody>
-          <a:bodyPr xmlns:a="http://schemas.openxmlformats.org/drawingml/2006/main" lIns="0" tIns="0" rIns="0" bIns="0" anchor="t">
-            <a:normAutofit fontScale="100000"/>
-          </a:bodyPr>
-          <a:lstStyle xmlns:a="http://schemas.openxmlformats.org/drawingml/2006/main"/>
-          <a:p xmlns:a="http://schemas.openxmlformats.org/drawingml/2006/main">
-            <a:pPr algn="l">
-              <a:lnSpc>
-                <a:spcPct val="108000"/>
-              </a:lnSpc>
-              <a:buNone/>
-              <a:defRPr sz="1950" b="1" i="0">
-                <a:solidFill>
-                  <a:srgbClr val="9A3B35"/>
-                </a:solidFill>
-                <a:latin typeface="Aptos"/>
-                <a:ea typeface="Aptos"/>
-                <a:cs typeface="Aptos"/>
-              </a:defRPr>
-            </a:pPr>
-            <a:r>
-              <a:rPr sz="1950" b="1" i="0">
-                <a:solidFill>
-                  <a:srgbClr val="9A3B35"/>
-                </a:solidFill>
-                <a:latin typeface="Aptos"/>
-                <a:ea typeface="Aptos"/>
-                <a:cs typeface="Aptos"/>
-              </a:rPr>
-              <a:t>•</a:t>
-            </a:r>
-          </a:p>
-        </p:txBody>
-      </p:sp>
-      <p:sp>
-        <p:nvSpPr>
-          <p:cNvPr id="17" name="alternative-explanation-4">
-            <a:extLst xmlns:a="http://schemas.openxmlformats.org/drawingml/2006/main">
-              <a:ext uri="{FF2B5EF4-FFF2-40B4-BE49-F238E27FC236}">
-                <a16:creationId xmlns:a16="http://schemas.microsoft.com/office/drawing/2014/main" id="{E59BCEAA-E0AB-41E1-94CD-E03AA1C8E434}"/>
-              </a:ext>
-            </a:extLst>
-          </p:cNvPr>
-          <p:cNvSpPr>
-            <a:spLocks xmlns:a="http://schemas.openxmlformats.org/drawingml/2006/main" noGrp="1"/>
-          </p:cNvSpPr>
-          <p:nvPr/>
-        </p:nvSpPr>
-        <p:spPr>
-          <a:xfrm xmlns:a="http://schemas.openxmlformats.org/drawingml/2006/main">
-            <a:off x="6515100" y="4133850"/>
-            <a:ext cx="4152900" cy="495300"/>
-          </a:xfrm>
-          <a:prstGeom xmlns:a="http://schemas.openxmlformats.org/drawingml/2006/main" prst="rect">
-            <a:avLst/>
-          </a:prstGeom>
-          <a:noFill xmlns:a="http://schemas.openxmlformats.org/drawingml/2006/main"/>
-          <a:ln xmlns:a="http://schemas.openxmlformats.org/drawingml/2006/main" w="0">
-            <a:noFill/>
-            <a:prstDash val="solid"/>
-          </a:ln>
-        </p:spPr>
-        <p:txBody>
-          <a:bodyPr xmlns:a="http://schemas.openxmlformats.org/drawingml/2006/main" lIns="0" tIns="0" rIns="0" bIns="0" anchor="t">
-            <a:normAutofit fontScale="100000"/>
-          </a:bodyPr>
-          <a:lstStyle xmlns:a="http://schemas.openxmlformats.org/drawingml/2006/main"/>
-          <a:p xmlns:a="http://schemas.openxmlformats.org/drawingml/2006/main">
-            <a:pPr algn="l">
-              <a:lnSpc>
-                <a:spcPct val="108000"/>
-              </a:lnSpc>
-              <a:buNone/>
-              <a:defRPr sz="1950" b="0" i="0">
-                <a:solidFill>
-                  <a:srgbClr val="172126"/>
-                </a:solidFill>
-                <a:latin typeface="Aptos"/>
-                <a:ea typeface="Aptos"/>
-                <a:cs typeface="Aptos"/>
-              </a:defRPr>
-            </a:pPr>
-            <a:r>
-              <a:rPr sz="1950" b="0" i="0">
-                <a:solidFill>
-                  <a:srgbClr val="172126"/>
-                </a:solidFill>
-                <a:latin typeface="Aptos"/>
-                <a:ea typeface="Aptos"/>
-                <a:cs typeface="Aptos"/>
-              </a:rPr>
-              <a:t>Construction or fuel prices</a:t>
-            </a:r>
-          </a:p>
-        </p:txBody>
-      </p:sp>
-      <p:sp>
-        <p:nvSpPr>
-          <p:cNvPr id="18" name="comparison-conclusion">
-            <a:extLst xmlns:a="http://schemas.openxmlformats.org/drawingml/2006/main">
-              <a:ext uri="{FF2B5EF4-FFF2-40B4-BE49-F238E27FC236}">
-                <a16:creationId xmlns:a16="http://schemas.microsoft.com/office/drawing/2014/main" id="{B71DAED3-49B5-42D5-9509-793363079F4E}"/>
-              </a:ext>
-            </a:extLst>
-          </p:cNvPr>
-          <p:cNvSpPr>
-            <a:spLocks xmlns:a="http://schemas.openxmlformats.org/drawingml/2006/main" noGrp="1"/>
-          </p:cNvSpPr>
-          <p:nvPr/>
-        </p:nvSpPr>
-        <p:spPr>
-          <a:xfrm xmlns:a="http://schemas.openxmlformats.org/drawingml/2006/main">
-            <a:off x="1123950" y="5200650"/>
-            <a:ext cx="9715500" cy="685800"/>
-          </a:xfrm>
-          <a:prstGeom xmlns:a="http://schemas.openxmlformats.org/drawingml/2006/main" prst="rect">
-            <a:avLst/>
-          </a:prstGeom>
-          <a:noFill xmlns:a="http://schemas.openxmlformats.org/drawingml/2006/main"/>
-          <a:ln xmlns:a="http://schemas.openxmlformats.org/drawingml/2006/main" w="0">
-            <a:noFill/>
-            <a:prstDash val="solid"/>
-          </a:ln>
-        </p:spPr>
-        <p:txBody>
-          <a:bodyPr xmlns:a="http://schemas.openxmlformats.org/drawingml/2006/main" lIns="0" tIns="0" rIns="0" bIns="0" anchor="t">
-            <a:normAutofit fontScale="89606"/>
-          </a:bodyPr>
-          <a:lstStyle xmlns:a="http://schemas.openxmlformats.org/drawingml/2006/main"/>
-          <a:p xmlns:a="http://schemas.openxmlformats.org/drawingml/2006/main">
-            <a:pPr algn="ctr">
-              <a:lnSpc>
-                <a:spcPct val="108000"/>
-              </a:lnSpc>
-              <a:buNone/>
-              <a:defRPr sz="2325" b="1" i="0">
-                <a:solidFill>
-                  <a:srgbClr val="172126"/>
-                </a:solidFill>
-                <a:latin typeface="Georgia"/>
-                <a:ea typeface="Georgia"/>
-                <a:cs typeface="Georgia"/>
-              </a:defRPr>
-            </a:pPr>
-            <a:r>
-              <a:rPr sz="2325" b="1" i="0">
-                <a:solidFill>
-                  <a:srgbClr val="172126"/>
-                </a:solidFill>
-                <a:latin typeface="Georgia"/>
-                <a:ea typeface="Georgia"/>
-                <a:cs typeface="Georgia"/>
-              </a:rPr>
-              <a:t>A comparison group helps separate the policy from other changes over time.</a:t>
+              <a:t>A striking pattern is the start of the analysis, not the end.</a:t>
             </a:r>
           </a:p>
         </p:txBody>
@@ -9916,7 +10141,7 @@
     </p:spTree>
     <p:extLst>
       <p:ext uri="{BB962C8B-B14F-4D97-AF65-F5344CB8AC3E}">
-        <p14:creationId xmlns:p14="http://schemas.microsoft.com/office/powerpoint/2010/main" val="227469399"/>
+        <p14:creationId xmlns:p14="http://schemas.microsoft.com/office/powerpoint/2010/main" val="162350898"/>
       </p:ext>
     </p:extLst>
   </p:cSld>
@@ -9924,6 +10149,1089 @@
 </file>
 
 <file path=ppt/slides/slide18.xml><?xml version="1.0" encoding="utf-8"?>
+<p:sld xmlns:p="http://schemas.openxmlformats.org/presentationml/2006/main">
+  <p:cSld>
+    <p:bg>
+      <p:bgPr>
+        <a:solidFill xmlns:a="http://schemas.openxmlformats.org/drawingml/2006/main">
+          <a:srgbClr val="F7F4ED"/>
+        </a:solidFill>
+      </p:bgPr>
+    </p:bg>
+    <p:spTree>
+      <p:nvGrpSpPr>
+        <p:cNvPr id="1" name=""/>
+        <p:cNvGrpSpPr/>
+        <p:nvPr/>
+      </p:nvGrpSpPr>
+      <p:grpSpPr>
+        <a:xfrm xmlns:a="http://schemas.openxmlformats.org/drawingml/2006/main"/>
+      </p:grpSpPr>
+      <p:sp>
+        <p:nvSpPr>
+          <p:cNvPr id="19" name="accent-rule">
+            <a:extLst xmlns:a="http://schemas.openxmlformats.org/drawingml/2006/main">
+              <a:ext uri="{FF2B5EF4-FFF2-40B4-BE49-F238E27FC236}">
+                <a16:creationId xmlns:a16="http://schemas.microsoft.com/office/drawing/2014/main" id="{50F046E8-D8C6-4F5F-BCA5-B5FC7785BFD9}"/>
+              </a:ext>
+            </a:extLst>
+          </p:cNvPr>
+          <p:cNvSpPr>
+            <a:spLocks xmlns:a="http://schemas.openxmlformats.org/drawingml/2006/main" noGrp="1"/>
+          </p:cNvSpPr>
+          <p:nvPr/>
+        </p:nvSpPr>
+        <p:spPr>
+          <a:xfrm xmlns:a="http://schemas.openxmlformats.org/drawingml/2006/main">
+            <a:off x="514350" y="400050"/>
+            <a:ext cx="685800" cy="57150"/>
+          </a:xfrm>
+          <a:prstGeom xmlns:a="http://schemas.openxmlformats.org/drawingml/2006/main" prst="rect">
+            <a:avLst/>
+          </a:prstGeom>
+          <a:solidFill xmlns:a="http://schemas.openxmlformats.org/drawingml/2006/main">
+            <a:srgbClr val="9A3B35"/>
+          </a:solidFill>
+          <a:ln xmlns:a="http://schemas.openxmlformats.org/drawingml/2006/main" w="0">
+            <a:noFill/>
+            <a:prstDash val="solid"/>
+          </a:ln>
+        </p:spPr>
+      </p:sp>
+      <p:sp>
+        <p:nvSpPr>
+          <p:cNvPr id="2" name="chapter-label">
+            <a:extLst xmlns:a="http://schemas.openxmlformats.org/drawingml/2006/main">
+              <a:ext uri="{FF2B5EF4-FFF2-40B4-BE49-F238E27FC236}">
+                <a16:creationId xmlns:a16="http://schemas.microsoft.com/office/drawing/2014/main" id="{27095B09-F6A9-4E70-93B8-6CC47B6FE43C}"/>
+              </a:ext>
+            </a:extLst>
+          </p:cNvPr>
+          <p:cNvSpPr>
+            <a:spLocks xmlns:a="http://schemas.openxmlformats.org/drawingml/2006/main" noGrp="1"/>
+          </p:cNvSpPr>
+          <p:nvPr/>
+        </p:nvSpPr>
+        <p:spPr>
+          <a:xfrm xmlns:a="http://schemas.openxmlformats.org/drawingml/2006/main">
+            <a:off x="1390650" y="304800"/>
+            <a:ext cx="1428750" cy="228600"/>
+          </a:xfrm>
+          <a:prstGeom xmlns:a="http://schemas.openxmlformats.org/drawingml/2006/main" prst="rect">
+            <a:avLst/>
+          </a:prstGeom>
+          <a:noFill xmlns:a="http://schemas.openxmlformats.org/drawingml/2006/main"/>
+          <a:ln xmlns:a="http://schemas.openxmlformats.org/drawingml/2006/main" w="0">
+            <a:noFill/>
+            <a:prstDash val="solid"/>
+          </a:ln>
+        </p:spPr>
+        <p:txBody>
+          <a:bodyPr xmlns:a="http://schemas.openxmlformats.org/drawingml/2006/main" lIns="0" tIns="0" rIns="0" bIns="0" anchor="t">
+            <a:normAutofit fontScale="100000"/>
+          </a:bodyPr>
+          <a:lstStyle xmlns:a="http://schemas.openxmlformats.org/drawingml/2006/main"/>
+          <a:p xmlns:a="http://schemas.openxmlformats.org/drawingml/2006/main">
+            <a:pPr algn="l">
+              <a:lnSpc>
+                <a:spcPct val="108000"/>
+              </a:lnSpc>
+              <a:buNone/>
+              <a:defRPr sz="1050" b="1" i="0">
+                <a:solidFill>
+                  <a:srgbClr val="9A3B35"/>
+                </a:solidFill>
+                <a:latin typeface="Aptos"/>
+                <a:ea typeface="Aptos"/>
+                <a:cs typeface="Aptos"/>
+              </a:defRPr>
+            </a:pPr>
+            <a:r>
+              <a:rPr sz="1050" b="1" i="0">
+                <a:solidFill>
+                  <a:srgbClr val="9A3B35"/>
+                </a:solidFill>
+                <a:latin typeface="Aptos"/>
+                <a:ea typeface="Aptos"/>
+                <a:cs typeface="Aptos"/>
+              </a:rPr>
+              <a:t>CHAPTER 1</a:t>
+            </a:r>
+          </a:p>
+        </p:txBody>
+      </p:sp>
+      <p:sp>
+        <p:nvSpPr>
+          <p:cNvPr id="3" name="slide-title">
+            <a:extLst xmlns:a="http://schemas.openxmlformats.org/drawingml/2006/main">
+              <a:ext uri="{FF2B5EF4-FFF2-40B4-BE49-F238E27FC236}">
+                <a16:creationId xmlns:a16="http://schemas.microsoft.com/office/drawing/2014/main" id="{CFE98A46-4F8D-45CE-85DB-644026301B4F}"/>
+              </a:ext>
+            </a:extLst>
+          </p:cNvPr>
+          <p:cNvSpPr>
+            <a:spLocks xmlns:a="http://schemas.openxmlformats.org/drawingml/2006/main" noGrp="1"/>
+          </p:cNvSpPr>
+          <p:nvPr/>
+        </p:nvSpPr>
+        <p:spPr>
+          <a:xfrm xmlns:a="http://schemas.openxmlformats.org/drawingml/2006/main">
+            <a:off x="609600" y="685800"/>
+            <a:ext cx="10972800" cy="647700"/>
+          </a:xfrm>
+          <a:prstGeom xmlns:a="http://schemas.openxmlformats.org/drawingml/2006/main" prst="rect">
+            <a:avLst/>
+          </a:prstGeom>
+          <a:noFill xmlns:a="http://schemas.openxmlformats.org/drawingml/2006/main"/>
+          <a:ln xmlns:a="http://schemas.openxmlformats.org/drawingml/2006/main" w="0">
+            <a:noFill/>
+            <a:prstDash val="solid"/>
+          </a:ln>
+        </p:spPr>
+        <p:txBody>
+          <a:bodyPr xmlns:a="http://schemas.openxmlformats.org/drawingml/2006/main" lIns="0" tIns="0" rIns="0" bIns="0" anchor="t">
+            <a:normAutofit fontScale="100000"/>
+          </a:bodyPr>
+          <a:lstStyle xmlns:a="http://schemas.openxmlformats.org/drawingml/2006/main"/>
+          <a:p xmlns:a="http://schemas.openxmlformats.org/drawingml/2006/main">
+            <a:pPr algn="l">
+              <a:lnSpc>
+                <a:spcPct val="108000"/>
+              </a:lnSpc>
+              <a:buNone/>
+              <a:defRPr sz="3150" b="1" i="0">
+                <a:solidFill>
+                  <a:srgbClr val="172126"/>
+                </a:solidFill>
+                <a:latin typeface="Georgia"/>
+                <a:ea typeface="Georgia"/>
+                <a:cs typeface="Georgia"/>
+              </a:defRPr>
+            </a:pPr>
+            <a:r>
+              <a:rPr sz="3150" b="1" i="0">
+                <a:solidFill>
+                  <a:srgbClr val="172126"/>
+                </a:solidFill>
+                <a:latin typeface="Georgia"/>
+                <a:ea typeface="Georgia"/>
+                <a:cs typeface="Georgia"/>
+              </a:rPr>
+              <a:t>A before-and-after change is not enough</a:t>
+            </a:r>
+          </a:p>
+        </p:txBody>
+      </p:sp>
+      <p:sp>
+        <p:nvSpPr>
+          <p:cNvPr id="4" name="footer-rule">
+            <a:extLst xmlns:a="http://schemas.openxmlformats.org/drawingml/2006/main">
+              <a:ext uri="{FF2B5EF4-FFF2-40B4-BE49-F238E27FC236}">
+                <a16:creationId xmlns:a16="http://schemas.microsoft.com/office/drawing/2014/main" id="{4BDBB85A-C3C9-41B6-9A3E-D6CFC0DC906D}"/>
+              </a:ext>
+            </a:extLst>
+          </p:cNvPr>
+          <p:cNvSpPr>
+            <a:spLocks xmlns:a="http://schemas.openxmlformats.org/drawingml/2006/main" noGrp="1"/>
+          </p:cNvSpPr>
+          <p:nvPr/>
+        </p:nvSpPr>
+        <p:spPr>
+          <a:xfrm xmlns:a="http://schemas.openxmlformats.org/drawingml/2006/main">
+            <a:off x="609600" y="6419850"/>
+            <a:ext cx="10972800" cy="9525"/>
+          </a:xfrm>
+          <a:prstGeom xmlns:a="http://schemas.openxmlformats.org/drawingml/2006/main" prst="rect">
+            <a:avLst/>
+          </a:prstGeom>
+          <a:solidFill xmlns:a="http://schemas.openxmlformats.org/drawingml/2006/main">
+            <a:srgbClr val="D3DADD"/>
+          </a:solidFill>
+          <a:ln xmlns:a="http://schemas.openxmlformats.org/drawingml/2006/main" w="0">
+            <a:noFill/>
+            <a:prstDash val="solid"/>
+          </a:ln>
+        </p:spPr>
+      </p:sp>
+      <p:sp>
+        <p:nvSpPr>
+          <p:cNvPr id="5" name="footer-book">
+            <a:extLst xmlns:a="http://schemas.openxmlformats.org/drawingml/2006/main">
+              <a:ext uri="{FF2B5EF4-FFF2-40B4-BE49-F238E27FC236}">
+                <a16:creationId xmlns:a16="http://schemas.microsoft.com/office/drawing/2014/main" id="{FB19F617-B4EC-4C5A-B578-1FF25260D461}"/>
+              </a:ext>
+            </a:extLst>
+          </p:cNvPr>
+          <p:cNvSpPr>
+            <a:spLocks xmlns:a="http://schemas.openxmlformats.org/drawingml/2006/main" noGrp="1"/>
+          </p:cNvSpPr>
+          <p:nvPr/>
+        </p:nvSpPr>
+        <p:spPr>
+          <a:xfrm xmlns:a="http://schemas.openxmlformats.org/drawingml/2006/main">
+            <a:off x="609600" y="6515100"/>
+            <a:ext cx="2095500" cy="190500"/>
+          </a:xfrm>
+          <a:prstGeom xmlns:a="http://schemas.openxmlformats.org/drawingml/2006/main" prst="rect">
+            <a:avLst/>
+          </a:prstGeom>
+          <a:noFill xmlns:a="http://schemas.openxmlformats.org/drawingml/2006/main"/>
+          <a:ln xmlns:a="http://schemas.openxmlformats.org/drawingml/2006/main" w="0">
+            <a:noFill/>
+            <a:prstDash val="solid"/>
+          </a:ln>
+        </p:spPr>
+        <p:txBody>
+          <a:bodyPr xmlns:a="http://schemas.openxmlformats.org/drawingml/2006/main" lIns="0" tIns="0" rIns="0" bIns="0" anchor="t">
+            <a:normAutofit fontScale="100000"/>
+          </a:bodyPr>
+          <a:lstStyle xmlns:a="http://schemas.openxmlformats.org/drawingml/2006/main"/>
+          <a:p xmlns:a="http://schemas.openxmlformats.org/drawingml/2006/main">
+            <a:pPr algn="l">
+              <a:lnSpc>
+                <a:spcPct val="108000"/>
+              </a:lnSpc>
+              <a:buNone/>
+              <a:defRPr sz="900" b="1" i="0">
+                <a:solidFill>
+                  <a:srgbClr val="56636A"/>
+                </a:solidFill>
+                <a:latin typeface="Aptos"/>
+                <a:ea typeface="Aptos"/>
+                <a:cs typeface="Aptos"/>
+              </a:defRPr>
+            </a:pPr>
+            <a:r>
+              <a:rPr sz="900" b="1" i="0">
+                <a:solidFill>
+                  <a:srgbClr val="56636A"/>
+                </a:solidFill>
+                <a:latin typeface="Aptos"/>
+                <a:ea typeface="Aptos"/>
+                <a:cs typeface="Aptos"/>
+              </a:rPr>
+              <a:t>PRINCIPLES OF MICRO</a:t>
+            </a:r>
+          </a:p>
+        </p:txBody>
+      </p:sp>
+      <p:sp>
+        <p:nvSpPr>
+          <p:cNvPr id="6" name="footer-number">
+            <a:extLst xmlns:a="http://schemas.openxmlformats.org/drawingml/2006/main">
+              <a:ext uri="{FF2B5EF4-FFF2-40B4-BE49-F238E27FC236}">
+                <a16:creationId xmlns:a16="http://schemas.microsoft.com/office/drawing/2014/main" id="{E1135880-6D7C-47D8-A338-2BEA012A3CB5}"/>
+              </a:ext>
+            </a:extLst>
+          </p:cNvPr>
+          <p:cNvSpPr>
+            <a:spLocks xmlns:a="http://schemas.openxmlformats.org/drawingml/2006/main" noGrp="1"/>
+          </p:cNvSpPr>
+          <p:nvPr/>
+        </p:nvSpPr>
+        <p:spPr>
+          <a:xfrm xmlns:a="http://schemas.openxmlformats.org/drawingml/2006/main">
+            <a:off x="11049000" y="6496050"/>
+            <a:ext cx="533400" cy="190500"/>
+          </a:xfrm>
+          <a:prstGeom xmlns:a="http://schemas.openxmlformats.org/drawingml/2006/main" prst="rect">
+            <a:avLst/>
+          </a:prstGeom>
+          <a:noFill xmlns:a="http://schemas.openxmlformats.org/drawingml/2006/main"/>
+          <a:ln xmlns:a="http://schemas.openxmlformats.org/drawingml/2006/main" w="0">
+            <a:noFill/>
+            <a:prstDash val="solid"/>
+          </a:ln>
+        </p:spPr>
+        <p:txBody>
+          <a:bodyPr xmlns:a="http://schemas.openxmlformats.org/drawingml/2006/main" lIns="0" tIns="0" rIns="0" bIns="0" anchor="t">
+            <a:normAutofit fontScale="100000"/>
+          </a:bodyPr>
+          <a:lstStyle xmlns:a="http://schemas.openxmlformats.org/drawingml/2006/main"/>
+          <a:p xmlns:a="http://schemas.openxmlformats.org/drawingml/2006/main">
+            <a:pPr algn="r">
+              <a:lnSpc>
+                <a:spcPct val="108000"/>
+              </a:lnSpc>
+              <a:buNone/>
+              <a:defRPr sz="900" b="0" i="0">
+                <a:solidFill>
+                  <a:srgbClr val="56636A"/>
+                </a:solidFill>
+                <a:latin typeface="Aptos"/>
+                <a:ea typeface="Aptos"/>
+                <a:cs typeface="Aptos"/>
+              </a:defRPr>
+            </a:pPr>
+            <a:r>
+              <a:rPr sz="900" b="0" i="0">
+                <a:solidFill>
+                  <a:srgbClr val="56636A"/>
+                </a:solidFill>
+                <a:latin typeface="Aptos"/>
+                <a:ea typeface="Aptos"/>
+                <a:cs typeface="Aptos"/>
+              </a:rPr>
+              <a:t>18</a:t>
+            </a:r>
+          </a:p>
+        </p:txBody>
+      </p:sp>
+      <p:sp>
+        <p:nvSpPr>
+          <p:cNvPr id="7" name="parking-falls">
+            <a:extLst xmlns:a="http://schemas.openxmlformats.org/drawingml/2006/main">
+              <a:ext uri="{FF2B5EF4-FFF2-40B4-BE49-F238E27FC236}">
+                <a16:creationId xmlns:a16="http://schemas.microsoft.com/office/drawing/2014/main" id="{E59E6CE6-3EE3-4C7A-9BE6-75C07B115FDC}"/>
+              </a:ext>
+            </a:extLst>
+          </p:cNvPr>
+          <p:cNvSpPr>
+            <a:spLocks xmlns:a="http://schemas.openxmlformats.org/drawingml/2006/main" noGrp="1"/>
+          </p:cNvSpPr>
+          <p:nvPr/>
+        </p:nvSpPr>
+        <p:spPr>
+          <a:xfrm xmlns:a="http://schemas.openxmlformats.org/drawingml/2006/main">
+            <a:off x="971550" y="1771650"/>
+            <a:ext cx="4000500" cy="552450"/>
+          </a:xfrm>
+          <a:prstGeom xmlns:a="http://schemas.openxmlformats.org/drawingml/2006/main" prst="rect">
+            <a:avLst/>
+          </a:prstGeom>
+          <a:noFill xmlns:a="http://schemas.openxmlformats.org/drawingml/2006/main"/>
+          <a:ln xmlns:a="http://schemas.openxmlformats.org/drawingml/2006/main" w="0">
+            <a:noFill/>
+            <a:prstDash val="solid"/>
+          </a:ln>
+        </p:spPr>
+        <p:txBody>
+          <a:bodyPr xmlns:a="http://schemas.openxmlformats.org/drawingml/2006/main" lIns="0" tIns="0" rIns="0" bIns="0" anchor="t">
+            <a:normAutofit fontScale="100000"/>
+          </a:bodyPr>
+          <a:lstStyle xmlns:a="http://schemas.openxmlformats.org/drawingml/2006/main"/>
+          <a:p xmlns:a="http://schemas.openxmlformats.org/drawingml/2006/main">
+            <a:pPr algn="l">
+              <a:lnSpc>
+                <a:spcPct val="108000"/>
+              </a:lnSpc>
+              <a:buNone/>
+              <a:defRPr sz="2775" b="1" i="0">
+                <a:solidFill>
+                  <a:srgbClr val="1E6675"/>
+                </a:solidFill>
+                <a:latin typeface="Georgia"/>
+                <a:ea typeface="Georgia"/>
+                <a:cs typeface="Georgia"/>
+              </a:defRPr>
+            </a:pPr>
+            <a:r>
+              <a:rPr sz="2775" b="1" i="0">
+                <a:solidFill>
+                  <a:srgbClr val="1E6675"/>
+                </a:solidFill>
+                <a:latin typeface="Georgia"/>
+                <a:ea typeface="Georgia"/>
+                <a:cs typeface="Georgia"/>
+              </a:rPr>
+              <a:t>Parking search falls</a:t>
+            </a:r>
+          </a:p>
+        </p:txBody>
+      </p:sp>
+      <p:sp>
+        <p:nvSpPr>
+          <p:cNvPr id="8" name="after-charge">
+            <a:extLst xmlns:a="http://schemas.openxmlformats.org/drawingml/2006/main">
+              <a:ext uri="{FF2B5EF4-FFF2-40B4-BE49-F238E27FC236}">
+                <a16:creationId xmlns:a16="http://schemas.microsoft.com/office/drawing/2014/main" id="{F5C23DCC-1D14-48D5-875A-E14BA3763D3F}"/>
+              </a:ext>
+            </a:extLst>
+          </p:cNvPr>
+          <p:cNvSpPr>
+            <a:spLocks xmlns:a="http://schemas.openxmlformats.org/drawingml/2006/main" noGrp="1"/>
+          </p:cNvSpPr>
+          <p:nvPr/>
+        </p:nvSpPr>
+        <p:spPr>
+          <a:xfrm xmlns:a="http://schemas.openxmlformats.org/drawingml/2006/main">
+            <a:off x="990600" y="2400300"/>
+            <a:ext cx="4000500" cy="685800"/>
+          </a:xfrm>
+          <a:prstGeom xmlns:a="http://schemas.openxmlformats.org/drawingml/2006/main" prst="rect">
+            <a:avLst/>
+          </a:prstGeom>
+          <a:noFill xmlns:a="http://schemas.openxmlformats.org/drawingml/2006/main"/>
+          <a:ln xmlns:a="http://schemas.openxmlformats.org/drawingml/2006/main" w="0">
+            <a:noFill/>
+            <a:prstDash val="solid"/>
+          </a:ln>
+        </p:spPr>
+        <p:txBody>
+          <a:bodyPr xmlns:a="http://schemas.openxmlformats.org/drawingml/2006/main" lIns="0" tIns="0" rIns="0" bIns="0" anchor="t">
+            <a:normAutofit fontScale="100000"/>
+          </a:bodyPr>
+          <a:lstStyle xmlns:a="http://schemas.openxmlformats.org/drawingml/2006/main"/>
+          <a:p xmlns:a="http://schemas.openxmlformats.org/drawingml/2006/main">
+            <a:pPr algn="l">
+              <a:lnSpc>
+                <a:spcPct val="108000"/>
+              </a:lnSpc>
+              <a:buNone/>
+              <a:defRPr sz="1875" b="0" i="0">
+                <a:solidFill>
+                  <a:srgbClr val="56636A"/>
+                </a:solidFill>
+                <a:latin typeface="Aptos"/>
+                <a:ea typeface="Aptos"/>
+                <a:cs typeface="Aptos"/>
+              </a:defRPr>
+            </a:pPr>
+            <a:r>
+              <a:rPr sz="1875" b="0" i="0">
+                <a:solidFill>
+                  <a:srgbClr val="56636A"/>
+                </a:solidFill>
+                <a:latin typeface="Aptos"/>
+                <a:ea typeface="Aptos"/>
+                <a:cs typeface="Aptos"/>
+              </a:rPr>
+              <a:t>after a university begins charging</a:t>
+            </a:r>
+          </a:p>
+        </p:txBody>
+      </p:sp>
+      <p:sp>
+        <p:nvSpPr>
+          <p:cNvPr id="9" name="what-else">
+            <a:extLst xmlns:a="http://schemas.openxmlformats.org/drawingml/2006/main">
+              <a:ext uri="{FF2B5EF4-FFF2-40B4-BE49-F238E27FC236}">
+                <a16:creationId xmlns:a16="http://schemas.microsoft.com/office/drawing/2014/main" id="{810DAD84-F158-4FE8-88C2-AF119D97B807}"/>
+              </a:ext>
+            </a:extLst>
+          </p:cNvPr>
+          <p:cNvSpPr>
+            <a:spLocks xmlns:a="http://schemas.openxmlformats.org/drawingml/2006/main" noGrp="1"/>
+          </p:cNvSpPr>
+          <p:nvPr/>
+        </p:nvSpPr>
+        <p:spPr>
+          <a:xfrm xmlns:a="http://schemas.openxmlformats.org/drawingml/2006/main">
+            <a:off x="6191250" y="1790700"/>
+            <a:ext cx="4572000" cy="552450"/>
+          </a:xfrm>
+          <a:prstGeom xmlns:a="http://schemas.openxmlformats.org/drawingml/2006/main" prst="rect">
+            <a:avLst/>
+          </a:prstGeom>
+          <a:noFill xmlns:a="http://schemas.openxmlformats.org/drawingml/2006/main"/>
+          <a:ln xmlns:a="http://schemas.openxmlformats.org/drawingml/2006/main" w="0">
+            <a:noFill/>
+            <a:prstDash val="solid"/>
+          </a:ln>
+        </p:spPr>
+        <p:txBody>
+          <a:bodyPr xmlns:a="http://schemas.openxmlformats.org/drawingml/2006/main" lIns="0" tIns="0" rIns="0" bIns="0" anchor="t">
+            <a:normAutofit fontScale="100000"/>
+          </a:bodyPr>
+          <a:lstStyle xmlns:a="http://schemas.openxmlformats.org/drawingml/2006/main"/>
+          <a:p xmlns:a="http://schemas.openxmlformats.org/drawingml/2006/main">
+            <a:pPr algn="l">
+              <a:lnSpc>
+                <a:spcPct val="108000"/>
+              </a:lnSpc>
+              <a:buNone/>
+              <a:defRPr sz="2700" b="1" i="0">
+                <a:solidFill>
+                  <a:srgbClr val="9A3B35"/>
+                </a:solidFill>
+                <a:latin typeface="Georgia"/>
+                <a:ea typeface="Georgia"/>
+                <a:cs typeface="Georgia"/>
+              </a:defRPr>
+            </a:pPr>
+            <a:r>
+              <a:rPr sz="2700" b="1" i="0">
+                <a:solidFill>
+                  <a:srgbClr val="9A3B35"/>
+                </a:solidFill>
+                <a:latin typeface="Georgia"/>
+                <a:ea typeface="Georgia"/>
+                <a:cs typeface="Georgia"/>
+              </a:rPr>
+              <a:t>But what else changed?</a:t>
+            </a:r>
+          </a:p>
+        </p:txBody>
+      </p:sp>
+      <p:sp>
+        <p:nvSpPr>
+          <p:cNvPr id="10" name="alternative-explanation-mark-1">
+            <a:extLst xmlns:a="http://schemas.openxmlformats.org/drawingml/2006/main">
+              <a:ext uri="{FF2B5EF4-FFF2-40B4-BE49-F238E27FC236}">
+                <a16:creationId xmlns:a16="http://schemas.microsoft.com/office/drawing/2014/main" id="{89063472-6D08-4510-831B-D8F03F083F52}"/>
+              </a:ext>
+            </a:extLst>
+          </p:cNvPr>
+          <p:cNvSpPr>
+            <a:spLocks xmlns:a="http://schemas.openxmlformats.org/drawingml/2006/main" noGrp="1"/>
+          </p:cNvSpPr>
+          <p:nvPr/>
+        </p:nvSpPr>
+        <p:spPr>
+          <a:xfrm xmlns:a="http://schemas.openxmlformats.org/drawingml/2006/main">
+            <a:off x="6191250" y="2581275"/>
+            <a:ext cx="228600" cy="495300"/>
+          </a:xfrm>
+          <a:prstGeom xmlns:a="http://schemas.openxmlformats.org/drawingml/2006/main" prst="rect">
+            <a:avLst/>
+          </a:prstGeom>
+          <a:noFill xmlns:a="http://schemas.openxmlformats.org/drawingml/2006/main"/>
+          <a:ln xmlns:a="http://schemas.openxmlformats.org/drawingml/2006/main" w="0">
+            <a:noFill/>
+            <a:prstDash val="solid"/>
+          </a:ln>
+        </p:spPr>
+        <p:txBody>
+          <a:bodyPr xmlns:a="http://schemas.openxmlformats.org/drawingml/2006/main" lIns="0" tIns="0" rIns="0" bIns="0" anchor="t">
+            <a:normAutofit fontScale="100000"/>
+          </a:bodyPr>
+          <a:lstStyle xmlns:a="http://schemas.openxmlformats.org/drawingml/2006/main"/>
+          <a:p xmlns:a="http://schemas.openxmlformats.org/drawingml/2006/main">
+            <a:pPr algn="l">
+              <a:lnSpc>
+                <a:spcPct val="108000"/>
+              </a:lnSpc>
+              <a:buNone/>
+              <a:defRPr sz="1950" b="1" i="0">
+                <a:solidFill>
+                  <a:srgbClr val="9A3B35"/>
+                </a:solidFill>
+                <a:latin typeface="Aptos"/>
+                <a:ea typeface="Aptos"/>
+                <a:cs typeface="Aptos"/>
+              </a:defRPr>
+            </a:pPr>
+            <a:r>
+              <a:rPr sz="1950" b="1" i="0">
+                <a:solidFill>
+                  <a:srgbClr val="9A3B35"/>
+                </a:solidFill>
+                <a:latin typeface="Aptos"/>
+                <a:ea typeface="Aptos"/>
+                <a:cs typeface="Aptos"/>
+              </a:rPr>
+              <a:t>•</a:t>
+            </a:r>
+          </a:p>
+        </p:txBody>
+      </p:sp>
+      <p:sp>
+        <p:nvSpPr>
+          <p:cNvPr id="11" name="alternative-explanation-1">
+            <a:extLst xmlns:a="http://schemas.openxmlformats.org/drawingml/2006/main">
+              <a:ext uri="{FF2B5EF4-FFF2-40B4-BE49-F238E27FC236}">
+                <a16:creationId xmlns:a16="http://schemas.microsoft.com/office/drawing/2014/main" id="{9045FE21-320F-4A08-AEE3-3D119EDCCE5C}"/>
+              </a:ext>
+            </a:extLst>
+          </p:cNvPr>
+          <p:cNvSpPr>
+            <a:spLocks xmlns:a="http://schemas.openxmlformats.org/drawingml/2006/main" noGrp="1"/>
+          </p:cNvSpPr>
+          <p:nvPr/>
+        </p:nvSpPr>
+        <p:spPr>
+          <a:xfrm xmlns:a="http://schemas.openxmlformats.org/drawingml/2006/main">
+            <a:off x="6515100" y="2590800"/>
+            <a:ext cx="4152900" cy="495300"/>
+          </a:xfrm>
+          <a:prstGeom xmlns:a="http://schemas.openxmlformats.org/drawingml/2006/main" prst="rect">
+            <a:avLst/>
+          </a:prstGeom>
+          <a:noFill xmlns:a="http://schemas.openxmlformats.org/drawingml/2006/main"/>
+          <a:ln xmlns:a="http://schemas.openxmlformats.org/drawingml/2006/main" w="0">
+            <a:noFill/>
+            <a:prstDash val="solid"/>
+          </a:ln>
+        </p:spPr>
+        <p:txBody>
+          <a:bodyPr xmlns:a="http://schemas.openxmlformats.org/drawingml/2006/main" lIns="0" tIns="0" rIns="0" bIns="0" anchor="t">
+            <a:normAutofit fontScale="100000"/>
+          </a:bodyPr>
+          <a:lstStyle xmlns:a="http://schemas.openxmlformats.org/drawingml/2006/main"/>
+          <a:p xmlns:a="http://schemas.openxmlformats.org/drawingml/2006/main">
+            <a:pPr algn="l">
+              <a:lnSpc>
+                <a:spcPct val="108000"/>
+              </a:lnSpc>
+              <a:buNone/>
+              <a:defRPr sz="1950" b="0" i="0">
+                <a:solidFill>
+                  <a:srgbClr val="172126"/>
+                </a:solidFill>
+                <a:latin typeface="Aptos"/>
+                <a:ea typeface="Aptos"/>
+                <a:cs typeface="Aptos"/>
+              </a:defRPr>
+            </a:pPr>
+            <a:r>
+              <a:rPr sz="1950" b="0" i="0">
+                <a:solidFill>
+                  <a:srgbClr val="172126"/>
+                </a:solidFill>
+                <a:latin typeface="Aptos"/>
+                <a:ea typeface="Aptos"/>
+                <a:cs typeface="Aptos"/>
+              </a:rPr>
+              <a:t>Enrollment</a:t>
+            </a:r>
+          </a:p>
+        </p:txBody>
+      </p:sp>
+      <p:sp>
+        <p:nvSpPr>
+          <p:cNvPr id="12" name="alternative-explanation-mark-2">
+            <a:extLst xmlns:a="http://schemas.openxmlformats.org/drawingml/2006/main">
+              <a:ext uri="{FF2B5EF4-FFF2-40B4-BE49-F238E27FC236}">
+                <a16:creationId xmlns:a16="http://schemas.microsoft.com/office/drawing/2014/main" id="{C68E6398-1CB7-4826-839F-99ADD27F05D6}"/>
+              </a:ext>
+            </a:extLst>
+          </p:cNvPr>
+          <p:cNvSpPr>
+            <a:spLocks xmlns:a="http://schemas.openxmlformats.org/drawingml/2006/main" noGrp="1"/>
+          </p:cNvSpPr>
+          <p:nvPr/>
+        </p:nvSpPr>
+        <p:spPr>
+          <a:xfrm xmlns:a="http://schemas.openxmlformats.org/drawingml/2006/main">
+            <a:off x="6191250" y="3095625"/>
+            <a:ext cx="228600" cy="495300"/>
+          </a:xfrm>
+          <a:prstGeom xmlns:a="http://schemas.openxmlformats.org/drawingml/2006/main" prst="rect">
+            <a:avLst/>
+          </a:prstGeom>
+          <a:noFill xmlns:a="http://schemas.openxmlformats.org/drawingml/2006/main"/>
+          <a:ln xmlns:a="http://schemas.openxmlformats.org/drawingml/2006/main" w="0">
+            <a:noFill/>
+            <a:prstDash val="solid"/>
+          </a:ln>
+        </p:spPr>
+        <p:txBody>
+          <a:bodyPr xmlns:a="http://schemas.openxmlformats.org/drawingml/2006/main" lIns="0" tIns="0" rIns="0" bIns="0" anchor="t">
+            <a:normAutofit fontScale="100000"/>
+          </a:bodyPr>
+          <a:lstStyle xmlns:a="http://schemas.openxmlformats.org/drawingml/2006/main"/>
+          <a:p xmlns:a="http://schemas.openxmlformats.org/drawingml/2006/main">
+            <a:pPr algn="l">
+              <a:lnSpc>
+                <a:spcPct val="108000"/>
+              </a:lnSpc>
+              <a:buNone/>
+              <a:defRPr sz="1950" b="1" i="0">
+                <a:solidFill>
+                  <a:srgbClr val="9A3B35"/>
+                </a:solidFill>
+                <a:latin typeface="Aptos"/>
+                <a:ea typeface="Aptos"/>
+                <a:cs typeface="Aptos"/>
+              </a:defRPr>
+            </a:pPr>
+            <a:r>
+              <a:rPr sz="1950" b="1" i="0">
+                <a:solidFill>
+                  <a:srgbClr val="9A3B35"/>
+                </a:solidFill>
+                <a:latin typeface="Aptos"/>
+                <a:ea typeface="Aptos"/>
+                <a:cs typeface="Aptos"/>
+              </a:rPr>
+              <a:t>•</a:t>
+            </a:r>
+          </a:p>
+        </p:txBody>
+      </p:sp>
+      <p:sp>
+        <p:nvSpPr>
+          <p:cNvPr id="13" name="alternative-explanation-2">
+            <a:extLst xmlns:a="http://schemas.openxmlformats.org/drawingml/2006/main">
+              <a:ext uri="{FF2B5EF4-FFF2-40B4-BE49-F238E27FC236}">
+                <a16:creationId xmlns:a16="http://schemas.microsoft.com/office/drawing/2014/main" id="{FB3369E9-6A08-47D3-99CA-81168B6C6B5E}"/>
+              </a:ext>
+            </a:extLst>
+          </p:cNvPr>
+          <p:cNvSpPr>
+            <a:spLocks xmlns:a="http://schemas.openxmlformats.org/drawingml/2006/main" noGrp="1"/>
+          </p:cNvSpPr>
+          <p:nvPr/>
+        </p:nvSpPr>
+        <p:spPr>
+          <a:xfrm xmlns:a="http://schemas.openxmlformats.org/drawingml/2006/main">
+            <a:off x="6515100" y="3105150"/>
+            <a:ext cx="4152900" cy="495300"/>
+          </a:xfrm>
+          <a:prstGeom xmlns:a="http://schemas.openxmlformats.org/drawingml/2006/main" prst="rect">
+            <a:avLst/>
+          </a:prstGeom>
+          <a:noFill xmlns:a="http://schemas.openxmlformats.org/drawingml/2006/main"/>
+          <a:ln xmlns:a="http://schemas.openxmlformats.org/drawingml/2006/main" w="0">
+            <a:noFill/>
+            <a:prstDash val="solid"/>
+          </a:ln>
+        </p:spPr>
+        <p:txBody>
+          <a:bodyPr xmlns:a="http://schemas.openxmlformats.org/drawingml/2006/main" lIns="0" tIns="0" rIns="0" bIns="0" anchor="t">
+            <a:normAutofit fontScale="100000"/>
+          </a:bodyPr>
+          <a:lstStyle xmlns:a="http://schemas.openxmlformats.org/drawingml/2006/main"/>
+          <a:p xmlns:a="http://schemas.openxmlformats.org/drawingml/2006/main">
+            <a:pPr algn="l">
+              <a:lnSpc>
+                <a:spcPct val="108000"/>
+              </a:lnSpc>
+              <a:buNone/>
+              <a:defRPr sz="1950" b="0" i="0">
+                <a:solidFill>
+                  <a:srgbClr val="172126"/>
+                </a:solidFill>
+                <a:latin typeface="Aptos"/>
+                <a:ea typeface="Aptos"/>
+                <a:cs typeface="Aptos"/>
+              </a:defRPr>
+            </a:pPr>
+            <a:r>
+              <a:rPr sz="1950" b="0" i="0">
+                <a:solidFill>
+                  <a:srgbClr val="172126"/>
+                </a:solidFill>
+                <a:latin typeface="Aptos"/>
+                <a:ea typeface="Aptos"/>
+                <a:cs typeface="Aptos"/>
+              </a:rPr>
+              <a:t>A new parking lot</a:t>
+            </a:r>
+          </a:p>
+        </p:txBody>
+      </p:sp>
+      <p:sp>
+        <p:nvSpPr>
+          <p:cNvPr id="14" name="alternative-explanation-mark-3">
+            <a:extLst xmlns:a="http://schemas.openxmlformats.org/drawingml/2006/main">
+              <a:ext uri="{FF2B5EF4-FFF2-40B4-BE49-F238E27FC236}">
+                <a16:creationId xmlns:a16="http://schemas.microsoft.com/office/drawing/2014/main" id="{81516262-6E6D-4A7C-A95C-B888F09FB027}"/>
+              </a:ext>
+            </a:extLst>
+          </p:cNvPr>
+          <p:cNvSpPr>
+            <a:spLocks xmlns:a="http://schemas.openxmlformats.org/drawingml/2006/main" noGrp="1"/>
+          </p:cNvSpPr>
+          <p:nvPr/>
+        </p:nvSpPr>
+        <p:spPr>
+          <a:xfrm xmlns:a="http://schemas.openxmlformats.org/drawingml/2006/main">
+            <a:off x="6191250" y="3609975"/>
+            <a:ext cx="228600" cy="495300"/>
+          </a:xfrm>
+          <a:prstGeom xmlns:a="http://schemas.openxmlformats.org/drawingml/2006/main" prst="rect">
+            <a:avLst/>
+          </a:prstGeom>
+          <a:noFill xmlns:a="http://schemas.openxmlformats.org/drawingml/2006/main"/>
+          <a:ln xmlns:a="http://schemas.openxmlformats.org/drawingml/2006/main" w="0">
+            <a:noFill/>
+            <a:prstDash val="solid"/>
+          </a:ln>
+        </p:spPr>
+        <p:txBody>
+          <a:bodyPr xmlns:a="http://schemas.openxmlformats.org/drawingml/2006/main" lIns="0" tIns="0" rIns="0" bIns="0" anchor="t">
+            <a:normAutofit fontScale="100000"/>
+          </a:bodyPr>
+          <a:lstStyle xmlns:a="http://schemas.openxmlformats.org/drawingml/2006/main"/>
+          <a:p xmlns:a="http://schemas.openxmlformats.org/drawingml/2006/main">
+            <a:pPr algn="l">
+              <a:lnSpc>
+                <a:spcPct val="108000"/>
+              </a:lnSpc>
+              <a:buNone/>
+              <a:defRPr sz="1950" b="1" i="0">
+                <a:solidFill>
+                  <a:srgbClr val="9A3B35"/>
+                </a:solidFill>
+                <a:latin typeface="Aptos"/>
+                <a:ea typeface="Aptos"/>
+                <a:cs typeface="Aptos"/>
+              </a:defRPr>
+            </a:pPr>
+            <a:r>
+              <a:rPr sz="1950" b="1" i="0">
+                <a:solidFill>
+                  <a:srgbClr val="9A3B35"/>
+                </a:solidFill>
+                <a:latin typeface="Aptos"/>
+                <a:ea typeface="Aptos"/>
+                <a:cs typeface="Aptos"/>
+              </a:rPr>
+              <a:t>•</a:t>
+            </a:r>
+          </a:p>
+        </p:txBody>
+      </p:sp>
+      <p:sp>
+        <p:nvSpPr>
+          <p:cNvPr id="15" name="alternative-explanation-3">
+            <a:extLst xmlns:a="http://schemas.openxmlformats.org/drawingml/2006/main">
+              <a:ext uri="{FF2B5EF4-FFF2-40B4-BE49-F238E27FC236}">
+                <a16:creationId xmlns:a16="http://schemas.microsoft.com/office/drawing/2014/main" id="{45E2B375-2187-450E-BC4A-2703956B053A}"/>
+              </a:ext>
+            </a:extLst>
+          </p:cNvPr>
+          <p:cNvSpPr>
+            <a:spLocks xmlns:a="http://schemas.openxmlformats.org/drawingml/2006/main" noGrp="1"/>
+          </p:cNvSpPr>
+          <p:nvPr/>
+        </p:nvSpPr>
+        <p:spPr>
+          <a:xfrm xmlns:a="http://schemas.openxmlformats.org/drawingml/2006/main">
+            <a:off x="6515100" y="3619500"/>
+            <a:ext cx="4152900" cy="495300"/>
+          </a:xfrm>
+          <a:prstGeom xmlns:a="http://schemas.openxmlformats.org/drawingml/2006/main" prst="rect">
+            <a:avLst/>
+          </a:prstGeom>
+          <a:noFill xmlns:a="http://schemas.openxmlformats.org/drawingml/2006/main"/>
+          <a:ln xmlns:a="http://schemas.openxmlformats.org/drawingml/2006/main" w="0">
+            <a:noFill/>
+            <a:prstDash val="solid"/>
+          </a:ln>
+        </p:spPr>
+        <p:txBody>
+          <a:bodyPr xmlns:a="http://schemas.openxmlformats.org/drawingml/2006/main" lIns="0" tIns="0" rIns="0" bIns="0" anchor="t">
+            <a:normAutofit fontScale="100000"/>
+          </a:bodyPr>
+          <a:lstStyle xmlns:a="http://schemas.openxmlformats.org/drawingml/2006/main"/>
+          <a:p xmlns:a="http://schemas.openxmlformats.org/drawingml/2006/main">
+            <a:pPr algn="l">
+              <a:lnSpc>
+                <a:spcPct val="108000"/>
+              </a:lnSpc>
+              <a:buNone/>
+              <a:defRPr sz="1950" b="0" i="0">
+                <a:solidFill>
+                  <a:srgbClr val="172126"/>
+                </a:solidFill>
+                <a:latin typeface="Aptos"/>
+                <a:ea typeface="Aptos"/>
+                <a:cs typeface="Aptos"/>
+              </a:defRPr>
+            </a:pPr>
+            <a:r>
+              <a:rPr sz="1950" b="0" i="0">
+                <a:solidFill>
+                  <a:srgbClr val="172126"/>
+                </a:solidFill>
+                <a:latin typeface="Aptos"/>
+                <a:ea typeface="Aptos"/>
+                <a:cs typeface="Aptos"/>
+              </a:rPr>
+              <a:t>Online classes</a:t>
+            </a:r>
+          </a:p>
+        </p:txBody>
+      </p:sp>
+      <p:sp>
+        <p:nvSpPr>
+          <p:cNvPr id="16" name="alternative-explanation-mark-4">
+            <a:extLst xmlns:a="http://schemas.openxmlformats.org/drawingml/2006/main">
+              <a:ext uri="{FF2B5EF4-FFF2-40B4-BE49-F238E27FC236}">
+                <a16:creationId xmlns:a16="http://schemas.microsoft.com/office/drawing/2014/main" id="{C44AB62D-6C1D-4FBF-AFDD-C4FE28C06713}"/>
+              </a:ext>
+            </a:extLst>
+          </p:cNvPr>
+          <p:cNvSpPr>
+            <a:spLocks xmlns:a="http://schemas.openxmlformats.org/drawingml/2006/main" noGrp="1"/>
+          </p:cNvSpPr>
+          <p:nvPr/>
+        </p:nvSpPr>
+        <p:spPr>
+          <a:xfrm xmlns:a="http://schemas.openxmlformats.org/drawingml/2006/main">
+            <a:off x="6191250" y="4124325"/>
+            <a:ext cx="228600" cy="495300"/>
+          </a:xfrm>
+          <a:prstGeom xmlns:a="http://schemas.openxmlformats.org/drawingml/2006/main" prst="rect">
+            <a:avLst/>
+          </a:prstGeom>
+          <a:noFill xmlns:a="http://schemas.openxmlformats.org/drawingml/2006/main"/>
+          <a:ln xmlns:a="http://schemas.openxmlformats.org/drawingml/2006/main" w="0">
+            <a:noFill/>
+            <a:prstDash val="solid"/>
+          </a:ln>
+        </p:spPr>
+        <p:txBody>
+          <a:bodyPr xmlns:a="http://schemas.openxmlformats.org/drawingml/2006/main" lIns="0" tIns="0" rIns="0" bIns="0" anchor="t">
+            <a:normAutofit fontScale="100000"/>
+          </a:bodyPr>
+          <a:lstStyle xmlns:a="http://schemas.openxmlformats.org/drawingml/2006/main"/>
+          <a:p xmlns:a="http://schemas.openxmlformats.org/drawingml/2006/main">
+            <a:pPr algn="l">
+              <a:lnSpc>
+                <a:spcPct val="108000"/>
+              </a:lnSpc>
+              <a:buNone/>
+              <a:defRPr sz="1950" b="1" i="0">
+                <a:solidFill>
+                  <a:srgbClr val="9A3B35"/>
+                </a:solidFill>
+                <a:latin typeface="Aptos"/>
+                <a:ea typeface="Aptos"/>
+                <a:cs typeface="Aptos"/>
+              </a:defRPr>
+            </a:pPr>
+            <a:r>
+              <a:rPr sz="1950" b="1" i="0">
+                <a:solidFill>
+                  <a:srgbClr val="9A3B35"/>
+                </a:solidFill>
+                <a:latin typeface="Aptos"/>
+                <a:ea typeface="Aptos"/>
+                <a:cs typeface="Aptos"/>
+              </a:rPr>
+              <a:t>•</a:t>
+            </a:r>
+          </a:p>
+        </p:txBody>
+      </p:sp>
+      <p:sp>
+        <p:nvSpPr>
+          <p:cNvPr id="17" name="alternative-explanation-4">
+            <a:extLst xmlns:a="http://schemas.openxmlformats.org/drawingml/2006/main">
+              <a:ext uri="{FF2B5EF4-FFF2-40B4-BE49-F238E27FC236}">
+                <a16:creationId xmlns:a16="http://schemas.microsoft.com/office/drawing/2014/main" id="{A4D6120A-032F-4609-AAB1-D988A15B161E}"/>
+              </a:ext>
+            </a:extLst>
+          </p:cNvPr>
+          <p:cNvSpPr>
+            <a:spLocks xmlns:a="http://schemas.openxmlformats.org/drawingml/2006/main" noGrp="1"/>
+          </p:cNvSpPr>
+          <p:nvPr/>
+        </p:nvSpPr>
+        <p:spPr>
+          <a:xfrm xmlns:a="http://schemas.openxmlformats.org/drawingml/2006/main">
+            <a:off x="6515100" y="4133850"/>
+            <a:ext cx="4152900" cy="495300"/>
+          </a:xfrm>
+          <a:prstGeom xmlns:a="http://schemas.openxmlformats.org/drawingml/2006/main" prst="rect">
+            <a:avLst/>
+          </a:prstGeom>
+          <a:noFill xmlns:a="http://schemas.openxmlformats.org/drawingml/2006/main"/>
+          <a:ln xmlns:a="http://schemas.openxmlformats.org/drawingml/2006/main" w="0">
+            <a:noFill/>
+            <a:prstDash val="solid"/>
+          </a:ln>
+        </p:spPr>
+        <p:txBody>
+          <a:bodyPr xmlns:a="http://schemas.openxmlformats.org/drawingml/2006/main" lIns="0" tIns="0" rIns="0" bIns="0" anchor="t">
+            <a:normAutofit fontScale="100000"/>
+          </a:bodyPr>
+          <a:lstStyle xmlns:a="http://schemas.openxmlformats.org/drawingml/2006/main"/>
+          <a:p xmlns:a="http://schemas.openxmlformats.org/drawingml/2006/main">
+            <a:pPr algn="l">
+              <a:lnSpc>
+                <a:spcPct val="108000"/>
+              </a:lnSpc>
+              <a:buNone/>
+              <a:defRPr sz="1950" b="0" i="0">
+                <a:solidFill>
+                  <a:srgbClr val="172126"/>
+                </a:solidFill>
+                <a:latin typeface="Aptos"/>
+                <a:ea typeface="Aptos"/>
+                <a:cs typeface="Aptos"/>
+              </a:defRPr>
+            </a:pPr>
+            <a:r>
+              <a:rPr sz="1950" b="0" i="0">
+                <a:solidFill>
+                  <a:srgbClr val="172126"/>
+                </a:solidFill>
+                <a:latin typeface="Aptos"/>
+                <a:ea typeface="Aptos"/>
+                <a:cs typeface="Aptos"/>
+              </a:rPr>
+              <a:t>Construction or fuel prices</a:t>
+            </a:r>
+          </a:p>
+        </p:txBody>
+      </p:sp>
+      <p:sp>
+        <p:nvSpPr>
+          <p:cNvPr id="18" name="comparison-conclusion">
+            <a:extLst xmlns:a="http://schemas.openxmlformats.org/drawingml/2006/main">
+              <a:ext uri="{FF2B5EF4-FFF2-40B4-BE49-F238E27FC236}">
+                <a16:creationId xmlns:a16="http://schemas.microsoft.com/office/drawing/2014/main" id="{87D94160-C0B7-4125-83E5-2D4D141A5145}"/>
+              </a:ext>
+            </a:extLst>
+          </p:cNvPr>
+          <p:cNvSpPr>
+            <a:spLocks xmlns:a="http://schemas.openxmlformats.org/drawingml/2006/main" noGrp="1"/>
+          </p:cNvSpPr>
+          <p:nvPr/>
+        </p:nvSpPr>
+        <p:spPr>
+          <a:xfrm xmlns:a="http://schemas.openxmlformats.org/drawingml/2006/main">
+            <a:off x="1123950" y="5200650"/>
+            <a:ext cx="9715500" cy="685800"/>
+          </a:xfrm>
+          <a:prstGeom xmlns:a="http://schemas.openxmlformats.org/drawingml/2006/main" prst="rect">
+            <a:avLst/>
+          </a:prstGeom>
+          <a:noFill xmlns:a="http://schemas.openxmlformats.org/drawingml/2006/main"/>
+          <a:ln xmlns:a="http://schemas.openxmlformats.org/drawingml/2006/main" w="0">
+            <a:noFill/>
+            <a:prstDash val="solid"/>
+          </a:ln>
+        </p:spPr>
+        <p:txBody>
+          <a:bodyPr xmlns:a="http://schemas.openxmlformats.org/drawingml/2006/main" lIns="0" tIns="0" rIns="0" bIns="0" anchor="t">
+            <a:normAutofit fontScale="89606"/>
+          </a:bodyPr>
+          <a:lstStyle xmlns:a="http://schemas.openxmlformats.org/drawingml/2006/main"/>
+          <a:p xmlns:a="http://schemas.openxmlformats.org/drawingml/2006/main">
+            <a:pPr algn="ctr">
+              <a:lnSpc>
+                <a:spcPct val="108000"/>
+              </a:lnSpc>
+              <a:buNone/>
+              <a:defRPr sz="2325" b="1" i="0">
+                <a:solidFill>
+                  <a:srgbClr val="172126"/>
+                </a:solidFill>
+                <a:latin typeface="Georgia"/>
+                <a:ea typeface="Georgia"/>
+                <a:cs typeface="Georgia"/>
+              </a:defRPr>
+            </a:pPr>
+            <a:r>
+              <a:rPr sz="2325" b="1" i="0">
+                <a:solidFill>
+                  <a:srgbClr val="172126"/>
+                </a:solidFill>
+                <a:latin typeface="Georgia"/>
+                <a:ea typeface="Georgia"/>
+                <a:cs typeface="Georgia"/>
+              </a:rPr>
+              <a:t>A comparison group helps separate the policy from other changes over time.</a:t>
+            </a:r>
+          </a:p>
+        </p:txBody>
+      </p:sp>
+    </p:spTree>
+    <p:extLst>
+      <p:ext uri="{BB962C8B-B14F-4D97-AF65-F5344CB8AC3E}">
+        <p14:creationId xmlns:p14="http://schemas.microsoft.com/office/powerpoint/2010/main" val="451529811"/>
+      </p:ext>
+    </p:extLst>
+  </p:cSld>
+</p:sld>
+</file>
+
+<file path=ppt/slides/slide19.xml><?xml version="1.0" encoding="utf-8"?>
 <p:sld xmlns:p="http://schemas.openxmlformats.org/presentationml/2006/main">
   <p:cSld>
     <p:bg>
@@ -9947,7 +11255,7 @@
           <p:cNvPr id="18" name="accent-rule">
             <a:extLst xmlns:a="http://schemas.openxmlformats.org/drawingml/2006/main">
               <a:ext uri="{FF2B5EF4-FFF2-40B4-BE49-F238E27FC236}">
-                <a16:creationId xmlns:a16="http://schemas.microsoft.com/office/drawing/2014/main" id="{48A9CF56-1B84-4F52-B1E0-F836DA564DD5}"/>
+                <a16:creationId xmlns:a16="http://schemas.microsoft.com/office/drawing/2014/main" id="{66406695-F290-45DB-8C59-6FDD30577E96}"/>
               </a:ext>
             </a:extLst>
           </p:cNvPr>
@@ -9978,7 +11286,7 @@
           <p:cNvPr id="2" name="chapter-label">
             <a:extLst xmlns:a="http://schemas.openxmlformats.org/drawingml/2006/main">
               <a:ext uri="{FF2B5EF4-FFF2-40B4-BE49-F238E27FC236}">
-                <a16:creationId xmlns:a16="http://schemas.microsoft.com/office/drawing/2014/main" id="{38A7A3CF-AF61-41C6-9DC5-0A30E04C80D2}"/>
+                <a16:creationId xmlns:a16="http://schemas.microsoft.com/office/drawing/2014/main" id="{ADBC30D5-492A-4944-8BC2-9C30B6820673}"/>
               </a:ext>
             </a:extLst>
           </p:cNvPr>
@@ -10040,7 +11348,7 @@
           <p:cNvPr id="3" name="slide-title">
             <a:extLst xmlns:a="http://schemas.openxmlformats.org/drawingml/2006/main">
               <a:ext uri="{FF2B5EF4-FFF2-40B4-BE49-F238E27FC236}">
-                <a16:creationId xmlns:a16="http://schemas.microsoft.com/office/drawing/2014/main" id="{3327AD50-06BA-448D-8B39-BABCFE1E297F}"/>
+                <a16:creationId xmlns:a16="http://schemas.microsoft.com/office/drawing/2014/main" id="{462BE267-2442-4AD1-9761-1D508DEAA657}"/>
               </a:ext>
             </a:extLst>
           </p:cNvPr>
@@ -10102,7 +11410,7 @@
           <p:cNvPr id="4" name="footer-rule">
             <a:extLst xmlns:a="http://schemas.openxmlformats.org/drawingml/2006/main">
               <a:ext uri="{FF2B5EF4-FFF2-40B4-BE49-F238E27FC236}">
-                <a16:creationId xmlns:a16="http://schemas.microsoft.com/office/drawing/2014/main" id="{227CB697-35BD-4F23-9AF3-92400BCF6EEF}"/>
+                <a16:creationId xmlns:a16="http://schemas.microsoft.com/office/drawing/2014/main" id="{56C6A852-CFB6-4D95-97F0-AEF72FDD0B9D}"/>
               </a:ext>
             </a:extLst>
           </p:cNvPr>
@@ -10133,7 +11441,7 @@
           <p:cNvPr id="5" name="footer-book">
             <a:extLst xmlns:a="http://schemas.openxmlformats.org/drawingml/2006/main">
               <a:ext uri="{FF2B5EF4-FFF2-40B4-BE49-F238E27FC236}">
-                <a16:creationId xmlns:a16="http://schemas.microsoft.com/office/drawing/2014/main" id="{67C24B70-C099-460D-9340-E75CB12BDEC6}"/>
+                <a16:creationId xmlns:a16="http://schemas.microsoft.com/office/drawing/2014/main" id="{EBD8420F-A7C5-4FB5-AE5A-FB12359AD189}"/>
               </a:ext>
             </a:extLst>
           </p:cNvPr>
@@ -10195,7 +11503,7 @@
           <p:cNvPr id="6" name="footer-number">
             <a:extLst xmlns:a="http://schemas.openxmlformats.org/drawingml/2006/main">
               <a:ext uri="{FF2B5EF4-FFF2-40B4-BE49-F238E27FC236}">
-                <a16:creationId xmlns:a16="http://schemas.microsoft.com/office/drawing/2014/main" id="{758D2B70-4401-4258-BB6B-CCA595681AD3}"/>
+                <a16:creationId xmlns:a16="http://schemas.microsoft.com/office/drawing/2014/main" id="{A1C4E638-AF68-4ACE-ACF3-4511F2DD3FB2}"/>
               </a:ext>
             </a:extLst>
           </p:cNvPr>
@@ -10247,7 +11555,7 @@
                 <a:ea typeface="Aptos"/>
                 <a:cs typeface="Aptos"/>
               </a:rPr>
-              <a:t>18</a:t>
+              <a:t>19</a:t>
             </a:r>
           </a:p>
         </p:txBody>
@@ -10257,7 +11565,7 @@
           <p:cNvPr id="7" name="program-field">
             <a:extLst xmlns:a="http://schemas.openxmlformats.org/drawingml/2006/main">
               <a:ext uri="{FF2B5EF4-FFF2-40B4-BE49-F238E27FC236}">
-                <a16:creationId xmlns:a16="http://schemas.microsoft.com/office/drawing/2014/main" id="{90883EBD-790C-4542-830F-F1D6DCCA0C76}"/>
+                <a16:creationId xmlns:a16="http://schemas.microsoft.com/office/drawing/2014/main" id="{4F579832-B4D6-4CDA-BEAD-ACFA72F02A50}"/>
               </a:ext>
             </a:extLst>
           </p:cNvPr>
@@ -10288,7 +11596,7 @@
           <p:cNvPr id="8" name="">
             <a:extLst xmlns:a="http://schemas.openxmlformats.org/drawingml/2006/main">
               <a:ext uri="{FF2B5EF4-FFF2-40B4-BE49-F238E27FC236}">
-                <a16:creationId xmlns:a16="http://schemas.microsoft.com/office/drawing/2014/main" id="{C048B795-B022-462B-B754-B0A7754FD754}"/>
+                <a16:creationId xmlns:a16="http://schemas.microsoft.com/office/drawing/2014/main" id="{88E4CA65-30A1-4630-B5D0-372D6AB31B7B}"/>
               </a:ext>
             </a:extLst>
           </p:cNvPr>
@@ -10350,7 +11658,7 @@
           <p:cNvPr id="9" name="program-copy">
             <a:extLst xmlns:a="http://schemas.openxmlformats.org/drawingml/2006/main">
               <a:ext uri="{FF2B5EF4-FFF2-40B4-BE49-F238E27FC236}">
-                <a16:creationId xmlns:a16="http://schemas.microsoft.com/office/drawing/2014/main" id="{40691E1B-225A-4C76-97DE-7DEAE93EB062}"/>
+                <a16:creationId xmlns:a16="http://schemas.microsoft.com/office/drawing/2014/main" id="{A549CC06-E103-47A5-B4C5-7A7034BFB9BF}"/>
               </a:ext>
             </a:extLst>
           </p:cNvPr>
@@ -10412,7 +11720,7 @@
           <p:cNvPr id="10" name="comparison-field">
             <a:extLst xmlns:a="http://schemas.openxmlformats.org/drawingml/2006/main">
               <a:ext uri="{FF2B5EF4-FFF2-40B4-BE49-F238E27FC236}">
-                <a16:creationId xmlns:a16="http://schemas.microsoft.com/office/drawing/2014/main" id="{DC4F1069-15E0-45FB-9C22-F969461F5CB7}"/>
+                <a16:creationId xmlns:a16="http://schemas.microsoft.com/office/drawing/2014/main" id="{F6A6DD0A-CA3F-4C52-8CAA-5A3E7BC8A1CE}"/>
               </a:ext>
             </a:extLst>
           </p:cNvPr>
@@ -10443,7 +11751,7 @@
           <p:cNvPr id="11" name="">
             <a:extLst xmlns:a="http://schemas.openxmlformats.org/drawingml/2006/main">
               <a:ext uri="{FF2B5EF4-FFF2-40B4-BE49-F238E27FC236}">
-                <a16:creationId xmlns:a16="http://schemas.microsoft.com/office/drawing/2014/main" id="{0084E14D-08ED-4737-BE76-967DDAE2F039}"/>
+                <a16:creationId xmlns:a16="http://schemas.microsoft.com/office/drawing/2014/main" id="{3C2330B3-1DA8-42D0-913B-17DFE2AD31F0}"/>
               </a:ext>
             </a:extLst>
           </p:cNvPr>
@@ -10505,7 +11813,7 @@
           <p:cNvPr id="12" name="comparison-copy">
             <a:extLst xmlns:a="http://schemas.openxmlformats.org/drawingml/2006/main">
               <a:ext uri="{FF2B5EF4-FFF2-40B4-BE49-F238E27FC236}">
-                <a16:creationId xmlns:a16="http://schemas.microsoft.com/office/drawing/2014/main" id="{C67759F6-450A-4464-99FC-C5E7C28F95B8}"/>
+                <a16:creationId xmlns:a16="http://schemas.microsoft.com/office/drawing/2014/main" id="{6152C0A5-F022-4978-A128-CCAC137405FB}"/>
               </a:ext>
             </a:extLst>
           </p:cNvPr>
@@ -10567,7 +11875,7 @@
           <p:cNvPr id="13" name="search-time-result">
             <a:extLst xmlns:a="http://schemas.openxmlformats.org/drawingml/2006/main">
               <a:ext uri="{FF2B5EF4-FFF2-40B4-BE49-F238E27FC236}">
-                <a16:creationId xmlns:a16="http://schemas.microsoft.com/office/drawing/2014/main" id="{34A9C10E-DD54-43DE-A700-DBD422BFCFC0}"/>
+                <a16:creationId xmlns:a16="http://schemas.microsoft.com/office/drawing/2014/main" id="{BBA8E02C-8232-41F9-A433-54A69DE1B8E3}"/>
               </a:ext>
             </a:extLst>
           </p:cNvPr>
@@ -10629,7 +11937,7 @@
           <p:cNvPr id="14" name="search-time-label">
             <a:extLst xmlns:a="http://schemas.openxmlformats.org/drawingml/2006/main">
               <a:ext uri="{FF2B5EF4-FFF2-40B4-BE49-F238E27FC236}">
-                <a16:creationId xmlns:a16="http://schemas.microsoft.com/office/drawing/2014/main" id="{90A4240D-16E3-4EA4-A3A3-89A68051DC10}"/>
+                <a16:creationId xmlns:a16="http://schemas.microsoft.com/office/drawing/2014/main" id="{4E4DBCDC-C00D-4F1B-8AB3-90327261D806}"/>
               </a:ext>
             </a:extLst>
           </p:cNvPr>
@@ -10691,7 +11999,7 @@
           <p:cNvPr id="15" name="search-distance-result">
             <a:extLst xmlns:a="http://schemas.openxmlformats.org/drawingml/2006/main">
               <a:ext uri="{FF2B5EF4-FFF2-40B4-BE49-F238E27FC236}">
-                <a16:creationId xmlns:a16="http://schemas.microsoft.com/office/drawing/2014/main" id="{58900076-64BD-4662-B46C-9DA009298D46}"/>
+                <a16:creationId xmlns:a16="http://schemas.microsoft.com/office/drawing/2014/main" id="{EF604496-776A-4016-AC3E-35D921D23E98}"/>
               </a:ext>
             </a:extLst>
           </p:cNvPr>
@@ -10753,7 +12061,7 @@
           <p:cNvPr id="16" name="search-distance-label">
             <a:extLst xmlns:a="http://schemas.openxmlformats.org/drawingml/2006/main">
               <a:ext uri="{FF2B5EF4-FFF2-40B4-BE49-F238E27FC236}">
-                <a16:creationId xmlns:a16="http://schemas.microsoft.com/office/drawing/2014/main" id="{B40B26C8-6728-4AC9-A2D2-A64A5C12BD07}"/>
+                <a16:creationId xmlns:a16="http://schemas.microsoft.com/office/drawing/2014/main" id="{B417CAE3-DC6D-4C96-A2E9-E862EA3DDE3F}"/>
               </a:ext>
             </a:extLst>
           </p:cNvPr>
@@ -10815,7 +12123,7 @@
           <p:cNvPr id="17" name="sfpark-caution">
             <a:extLst xmlns:a="http://schemas.openxmlformats.org/drawingml/2006/main">
               <a:ext uri="{FF2B5EF4-FFF2-40B4-BE49-F238E27FC236}">
-                <a16:creationId xmlns:a16="http://schemas.microsoft.com/office/drawing/2014/main" id="{722A0CBF-1BEB-4DDC-A3DC-2C46B4B1EF55}"/>
+                <a16:creationId xmlns:a16="http://schemas.microsoft.com/office/drawing/2014/main" id="{BB89C193-8B39-416D-84D9-D5111552CD3A}"/>
               </a:ext>
             </a:extLst>
           </p:cNvPr>
@@ -10875,892 +12183,7 @@
     </p:spTree>
     <p:extLst>
       <p:ext uri="{BB962C8B-B14F-4D97-AF65-F5344CB8AC3E}">
-        <p14:creationId xmlns:p14="http://schemas.microsoft.com/office/powerpoint/2010/main" val="2076515483"/>
-      </p:ext>
-    </p:extLst>
-  </p:cSld>
-</p:sld>
-</file>
-
-<file path=ppt/slides/slide19.xml><?xml version="1.0" encoding="utf-8"?>
-<p:sld xmlns:p="http://schemas.openxmlformats.org/presentationml/2006/main">
-  <p:cSld>
-    <p:bg>
-      <p:bgPr>
-        <a:solidFill xmlns:a="http://schemas.openxmlformats.org/drawingml/2006/main">
-          <a:srgbClr val="F7F4ED"/>
-        </a:solidFill>
-      </p:bgPr>
-    </p:bg>
-    <p:spTree>
-      <p:nvGrpSpPr>
-        <p:cNvPr id="1" name=""/>
-        <p:cNvGrpSpPr/>
-        <p:nvPr/>
-      </p:nvGrpSpPr>
-      <p:grpSpPr>
-        <a:xfrm xmlns:a="http://schemas.openxmlformats.org/drawingml/2006/main"/>
-      </p:grpSpPr>
-      <p:sp>
-        <p:nvSpPr>
-          <p:cNvPr id="15" name="accent-rule">
-            <a:extLst xmlns:a="http://schemas.openxmlformats.org/drawingml/2006/main">
-              <a:ext uri="{FF2B5EF4-FFF2-40B4-BE49-F238E27FC236}">
-                <a16:creationId xmlns:a16="http://schemas.microsoft.com/office/drawing/2014/main" id="{E6A1B1F1-44E0-449D-8699-079239261715}"/>
-              </a:ext>
-            </a:extLst>
-          </p:cNvPr>
-          <p:cNvSpPr>
-            <a:spLocks xmlns:a="http://schemas.openxmlformats.org/drawingml/2006/main" noGrp="1"/>
-          </p:cNvSpPr>
-          <p:nvPr/>
-        </p:nvSpPr>
-        <p:spPr>
-          <a:xfrm xmlns:a="http://schemas.openxmlformats.org/drawingml/2006/main">
-            <a:off x="514350" y="400050"/>
-            <a:ext cx="685800" cy="57150"/>
-          </a:xfrm>
-          <a:prstGeom xmlns:a="http://schemas.openxmlformats.org/drawingml/2006/main" prst="rect">
-            <a:avLst/>
-          </a:prstGeom>
-          <a:solidFill xmlns:a="http://schemas.openxmlformats.org/drawingml/2006/main">
-            <a:srgbClr val="9A3B35"/>
-          </a:solidFill>
-          <a:ln xmlns:a="http://schemas.openxmlformats.org/drawingml/2006/main" w="0">
-            <a:noFill/>
-            <a:prstDash val="solid"/>
-          </a:ln>
-        </p:spPr>
-      </p:sp>
-      <p:sp>
-        <p:nvSpPr>
-          <p:cNvPr id="2" name="chapter-label">
-            <a:extLst xmlns:a="http://schemas.openxmlformats.org/drawingml/2006/main">
-              <a:ext uri="{FF2B5EF4-FFF2-40B4-BE49-F238E27FC236}">
-                <a16:creationId xmlns:a16="http://schemas.microsoft.com/office/drawing/2014/main" id="{B7D33409-BAA7-4D0A-8B74-4EED434FA574}"/>
-              </a:ext>
-            </a:extLst>
-          </p:cNvPr>
-          <p:cNvSpPr>
-            <a:spLocks xmlns:a="http://schemas.openxmlformats.org/drawingml/2006/main" noGrp="1"/>
-          </p:cNvSpPr>
-          <p:nvPr/>
-        </p:nvSpPr>
-        <p:spPr>
-          <a:xfrm xmlns:a="http://schemas.openxmlformats.org/drawingml/2006/main">
-            <a:off x="1390650" y="304800"/>
-            <a:ext cx="1428750" cy="228600"/>
-          </a:xfrm>
-          <a:prstGeom xmlns:a="http://schemas.openxmlformats.org/drawingml/2006/main" prst="rect">
-            <a:avLst/>
-          </a:prstGeom>
-          <a:noFill xmlns:a="http://schemas.openxmlformats.org/drawingml/2006/main"/>
-          <a:ln xmlns:a="http://schemas.openxmlformats.org/drawingml/2006/main" w="0">
-            <a:noFill/>
-            <a:prstDash val="solid"/>
-          </a:ln>
-        </p:spPr>
-        <p:txBody>
-          <a:bodyPr xmlns:a="http://schemas.openxmlformats.org/drawingml/2006/main" lIns="0" tIns="0" rIns="0" bIns="0" anchor="t">
-            <a:normAutofit fontScale="100000"/>
-          </a:bodyPr>
-          <a:lstStyle xmlns:a="http://schemas.openxmlformats.org/drawingml/2006/main"/>
-          <a:p xmlns:a="http://schemas.openxmlformats.org/drawingml/2006/main">
-            <a:pPr algn="l">
-              <a:lnSpc>
-                <a:spcPct val="108000"/>
-              </a:lnSpc>
-              <a:buNone/>
-              <a:defRPr sz="1050" b="1" i="0">
-                <a:solidFill>
-                  <a:srgbClr val="9A3B35"/>
-                </a:solidFill>
-                <a:latin typeface="Aptos"/>
-                <a:ea typeface="Aptos"/>
-                <a:cs typeface="Aptos"/>
-              </a:defRPr>
-            </a:pPr>
-            <a:r>
-              <a:rPr sz="1050" b="1" i="0">
-                <a:solidFill>
-                  <a:srgbClr val="9A3B35"/>
-                </a:solidFill>
-                <a:latin typeface="Aptos"/>
-                <a:ea typeface="Aptos"/>
-                <a:cs typeface="Aptos"/>
-              </a:rPr>
-              <a:t>CHAPTER 1</a:t>
-            </a:r>
-          </a:p>
-        </p:txBody>
-      </p:sp>
-      <p:sp>
-        <p:nvSpPr>
-          <p:cNvPr id="3" name="slide-title">
-            <a:extLst xmlns:a="http://schemas.openxmlformats.org/drawingml/2006/main">
-              <a:ext uri="{FF2B5EF4-FFF2-40B4-BE49-F238E27FC236}">
-                <a16:creationId xmlns:a16="http://schemas.microsoft.com/office/drawing/2014/main" id="{7D025659-25D3-43B2-B94F-06B9F44048A3}"/>
-              </a:ext>
-            </a:extLst>
-          </p:cNvPr>
-          <p:cNvSpPr>
-            <a:spLocks xmlns:a="http://schemas.openxmlformats.org/drawingml/2006/main" noGrp="1"/>
-          </p:cNvSpPr>
-          <p:nvPr/>
-        </p:nvSpPr>
-        <p:spPr>
-          <a:xfrm xmlns:a="http://schemas.openxmlformats.org/drawingml/2006/main">
-            <a:off x="609600" y="685800"/>
-            <a:ext cx="10972800" cy="647700"/>
-          </a:xfrm>
-          <a:prstGeom xmlns:a="http://schemas.openxmlformats.org/drawingml/2006/main" prst="rect">
-            <a:avLst/>
-          </a:prstGeom>
-          <a:noFill xmlns:a="http://schemas.openxmlformats.org/drawingml/2006/main"/>
-          <a:ln xmlns:a="http://schemas.openxmlformats.org/drawingml/2006/main" w="0">
-            <a:noFill/>
-            <a:prstDash val="solid"/>
-          </a:ln>
-        </p:spPr>
-        <p:txBody>
-          <a:bodyPr xmlns:a="http://schemas.openxmlformats.org/drawingml/2006/main" lIns="0" tIns="0" rIns="0" bIns="0" anchor="t">
-            <a:normAutofit fontScale="100000"/>
-          </a:bodyPr>
-          <a:lstStyle xmlns:a="http://schemas.openxmlformats.org/drawingml/2006/main"/>
-          <a:p xmlns:a="http://schemas.openxmlformats.org/drawingml/2006/main">
-            <a:pPr algn="l">
-              <a:lnSpc>
-                <a:spcPct val="108000"/>
-              </a:lnSpc>
-              <a:buNone/>
-              <a:defRPr sz="3150" b="1" i="0">
-                <a:solidFill>
-                  <a:srgbClr val="172126"/>
-                </a:solidFill>
-                <a:latin typeface="Georgia"/>
-                <a:ea typeface="Georgia"/>
-                <a:cs typeface="Georgia"/>
-              </a:defRPr>
-            </a:pPr>
-            <a:r>
-              <a:rPr sz="3150" b="1" i="0">
-                <a:solidFill>
-                  <a:srgbClr val="172126"/>
-                </a:solidFill>
-                <a:latin typeface="Georgia"/>
-                <a:ea typeface="Georgia"/>
-                <a:cs typeface="Georgia"/>
-              </a:rPr>
-              <a:t>Facts and values answer different questions</a:t>
-            </a:r>
-          </a:p>
-        </p:txBody>
-      </p:sp>
-      <p:sp>
-        <p:nvSpPr>
-          <p:cNvPr id="4" name="footer-rule">
-            <a:extLst xmlns:a="http://schemas.openxmlformats.org/drawingml/2006/main">
-              <a:ext uri="{FF2B5EF4-FFF2-40B4-BE49-F238E27FC236}">
-                <a16:creationId xmlns:a16="http://schemas.microsoft.com/office/drawing/2014/main" id="{F1494605-B521-4BFA-B950-82391A06A415}"/>
-              </a:ext>
-            </a:extLst>
-          </p:cNvPr>
-          <p:cNvSpPr>
-            <a:spLocks xmlns:a="http://schemas.openxmlformats.org/drawingml/2006/main" noGrp="1"/>
-          </p:cNvSpPr>
-          <p:nvPr/>
-        </p:nvSpPr>
-        <p:spPr>
-          <a:xfrm xmlns:a="http://schemas.openxmlformats.org/drawingml/2006/main">
-            <a:off x="609600" y="6419850"/>
-            <a:ext cx="10972800" cy="9525"/>
-          </a:xfrm>
-          <a:prstGeom xmlns:a="http://schemas.openxmlformats.org/drawingml/2006/main" prst="rect">
-            <a:avLst/>
-          </a:prstGeom>
-          <a:solidFill xmlns:a="http://schemas.openxmlformats.org/drawingml/2006/main">
-            <a:srgbClr val="D3DADD"/>
-          </a:solidFill>
-          <a:ln xmlns:a="http://schemas.openxmlformats.org/drawingml/2006/main" w="0">
-            <a:noFill/>
-            <a:prstDash val="solid"/>
-          </a:ln>
-        </p:spPr>
-      </p:sp>
-      <p:sp>
-        <p:nvSpPr>
-          <p:cNvPr id="5" name="footer-book">
-            <a:extLst xmlns:a="http://schemas.openxmlformats.org/drawingml/2006/main">
-              <a:ext uri="{FF2B5EF4-FFF2-40B4-BE49-F238E27FC236}">
-                <a16:creationId xmlns:a16="http://schemas.microsoft.com/office/drawing/2014/main" id="{E3530F25-E539-4FE0-9E62-366EBDD51365}"/>
-              </a:ext>
-            </a:extLst>
-          </p:cNvPr>
-          <p:cNvSpPr>
-            <a:spLocks xmlns:a="http://schemas.openxmlformats.org/drawingml/2006/main" noGrp="1"/>
-          </p:cNvSpPr>
-          <p:nvPr/>
-        </p:nvSpPr>
-        <p:spPr>
-          <a:xfrm xmlns:a="http://schemas.openxmlformats.org/drawingml/2006/main">
-            <a:off x="609600" y="6515100"/>
-            <a:ext cx="2095500" cy="190500"/>
-          </a:xfrm>
-          <a:prstGeom xmlns:a="http://schemas.openxmlformats.org/drawingml/2006/main" prst="rect">
-            <a:avLst/>
-          </a:prstGeom>
-          <a:noFill xmlns:a="http://schemas.openxmlformats.org/drawingml/2006/main"/>
-          <a:ln xmlns:a="http://schemas.openxmlformats.org/drawingml/2006/main" w="0">
-            <a:noFill/>
-            <a:prstDash val="solid"/>
-          </a:ln>
-        </p:spPr>
-        <p:txBody>
-          <a:bodyPr xmlns:a="http://schemas.openxmlformats.org/drawingml/2006/main" lIns="0" tIns="0" rIns="0" bIns="0" anchor="t">
-            <a:normAutofit fontScale="100000"/>
-          </a:bodyPr>
-          <a:lstStyle xmlns:a="http://schemas.openxmlformats.org/drawingml/2006/main"/>
-          <a:p xmlns:a="http://schemas.openxmlformats.org/drawingml/2006/main">
-            <a:pPr algn="l">
-              <a:lnSpc>
-                <a:spcPct val="108000"/>
-              </a:lnSpc>
-              <a:buNone/>
-              <a:defRPr sz="900" b="1" i="0">
-                <a:solidFill>
-                  <a:srgbClr val="56636A"/>
-                </a:solidFill>
-                <a:latin typeface="Aptos"/>
-                <a:ea typeface="Aptos"/>
-                <a:cs typeface="Aptos"/>
-              </a:defRPr>
-            </a:pPr>
-            <a:r>
-              <a:rPr sz="900" b="1" i="0">
-                <a:solidFill>
-                  <a:srgbClr val="56636A"/>
-                </a:solidFill>
-                <a:latin typeface="Aptos"/>
-                <a:ea typeface="Aptos"/>
-                <a:cs typeface="Aptos"/>
-              </a:rPr>
-              <a:t>PRINCIPLES OF MICRO</a:t>
-            </a:r>
-          </a:p>
-        </p:txBody>
-      </p:sp>
-      <p:sp>
-        <p:nvSpPr>
-          <p:cNvPr id="6" name="footer-number">
-            <a:extLst xmlns:a="http://schemas.openxmlformats.org/drawingml/2006/main">
-              <a:ext uri="{FF2B5EF4-FFF2-40B4-BE49-F238E27FC236}">
-                <a16:creationId xmlns:a16="http://schemas.microsoft.com/office/drawing/2014/main" id="{3FF0D932-F978-4AAB-BB1D-095274CD4BC2}"/>
-              </a:ext>
-            </a:extLst>
-          </p:cNvPr>
-          <p:cNvSpPr>
-            <a:spLocks xmlns:a="http://schemas.openxmlformats.org/drawingml/2006/main" noGrp="1"/>
-          </p:cNvSpPr>
-          <p:nvPr/>
-        </p:nvSpPr>
-        <p:spPr>
-          <a:xfrm xmlns:a="http://schemas.openxmlformats.org/drawingml/2006/main">
-            <a:off x="11049000" y="6496050"/>
-            <a:ext cx="533400" cy="190500"/>
-          </a:xfrm>
-          <a:prstGeom xmlns:a="http://schemas.openxmlformats.org/drawingml/2006/main" prst="rect">
-            <a:avLst/>
-          </a:prstGeom>
-          <a:noFill xmlns:a="http://schemas.openxmlformats.org/drawingml/2006/main"/>
-          <a:ln xmlns:a="http://schemas.openxmlformats.org/drawingml/2006/main" w="0">
-            <a:noFill/>
-            <a:prstDash val="solid"/>
-          </a:ln>
-        </p:spPr>
-        <p:txBody>
-          <a:bodyPr xmlns:a="http://schemas.openxmlformats.org/drawingml/2006/main" lIns="0" tIns="0" rIns="0" bIns="0" anchor="t">
-            <a:normAutofit fontScale="100000"/>
-          </a:bodyPr>
-          <a:lstStyle xmlns:a="http://schemas.openxmlformats.org/drawingml/2006/main"/>
-          <a:p xmlns:a="http://schemas.openxmlformats.org/drawingml/2006/main">
-            <a:pPr algn="r">
-              <a:lnSpc>
-                <a:spcPct val="108000"/>
-              </a:lnSpc>
-              <a:buNone/>
-              <a:defRPr sz="900" b="0" i="0">
-                <a:solidFill>
-                  <a:srgbClr val="56636A"/>
-                </a:solidFill>
-                <a:latin typeface="Aptos"/>
-                <a:ea typeface="Aptos"/>
-                <a:cs typeface="Aptos"/>
-              </a:defRPr>
-            </a:pPr>
-            <a:r>
-              <a:rPr sz="900" b="0" i="0">
-                <a:solidFill>
-                  <a:srgbClr val="56636A"/>
-                </a:solidFill>
-                <a:latin typeface="Aptos"/>
-                <a:ea typeface="Aptos"/>
-                <a:cs typeface="Aptos"/>
-              </a:rPr>
-              <a:t>19</a:t>
-            </a:r>
-          </a:p>
-        </p:txBody>
-      </p:sp>
-      <p:sp>
-        <p:nvSpPr>
-          <p:cNvPr id="7" name="positive-heading">
-            <a:extLst xmlns:a="http://schemas.openxmlformats.org/drawingml/2006/main">
-              <a:ext uri="{FF2B5EF4-FFF2-40B4-BE49-F238E27FC236}">
-                <a16:creationId xmlns:a16="http://schemas.microsoft.com/office/drawing/2014/main" id="{FBFED926-6135-4B5D-9C50-AD864D014A3D}"/>
-              </a:ext>
-            </a:extLst>
-          </p:cNvPr>
-          <p:cNvSpPr>
-            <a:spLocks xmlns:a="http://schemas.openxmlformats.org/drawingml/2006/main" noGrp="1"/>
-          </p:cNvSpPr>
-          <p:nvPr/>
-        </p:nvSpPr>
-        <p:spPr>
-          <a:xfrm xmlns:a="http://schemas.openxmlformats.org/drawingml/2006/main">
-            <a:off x="952500" y="1790700"/>
-            <a:ext cx="3810000" cy="609600"/>
-          </a:xfrm>
-          <a:prstGeom xmlns:a="http://schemas.openxmlformats.org/drawingml/2006/main" prst="rect">
-            <a:avLst/>
-          </a:prstGeom>
-          <a:noFill xmlns:a="http://schemas.openxmlformats.org/drawingml/2006/main"/>
-          <a:ln xmlns:a="http://schemas.openxmlformats.org/drawingml/2006/main" w="0">
-            <a:noFill/>
-            <a:prstDash val="solid"/>
-          </a:ln>
-        </p:spPr>
-        <p:txBody>
-          <a:bodyPr xmlns:a="http://schemas.openxmlformats.org/drawingml/2006/main" lIns="0" tIns="0" rIns="0" bIns="0" anchor="t">
-            <a:normAutofit fontScale="100000"/>
-          </a:bodyPr>
-          <a:lstStyle xmlns:a="http://schemas.openxmlformats.org/drawingml/2006/main"/>
-          <a:p xmlns:a="http://schemas.openxmlformats.org/drawingml/2006/main">
-            <a:pPr algn="l">
-              <a:lnSpc>
-                <a:spcPct val="108000"/>
-              </a:lnSpc>
-              <a:buNone/>
-              <a:defRPr sz="3150" b="1" i="0">
-                <a:solidFill>
-                  <a:srgbClr val="1E6675"/>
-                </a:solidFill>
-                <a:latin typeface="Georgia"/>
-                <a:ea typeface="Georgia"/>
-                <a:cs typeface="Georgia"/>
-              </a:defRPr>
-            </a:pPr>
-            <a:r>
-              <a:rPr sz="3150" b="1" i="0">
-                <a:solidFill>
-                  <a:srgbClr val="1E6675"/>
-                </a:solidFill>
-                <a:latin typeface="Georgia"/>
-                <a:ea typeface="Georgia"/>
-                <a:cs typeface="Georgia"/>
-              </a:rPr>
-              <a:t>Positive</a:t>
-            </a:r>
-          </a:p>
-        </p:txBody>
-      </p:sp>
-      <p:sp>
-        <p:nvSpPr>
-          <p:cNvPr id="8" name="positive-questions">
-            <a:extLst xmlns:a="http://schemas.openxmlformats.org/drawingml/2006/main">
-              <a:ext uri="{FF2B5EF4-FFF2-40B4-BE49-F238E27FC236}">
-                <a16:creationId xmlns:a16="http://schemas.microsoft.com/office/drawing/2014/main" id="{34631E00-449A-4EA0-B5D9-D74D6FD83E89}"/>
-              </a:ext>
-            </a:extLst>
-          </p:cNvPr>
-          <p:cNvSpPr>
-            <a:spLocks xmlns:a="http://schemas.openxmlformats.org/drawingml/2006/main" noGrp="1"/>
-          </p:cNvSpPr>
-          <p:nvPr/>
-        </p:nvSpPr>
-        <p:spPr>
-          <a:xfrm xmlns:a="http://schemas.openxmlformats.org/drawingml/2006/main">
-            <a:off x="971550" y="2647950"/>
-            <a:ext cx="4000500" cy="1428750"/>
-          </a:xfrm>
-          <a:prstGeom xmlns:a="http://schemas.openxmlformats.org/drawingml/2006/main" prst="rect">
-            <a:avLst/>
-          </a:prstGeom>
-          <a:noFill xmlns:a="http://schemas.openxmlformats.org/drawingml/2006/main"/>
-          <a:ln xmlns:a="http://schemas.openxmlformats.org/drawingml/2006/main" w="0">
-            <a:noFill/>
-            <a:prstDash val="solid"/>
-          </a:ln>
-        </p:spPr>
-        <p:txBody>
-          <a:bodyPr xmlns:a="http://schemas.openxmlformats.org/drawingml/2006/main" lIns="0" tIns="0" rIns="0" bIns="0" anchor="t">
-            <a:normAutofit fontScale="100000"/>
-          </a:bodyPr>
-          <a:lstStyle xmlns:a="http://schemas.openxmlformats.org/drawingml/2006/main"/>
-          <a:p xmlns:a="http://schemas.openxmlformats.org/drawingml/2006/main">
-            <a:pPr algn="l">
-              <a:lnSpc>
-                <a:spcPct val="108000"/>
-              </a:lnSpc>
-              <a:buNone/>
-              <a:defRPr sz="2100" b="0" i="0">
-                <a:solidFill>
-                  <a:srgbClr val="172126"/>
-                </a:solidFill>
-                <a:latin typeface="Aptos"/>
-                <a:ea typeface="Aptos"/>
-                <a:cs typeface="Aptos"/>
-              </a:defRPr>
-            </a:pPr>
-            <a:r>
-              <a:rPr sz="2100" b="0" i="0">
-                <a:solidFill>
-                  <a:srgbClr val="172126"/>
-                </a:solidFill>
-                <a:latin typeface="Aptos"/>
-                <a:ea typeface="Aptos"/>
-                <a:cs typeface="Aptos"/>
-              </a:rPr>
-              <a:t>What happened?</a:t>
-            </a:r>
-          </a:p>
-          <a:p xmlns:a="http://schemas.openxmlformats.org/drawingml/2006/main">
-            <a:pPr algn="l">
-              <a:lnSpc>
-                <a:spcPct val="108000"/>
-              </a:lnSpc>
-              <a:buNone/>
-              <a:defRPr sz="2100" b="0" i="0">
-                <a:solidFill>
-                  <a:srgbClr val="172126"/>
-                </a:solidFill>
-                <a:latin typeface="Aptos"/>
-                <a:ea typeface="Aptos"/>
-                <a:cs typeface="Aptos"/>
-              </a:defRPr>
-            </a:pPr>
-            <a:r>
-              <a:rPr sz="2100" b="0" i="0">
-                <a:solidFill>
-                  <a:srgbClr val="172126"/>
-                </a:solidFill>
-                <a:latin typeface="Aptos"/>
-                <a:ea typeface="Aptos"/>
-                <a:cs typeface="Aptos"/>
-              </a:rPr>
-              <a:t>Why?</a:t>
-            </a:r>
-          </a:p>
-          <a:p xmlns:a="http://schemas.openxmlformats.org/drawingml/2006/main">
-            <a:pPr algn="l">
-              <a:lnSpc>
-                <a:spcPct val="108000"/>
-              </a:lnSpc>
-              <a:buNone/>
-              <a:defRPr sz="2100" b="0" i="0">
-                <a:solidFill>
-                  <a:srgbClr val="172126"/>
-                </a:solidFill>
-                <a:latin typeface="Aptos"/>
-                <a:ea typeface="Aptos"/>
-                <a:cs typeface="Aptos"/>
-              </a:defRPr>
-            </a:pPr>
-            <a:r>
-              <a:rPr sz="2100" b="0" i="0">
-                <a:solidFill>
-                  <a:srgbClr val="172126"/>
-                </a:solidFill>
-                <a:latin typeface="Aptos"/>
-                <a:ea typeface="Aptos"/>
-                <a:cs typeface="Aptos"/>
-              </a:rPr>
-              <a:t>What is likely to happen?</a:t>
-            </a:r>
-          </a:p>
-        </p:txBody>
-      </p:sp>
-      <p:sp>
-        <p:nvSpPr>
-          <p:cNvPr id="9" name="positive-requires">
-            <a:extLst xmlns:a="http://schemas.openxmlformats.org/drawingml/2006/main">
-              <a:ext uri="{FF2B5EF4-FFF2-40B4-BE49-F238E27FC236}">
-                <a16:creationId xmlns:a16="http://schemas.microsoft.com/office/drawing/2014/main" id="{123C6645-C3F5-42AE-B9F9-BB99F48B5B99}"/>
-              </a:ext>
-            </a:extLst>
-          </p:cNvPr>
-          <p:cNvSpPr>
-            <a:spLocks xmlns:a="http://schemas.openxmlformats.org/drawingml/2006/main" noGrp="1"/>
-          </p:cNvSpPr>
-          <p:nvPr/>
-        </p:nvSpPr>
-        <p:spPr>
-          <a:xfrm xmlns:a="http://schemas.openxmlformats.org/drawingml/2006/main">
-            <a:off x="971550" y="4457700"/>
-            <a:ext cx="3429000" cy="400050"/>
-          </a:xfrm>
-          <a:prstGeom xmlns:a="http://schemas.openxmlformats.org/drawingml/2006/main" prst="rect">
-            <a:avLst/>
-          </a:prstGeom>
-          <a:noFill xmlns:a="http://schemas.openxmlformats.org/drawingml/2006/main"/>
-          <a:ln xmlns:a="http://schemas.openxmlformats.org/drawingml/2006/main" w="0">
-            <a:noFill/>
-            <a:prstDash val="solid"/>
-          </a:ln>
-        </p:spPr>
-        <p:txBody>
-          <a:bodyPr xmlns:a="http://schemas.openxmlformats.org/drawingml/2006/main" lIns="0" tIns="0" rIns="0" bIns="0" anchor="t">
-            <a:normAutofit fontScale="100000"/>
-          </a:bodyPr>
-          <a:lstStyle xmlns:a="http://schemas.openxmlformats.org/drawingml/2006/main"/>
-          <a:p xmlns:a="http://schemas.openxmlformats.org/drawingml/2006/main">
-            <a:pPr algn="l">
-              <a:lnSpc>
-                <a:spcPct val="108000"/>
-              </a:lnSpc>
-              <a:buNone/>
-              <a:defRPr sz="1725" b="1" i="0">
-                <a:solidFill>
-                  <a:srgbClr val="56636A"/>
-                </a:solidFill>
-                <a:latin typeface="Aptos"/>
-                <a:ea typeface="Aptos"/>
-                <a:cs typeface="Aptos"/>
-              </a:defRPr>
-            </a:pPr>
-            <a:r>
-              <a:rPr sz="1725" b="1" i="0">
-                <a:solidFill>
-                  <a:srgbClr val="56636A"/>
-                </a:solidFill>
-                <a:latin typeface="Aptos"/>
-                <a:ea typeface="Aptos"/>
-                <a:cs typeface="Aptos"/>
-              </a:rPr>
-              <a:t>Requires evidence</a:t>
-            </a:r>
-          </a:p>
-        </p:txBody>
-      </p:sp>
-      <p:sp>
-        <p:nvSpPr>
-          <p:cNvPr id="10" name="positive-normative-divider">
-            <a:extLst xmlns:a="http://schemas.openxmlformats.org/drawingml/2006/main">
-              <a:ext uri="{FF2B5EF4-FFF2-40B4-BE49-F238E27FC236}">
-                <a16:creationId xmlns:a16="http://schemas.microsoft.com/office/drawing/2014/main" id="{036C961F-6633-4923-B3FE-D712A53BEABD}"/>
-              </a:ext>
-            </a:extLst>
-          </p:cNvPr>
-          <p:cNvSpPr>
-            <a:spLocks xmlns:a="http://schemas.openxmlformats.org/drawingml/2006/main" noGrp="1"/>
-          </p:cNvSpPr>
-          <p:nvPr/>
-        </p:nvSpPr>
-        <p:spPr>
-          <a:xfrm xmlns:a="http://schemas.openxmlformats.org/drawingml/2006/main">
-            <a:off x="5905500" y="1676400"/>
-            <a:ext cx="19050" cy="3619500"/>
-          </a:xfrm>
-          <a:prstGeom xmlns:a="http://schemas.openxmlformats.org/drawingml/2006/main" prst="rect">
-            <a:avLst/>
-          </a:prstGeom>
-          <a:solidFill xmlns:a="http://schemas.openxmlformats.org/drawingml/2006/main">
-            <a:srgbClr val="D3DADD"/>
-          </a:solidFill>
-          <a:ln xmlns:a="http://schemas.openxmlformats.org/drawingml/2006/main" w="0">
-            <a:noFill/>
-            <a:prstDash val="solid"/>
-          </a:ln>
-        </p:spPr>
-      </p:sp>
-      <p:sp>
-        <p:nvSpPr>
-          <p:cNvPr id="11" name="normative-heading">
-            <a:extLst xmlns:a="http://schemas.openxmlformats.org/drawingml/2006/main">
-              <a:ext uri="{FF2B5EF4-FFF2-40B4-BE49-F238E27FC236}">
-                <a16:creationId xmlns:a16="http://schemas.microsoft.com/office/drawing/2014/main" id="{57E50451-46D4-4E1B-B668-2A03299E9E11}"/>
-              </a:ext>
-            </a:extLst>
-          </p:cNvPr>
-          <p:cNvSpPr>
-            <a:spLocks xmlns:a="http://schemas.openxmlformats.org/drawingml/2006/main" noGrp="1"/>
-          </p:cNvSpPr>
-          <p:nvPr/>
-        </p:nvSpPr>
-        <p:spPr>
-          <a:xfrm xmlns:a="http://schemas.openxmlformats.org/drawingml/2006/main">
-            <a:off x="6572250" y="1790700"/>
-            <a:ext cx="3810000" cy="609600"/>
-          </a:xfrm>
-          <a:prstGeom xmlns:a="http://schemas.openxmlformats.org/drawingml/2006/main" prst="rect">
-            <a:avLst/>
-          </a:prstGeom>
-          <a:noFill xmlns:a="http://schemas.openxmlformats.org/drawingml/2006/main"/>
-          <a:ln xmlns:a="http://schemas.openxmlformats.org/drawingml/2006/main" w="0">
-            <a:noFill/>
-            <a:prstDash val="solid"/>
-          </a:ln>
-        </p:spPr>
-        <p:txBody>
-          <a:bodyPr xmlns:a="http://schemas.openxmlformats.org/drawingml/2006/main" lIns="0" tIns="0" rIns="0" bIns="0" anchor="t">
-            <a:normAutofit fontScale="100000"/>
-          </a:bodyPr>
-          <a:lstStyle xmlns:a="http://schemas.openxmlformats.org/drawingml/2006/main"/>
-          <a:p xmlns:a="http://schemas.openxmlformats.org/drawingml/2006/main">
-            <a:pPr algn="l">
-              <a:lnSpc>
-                <a:spcPct val="108000"/>
-              </a:lnSpc>
-              <a:buNone/>
-              <a:defRPr sz="3150" b="1" i="0">
-                <a:solidFill>
-                  <a:srgbClr val="9A3B35"/>
-                </a:solidFill>
-                <a:latin typeface="Georgia"/>
-                <a:ea typeface="Georgia"/>
-                <a:cs typeface="Georgia"/>
-              </a:defRPr>
-            </a:pPr>
-            <a:r>
-              <a:rPr sz="3150" b="1" i="0">
-                <a:solidFill>
-                  <a:srgbClr val="9A3B35"/>
-                </a:solidFill>
-                <a:latin typeface="Georgia"/>
-                <a:ea typeface="Georgia"/>
-                <a:cs typeface="Georgia"/>
-              </a:rPr>
-              <a:t>Normative</a:t>
-            </a:r>
-          </a:p>
-        </p:txBody>
-      </p:sp>
-      <p:sp>
-        <p:nvSpPr>
-          <p:cNvPr id="12" name="normative-questions">
-            <a:extLst xmlns:a="http://schemas.openxmlformats.org/drawingml/2006/main">
-              <a:ext uri="{FF2B5EF4-FFF2-40B4-BE49-F238E27FC236}">
-                <a16:creationId xmlns:a16="http://schemas.microsoft.com/office/drawing/2014/main" id="{72BD0BBF-489E-4B95-9F85-223E7D19F3DB}"/>
-              </a:ext>
-            </a:extLst>
-          </p:cNvPr>
-          <p:cNvSpPr>
-            <a:spLocks xmlns:a="http://schemas.openxmlformats.org/drawingml/2006/main" noGrp="1"/>
-          </p:cNvSpPr>
-          <p:nvPr/>
-        </p:nvSpPr>
-        <p:spPr>
-          <a:xfrm xmlns:a="http://schemas.openxmlformats.org/drawingml/2006/main">
-            <a:off x="6591300" y="2647950"/>
-            <a:ext cx="4095750" cy="1143000"/>
-          </a:xfrm>
-          <a:prstGeom xmlns:a="http://schemas.openxmlformats.org/drawingml/2006/main" prst="rect">
-            <a:avLst/>
-          </a:prstGeom>
-          <a:noFill xmlns:a="http://schemas.openxmlformats.org/drawingml/2006/main"/>
-          <a:ln xmlns:a="http://schemas.openxmlformats.org/drawingml/2006/main" w="0">
-            <a:noFill/>
-            <a:prstDash val="solid"/>
-          </a:ln>
-        </p:spPr>
-        <p:txBody>
-          <a:bodyPr xmlns:a="http://schemas.openxmlformats.org/drawingml/2006/main" lIns="0" tIns="0" rIns="0" bIns="0" anchor="t">
-            <a:normAutofit fontScale="100000"/>
-          </a:bodyPr>
-          <a:lstStyle xmlns:a="http://schemas.openxmlformats.org/drawingml/2006/main"/>
-          <a:p xmlns:a="http://schemas.openxmlformats.org/drawingml/2006/main">
-            <a:pPr algn="l">
-              <a:lnSpc>
-                <a:spcPct val="108000"/>
-              </a:lnSpc>
-              <a:buNone/>
-              <a:defRPr sz="2100" b="0" i="0">
-                <a:solidFill>
-                  <a:srgbClr val="172126"/>
-                </a:solidFill>
-                <a:latin typeface="Aptos"/>
-                <a:ea typeface="Aptos"/>
-                <a:cs typeface="Aptos"/>
-              </a:defRPr>
-            </a:pPr>
-            <a:r>
-              <a:rPr sz="2100" b="0" i="0">
-                <a:solidFill>
-                  <a:srgbClr val="172126"/>
-                </a:solidFill>
-                <a:latin typeface="Aptos"/>
-                <a:ea typeface="Aptos"/>
-                <a:cs typeface="Aptos"/>
-              </a:rPr>
-              <a:t>What should be done?</a:t>
-            </a:r>
-          </a:p>
-          <a:p xmlns:a="http://schemas.openxmlformats.org/drawingml/2006/main">
-            <a:pPr algn="l">
-              <a:lnSpc>
-                <a:spcPct val="108000"/>
-              </a:lnSpc>
-              <a:buNone/>
-              <a:defRPr sz="2100" b="0" i="0">
-                <a:solidFill>
-                  <a:srgbClr val="172126"/>
-                </a:solidFill>
-                <a:latin typeface="Aptos"/>
-                <a:ea typeface="Aptos"/>
-                <a:cs typeface="Aptos"/>
-              </a:defRPr>
-            </a:pPr>
-            <a:r>
-              <a:rPr sz="2100" b="0" i="0">
-                <a:solidFill>
-                  <a:srgbClr val="172126"/>
-                </a:solidFill>
-                <a:latin typeface="Aptos"/>
-                <a:ea typeface="Aptos"/>
-                <a:cs typeface="Aptos"/>
-              </a:rPr>
-              <a:t>Which goals matter most?</a:t>
-            </a:r>
-          </a:p>
-        </p:txBody>
-      </p:sp>
-      <p:sp>
-        <p:nvSpPr>
-          <p:cNvPr id="13" name="normative-requires">
-            <a:extLst xmlns:a="http://schemas.openxmlformats.org/drawingml/2006/main">
-              <a:ext uri="{FF2B5EF4-FFF2-40B4-BE49-F238E27FC236}">
-                <a16:creationId xmlns:a16="http://schemas.microsoft.com/office/drawing/2014/main" id="{E6E86A5B-213A-4F00-BD98-C7900E5EDB32}"/>
-              </a:ext>
-            </a:extLst>
-          </p:cNvPr>
-          <p:cNvSpPr>
-            <a:spLocks xmlns:a="http://schemas.openxmlformats.org/drawingml/2006/main" noGrp="1"/>
-          </p:cNvSpPr>
-          <p:nvPr/>
-        </p:nvSpPr>
-        <p:spPr>
-          <a:xfrm xmlns:a="http://schemas.openxmlformats.org/drawingml/2006/main">
-            <a:off x="6591300" y="4457700"/>
-            <a:ext cx="3810000" cy="400050"/>
-          </a:xfrm>
-          <a:prstGeom xmlns:a="http://schemas.openxmlformats.org/drawingml/2006/main" prst="rect">
-            <a:avLst/>
-          </a:prstGeom>
-          <a:noFill xmlns:a="http://schemas.openxmlformats.org/drawingml/2006/main"/>
-          <a:ln xmlns:a="http://schemas.openxmlformats.org/drawingml/2006/main" w="0">
-            <a:noFill/>
-            <a:prstDash val="solid"/>
-          </a:ln>
-        </p:spPr>
-        <p:txBody>
-          <a:bodyPr xmlns:a="http://schemas.openxmlformats.org/drawingml/2006/main" lIns="0" tIns="0" rIns="0" bIns="0" anchor="t">
-            <a:normAutofit fontScale="100000"/>
-          </a:bodyPr>
-          <a:lstStyle xmlns:a="http://schemas.openxmlformats.org/drawingml/2006/main"/>
-          <a:p xmlns:a="http://schemas.openxmlformats.org/drawingml/2006/main">
-            <a:pPr algn="l">
-              <a:lnSpc>
-                <a:spcPct val="108000"/>
-              </a:lnSpc>
-              <a:buNone/>
-              <a:defRPr sz="1725" b="1" i="0">
-                <a:solidFill>
-                  <a:srgbClr val="56636A"/>
-                </a:solidFill>
-                <a:latin typeface="Aptos"/>
-                <a:ea typeface="Aptos"/>
-                <a:cs typeface="Aptos"/>
-              </a:defRPr>
-            </a:pPr>
-            <a:r>
-              <a:rPr sz="1725" b="1" i="0">
-                <a:solidFill>
-                  <a:srgbClr val="56636A"/>
-                </a:solidFill>
-                <a:latin typeface="Aptos"/>
-                <a:ea typeface="Aptos"/>
-                <a:cs typeface="Aptos"/>
-              </a:rPr>
-              <a:t>Requires evidence and values</a:t>
-            </a:r>
-          </a:p>
-        </p:txBody>
-      </p:sp>
-      <p:sp>
-        <p:nvSpPr>
-          <p:cNvPr id="14" name="positive-normative-close">
-            <a:extLst xmlns:a="http://schemas.openxmlformats.org/drawingml/2006/main">
-              <a:ext uri="{FF2B5EF4-FFF2-40B4-BE49-F238E27FC236}">
-                <a16:creationId xmlns:a16="http://schemas.microsoft.com/office/drawing/2014/main" id="{E3D8369C-14D2-42E0-94BA-7A2373D00B9A}"/>
-              </a:ext>
-            </a:extLst>
-          </p:cNvPr>
-          <p:cNvSpPr>
-            <a:spLocks xmlns:a="http://schemas.openxmlformats.org/drawingml/2006/main" noGrp="1"/>
-          </p:cNvSpPr>
-          <p:nvPr/>
-        </p:nvSpPr>
-        <p:spPr>
-          <a:xfrm xmlns:a="http://schemas.openxmlformats.org/drawingml/2006/main">
-            <a:off x="1333500" y="5448300"/>
-            <a:ext cx="9525000" cy="495300"/>
-          </a:xfrm>
-          <a:prstGeom xmlns:a="http://schemas.openxmlformats.org/drawingml/2006/main" prst="rect">
-            <a:avLst/>
-          </a:prstGeom>
-          <a:noFill xmlns:a="http://schemas.openxmlformats.org/drawingml/2006/main"/>
-          <a:ln xmlns:a="http://schemas.openxmlformats.org/drawingml/2006/main" w="0">
-            <a:noFill/>
-            <a:prstDash val="solid"/>
-          </a:ln>
-        </p:spPr>
-        <p:txBody>
-          <a:bodyPr xmlns:a="http://schemas.openxmlformats.org/drawingml/2006/main" lIns="0" tIns="0" rIns="0" bIns="0" anchor="t">
-            <a:normAutofit fontScale="96946"/>
-          </a:bodyPr>
-          <a:lstStyle xmlns:a="http://schemas.openxmlformats.org/drawingml/2006/main"/>
-          <a:p xmlns:a="http://schemas.openxmlformats.org/drawingml/2006/main">
-            <a:pPr algn="ctr">
-              <a:lnSpc>
-                <a:spcPct val="108000"/>
-              </a:lnSpc>
-              <a:buNone/>
-              <a:defRPr sz="2175" b="1" i="0">
-                <a:solidFill>
-                  <a:srgbClr val="172126"/>
-                </a:solidFill>
-                <a:latin typeface="Georgia"/>
-                <a:ea typeface="Georgia"/>
-                <a:cs typeface="Georgia"/>
-              </a:defRPr>
-            </a:pPr>
-            <a:r>
-              <a:rPr sz="2175" b="1" i="0">
-                <a:solidFill>
-                  <a:srgbClr val="172126"/>
-                </a:solidFill>
-                <a:latin typeface="Georgia"/>
-                <a:ea typeface="Georgia"/>
-                <a:cs typeface="Georgia"/>
-              </a:rPr>
-              <a:t>Evidence can inform a judgment. It cannot make the judgment for us.</a:t>
-            </a:r>
-          </a:p>
-        </p:txBody>
-      </p:sp>
-    </p:spTree>
-    <p:extLst>
-      <p:ext uri="{BB962C8B-B14F-4D97-AF65-F5344CB8AC3E}">
-        <p14:creationId xmlns:p14="http://schemas.microsoft.com/office/powerpoint/2010/main" val="1736889634"/>
+        <p14:creationId xmlns:p14="http://schemas.microsoft.com/office/powerpoint/2010/main" val="194974001"/>
       </p:ext>
     </p:extLst>
   </p:cSld>
@@ -11791,7 +12214,7 @@
           <p:cNvPr id="16" name="accent-rule">
             <a:extLst xmlns:a="http://schemas.openxmlformats.org/drawingml/2006/main">
               <a:ext uri="{FF2B5EF4-FFF2-40B4-BE49-F238E27FC236}">
-                <a16:creationId xmlns:a16="http://schemas.microsoft.com/office/drawing/2014/main" id="{24D0E2CF-2F67-4766-8EAC-A2F1CDE7194A}"/>
+                <a16:creationId xmlns:a16="http://schemas.microsoft.com/office/drawing/2014/main" id="{88F11FF5-C24B-4373-B91E-3A72241B9C0D}"/>
               </a:ext>
             </a:extLst>
           </p:cNvPr>
@@ -11822,7 +12245,7 @@
           <p:cNvPr id="2" name="chapter-label">
             <a:extLst xmlns:a="http://schemas.openxmlformats.org/drawingml/2006/main">
               <a:ext uri="{FF2B5EF4-FFF2-40B4-BE49-F238E27FC236}">
-                <a16:creationId xmlns:a16="http://schemas.microsoft.com/office/drawing/2014/main" id="{A88CE2D5-4E4F-40D3-BDE8-EE60CFC2572A}"/>
+                <a16:creationId xmlns:a16="http://schemas.microsoft.com/office/drawing/2014/main" id="{90AE19FC-885E-4D5C-84AC-A5FE37F4C864}"/>
               </a:ext>
             </a:extLst>
           </p:cNvPr>
@@ -11884,7 +12307,7 @@
           <p:cNvPr id="3" name="slide-title">
             <a:extLst xmlns:a="http://schemas.openxmlformats.org/drawingml/2006/main">
               <a:ext uri="{FF2B5EF4-FFF2-40B4-BE49-F238E27FC236}">
-                <a16:creationId xmlns:a16="http://schemas.microsoft.com/office/drawing/2014/main" id="{AC641DB5-C281-4E94-8882-4B55E05CA30B}"/>
+                <a16:creationId xmlns:a16="http://schemas.microsoft.com/office/drawing/2014/main" id="{2DDE0A69-291C-4E33-B34E-558DCC8D6852}"/>
               </a:ext>
             </a:extLst>
           </p:cNvPr>
@@ -11946,7 +12369,7 @@
           <p:cNvPr id="4" name="footer-rule">
             <a:extLst xmlns:a="http://schemas.openxmlformats.org/drawingml/2006/main">
               <a:ext uri="{FF2B5EF4-FFF2-40B4-BE49-F238E27FC236}">
-                <a16:creationId xmlns:a16="http://schemas.microsoft.com/office/drawing/2014/main" id="{15B02B8E-DF93-4E53-9935-745ED7A55B86}"/>
+                <a16:creationId xmlns:a16="http://schemas.microsoft.com/office/drawing/2014/main" id="{DBB91CBC-8AA1-4421-87ED-4C9F75E73FA6}"/>
               </a:ext>
             </a:extLst>
           </p:cNvPr>
@@ -11977,7 +12400,7 @@
           <p:cNvPr id="5" name="footer-book">
             <a:extLst xmlns:a="http://schemas.openxmlformats.org/drawingml/2006/main">
               <a:ext uri="{FF2B5EF4-FFF2-40B4-BE49-F238E27FC236}">
-                <a16:creationId xmlns:a16="http://schemas.microsoft.com/office/drawing/2014/main" id="{804A2618-9E92-4BF9-AD33-796D669796EC}"/>
+                <a16:creationId xmlns:a16="http://schemas.microsoft.com/office/drawing/2014/main" id="{AB6D1EED-10DF-4087-9D87-C1251E7843D1}"/>
               </a:ext>
             </a:extLst>
           </p:cNvPr>
@@ -12039,7 +12462,7 @@
           <p:cNvPr id="6" name="footer-number">
             <a:extLst xmlns:a="http://schemas.openxmlformats.org/drawingml/2006/main">
               <a:ext uri="{FF2B5EF4-FFF2-40B4-BE49-F238E27FC236}">
-                <a16:creationId xmlns:a16="http://schemas.microsoft.com/office/drawing/2014/main" id="{36F131DA-F6CE-44C3-8A12-A0E73437DFE5}"/>
+                <a16:creationId xmlns:a16="http://schemas.microsoft.com/office/drawing/2014/main" id="{D5FD0069-AEF8-4F89-B0BE-779236BFC2C2}"/>
               </a:ext>
             </a:extLst>
           </p:cNvPr>
@@ -12101,7 +12524,7 @@
           <p:cNvPr id="7" name="oikonomia">
             <a:extLst xmlns:a="http://schemas.openxmlformats.org/drawingml/2006/main">
               <a:ext uri="{FF2B5EF4-FFF2-40B4-BE49-F238E27FC236}">
-                <a16:creationId xmlns:a16="http://schemas.microsoft.com/office/drawing/2014/main" id="{B80DD0DB-C23A-41FF-974C-CCF8ACABC1D2}"/>
+                <a16:creationId xmlns:a16="http://schemas.microsoft.com/office/drawing/2014/main" id="{3486A318-6360-4A43-8BF5-25B2E676E6B4}"/>
               </a:ext>
             </a:extLst>
           </p:cNvPr>
@@ -12163,7 +12586,7 @@
           <p:cNvPr id="8" name="household-meaning">
             <a:extLst xmlns:a="http://schemas.openxmlformats.org/drawingml/2006/main">
               <a:ext uri="{FF2B5EF4-FFF2-40B4-BE49-F238E27FC236}">
-                <a16:creationId xmlns:a16="http://schemas.microsoft.com/office/drawing/2014/main" id="{8C9BE5CF-F2C1-4581-8D38-2C912EEB21EE}"/>
+                <a16:creationId xmlns:a16="http://schemas.microsoft.com/office/drawing/2014/main" id="{67E489AA-A679-4C8A-922C-6BF731088A8F}"/>
               </a:ext>
             </a:extLst>
           </p:cNvPr>
@@ -12225,7 +12648,7 @@
           <p:cNvPr id="9" name="scope-divider">
             <a:extLst xmlns:a="http://schemas.openxmlformats.org/drawingml/2006/main">
               <a:ext uri="{FF2B5EF4-FFF2-40B4-BE49-F238E27FC236}">
-                <a16:creationId xmlns:a16="http://schemas.microsoft.com/office/drawing/2014/main" id="{C0EB3647-3D54-4FBF-AFE0-698807A2C600}"/>
+                <a16:creationId xmlns:a16="http://schemas.microsoft.com/office/drawing/2014/main" id="{729B516E-5120-4983-A13E-E8675C43A0BD}"/>
               </a:ext>
             </a:extLst>
           </p:cNvPr>
@@ -12256,7 +12679,7 @@
           <p:cNvPr id="10" name="modern-question">
             <a:extLst xmlns:a="http://schemas.openxmlformats.org/drawingml/2006/main">
               <a:ext uri="{FF2B5EF4-FFF2-40B4-BE49-F238E27FC236}">
-                <a16:creationId xmlns:a16="http://schemas.microsoft.com/office/drawing/2014/main" id="{E7481524-545A-4A3E-AE7D-9708A3599BA5}"/>
+                <a16:creationId xmlns:a16="http://schemas.microsoft.com/office/drawing/2014/main" id="{FD275480-FD7B-49EF-9A60-156198D4D9A5}"/>
               </a:ext>
             </a:extLst>
           </p:cNvPr>
@@ -12318,7 +12741,7 @@
           <p:cNvPr id="11" name="scope-mark-1">
             <a:extLst xmlns:a="http://schemas.openxmlformats.org/drawingml/2006/main">
               <a:ext uri="{FF2B5EF4-FFF2-40B4-BE49-F238E27FC236}">
-                <a16:creationId xmlns:a16="http://schemas.microsoft.com/office/drawing/2014/main" id="{EA38D2A2-70A6-4BE3-9404-628B038C5951}"/>
+                <a16:creationId xmlns:a16="http://schemas.microsoft.com/office/drawing/2014/main" id="{508290AA-B094-4750-8530-F61C7FDF84F3}"/>
               </a:ext>
             </a:extLst>
           </p:cNvPr>
@@ -12380,7 +12803,7 @@
           <p:cNvPr id="12" name="scope-1">
             <a:extLst xmlns:a="http://schemas.openxmlformats.org/drawingml/2006/main">
               <a:ext uri="{FF2B5EF4-FFF2-40B4-BE49-F238E27FC236}">
-                <a16:creationId xmlns:a16="http://schemas.microsoft.com/office/drawing/2014/main" id="{9CA4A2E1-8512-4DA2-877E-CF0FEDC79A10}"/>
+                <a16:creationId xmlns:a16="http://schemas.microsoft.com/office/drawing/2014/main" id="{72D89E35-49E5-457F-B8FF-47408FF28198}"/>
               </a:ext>
             </a:extLst>
           </p:cNvPr>
@@ -12442,7 +12865,7 @@
           <p:cNvPr id="13" name="scope-mark-2">
             <a:extLst xmlns:a="http://schemas.openxmlformats.org/drawingml/2006/main">
               <a:ext uri="{FF2B5EF4-FFF2-40B4-BE49-F238E27FC236}">
-                <a16:creationId xmlns:a16="http://schemas.microsoft.com/office/drawing/2014/main" id="{DC3A30E7-78BC-4FAB-913E-66A302DA2E0F}"/>
+                <a16:creationId xmlns:a16="http://schemas.microsoft.com/office/drawing/2014/main" id="{DB07397D-A907-4375-A376-3B8A86E4CE1E}"/>
               </a:ext>
             </a:extLst>
           </p:cNvPr>
@@ -12504,7 +12927,7 @@
           <p:cNvPr id="14" name="scope-2">
             <a:extLst xmlns:a="http://schemas.openxmlformats.org/drawingml/2006/main">
               <a:ext uri="{FF2B5EF4-FFF2-40B4-BE49-F238E27FC236}">
-                <a16:creationId xmlns:a16="http://schemas.microsoft.com/office/drawing/2014/main" id="{BE828795-FCC2-4133-8833-836E4117638D}"/>
+                <a16:creationId xmlns:a16="http://schemas.microsoft.com/office/drawing/2014/main" id="{179C87D7-6806-4361-A33C-19488440EFB9}"/>
               </a:ext>
             </a:extLst>
           </p:cNvPr>
@@ -12566,7 +12989,7 @@
           <p:cNvPr id="15" name="scope-close">
             <a:extLst xmlns:a="http://schemas.openxmlformats.org/drawingml/2006/main">
               <a:ext uri="{FF2B5EF4-FFF2-40B4-BE49-F238E27FC236}">
-                <a16:creationId xmlns:a16="http://schemas.microsoft.com/office/drawing/2014/main" id="{499D26E1-523A-4A74-AF16-60BD2DF3A9FA}"/>
+                <a16:creationId xmlns:a16="http://schemas.microsoft.com/office/drawing/2014/main" id="{97487894-73CE-47EA-BC74-B9858C58459E}"/>
               </a:ext>
             </a:extLst>
           </p:cNvPr>
@@ -12626,7 +13049,7 @@
     </p:spTree>
     <p:extLst>
       <p:ext uri="{BB962C8B-B14F-4D97-AF65-F5344CB8AC3E}">
-        <p14:creationId xmlns:p14="http://schemas.microsoft.com/office/powerpoint/2010/main" val="1185104712"/>
+        <p14:creationId xmlns:p14="http://schemas.microsoft.com/office/powerpoint/2010/main" val="1539325812"/>
       </p:ext>
     </p:extLst>
   </p:cSld>
@@ -12654,10 +13077,10 @@
       </p:grpSpPr>
       <p:sp>
         <p:nvSpPr>
-          <p:cNvPr id="13" name="accent-rule">
-            <a:extLst xmlns:a="http://schemas.openxmlformats.org/drawingml/2006/main">
-              <a:ext uri="{FF2B5EF4-FFF2-40B4-BE49-F238E27FC236}">
-                <a16:creationId xmlns:a16="http://schemas.microsoft.com/office/drawing/2014/main" id="{BB12436F-8CFD-4AF0-80AD-D63E8E8A5AF6}"/>
+          <p:cNvPr id="15" name="accent-rule">
+            <a:extLst xmlns:a="http://schemas.openxmlformats.org/drawingml/2006/main">
+              <a:ext uri="{FF2B5EF4-FFF2-40B4-BE49-F238E27FC236}">
+                <a16:creationId xmlns:a16="http://schemas.microsoft.com/office/drawing/2014/main" id="{6D0BFDF8-5663-4B67-802C-400A9DD90F27}"/>
               </a:ext>
             </a:extLst>
           </p:cNvPr>
@@ -12688,7 +13111,7 @@
           <p:cNvPr id="2" name="chapter-label">
             <a:extLst xmlns:a="http://schemas.openxmlformats.org/drawingml/2006/main">
               <a:ext uri="{FF2B5EF4-FFF2-40B4-BE49-F238E27FC236}">
-                <a16:creationId xmlns:a16="http://schemas.microsoft.com/office/drawing/2014/main" id="{94A3219C-3C41-449E-BE18-10D2F4637F0D}"/>
+                <a16:creationId xmlns:a16="http://schemas.microsoft.com/office/drawing/2014/main" id="{93B2F67B-23E2-4451-AC41-A85A2373F0CC}"/>
               </a:ext>
             </a:extLst>
           </p:cNvPr>
@@ -12750,7 +13173,7 @@
           <p:cNvPr id="3" name="slide-title">
             <a:extLst xmlns:a="http://schemas.openxmlformats.org/drawingml/2006/main">
               <a:ext uri="{FF2B5EF4-FFF2-40B4-BE49-F238E27FC236}">
-                <a16:creationId xmlns:a16="http://schemas.microsoft.com/office/drawing/2014/main" id="{37555228-242F-40B1-ADED-D4C1DA5808CC}"/>
+                <a16:creationId xmlns:a16="http://schemas.microsoft.com/office/drawing/2014/main" id="{06077A4C-9A27-4B7B-A25B-AE1C71A47D65}"/>
               </a:ext>
             </a:extLst>
           </p:cNvPr>
@@ -12802,7 +13225,7 @@
                 <a:ea typeface="Georgia"/>
                 <a:cs typeface="Georgia"/>
               </a:rPr>
-              <a:t>The first visible effect is rarely the whole effect</a:t>
+              <a:t>Facts and values answer different questions</a:t>
             </a:r>
           </a:p>
         </p:txBody>
@@ -12812,7 +13235,7 @@
           <p:cNvPr id="4" name="footer-rule">
             <a:extLst xmlns:a="http://schemas.openxmlformats.org/drawingml/2006/main">
               <a:ext uri="{FF2B5EF4-FFF2-40B4-BE49-F238E27FC236}">
-                <a16:creationId xmlns:a16="http://schemas.microsoft.com/office/drawing/2014/main" id="{2087DA54-80F0-41FE-B73B-2D107E6CF5CA}"/>
+                <a16:creationId xmlns:a16="http://schemas.microsoft.com/office/drawing/2014/main" id="{60CCDDC2-A61E-4A11-A54D-90CDB96D6AB2}"/>
               </a:ext>
             </a:extLst>
           </p:cNvPr>
@@ -12843,7 +13266,7 @@
           <p:cNvPr id="5" name="footer-book">
             <a:extLst xmlns:a="http://schemas.openxmlformats.org/drawingml/2006/main">
               <a:ext uri="{FF2B5EF4-FFF2-40B4-BE49-F238E27FC236}">
-                <a16:creationId xmlns:a16="http://schemas.microsoft.com/office/drawing/2014/main" id="{05081F78-112B-40B2-A4D2-912D75891D6B}"/>
+                <a16:creationId xmlns:a16="http://schemas.microsoft.com/office/drawing/2014/main" id="{84048F91-434D-46F2-83A6-F568E9E169E9}"/>
               </a:ext>
             </a:extLst>
           </p:cNvPr>
@@ -12905,7 +13328,7 @@
           <p:cNvPr id="6" name="footer-number">
             <a:extLst xmlns:a="http://schemas.openxmlformats.org/drawingml/2006/main">
               <a:ext uri="{FF2B5EF4-FFF2-40B4-BE49-F238E27FC236}">
-                <a16:creationId xmlns:a16="http://schemas.microsoft.com/office/drawing/2014/main" id="{4359D9A7-BB16-4A4B-8D04-D0DA1211AC35}"/>
+                <a16:creationId xmlns:a16="http://schemas.microsoft.com/office/drawing/2014/main" id="{9841457B-4EB0-4532-BC11-BEB2964D9F8A}"/>
               </a:ext>
             </a:extLst>
           </p:cNvPr>
@@ -12964,22 +13387,22 @@
       </p:sp>
       <p:sp>
         <p:nvSpPr>
-          <p:cNvPr id="7" name="">
-            <a:extLst xmlns:a="http://schemas.openxmlformats.org/drawingml/2006/main">
-              <a:ext uri="{FF2B5EF4-FFF2-40B4-BE49-F238E27FC236}">
-                <a16:creationId xmlns:a16="http://schemas.microsoft.com/office/drawing/2014/main" id="{5811193D-6AA3-4FE9-A858-2A2F7FABF5E9}"/>
-              </a:ext>
-            </a:extLst>
-          </p:cNvPr>
-          <p:cNvSpPr>
-            <a:spLocks xmlns:a="http://schemas.openxmlformats.org/drawingml/2006/main" noGrp="1"/>
-          </p:cNvSpPr>
-          <p:nvPr/>
-        </p:nvSpPr>
-        <p:spPr>
-          <a:xfrm xmlns:a="http://schemas.openxmlformats.org/drawingml/2006/main">
-            <a:off x="990600" y="1847850"/>
-            <a:ext cx="1714500" cy="228600"/>
+          <p:cNvPr id="7" name="positive-heading">
+            <a:extLst xmlns:a="http://schemas.openxmlformats.org/drawingml/2006/main">
+              <a:ext uri="{FF2B5EF4-FFF2-40B4-BE49-F238E27FC236}">
+                <a16:creationId xmlns:a16="http://schemas.microsoft.com/office/drawing/2014/main" id="{6F981A32-199F-4288-8385-BB9331446BA6}"/>
+              </a:ext>
+            </a:extLst>
+          </p:cNvPr>
+          <p:cNvSpPr>
+            <a:spLocks xmlns:a="http://schemas.openxmlformats.org/drawingml/2006/main" noGrp="1"/>
+          </p:cNvSpPr>
+          <p:nvPr/>
+        </p:nvSpPr>
+        <p:spPr>
+          <a:xfrm xmlns:a="http://schemas.openxmlformats.org/drawingml/2006/main">
+            <a:off x="952500" y="1790700"/>
+            <a:ext cx="3810000" cy="609600"/>
           </a:xfrm>
           <a:prstGeom xmlns:a="http://schemas.openxmlformats.org/drawingml/2006/main" prst="rect">
             <a:avLst/>
@@ -13001,47 +13424,47 @@
                 <a:spcPct val="108000"/>
               </a:lnSpc>
               <a:buNone/>
-              <a:defRPr sz="1050" b="1" i="0">
+              <a:defRPr sz="3150" b="1" i="0">
                 <a:solidFill>
                   <a:srgbClr val="1E6675"/>
                 </a:solidFill>
-                <a:latin typeface="Aptos"/>
-                <a:ea typeface="Aptos"/>
-                <a:cs typeface="Aptos"/>
-              </a:defRPr>
-            </a:pPr>
-            <a:r>
-              <a:rPr sz="1050" b="1" i="0">
+                <a:latin typeface="Georgia"/>
+                <a:ea typeface="Georgia"/>
+                <a:cs typeface="Georgia"/>
+              </a:defRPr>
+            </a:pPr>
+            <a:r>
+              <a:rPr sz="3150" b="1" i="0">
                 <a:solidFill>
                   <a:srgbClr val="1E6675"/>
                 </a:solidFill>
-                <a:latin typeface="Aptos"/>
-                <a:ea typeface="Aptos"/>
-                <a:cs typeface="Aptos"/>
-              </a:rPr>
-              <a:t>SEEN</a:t>
-            </a:r>
-          </a:p>
-        </p:txBody>
-      </p:sp>
-      <p:sp>
-        <p:nvSpPr>
-          <p:cNvPr id="8" name="seen-copy">
-            <a:extLst xmlns:a="http://schemas.openxmlformats.org/drawingml/2006/main">
-              <a:ext uri="{FF2B5EF4-FFF2-40B4-BE49-F238E27FC236}">
-                <a16:creationId xmlns:a16="http://schemas.microsoft.com/office/drawing/2014/main" id="{802CD776-1B7B-4D92-A275-9C21BB1A6BBB}"/>
-              </a:ext>
-            </a:extLst>
-          </p:cNvPr>
-          <p:cNvSpPr>
-            <a:spLocks xmlns:a="http://schemas.openxmlformats.org/drawingml/2006/main" noGrp="1"/>
-          </p:cNvSpPr>
-          <p:nvPr/>
-        </p:nvSpPr>
-        <p:spPr>
-          <a:xfrm xmlns:a="http://schemas.openxmlformats.org/drawingml/2006/main">
-            <a:off x="990600" y="2305050"/>
-            <a:ext cx="4286250" cy="1428750"/>
+                <a:latin typeface="Georgia"/>
+                <a:ea typeface="Georgia"/>
+                <a:cs typeface="Georgia"/>
+              </a:rPr>
+              <a:t>Positive</a:t>
+            </a:r>
+          </a:p>
+        </p:txBody>
+      </p:sp>
+      <p:sp>
+        <p:nvSpPr>
+          <p:cNvPr id="8" name="positive-questions">
+            <a:extLst xmlns:a="http://schemas.openxmlformats.org/drawingml/2006/main">
+              <a:ext uri="{FF2B5EF4-FFF2-40B4-BE49-F238E27FC236}">
+                <a16:creationId xmlns:a16="http://schemas.microsoft.com/office/drawing/2014/main" id="{BBAED415-690A-422D-945E-201F7F84DA4E}"/>
+              </a:ext>
+            </a:extLst>
+          </p:cNvPr>
+          <p:cNvSpPr>
+            <a:spLocks xmlns:a="http://schemas.openxmlformats.org/drawingml/2006/main" noGrp="1"/>
+          </p:cNvSpPr>
+          <p:nvPr/>
+        </p:nvSpPr>
+        <p:spPr>
+          <a:xfrm xmlns:a="http://schemas.openxmlformats.org/drawingml/2006/main">
+            <a:off x="971550" y="2647950"/>
+            <a:ext cx="4000500" cy="1428750"/>
           </a:xfrm>
           <a:prstGeom xmlns:a="http://schemas.openxmlformats.org/drawingml/2006/main" prst="rect">
             <a:avLst/>
@@ -13063,7 +13486,7 @@
                 <a:spcPct val="108000"/>
               </a:lnSpc>
               <a:buNone/>
-              <a:defRPr sz="2025" b="0" i="0">
+              <a:defRPr sz="2100" b="0" i="0">
                 <a:solidFill>
                   <a:srgbClr val="172126"/>
                 </a:solidFill>
@@ -13073,7 +13496,7 @@
               </a:defRPr>
             </a:pPr>
             <a:r>
-              <a:rPr sz="2025" b="0" i="0">
+              <a:rPr sz="2100" b="0" i="0">
                 <a:solidFill>
                   <a:srgbClr val="172126"/>
                 </a:solidFill>
@@ -13081,7 +13504,7 @@
                 <a:ea typeface="Aptos"/>
                 <a:cs typeface="Aptos"/>
               </a:rPr>
-              <a:t>The student pays no parking fee.</a:t>
+              <a:t>What happened?</a:t>
             </a:r>
           </a:p>
           <a:p xmlns:a="http://schemas.openxmlformats.org/drawingml/2006/main">
@@ -13090,7 +13513,7 @@
                 <a:spcPct val="108000"/>
               </a:lnSpc>
               <a:buNone/>
-              <a:defRPr sz="2025" b="0" i="0">
+              <a:defRPr sz="2100" b="0" i="0">
                 <a:solidFill>
                   <a:srgbClr val="172126"/>
                 </a:solidFill>
@@ -13100,7 +13523,7 @@
               </a:defRPr>
             </a:pPr>
             <a:r>
-              <a:rPr sz="2025" b="0" i="0">
+              <a:rPr sz="2100" b="0" i="0">
                 <a:solidFill>
                   <a:srgbClr val="172126"/>
                 </a:solidFill>
@@ -13108,29 +13531,118 @@
                 <a:ea typeface="Aptos"/>
                 <a:cs typeface="Aptos"/>
               </a:rPr>
-              <a:t>The glazier is paid to replace a broken window.</a:t>
-            </a:r>
-          </a:p>
-        </p:txBody>
-      </p:sp>
-      <p:sp>
-        <p:nvSpPr>
-          <p:cNvPr id="9" name="seen-divider">
-            <a:extLst xmlns:a="http://schemas.openxmlformats.org/drawingml/2006/main">
-              <a:ext uri="{FF2B5EF4-FFF2-40B4-BE49-F238E27FC236}">
-                <a16:creationId xmlns:a16="http://schemas.microsoft.com/office/drawing/2014/main" id="{B27C0EB1-92A3-431E-9435-0E3C5EADE634}"/>
-              </a:ext>
-            </a:extLst>
-          </p:cNvPr>
-          <p:cNvSpPr>
-            <a:spLocks xmlns:a="http://schemas.openxmlformats.org/drawingml/2006/main" noGrp="1"/>
-          </p:cNvSpPr>
-          <p:nvPr/>
-        </p:nvSpPr>
-        <p:spPr>
-          <a:xfrm xmlns:a="http://schemas.openxmlformats.org/drawingml/2006/main">
-            <a:off x="5772150" y="1714500"/>
-            <a:ext cx="19050" cy="3543300"/>
+              <a:t>Why?</a:t>
+            </a:r>
+          </a:p>
+          <a:p xmlns:a="http://schemas.openxmlformats.org/drawingml/2006/main">
+            <a:pPr algn="l">
+              <a:lnSpc>
+                <a:spcPct val="108000"/>
+              </a:lnSpc>
+              <a:buNone/>
+              <a:defRPr sz="2100" b="0" i="0">
+                <a:solidFill>
+                  <a:srgbClr val="172126"/>
+                </a:solidFill>
+                <a:latin typeface="Aptos"/>
+                <a:ea typeface="Aptos"/>
+                <a:cs typeface="Aptos"/>
+              </a:defRPr>
+            </a:pPr>
+            <a:r>
+              <a:rPr sz="2100" b="0" i="0">
+                <a:solidFill>
+                  <a:srgbClr val="172126"/>
+                </a:solidFill>
+                <a:latin typeface="Aptos"/>
+                <a:ea typeface="Aptos"/>
+                <a:cs typeface="Aptos"/>
+              </a:rPr>
+              <a:t>What is likely to happen?</a:t>
+            </a:r>
+          </a:p>
+        </p:txBody>
+      </p:sp>
+      <p:sp>
+        <p:nvSpPr>
+          <p:cNvPr id="9" name="positive-requires">
+            <a:extLst xmlns:a="http://schemas.openxmlformats.org/drawingml/2006/main">
+              <a:ext uri="{FF2B5EF4-FFF2-40B4-BE49-F238E27FC236}">
+                <a16:creationId xmlns:a16="http://schemas.microsoft.com/office/drawing/2014/main" id="{B9FC8EB9-E51F-4961-A8C1-E79B99B22BCF}"/>
+              </a:ext>
+            </a:extLst>
+          </p:cNvPr>
+          <p:cNvSpPr>
+            <a:spLocks xmlns:a="http://schemas.openxmlformats.org/drawingml/2006/main" noGrp="1"/>
+          </p:cNvSpPr>
+          <p:nvPr/>
+        </p:nvSpPr>
+        <p:spPr>
+          <a:xfrm xmlns:a="http://schemas.openxmlformats.org/drawingml/2006/main">
+            <a:off x="971550" y="4457700"/>
+            <a:ext cx="3429000" cy="400050"/>
+          </a:xfrm>
+          <a:prstGeom xmlns:a="http://schemas.openxmlformats.org/drawingml/2006/main" prst="rect">
+            <a:avLst/>
+          </a:prstGeom>
+          <a:noFill xmlns:a="http://schemas.openxmlformats.org/drawingml/2006/main"/>
+          <a:ln xmlns:a="http://schemas.openxmlformats.org/drawingml/2006/main" w="0">
+            <a:noFill/>
+            <a:prstDash val="solid"/>
+          </a:ln>
+        </p:spPr>
+        <p:txBody>
+          <a:bodyPr xmlns:a="http://schemas.openxmlformats.org/drawingml/2006/main" lIns="0" tIns="0" rIns="0" bIns="0" anchor="t">
+            <a:normAutofit fontScale="100000"/>
+          </a:bodyPr>
+          <a:lstStyle xmlns:a="http://schemas.openxmlformats.org/drawingml/2006/main"/>
+          <a:p xmlns:a="http://schemas.openxmlformats.org/drawingml/2006/main">
+            <a:pPr algn="l">
+              <a:lnSpc>
+                <a:spcPct val="108000"/>
+              </a:lnSpc>
+              <a:buNone/>
+              <a:defRPr sz="1725" b="1" i="0">
+                <a:solidFill>
+                  <a:srgbClr val="56636A"/>
+                </a:solidFill>
+                <a:latin typeface="Aptos"/>
+                <a:ea typeface="Aptos"/>
+                <a:cs typeface="Aptos"/>
+              </a:defRPr>
+            </a:pPr>
+            <a:r>
+              <a:rPr sz="1725" b="1" i="0">
+                <a:solidFill>
+                  <a:srgbClr val="56636A"/>
+                </a:solidFill>
+                <a:latin typeface="Aptos"/>
+                <a:ea typeface="Aptos"/>
+                <a:cs typeface="Aptos"/>
+              </a:rPr>
+              <a:t>Requires evidence</a:t>
+            </a:r>
+          </a:p>
+        </p:txBody>
+      </p:sp>
+      <p:sp>
+        <p:nvSpPr>
+          <p:cNvPr id="10" name="positive-normative-divider">
+            <a:extLst xmlns:a="http://schemas.openxmlformats.org/drawingml/2006/main">
+              <a:ext uri="{FF2B5EF4-FFF2-40B4-BE49-F238E27FC236}">
+                <a16:creationId xmlns:a16="http://schemas.microsoft.com/office/drawing/2014/main" id="{84324667-69F7-453E-AC29-053E9F7D9E27}"/>
+              </a:ext>
+            </a:extLst>
+          </p:cNvPr>
+          <p:cNvSpPr>
+            <a:spLocks xmlns:a="http://schemas.openxmlformats.org/drawingml/2006/main" noGrp="1"/>
+          </p:cNvSpPr>
+          <p:nvPr/>
+        </p:nvSpPr>
+        <p:spPr>
+          <a:xfrm xmlns:a="http://schemas.openxmlformats.org/drawingml/2006/main">
+            <a:off x="5905500" y="1676400"/>
+            <a:ext cx="19050" cy="3619500"/>
           </a:xfrm>
           <a:prstGeom xmlns:a="http://schemas.openxmlformats.org/drawingml/2006/main" prst="rect">
             <a:avLst/>
@@ -13146,22 +13658,22 @@
       </p:sp>
       <p:sp>
         <p:nvSpPr>
-          <p:cNvPr id="10" name="">
-            <a:extLst xmlns:a="http://schemas.openxmlformats.org/drawingml/2006/main">
-              <a:ext uri="{FF2B5EF4-FFF2-40B4-BE49-F238E27FC236}">
-                <a16:creationId xmlns:a16="http://schemas.microsoft.com/office/drawing/2014/main" id="{84ACF42E-792D-4A03-A790-A0287ED2A2FC}"/>
-              </a:ext>
-            </a:extLst>
-          </p:cNvPr>
-          <p:cNvSpPr>
-            <a:spLocks xmlns:a="http://schemas.openxmlformats.org/drawingml/2006/main" noGrp="1"/>
-          </p:cNvSpPr>
-          <p:nvPr/>
-        </p:nvSpPr>
-        <p:spPr>
-          <a:xfrm xmlns:a="http://schemas.openxmlformats.org/drawingml/2006/main">
-            <a:off x="6381750" y="1847850"/>
-            <a:ext cx="1714500" cy="228600"/>
+          <p:cNvPr id="11" name="normative-heading">
+            <a:extLst xmlns:a="http://schemas.openxmlformats.org/drawingml/2006/main">
+              <a:ext uri="{FF2B5EF4-FFF2-40B4-BE49-F238E27FC236}">
+                <a16:creationId xmlns:a16="http://schemas.microsoft.com/office/drawing/2014/main" id="{0CB253F8-D71F-44A9-807E-059F7E79AC15}"/>
+              </a:ext>
+            </a:extLst>
+          </p:cNvPr>
+          <p:cNvSpPr>
+            <a:spLocks xmlns:a="http://schemas.openxmlformats.org/drawingml/2006/main" noGrp="1"/>
+          </p:cNvSpPr>
+          <p:nvPr/>
+        </p:nvSpPr>
+        <p:spPr>
+          <a:xfrm xmlns:a="http://schemas.openxmlformats.org/drawingml/2006/main">
+            <a:off x="6572250" y="1790700"/>
+            <a:ext cx="3810000" cy="609600"/>
           </a:xfrm>
           <a:prstGeom xmlns:a="http://schemas.openxmlformats.org/drawingml/2006/main" prst="rect">
             <a:avLst/>
@@ -13183,185 +13695,7 @@
                 <a:spcPct val="108000"/>
               </a:lnSpc>
               <a:buNone/>
-              <a:defRPr sz="1050" b="1" i="0">
-                <a:solidFill>
-                  <a:srgbClr val="9A3B35"/>
-                </a:solidFill>
-                <a:latin typeface="Aptos"/>
-                <a:ea typeface="Aptos"/>
-                <a:cs typeface="Aptos"/>
-              </a:defRPr>
-            </a:pPr>
-            <a:r>
-              <a:rPr sz="1050" b="1" i="0">
-                <a:solidFill>
-                  <a:srgbClr val="9A3B35"/>
-                </a:solidFill>
-                <a:latin typeface="Aptos"/>
-                <a:ea typeface="Aptos"/>
-                <a:cs typeface="Aptos"/>
-              </a:rPr>
-              <a:t>UNSEEN</a:t>
-            </a:r>
-          </a:p>
-        </p:txBody>
-      </p:sp>
-      <p:sp>
-        <p:nvSpPr>
-          <p:cNvPr id="11" name="unseen-copy">
-            <a:extLst xmlns:a="http://schemas.openxmlformats.org/drawingml/2006/main">
-              <a:ext uri="{FF2B5EF4-FFF2-40B4-BE49-F238E27FC236}">
-                <a16:creationId xmlns:a16="http://schemas.microsoft.com/office/drawing/2014/main" id="{DDED368A-D055-4F55-98C3-E333E0FA3E19}"/>
-              </a:ext>
-            </a:extLst>
-          </p:cNvPr>
-          <p:cNvSpPr>
-            <a:spLocks xmlns:a="http://schemas.openxmlformats.org/drawingml/2006/main" noGrp="1"/>
-          </p:cNvSpPr>
-          <p:nvPr/>
-        </p:nvSpPr>
-        <p:spPr>
-          <a:xfrm xmlns:a="http://schemas.openxmlformats.org/drawingml/2006/main">
-            <a:off x="6381750" y="2305050"/>
-            <a:ext cx="4286250" cy="1581150"/>
-          </a:xfrm>
-          <a:prstGeom xmlns:a="http://schemas.openxmlformats.org/drawingml/2006/main" prst="rect">
-            <a:avLst/>
-          </a:prstGeom>
-          <a:noFill xmlns:a="http://schemas.openxmlformats.org/drawingml/2006/main"/>
-          <a:ln xmlns:a="http://schemas.openxmlformats.org/drawingml/2006/main" w="0">
-            <a:noFill/>
-            <a:prstDash val="solid"/>
-          </a:ln>
-        </p:spPr>
-        <p:txBody>
-          <a:bodyPr xmlns:a="http://schemas.openxmlformats.org/drawingml/2006/main" lIns="0" tIns="0" rIns="0" bIns="0" anchor="t">
-            <a:normAutofit fontScale="100000"/>
-          </a:bodyPr>
-          <a:lstStyle xmlns:a="http://schemas.openxmlformats.org/drawingml/2006/main"/>
-          <a:p xmlns:a="http://schemas.openxmlformats.org/drawingml/2006/main">
-            <a:pPr algn="l">
-              <a:lnSpc>
-                <a:spcPct val="108000"/>
-              </a:lnSpc>
-              <a:buNone/>
-              <a:defRPr sz="2025" b="0" i="0">
-                <a:solidFill>
-                  <a:srgbClr val="172126"/>
-                </a:solidFill>
-                <a:latin typeface="Aptos"/>
-                <a:ea typeface="Aptos"/>
-                <a:cs typeface="Aptos"/>
-              </a:defRPr>
-            </a:pPr>
-            <a:r>
-              <a:rPr sz="2025" b="0" i="0">
-                <a:solidFill>
-                  <a:srgbClr val="172126"/>
-                </a:solidFill>
-                <a:latin typeface="Aptos"/>
-                <a:ea typeface="Aptos"/>
-                <a:cs typeface="Aptos"/>
-              </a:rPr>
-              <a:t>Time spent searching.</a:t>
-            </a:r>
-          </a:p>
-          <a:p xmlns:a="http://schemas.openxmlformats.org/drawingml/2006/main">
-            <a:pPr algn="l">
-              <a:lnSpc>
-                <a:spcPct val="108000"/>
-              </a:lnSpc>
-              <a:buNone/>
-              <a:defRPr sz="2025" b="0" i="0">
-                <a:solidFill>
-                  <a:srgbClr val="172126"/>
-                </a:solidFill>
-                <a:latin typeface="Aptos"/>
-                <a:ea typeface="Aptos"/>
-                <a:cs typeface="Aptos"/>
-              </a:defRPr>
-            </a:pPr>
-            <a:r>
-              <a:rPr sz="2025" b="0" i="0">
-                <a:solidFill>
-                  <a:srgbClr val="172126"/>
-                </a:solidFill>
-                <a:latin typeface="Aptos"/>
-                <a:ea typeface="Aptos"/>
-                <a:cs typeface="Aptos"/>
-              </a:rPr>
-              <a:t>The displaced purchase.</a:t>
-            </a:r>
-          </a:p>
-          <a:p xmlns:a="http://schemas.openxmlformats.org/drawingml/2006/main">
-            <a:pPr algn="l">
-              <a:lnSpc>
-                <a:spcPct val="108000"/>
-              </a:lnSpc>
-              <a:buNone/>
-              <a:defRPr sz="2025" b="0" i="0">
-                <a:solidFill>
-                  <a:srgbClr val="172126"/>
-                </a:solidFill>
-                <a:latin typeface="Aptos"/>
-                <a:ea typeface="Aptos"/>
-                <a:cs typeface="Aptos"/>
-              </a:defRPr>
-            </a:pPr>
-            <a:r>
-              <a:rPr sz="2025" b="0" i="0">
-                <a:solidFill>
-                  <a:srgbClr val="172126"/>
-                </a:solidFill>
-                <a:latin typeface="Aptos"/>
-                <a:ea typeface="Aptos"/>
-                <a:cs typeface="Aptos"/>
-              </a:rPr>
-              <a:t>Later responses to changed incentives.</a:t>
-            </a:r>
-          </a:p>
-        </p:txBody>
-      </p:sp>
-      <p:sp>
-        <p:nvSpPr>
-          <p:cNvPr id="12" name="unseen-close">
-            <a:extLst xmlns:a="http://schemas.openxmlformats.org/drawingml/2006/main">
-              <a:ext uri="{FF2B5EF4-FFF2-40B4-BE49-F238E27FC236}">
-                <a16:creationId xmlns:a16="http://schemas.microsoft.com/office/drawing/2014/main" id="{334ABB63-DCA6-4A2A-A2DB-699EFC4BFCA8}"/>
-              </a:ext>
-            </a:extLst>
-          </p:cNvPr>
-          <p:cNvSpPr>
-            <a:spLocks xmlns:a="http://schemas.openxmlformats.org/drawingml/2006/main" noGrp="1"/>
-          </p:cNvSpPr>
-          <p:nvPr/>
-        </p:nvSpPr>
-        <p:spPr>
-          <a:xfrm xmlns:a="http://schemas.openxmlformats.org/drawingml/2006/main">
-            <a:off x="1200150" y="4953000"/>
-            <a:ext cx="9715500" cy="723900"/>
-          </a:xfrm>
-          <a:prstGeom xmlns:a="http://schemas.openxmlformats.org/drawingml/2006/main" prst="rect">
-            <a:avLst/>
-          </a:prstGeom>
-          <a:noFill xmlns:a="http://schemas.openxmlformats.org/drawingml/2006/main"/>
-          <a:ln xmlns:a="http://schemas.openxmlformats.org/drawingml/2006/main" w="0">
-            <a:noFill/>
-            <a:prstDash val="solid"/>
-          </a:ln>
-        </p:spPr>
-        <p:txBody>
-          <a:bodyPr xmlns:a="http://schemas.openxmlformats.org/drawingml/2006/main" lIns="0" tIns="0" rIns="0" bIns="0" anchor="t">
-            <a:normAutofit fontScale="91628"/>
-          </a:bodyPr>
-          <a:lstStyle xmlns:a="http://schemas.openxmlformats.org/drawingml/2006/main"/>
-          <a:p xmlns:a="http://schemas.openxmlformats.org/drawingml/2006/main">
-            <a:pPr algn="ctr">
-              <a:lnSpc>
-                <a:spcPct val="108000"/>
-              </a:lnSpc>
-              <a:buNone/>
-              <a:defRPr sz="2400" b="1" i="0">
+              <a:defRPr sz="3150" b="1" i="0">
                 <a:solidFill>
                   <a:srgbClr val="9A3B35"/>
                 </a:solidFill>
@@ -13371,7 +13705,7 @@
               </a:defRPr>
             </a:pPr>
             <a:r>
-              <a:rPr sz="2400" b="1" i="0">
+              <a:rPr sz="3150" b="1" i="0">
                 <a:solidFill>
                   <a:srgbClr val="9A3B35"/>
                 </a:solidFill>
@@ -13379,7 +13713,220 @@
                 <a:ea typeface="Georgia"/>
                 <a:cs typeface="Georgia"/>
               </a:rPr>
-              <a:t>Good intentions explain a policy’s purpose—not its full consequences.</a:t>
+              <a:t>Normative</a:t>
+            </a:r>
+          </a:p>
+        </p:txBody>
+      </p:sp>
+      <p:sp>
+        <p:nvSpPr>
+          <p:cNvPr id="12" name="normative-questions">
+            <a:extLst xmlns:a="http://schemas.openxmlformats.org/drawingml/2006/main">
+              <a:ext uri="{FF2B5EF4-FFF2-40B4-BE49-F238E27FC236}">
+                <a16:creationId xmlns:a16="http://schemas.microsoft.com/office/drawing/2014/main" id="{60E3F0E6-FFD1-412E-92FC-8622840DD006}"/>
+              </a:ext>
+            </a:extLst>
+          </p:cNvPr>
+          <p:cNvSpPr>
+            <a:spLocks xmlns:a="http://schemas.openxmlformats.org/drawingml/2006/main" noGrp="1"/>
+          </p:cNvSpPr>
+          <p:nvPr/>
+        </p:nvSpPr>
+        <p:spPr>
+          <a:xfrm xmlns:a="http://schemas.openxmlformats.org/drawingml/2006/main">
+            <a:off x="6591300" y="2647950"/>
+            <a:ext cx="4095750" cy="1143000"/>
+          </a:xfrm>
+          <a:prstGeom xmlns:a="http://schemas.openxmlformats.org/drawingml/2006/main" prst="rect">
+            <a:avLst/>
+          </a:prstGeom>
+          <a:noFill xmlns:a="http://schemas.openxmlformats.org/drawingml/2006/main"/>
+          <a:ln xmlns:a="http://schemas.openxmlformats.org/drawingml/2006/main" w="0">
+            <a:noFill/>
+            <a:prstDash val="solid"/>
+          </a:ln>
+        </p:spPr>
+        <p:txBody>
+          <a:bodyPr xmlns:a="http://schemas.openxmlformats.org/drawingml/2006/main" lIns="0" tIns="0" rIns="0" bIns="0" anchor="t">
+            <a:normAutofit fontScale="100000"/>
+          </a:bodyPr>
+          <a:lstStyle xmlns:a="http://schemas.openxmlformats.org/drawingml/2006/main"/>
+          <a:p xmlns:a="http://schemas.openxmlformats.org/drawingml/2006/main">
+            <a:pPr algn="l">
+              <a:lnSpc>
+                <a:spcPct val="108000"/>
+              </a:lnSpc>
+              <a:buNone/>
+              <a:defRPr sz="2100" b="0" i="0">
+                <a:solidFill>
+                  <a:srgbClr val="172126"/>
+                </a:solidFill>
+                <a:latin typeface="Aptos"/>
+                <a:ea typeface="Aptos"/>
+                <a:cs typeface="Aptos"/>
+              </a:defRPr>
+            </a:pPr>
+            <a:r>
+              <a:rPr sz="2100" b="0" i="0">
+                <a:solidFill>
+                  <a:srgbClr val="172126"/>
+                </a:solidFill>
+                <a:latin typeface="Aptos"/>
+                <a:ea typeface="Aptos"/>
+                <a:cs typeface="Aptos"/>
+              </a:rPr>
+              <a:t>What should be done?</a:t>
+            </a:r>
+          </a:p>
+          <a:p xmlns:a="http://schemas.openxmlformats.org/drawingml/2006/main">
+            <a:pPr algn="l">
+              <a:lnSpc>
+                <a:spcPct val="108000"/>
+              </a:lnSpc>
+              <a:buNone/>
+              <a:defRPr sz="2100" b="0" i="0">
+                <a:solidFill>
+                  <a:srgbClr val="172126"/>
+                </a:solidFill>
+                <a:latin typeface="Aptos"/>
+                <a:ea typeface="Aptos"/>
+                <a:cs typeface="Aptos"/>
+              </a:defRPr>
+            </a:pPr>
+            <a:r>
+              <a:rPr sz="2100" b="0" i="0">
+                <a:solidFill>
+                  <a:srgbClr val="172126"/>
+                </a:solidFill>
+                <a:latin typeface="Aptos"/>
+                <a:ea typeface="Aptos"/>
+                <a:cs typeface="Aptos"/>
+              </a:rPr>
+              <a:t>Which goals matter most?</a:t>
+            </a:r>
+          </a:p>
+        </p:txBody>
+      </p:sp>
+      <p:sp>
+        <p:nvSpPr>
+          <p:cNvPr id="13" name="normative-requires">
+            <a:extLst xmlns:a="http://schemas.openxmlformats.org/drawingml/2006/main">
+              <a:ext uri="{FF2B5EF4-FFF2-40B4-BE49-F238E27FC236}">
+                <a16:creationId xmlns:a16="http://schemas.microsoft.com/office/drawing/2014/main" id="{10E4C075-3DB9-43E7-A250-8DEAC715E9B0}"/>
+              </a:ext>
+            </a:extLst>
+          </p:cNvPr>
+          <p:cNvSpPr>
+            <a:spLocks xmlns:a="http://schemas.openxmlformats.org/drawingml/2006/main" noGrp="1"/>
+          </p:cNvSpPr>
+          <p:nvPr/>
+        </p:nvSpPr>
+        <p:spPr>
+          <a:xfrm xmlns:a="http://schemas.openxmlformats.org/drawingml/2006/main">
+            <a:off x="6591300" y="4457700"/>
+            <a:ext cx="3810000" cy="400050"/>
+          </a:xfrm>
+          <a:prstGeom xmlns:a="http://schemas.openxmlformats.org/drawingml/2006/main" prst="rect">
+            <a:avLst/>
+          </a:prstGeom>
+          <a:noFill xmlns:a="http://schemas.openxmlformats.org/drawingml/2006/main"/>
+          <a:ln xmlns:a="http://schemas.openxmlformats.org/drawingml/2006/main" w="0">
+            <a:noFill/>
+            <a:prstDash val="solid"/>
+          </a:ln>
+        </p:spPr>
+        <p:txBody>
+          <a:bodyPr xmlns:a="http://schemas.openxmlformats.org/drawingml/2006/main" lIns="0" tIns="0" rIns="0" bIns="0" anchor="t">
+            <a:normAutofit fontScale="100000"/>
+          </a:bodyPr>
+          <a:lstStyle xmlns:a="http://schemas.openxmlformats.org/drawingml/2006/main"/>
+          <a:p xmlns:a="http://schemas.openxmlformats.org/drawingml/2006/main">
+            <a:pPr algn="l">
+              <a:lnSpc>
+                <a:spcPct val="108000"/>
+              </a:lnSpc>
+              <a:buNone/>
+              <a:defRPr sz="1725" b="1" i="0">
+                <a:solidFill>
+                  <a:srgbClr val="56636A"/>
+                </a:solidFill>
+                <a:latin typeface="Aptos"/>
+                <a:ea typeface="Aptos"/>
+                <a:cs typeface="Aptos"/>
+              </a:defRPr>
+            </a:pPr>
+            <a:r>
+              <a:rPr sz="1725" b="1" i="0">
+                <a:solidFill>
+                  <a:srgbClr val="56636A"/>
+                </a:solidFill>
+                <a:latin typeface="Aptos"/>
+                <a:ea typeface="Aptos"/>
+                <a:cs typeface="Aptos"/>
+              </a:rPr>
+              <a:t>Requires evidence and values</a:t>
+            </a:r>
+          </a:p>
+        </p:txBody>
+      </p:sp>
+      <p:sp>
+        <p:nvSpPr>
+          <p:cNvPr id="14" name="positive-normative-close">
+            <a:extLst xmlns:a="http://schemas.openxmlformats.org/drawingml/2006/main">
+              <a:ext uri="{FF2B5EF4-FFF2-40B4-BE49-F238E27FC236}">
+                <a16:creationId xmlns:a16="http://schemas.microsoft.com/office/drawing/2014/main" id="{696E5EA7-9E47-4996-9DC4-5D9BCDDAED3B}"/>
+              </a:ext>
+            </a:extLst>
+          </p:cNvPr>
+          <p:cNvSpPr>
+            <a:spLocks xmlns:a="http://schemas.openxmlformats.org/drawingml/2006/main" noGrp="1"/>
+          </p:cNvSpPr>
+          <p:nvPr/>
+        </p:nvSpPr>
+        <p:spPr>
+          <a:xfrm xmlns:a="http://schemas.openxmlformats.org/drawingml/2006/main">
+            <a:off x="1333500" y="5448300"/>
+            <a:ext cx="9525000" cy="495300"/>
+          </a:xfrm>
+          <a:prstGeom xmlns:a="http://schemas.openxmlformats.org/drawingml/2006/main" prst="rect">
+            <a:avLst/>
+          </a:prstGeom>
+          <a:noFill xmlns:a="http://schemas.openxmlformats.org/drawingml/2006/main"/>
+          <a:ln xmlns:a="http://schemas.openxmlformats.org/drawingml/2006/main" w="0">
+            <a:noFill/>
+            <a:prstDash val="solid"/>
+          </a:ln>
+        </p:spPr>
+        <p:txBody>
+          <a:bodyPr xmlns:a="http://schemas.openxmlformats.org/drawingml/2006/main" lIns="0" tIns="0" rIns="0" bIns="0" anchor="t">
+            <a:normAutofit fontScale="96946"/>
+          </a:bodyPr>
+          <a:lstStyle xmlns:a="http://schemas.openxmlformats.org/drawingml/2006/main"/>
+          <a:p xmlns:a="http://schemas.openxmlformats.org/drawingml/2006/main">
+            <a:pPr algn="ctr">
+              <a:lnSpc>
+                <a:spcPct val="108000"/>
+              </a:lnSpc>
+              <a:buNone/>
+              <a:defRPr sz="2175" b="1" i="0">
+                <a:solidFill>
+                  <a:srgbClr val="172126"/>
+                </a:solidFill>
+                <a:latin typeface="Georgia"/>
+                <a:ea typeface="Georgia"/>
+                <a:cs typeface="Georgia"/>
+              </a:defRPr>
+            </a:pPr>
+            <a:r>
+              <a:rPr sz="2175" b="1" i="0">
+                <a:solidFill>
+                  <a:srgbClr val="172126"/>
+                </a:solidFill>
+                <a:latin typeface="Georgia"/>
+                <a:ea typeface="Georgia"/>
+                <a:cs typeface="Georgia"/>
+              </a:rPr>
+              <a:t>Evidence can inform a judgment. It cannot make the judgment for us.</a:t>
             </a:r>
           </a:p>
         </p:txBody>
@@ -13387,7 +13934,7 @@
     </p:spTree>
     <p:extLst>
       <p:ext uri="{BB962C8B-B14F-4D97-AF65-F5344CB8AC3E}">
-        <p14:creationId xmlns:p14="http://schemas.microsoft.com/office/powerpoint/2010/main" val="77373745"/>
+        <p14:creationId xmlns:p14="http://schemas.microsoft.com/office/powerpoint/2010/main" val="381577999"/>
       </p:ext>
     </p:extLst>
   </p:cSld>
@@ -13395,6 +13942,767 @@
 </file>
 
 <file path=ppt/slides/slide21.xml><?xml version="1.0" encoding="utf-8"?>
+<p:sld xmlns:p="http://schemas.openxmlformats.org/presentationml/2006/main">
+  <p:cSld>
+    <p:bg>
+      <p:bgPr>
+        <a:solidFill xmlns:a="http://schemas.openxmlformats.org/drawingml/2006/main">
+          <a:srgbClr val="F7F4ED"/>
+        </a:solidFill>
+      </p:bgPr>
+    </p:bg>
+    <p:spTree>
+      <p:nvGrpSpPr>
+        <p:cNvPr id="1" name=""/>
+        <p:cNvGrpSpPr/>
+        <p:nvPr/>
+      </p:nvGrpSpPr>
+      <p:grpSpPr>
+        <a:xfrm xmlns:a="http://schemas.openxmlformats.org/drawingml/2006/main"/>
+      </p:grpSpPr>
+      <p:sp>
+        <p:nvSpPr>
+          <p:cNvPr id="13" name="accent-rule">
+            <a:extLst xmlns:a="http://schemas.openxmlformats.org/drawingml/2006/main">
+              <a:ext uri="{FF2B5EF4-FFF2-40B4-BE49-F238E27FC236}">
+                <a16:creationId xmlns:a16="http://schemas.microsoft.com/office/drawing/2014/main" id="{56A0DDC9-4A71-41FC-81BE-AF3429C87ED7}"/>
+              </a:ext>
+            </a:extLst>
+          </p:cNvPr>
+          <p:cNvSpPr>
+            <a:spLocks xmlns:a="http://schemas.openxmlformats.org/drawingml/2006/main" noGrp="1"/>
+          </p:cNvSpPr>
+          <p:nvPr/>
+        </p:nvSpPr>
+        <p:spPr>
+          <a:xfrm xmlns:a="http://schemas.openxmlformats.org/drawingml/2006/main">
+            <a:off x="514350" y="400050"/>
+            <a:ext cx="685800" cy="57150"/>
+          </a:xfrm>
+          <a:prstGeom xmlns:a="http://schemas.openxmlformats.org/drawingml/2006/main" prst="rect">
+            <a:avLst/>
+          </a:prstGeom>
+          <a:solidFill xmlns:a="http://schemas.openxmlformats.org/drawingml/2006/main">
+            <a:srgbClr val="9A3B35"/>
+          </a:solidFill>
+          <a:ln xmlns:a="http://schemas.openxmlformats.org/drawingml/2006/main" w="0">
+            <a:noFill/>
+            <a:prstDash val="solid"/>
+          </a:ln>
+        </p:spPr>
+      </p:sp>
+      <p:sp>
+        <p:nvSpPr>
+          <p:cNvPr id="2" name="chapter-label">
+            <a:extLst xmlns:a="http://schemas.openxmlformats.org/drawingml/2006/main">
+              <a:ext uri="{FF2B5EF4-FFF2-40B4-BE49-F238E27FC236}">
+                <a16:creationId xmlns:a16="http://schemas.microsoft.com/office/drawing/2014/main" id="{E277ECAE-761B-4113-879D-F57E531ADAF4}"/>
+              </a:ext>
+            </a:extLst>
+          </p:cNvPr>
+          <p:cNvSpPr>
+            <a:spLocks xmlns:a="http://schemas.openxmlformats.org/drawingml/2006/main" noGrp="1"/>
+          </p:cNvSpPr>
+          <p:nvPr/>
+        </p:nvSpPr>
+        <p:spPr>
+          <a:xfrm xmlns:a="http://schemas.openxmlformats.org/drawingml/2006/main">
+            <a:off x="1390650" y="304800"/>
+            <a:ext cx="1428750" cy="228600"/>
+          </a:xfrm>
+          <a:prstGeom xmlns:a="http://schemas.openxmlformats.org/drawingml/2006/main" prst="rect">
+            <a:avLst/>
+          </a:prstGeom>
+          <a:noFill xmlns:a="http://schemas.openxmlformats.org/drawingml/2006/main"/>
+          <a:ln xmlns:a="http://schemas.openxmlformats.org/drawingml/2006/main" w="0">
+            <a:noFill/>
+            <a:prstDash val="solid"/>
+          </a:ln>
+        </p:spPr>
+        <p:txBody>
+          <a:bodyPr xmlns:a="http://schemas.openxmlformats.org/drawingml/2006/main" lIns="0" tIns="0" rIns="0" bIns="0" anchor="t">
+            <a:normAutofit fontScale="100000"/>
+          </a:bodyPr>
+          <a:lstStyle xmlns:a="http://schemas.openxmlformats.org/drawingml/2006/main"/>
+          <a:p xmlns:a="http://schemas.openxmlformats.org/drawingml/2006/main">
+            <a:pPr algn="l">
+              <a:lnSpc>
+                <a:spcPct val="108000"/>
+              </a:lnSpc>
+              <a:buNone/>
+              <a:defRPr sz="1050" b="1" i="0">
+                <a:solidFill>
+                  <a:srgbClr val="9A3B35"/>
+                </a:solidFill>
+                <a:latin typeface="Aptos"/>
+                <a:ea typeface="Aptos"/>
+                <a:cs typeface="Aptos"/>
+              </a:defRPr>
+            </a:pPr>
+            <a:r>
+              <a:rPr sz="1050" b="1" i="0">
+                <a:solidFill>
+                  <a:srgbClr val="9A3B35"/>
+                </a:solidFill>
+                <a:latin typeface="Aptos"/>
+                <a:ea typeface="Aptos"/>
+                <a:cs typeface="Aptos"/>
+              </a:rPr>
+              <a:t>CHAPTER 1</a:t>
+            </a:r>
+          </a:p>
+        </p:txBody>
+      </p:sp>
+      <p:sp>
+        <p:nvSpPr>
+          <p:cNvPr id="3" name="slide-title">
+            <a:extLst xmlns:a="http://schemas.openxmlformats.org/drawingml/2006/main">
+              <a:ext uri="{FF2B5EF4-FFF2-40B4-BE49-F238E27FC236}">
+                <a16:creationId xmlns:a16="http://schemas.microsoft.com/office/drawing/2014/main" id="{03D2E76B-B08C-4955-8434-73AA1AE8B120}"/>
+              </a:ext>
+            </a:extLst>
+          </p:cNvPr>
+          <p:cNvSpPr>
+            <a:spLocks xmlns:a="http://schemas.openxmlformats.org/drawingml/2006/main" noGrp="1"/>
+          </p:cNvSpPr>
+          <p:nvPr/>
+        </p:nvSpPr>
+        <p:spPr>
+          <a:xfrm xmlns:a="http://schemas.openxmlformats.org/drawingml/2006/main">
+            <a:off x="609600" y="685800"/>
+            <a:ext cx="10972800" cy="647700"/>
+          </a:xfrm>
+          <a:prstGeom xmlns:a="http://schemas.openxmlformats.org/drawingml/2006/main" prst="rect">
+            <a:avLst/>
+          </a:prstGeom>
+          <a:noFill xmlns:a="http://schemas.openxmlformats.org/drawingml/2006/main"/>
+          <a:ln xmlns:a="http://schemas.openxmlformats.org/drawingml/2006/main" w="0">
+            <a:noFill/>
+            <a:prstDash val="solid"/>
+          </a:ln>
+        </p:spPr>
+        <p:txBody>
+          <a:bodyPr xmlns:a="http://schemas.openxmlformats.org/drawingml/2006/main" lIns="0" tIns="0" rIns="0" bIns="0" anchor="t">
+            <a:normAutofit fontScale="100000"/>
+          </a:bodyPr>
+          <a:lstStyle xmlns:a="http://schemas.openxmlformats.org/drawingml/2006/main"/>
+          <a:p xmlns:a="http://schemas.openxmlformats.org/drawingml/2006/main">
+            <a:pPr algn="l">
+              <a:lnSpc>
+                <a:spcPct val="108000"/>
+              </a:lnSpc>
+              <a:buNone/>
+              <a:defRPr sz="3150" b="1" i="0">
+                <a:solidFill>
+                  <a:srgbClr val="172126"/>
+                </a:solidFill>
+                <a:latin typeface="Georgia"/>
+                <a:ea typeface="Georgia"/>
+                <a:cs typeface="Georgia"/>
+              </a:defRPr>
+            </a:pPr>
+            <a:r>
+              <a:rPr sz="3150" b="1" i="0">
+                <a:solidFill>
+                  <a:srgbClr val="172126"/>
+                </a:solidFill>
+                <a:latin typeface="Georgia"/>
+                <a:ea typeface="Georgia"/>
+                <a:cs typeface="Georgia"/>
+              </a:rPr>
+              <a:t>The first visible effect is rarely the whole effect</a:t>
+            </a:r>
+          </a:p>
+        </p:txBody>
+      </p:sp>
+      <p:sp>
+        <p:nvSpPr>
+          <p:cNvPr id="4" name="footer-rule">
+            <a:extLst xmlns:a="http://schemas.openxmlformats.org/drawingml/2006/main">
+              <a:ext uri="{FF2B5EF4-FFF2-40B4-BE49-F238E27FC236}">
+                <a16:creationId xmlns:a16="http://schemas.microsoft.com/office/drawing/2014/main" id="{FA968D18-07CB-461A-8D2F-E5F226F230B6}"/>
+              </a:ext>
+            </a:extLst>
+          </p:cNvPr>
+          <p:cNvSpPr>
+            <a:spLocks xmlns:a="http://schemas.openxmlformats.org/drawingml/2006/main" noGrp="1"/>
+          </p:cNvSpPr>
+          <p:nvPr/>
+        </p:nvSpPr>
+        <p:spPr>
+          <a:xfrm xmlns:a="http://schemas.openxmlformats.org/drawingml/2006/main">
+            <a:off x="609600" y="6419850"/>
+            <a:ext cx="10972800" cy="9525"/>
+          </a:xfrm>
+          <a:prstGeom xmlns:a="http://schemas.openxmlformats.org/drawingml/2006/main" prst="rect">
+            <a:avLst/>
+          </a:prstGeom>
+          <a:solidFill xmlns:a="http://schemas.openxmlformats.org/drawingml/2006/main">
+            <a:srgbClr val="D3DADD"/>
+          </a:solidFill>
+          <a:ln xmlns:a="http://schemas.openxmlformats.org/drawingml/2006/main" w="0">
+            <a:noFill/>
+            <a:prstDash val="solid"/>
+          </a:ln>
+        </p:spPr>
+      </p:sp>
+      <p:sp>
+        <p:nvSpPr>
+          <p:cNvPr id="5" name="footer-book">
+            <a:extLst xmlns:a="http://schemas.openxmlformats.org/drawingml/2006/main">
+              <a:ext uri="{FF2B5EF4-FFF2-40B4-BE49-F238E27FC236}">
+                <a16:creationId xmlns:a16="http://schemas.microsoft.com/office/drawing/2014/main" id="{438F25DD-1A4B-4559-86F8-06D532810413}"/>
+              </a:ext>
+            </a:extLst>
+          </p:cNvPr>
+          <p:cNvSpPr>
+            <a:spLocks xmlns:a="http://schemas.openxmlformats.org/drawingml/2006/main" noGrp="1"/>
+          </p:cNvSpPr>
+          <p:nvPr/>
+        </p:nvSpPr>
+        <p:spPr>
+          <a:xfrm xmlns:a="http://schemas.openxmlformats.org/drawingml/2006/main">
+            <a:off x="609600" y="6515100"/>
+            <a:ext cx="2095500" cy="190500"/>
+          </a:xfrm>
+          <a:prstGeom xmlns:a="http://schemas.openxmlformats.org/drawingml/2006/main" prst="rect">
+            <a:avLst/>
+          </a:prstGeom>
+          <a:noFill xmlns:a="http://schemas.openxmlformats.org/drawingml/2006/main"/>
+          <a:ln xmlns:a="http://schemas.openxmlformats.org/drawingml/2006/main" w="0">
+            <a:noFill/>
+            <a:prstDash val="solid"/>
+          </a:ln>
+        </p:spPr>
+        <p:txBody>
+          <a:bodyPr xmlns:a="http://schemas.openxmlformats.org/drawingml/2006/main" lIns="0" tIns="0" rIns="0" bIns="0" anchor="t">
+            <a:normAutofit fontScale="100000"/>
+          </a:bodyPr>
+          <a:lstStyle xmlns:a="http://schemas.openxmlformats.org/drawingml/2006/main"/>
+          <a:p xmlns:a="http://schemas.openxmlformats.org/drawingml/2006/main">
+            <a:pPr algn="l">
+              <a:lnSpc>
+                <a:spcPct val="108000"/>
+              </a:lnSpc>
+              <a:buNone/>
+              <a:defRPr sz="900" b="1" i="0">
+                <a:solidFill>
+                  <a:srgbClr val="56636A"/>
+                </a:solidFill>
+                <a:latin typeface="Aptos"/>
+                <a:ea typeface="Aptos"/>
+                <a:cs typeface="Aptos"/>
+              </a:defRPr>
+            </a:pPr>
+            <a:r>
+              <a:rPr sz="900" b="1" i="0">
+                <a:solidFill>
+                  <a:srgbClr val="56636A"/>
+                </a:solidFill>
+                <a:latin typeface="Aptos"/>
+                <a:ea typeface="Aptos"/>
+                <a:cs typeface="Aptos"/>
+              </a:rPr>
+              <a:t>PRINCIPLES OF MICRO</a:t>
+            </a:r>
+          </a:p>
+        </p:txBody>
+      </p:sp>
+      <p:sp>
+        <p:nvSpPr>
+          <p:cNvPr id="6" name="footer-number">
+            <a:extLst xmlns:a="http://schemas.openxmlformats.org/drawingml/2006/main">
+              <a:ext uri="{FF2B5EF4-FFF2-40B4-BE49-F238E27FC236}">
+                <a16:creationId xmlns:a16="http://schemas.microsoft.com/office/drawing/2014/main" id="{F2171987-DE13-4F8F-8EA3-D78BB218A5C6}"/>
+              </a:ext>
+            </a:extLst>
+          </p:cNvPr>
+          <p:cNvSpPr>
+            <a:spLocks xmlns:a="http://schemas.openxmlformats.org/drawingml/2006/main" noGrp="1"/>
+          </p:cNvSpPr>
+          <p:nvPr/>
+        </p:nvSpPr>
+        <p:spPr>
+          <a:xfrm xmlns:a="http://schemas.openxmlformats.org/drawingml/2006/main">
+            <a:off x="11049000" y="6496050"/>
+            <a:ext cx="533400" cy="190500"/>
+          </a:xfrm>
+          <a:prstGeom xmlns:a="http://schemas.openxmlformats.org/drawingml/2006/main" prst="rect">
+            <a:avLst/>
+          </a:prstGeom>
+          <a:noFill xmlns:a="http://schemas.openxmlformats.org/drawingml/2006/main"/>
+          <a:ln xmlns:a="http://schemas.openxmlformats.org/drawingml/2006/main" w="0">
+            <a:noFill/>
+            <a:prstDash val="solid"/>
+          </a:ln>
+        </p:spPr>
+        <p:txBody>
+          <a:bodyPr xmlns:a="http://schemas.openxmlformats.org/drawingml/2006/main" lIns="0" tIns="0" rIns="0" bIns="0" anchor="t">
+            <a:normAutofit fontScale="100000"/>
+          </a:bodyPr>
+          <a:lstStyle xmlns:a="http://schemas.openxmlformats.org/drawingml/2006/main"/>
+          <a:p xmlns:a="http://schemas.openxmlformats.org/drawingml/2006/main">
+            <a:pPr algn="r">
+              <a:lnSpc>
+                <a:spcPct val="108000"/>
+              </a:lnSpc>
+              <a:buNone/>
+              <a:defRPr sz="900" b="0" i="0">
+                <a:solidFill>
+                  <a:srgbClr val="56636A"/>
+                </a:solidFill>
+                <a:latin typeface="Aptos"/>
+                <a:ea typeface="Aptos"/>
+                <a:cs typeface="Aptos"/>
+              </a:defRPr>
+            </a:pPr>
+            <a:r>
+              <a:rPr sz="900" b="0" i="0">
+                <a:solidFill>
+                  <a:srgbClr val="56636A"/>
+                </a:solidFill>
+                <a:latin typeface="Aptos"/>
+                <a:ea typeface="Aptos"/>
+                <a:cs typeface="Aptos"/>
+              </a:rPr>
+              <a:t>21</a:t>
+            </a:r>
+          </a:p>
+        </p:txBody>
+      </p:sp>
+      <p:sp>
+        <p:nvSpPr>
+          <p:cNvPr id="7" name="">
+            <a:extLst xmlns:a="http://schemas.openxmlformats.org/drawingml/2006/main">
+              <a:ext uri="{FF2B5EF4-FFF2-40B4-BE49-F238E27FC236}">
+                <a16:creationId xmlns:a16="http://schemas.microsoft.com/office/drawing/2014/main" id="{0CEAB0EB-677B-44B9-BB2B-ECE7C21C0850}"/>
+              </a:ext>
+            </a:extLst>
+          </p:cNvPr>
+          <p:cNvSpPr>
+            <a:spLocks xmlns:a="http://schemas.openxmlformats.org/drawingml/2006/main" noGrp="1"/>
+          </p:cNvSpPr>
+          <p:nvPr/>
+        </p:nvSpPr>
+        <p:spPr>
+          <a:xfrm xmlns:a="http://schemas.openxmlformats.org/drawingml/2006/main">
+            <a:off x="990600" y="1847850"/>
+            <a:ext cx="1714500" cy="228600"/>
+          </a:xfrm>
+          <a:prstGeom xmlns:a="http://schemas.openxmlformats.org/drawingml/2006/main" prst="rect">
+            <a:avLst/>
+          </a:prstGeom>
+          <a:noFill xmlns:a="http://schemas.openxmlformats.org/drawingml/2006/main"/>
+          <a:ln xmlns:a="http://schemas.openxmlformats.org/drawingml/2006/main" w="0">
+            <a:noFill/>
+            <a:prstDash val="solid"/>
+          </a:ln>
+        </p:spPr>
+        <p:txBody>
+          <a:bodyPr xmlns:a="http://schemas.openxmlformats.org/drawingml/2006/main" lIns="0" tIns="0" rIns="0" bIns="0" anchor="t">
+            <a:normAutofit fontScale="100000"/>
+          </a:bodyPr>
+          <a:lstStyle xmlns:a="http://schemas.openxmlformats.org/drawingml/2006/main"/>
+          <a:p xmlns:a="http://schemas.openxmlformats.org/drawingml/2006/main">
+            <a:pPr algn="l">
+              <a:lnSpc>
+                <a:spcPct val="108000"/>
+              </a:lnSpc>
+              <a:buNone/>
+              <a:defRPr sz="1050" b="1" i="0">
+                <a:solidFill>
+                  <a:srgbClr val="1E6675"/>
+                </a:solidFill>
+                <a:latin typeface="Aptos"/>
+                <a:ea typeface="Aptos"/>
+                <a:cs typeface="Aptos"/>
+              </a:defRPr>
+            </a:pPr>
+            <a:r>
+              <a:rPr sz="1050" b="1" i="0">
+                <a:solidFill>
+                  <a:srgbClr val="1E6675"/>
+                </a:solidFill>
+                <a:latin typeface="Aptos"/>
+                <a:ea typeface="Aptos"/>
+                <a:cs typeface="Aptos"/>
+              </a:rPr>
+              <a:t>SEEN</a:t>
+            </a:r>
+          </a:p>
+        </p:txBody>
+      </p:sp>
+      <p:sp>
+        <p:nvSpPr>
+          <p:cNvPr id="8" name="seen-copy">
+            <a:extLst xmlns:a="http://schemas.openxmlformats.org/drawingml/2006/main">
+              <a:ext uri="{FF2B5EF4-FFF2-40B4-BE49-F238E27FC236}">
+                <a16:creationId xmlns:a16="http://schemas.microsoft.com/office/drawing/2014/main" id="{24AD871A-D47F-41FE-8E9E-A10C7E31823E}"/>
+              </a:ext>
+            </a:extLst>
+          </p:cNvPr>
+          <p:cNvSpPr>
+            <a:spLocks xmlns:a="http://schemas.openxmlformats.org/drawingml/2006/main" noGrp="1"/>
+          </p:cNvSpPr>
+          <p:nvPr/>
+        </p:nvSpPr>
+        <p:spPr>
+          <a:xfrm xmlns:a="http://schemas.openxmlformats.org/drawingml/2006/main">
+            <a:off x="990600" y="2305050"/>
+            <a:ext cx="4286250" cy="1428750"/>
+          </a:xfrm>
+          <a:prstGeom xmlns:a="http://schemas.openxmlformats.org/drawingml/2006/main" prst="rect">
+            <a:avLst/>
+          </a:prstGeom>
+          <a:noFill xmlns:a="http://schemas.openxmlformats.org/drawingml/2006/main"/>
+          <a:ln xmlns:a="http://schemas.openxmlformats.org/drawingml/2006/main" w="0">
+            <a:noFill/>
+            <a:prstDash val="solid"/>
+          </a:ln>
+        </p:spPr>
+        <p:txBody>
+          <a:bodyPr xmlns:a="http://schemas.openxmlformats.org/drawingml/2006/main" lIns="0" tIns="0" rIns="0" bIns="0" anchor="t">
+            <a:normAutofit fontScale="100000"/>
+          </a:bodyPr>
+          <a:lstStyle xmlns:a="http://schemas.openxmlformats.org/drawingml/2006/main"/>
+          <a:p xmlns:a="http://schemas.openxmlformats.org/drawingml/2006/main">
+            <a:pPr algn="l">
+              <a:lnSpc>
+                <a:spcPct val="108000"/>
+              </a:lnSpc>
+              <a:buNone/>
+              <a:defRPr sz="2025" b="0" i="0">
+                <a:solidFill>
+                  <a:srgbClr val="172126"/>
+                </a:solidFill>
+                <a:latin typeface="Aptos"/>
+                <a:ea typeface="Aptos"/>
+                <a:cs typeface="Aptos"/>
+              </a:defRPr>
+            </a:pPr>
+            <a:r>
+              <a:rPr sz="2025" b="0" i="0">
+                <a:solidFill>
+                  <a:srgbClr val="172126"/>
+                </a:solidFill>
+                <a:latin typeface="Aptos"/>
+                <a:ea typeface="Aptos"/>
+                <a:cs typeface="Aptos"/>
+              </a:rPr>
+              <a:t>The student pays no parking fee.</a:t>
+            </a:r>
+          </a:p>
+          <a:p xmlns:a="http://schemas.openxmlformats.org/drawingml/2006/main">
+            <a:pPr algn="l">
+              <a:lnSpc>
+                <a:spcPct val="108000"/>
+              </a:lnSpc>
+              <a:buNone/>
+              <a:defRPr sz="2025" b="0" i="0">
+                <a:solidFill>
+                  <a:srgbClr val="172126"/>
+                </a:solidFill>
+                <a:latin typeface="Aptos"/>
+                <a:ea typeface="Aptos"/>
+                <a:cs typeface="Aptos"/>
+              </a:defRPr>
+            </a:pPr>
+            <a:r>
+              <a:rPr sz="2025" b="0" i="0">
+                <a:solidFill>
+                  <a:srgbClr val="172126"/>
+                </a:solidFill>
+                <a:latin typeface="Aptos"/>
+                <a:ea typeface="Aptos"/>
+                <a:cs typeface="Aptos"/>
+              </a:rPr>
+              <a:t>The glazier is paid to replace a broken window.</a:t>
+            </a:r>
+          </a:p>
+        </p:txBody>
+      </p:sp>
+      <p:sp>
+        <p:nvSpPr>
+          <p:cNvPr id="9" name="seen-divider">
+            <a:extLst xmlns:a="http://schemas.openxmlformats.org/drawingml/2006/main">
+              <a:ext uri="{FF2B5EF4-FFF2-40B4-BE49-F238E27FC236}">
+                <a16:creationId xmlns:a16="http://schemas.microsoft.com/office/drawing/2014/main" id="{3709E4B7-7655-4318-9971-E6BD721A593A}"/>
+              </a:ext>
+            </a:extLst>
+          </p:cNvPr>
+          <p:cNvSpPr>
+            <a:spLocks xmlns:a="http://schemas.openxmlformats.org/drawingml/2006/main" noGrp="1"/>
+          </p:cNvSpPr>
+          <p:nvPr/>
+        </p:nvSpPr>
+        <p:spPr>
+          <a:xfrm xmlns:a="http://schemas.openxmlformats.org/drawingml/2006/main">
+            <a:off x="5772150" y="1714500"/>
+            <a:ext cx="19050" cy="3543300"/>
+          </a:xfrm>
+          <a:prstGeom xmlns:a="http://schemas.openxmlformats.org/drawingml/2006/main" prst="rect">
+            <a:avLst/>
+          </a:prstGeom>
+          <a:solidFill xmlns:a="http://schemas.openxmlformats.org/drawingml/2006/main">
+            <a:srgbClr val="D3DADD"/>
+          </a:solidFill>
+          <a:ln xmlns:a="http://schemas.openxmlformats.org/drawingml/2006/main" w="0">
+            <a:noFill/>
+            <a:prstDash val="solid"/>
+          </a:ln>
+        </p:spPr>
+      </p:sp>
+      <p:sp>
+        <p:nvSpPr>
+          <p:cNvPr id="10" name="">
+            <a:extLst xmlns:a="http://schemas.openxmlformats.org/drawingml/2006/main">
+              <a:ext uri="{FF2B5EF4-FFF2-40B4-BE49-F238E27FC236}">
+                <a16:creationId xmlns:a16="http://schemas.microsoft.com/office/drawing/2014/main" id="{6477E85C-779F-43AB-8C4A-28E4A5DA55FD}"/>
+              </a:ext>
+            </a:extLst>
+          </p:cNvPr>
+          <p:cNvSpPr>
+            <a:spLocks xmlns:a="http://schemas.openxmlformats.org/drawingml/2006/main" noGrp="1"/>
+          </p:cNvSpPr>
+          <p:nvPr/>
+        </p:nvSpPr>
+        <p:spPr>
+          <a:xfrm xmlns:a="http://schemas.openxmlformats.org/drawingml/2006/main">
+            <a:off x="6381750" y="1847850"/>
+            <a:ext cx="1714500" cy="228600"/>
+          </a:xfrm>
+          <a:prstGeom xmlns:a="http://schemas.openxmlformats.org/drawingml/2006/main" prst="rect">
+            <a:avLst/>
+          </a:prstGeom>
+          <a:noFill xmlns:a="http://schemas.openxmlformats.org/drawingml/2006/main"/>
+          <a:ln xmlns:a="http://schemas.openxmlformats.org/drawingml/2006/main" w="0">
+            <a:noFill/>
+            <a:prstDash val="solid"/>
+          </a:ln>
+        </p:spPr>
+        <p:txBody>
+          <a:bodyPr xmlns:a="http://schemas.openxmlformats.org/drawingml/2006/main" lIns="0" tIns="0" rIns="0" bIns="0" anchor="t">
+            <a:normAutofit fontScale="100000"/>
+          </a:bodyPr>
+          <a:lstStyle xmlns:a="http://schemas.openxmlformats.org/drawingml/2006/main"/>
+          <a:p xmlns:a="http://schemas.openxmlformats.org/drawingml/2006/main">
+            <a:pPr algn="l">
+              <a:lnSpc>
+                <a:spcPct val="108000"/>
+              </a:lnSpc>
+              <a:buNone/>
+              <a:defRPr sz="1050" b="1" i="0">
+                <a:solidFill>
+                  <a:srgbClr val="9A3B35"/>
+                </a:solidFill>
+                <a:latin typeface="Aptos"/>
+                <a:ea typeface="Aptos"/>
+                <a:cs typeface="Aptos"/>
+              </a:defRPr>
+            </a:pPr>
+            <a:r>
+              <a:rPr sz="1050" b="1" i="0">
+                <a:solidFill>
+                  <a:srgbClr val="9A3B35"/>
+                </a:solidFill>
+                <a:latin typeface="Aptos"/>
+                <a:ea typeface="Aptos"/>
+                <a:cs typeface="Aptos"/>
+              </a:rPr>
+              <a:t>UNSEEN</a:t>
+            </a:r>
+          </a:p>
+        </p:txBody>
+      </p:sp>
+      <p:sp>
+        <p:nvSpPr>
+          <p:cNvPr id="11" name="unseen-copy">
+            <a:extLst xmlns:a="http://schemas.openxmlformats.org/drawingml/2006/main">
+              <a:ext uri="{FF2B5EF4-FFF2-40B4-BE49-F238E27FC236}">
+                <a16:creationId xmlns:a16="http://schemas.microsoft.com/office/drawing/2014/main" id="{0CD8A00C-E882-4CDA-BD13-89C6AB6EA426}"/>
+              </a:ext>
+            </a:extLst>
+          </p:cNvPr>
+          <p:cNvSpPr>
+            <a:spLocks xmlns:a="http://schemas.openxmlformats.org/drawingml/2006/main" noGrp="1"/>
+          </p:cNvSpPr>
+          <p:nvPr/>
+        </p:nvSpPr>
+        <p:spPr>
+          <a:xfrm xmlns:a="http://schemas.openxmlformats.org/drawingml/2006/main">
+            <a:off x="6381750" y="2305050"/>
+            <a:ext cx="4286250" cy="1581150"/>
+          </a:xfrm>
+          <a:prstGeom xmlns:a="http://schemas.openxmlformats.org/drawingml/2006/main" prst="rect">
+            <a:avLst/>
+          </a:prstGeom>
+          <a:noFill xmlns:a="http://schemas.openxmlformats.org/drawingml/2006/main"/>
+          <a:ln xmlns:a="http://schemas.openxmlformats.org/drawingml/2006/main" w="0">
+            <a:noFill/>
+            <a:prstDash val="solid"/>
+          </a:ln>
+        </p:spPr>
+        <p:txBody>
+          <a:bodyPr xmlns:a="http://schemas.openxmlformats.org/drawingml/2006/main" lIns="0" tIns="0" rIns="0" bIns="0" anchor="t">
+            <a:normAutofit fontScale="100000"/>
+          </a:bodyPr>
+          <a:lstStyle xmlns:a="http://schemas.openxmlformats.org/drawingml/2006/main"/>
+          <a:p xmlns:a="http://schemas.openxmlformats.org/drawingml/2006/main">
+            <a:pPr algn="l">
+              <a:lnSpc>
+                <a:spcPct val="108000"/>
+              </a:lnSpc>
+              <a:buNone/>
+              <a:defRPr sz="2025" b="0" i="0">
+                <a:solidFill>
+                  <a:srgbClr val="172126"/>
+                </a:solidFill>
+                <a:latin typeface="Aptos"/>
+                <a:ea typeface="Aptos"/>
+                <a:cs typeface="Aptos"/>
+              </a:defRPr>
+            </a:pPr>
+            <a:r>
+              <a:rPr sz="2025" b="0" i="0">
+                <a:solidFill>
+                  <a:srgbClr val="172126"/>
+                </a:solidFill>
+                <a:latin typeface="Aptos"/>
+                <a:ea typeface="Aptos"/>
+                <a:cs typeface="Aptos"/>
+              </a:rPr>
+              <a:t>Time spent searching.</a:t>
+            </a:r>
+          </a:p>
+          <a:p xmlns:a="http://schemas.openxmlformats.org/drawingml/2006/main">
+            <a:pPr algn="l">
+              <a:lnSpc>
+                <a:spcPct val="108000"/>
+              </a:lnSpc>
+              <a:buNone/>
+              <a:defRPr sz="2025" b="0" i="0">
+                <a:solidFill>
+                  <a:srgbClr val="172126"/>
+                </a:solidFill>
+                <a:latin typeface="Aptos"/>
+                <a:ea typeface="Aptos"/>
+                <a:cs typeface="Aptos"/>
+              </a:defRPr>
+            </a:pPr>
+            <a:r>
+              <a:rPr sz="2025" b="0" i="0">
+                <a:solidFill>
+                  <a:srgbClr val="172126"/>
+                </a:solidFill>
+                <a:latin typeface="Aptos"/>
+                <a:ea typeface="Aptos"/>
+                <a:cs typeface="Aptos"/>
+              </a:rPr>
+              <a:t>The displaced purchase.</a:t>
+            </a:r>
+          </a:p>
+          <a:p xmlns:a="http://schemas.openxmlformats.org/drawingml/2006/main">
+            <a:pPr algn="l">
+              <a:lnSpc>
+                <a:spcPct val="108000"/>
+              </a:lnSpc>
+              <a:buNone/>
+              <a:defRPr sz="2025" b="0" i="0">
+                <a:solidFill>
+                  <a:srgbClr val="172126"/>
+                </a:solidFill>
+                <a:latin typeface="Aptos"/>
+                <a:ea typeface="Aptos"/>
+                <a:cs typeface="Aptos"/>
+              </a:defRPr>
+            </a:pPr>
+            <a:r>
+              <a:rPr sz="2025" b="0" i="0">
+                <a:solidFill>
+                  <a:srgbClr val="172126"/>
+                </a:solidFill>
+                <a:latin typeface="Aptos"/>
+                <a:ea typeface="Aptos"/>
+                <a:cs typeface="Aptos"/>
+              </a:rPr>
+              <a:t>Later responses to changed incentives.</a:t>
+            </a:r>
+          </a:p>
+        </p:txBody>
+      </p:sp>
+      <p:sp>
+        <p:nvSpPr>
+          <p:cNvPr id="12" name="unseen-close">
+            <a:extLst xmlns:a="http://schemas.openxmlformats.org/drawingml/2006/main">
+              <a:ext uri="{FF2B5EF4-FFF2-40B4-BE49-F238E27FC236}">
+                <a16:creationId xmlns:a16="http://schemas.microsoft.com/office/drawing/2014/main" id="{BF296346-906F-4731-BDA3-E051B1F62D8D}"/>
+              </a:ext>
+            </a:extLst>
+          </p:cNvPr>
+          <p:cNvSpPr>
+            <a:spLocks xmlns:a="http://schemas.openxmlformats.org/drawingml/2006/main" noGrp="1"/>
+          </p:cNvSpPr>
+          <p:nvPr/>
+        </p:nvSpPr>
+        <p:spPr>
+          <a:xfrm xmlns:a="http://schemas.openxmlformats.org/drawingml/2006/main">
+            <a:off x="1200150" y="4953000"/>
+            <a:ext cx="9715500" cy="723900"/>
+          </a:xfrm>
+          <a:prstGeom xmlns:a="http://schemas.openxmlformats.org/drawingml/2006/main" prst="rect">
+            <a:avLst/>
+          </a:prstGeom>
+          <a:noFill xmlns:a="http://schemas.openxmlformats.org/drawingml/2006/main"/>
+          <a:ln xmlns:a="http://schemas.openxmlformats.org/drawingml/2006/main" w="0">
+            <a:noFill/>
+            <a:prstDash val="solid"/>
+          </a:ln>
+        </p:spPr>
+        <p:txBody>
+          <a:bodyPr xmlns:a="http://schemas.openxmlformats.org/drawingml/2006/main" lIns="0" tIns="0" rIns="0" bIns="0" anchor="t">
+            <a:normAutofit fontScale="91628"/>
+          </a:bodyPr>
+          <a:lstStyle xmlns:a="http://schemas.openxmlformats.org/drawingml/2006/main"/>
+          <a:p xmlns:a="http://schemas.openxmlformats.org/drawingml/2006/main">
+            <a:pPr algn="ctr">
+              <a:lnSpc>
+                <a:spcPct val="108000"/>
+              </a:lnSpc>
+              <a:buNone/>
+              <a:defRPr sz="2400" b="1" i="0">
+                <a:solidFill>
+                  <a:srgbClr val="9A3B35"/>
+                </a:solidFill>
+                <a:latin typeface="Georgia"/>
+                <a:ea typeface="Georgia"/>
+                <a:cs typeface="Georgia"/>
+              </a:defRPr>
+            </a:pPr>
+            <a:r>
+              <a:rPr sz="2400" b="1" i="0">
+                <a:solidFill>
+                  <a:srgbClr val="9A3B35"/>
+                </a:solidFill>
+                <a:latin typeface="Georgia"/>
+                <a:ea typeface="Georgia"/>
+                <a:cs typeface="Georgia"/>
+              </a:rPr>
+              <a:t>Good intentions explain a policy’s purpose—not its full consequences.</a:t>
+            </a:r>
+          </a:p>
+        </p:txBody>
+      </p:sp>
+    </p:spTree>
+    <p:extLst>
+      <p:ext uri="{BB962C8B-B14F-4D97-AF65-F5344CB8AC3E}">
+        <p14:creationId xmlns:p14="http://schemas.microsoft.com/office/powerpoint/2010/main" val="237878821"/>
+      </p:ext>
+    </p:extLst>
+  </p:cSld>
+</p:sld>
+</file>
+
+<file path=ppt/slides/slide22.xml><?xml version="1.0" encoding="utf-8"?>
 <p:sld xmlns:p="http://schemas.openxmlformats.org/presentationml/2006/main">
   <p:cSld>
     <p:bg>
@@ -13418,7 +14726,7 @@
           <p:cNvPr id="24" name="accent-rule">
             <a:extLst xmlns:a="http://schemas.openxmlformats.org/drawingml/2006/main">
               <a:ext uri="{FF2B5EF4-FFF2-40B4-BE49-F238E27FC236}">
-                <a16:creationId xmlns:a16="http://schemas.microsoft.com/office/drawing/2014/main" id="{02FF29AF-F089-4354-9FC2-B828032A5BEF}"/>
+                <a16:creationId xmlns:a16="http://schemas.microsoft.com/office/drawing/2014/main" id="{98F56136-2B43-4B55-B7EB-319CC8E25792}"/>
               </a:ext>
             </a:extLst>
           </p:cNvPr>
@@ -13449,7 +14757,7 @@
           <p:cNvPr id="2" name="chapter-label">
             <a:extLst xmlns:a="http://schemas.openxmlformats.org/drawingml/2006/main">
               <a:ext uri="{FF2B5EF4-FFF2-40B4-BE49-F238E27FC236}">
-                <a16:creationId xmlns:a16="http://schemas.microsoft.com/office/drawing/2014/main" id="{188EDCF7-51CF-4848-BAA6-FF3E35452BB7}"/>
+                <a16:creationId xmlns:a16="http://schemas.microsoft.com/office/drawing/2014/main" id="{D3E420C1-8CFC-46F5-954C-0EAEF5DC2A04}"/>
               </a:ext>
             </a:extLst>
           </p:cNvPr>
@@ -13511,7 +14819,7 @@
           <p:cNvPr id="3" name="slide-title">
             <a:extLst xmlns:a="http://schemas.openxmlformats.org/drawingml/2006/main">
               <a:ext uri="{FF2B5EF4-FFF2-40B4-BE49-F238E27FC236}">
-                <a16:creationId xmlns:a16="http://schemas.microsoft.com/office/drawing/2014/main" id="{2149DE57-A42C-4E17-BC51-393CD8568174}"/>
+                <a16:creationId xmlns:a16="http://schemas.microsoft.com/office/drawing/2014/main" id="{1985C2BB-A1DB-46B9-91D5-821A949C9327}"/>
               </a:ext>
             </a:extLst>
           </p:cNvPr>
@@ -13573,7 +14881,7 @@
           <p:cNvPr id="4" name="footer-rule">
             <a:extLst xmlns:a="http://schemas.openxmlformats.org/drawingml/2006/main">
               <a:ext uri="{FF2B5EF4-FFF2-40B4-BE49-F238E27FC236}">
-                <a16:creationId xmlns:a16="http://schemas.microsoft.com/office/drawing/2014/main" id="{B676FBCC-644A-4C4A-937D-2B8E7FBC1972}"/>
+                <a16:creationId xmlns:a16="http://schemas.microsoft.com/office/drawing/2014/main" id="{089B4D90-9897-486A-A671-569C13B3092C}"/>
               </a:ext>
             </a:extLst>
           </p:cNvPr>
@@ -13604,7 +14912,7 @@
           <p:cNvPr id="5" name="footer-book">
             <a:extLst xmlns:a="http://schemas.openxmlformats.org/drawingml/2006/main">
               <a:ext uri="{FF2B5EF4-FFF2-40B4-BE49-F238E27FC236}">
-                <a16:creationId xmlns:a16="http://schemas.microsoft.com/office/drawing/2014/main" id="{55A9C7E7-DF84-4C42-84D5-53CE49196ABB}"/>
+                <a16:creationId xmlns:a16="http://schemas.microsoft.com/office/drawing/2014/main" id="{FF3BA6C1-347E-4167-BD6C-AAE961724595}"/>
               </a:ext>
             </a:extLst>
           </p:cNvPr>
@@ -13666,7 +14974,7 @@
           <p:cNvPr id="6" name="footer-number">
             <a:extLst xmlns:a="http://schemas.openxmlformats.org/drawingml/2006/main">
               <a:ext uri="{FF2B5EF4-FFF2-40B4-BE49-F238E27FC236}">
-                <a16:creationId xmlns:a16="http://schemas.microsoft.com/office/drawing/2014/main" id="{198D6594-4559-46D6-B427-4832DEFBCFAF}"/>
+                <a16:creationId xmlns:a16="http://schemas.microsoft.com/office/drawing/2014/main" id="{E7F8D546-149B-42A3-99B2-1CDE8CBE0381}"/>
               </a:ext>
             </a:extLst>
           </p:cNvPr>
@@ -13718,7 +15026,7 @@
                 <a:ea typeface="Aptos"/>
                 <a:cs typeface="Aptos"/>
               </a:rPr>
-              <a:t>21</a:t>
+              <a:t>22</a:t>
             </a:r>
           </a:p>
         </p:txBody>
@@ -13728,7 +15036,7 @@
           <p:cNvPr id="7" name="close-rule">
             <a:extLst xmlns:a="http://schemas.openxmlformats.org/drawingml/2006/main">
               <a:ext uri="{FF2B5EF4-FFF2-40B4-BE49-F238E27FC236}">
-                <a16:creationId xmlns:a16="http://schemas.microsoft.com/office/drawing/2014/main" id="{50C58C3F-04B2-424C-BD3D-A67CAC94D5DC}"/>
+                <a16:creationId xmlns:a16="http://schemas.microsoft.com/office/drawing/2014/main" id="{FAC6008F-F368-4414-B748-FC95A8F65026}"/>
               </a:ext>
             </a:extLst>
           </p:cNvPr>
@@ -13759,7 +15067,7 @@
           <p:cNvPr id="8" name="method-mark-1">
             <a:extLst xmlns:a="http://schemas.openxmlformats.org/drawingml/2006/main">
               <a:ext uri="{FF2B5EF4-FFF2-40B4-BE49-F238E27FC236}">
-                <a16:creationId xmlns:a16="http://schemas.microsoft.com/office/drawing/2014/main" id="{14DB6E43-C7FE-4F86-AE38-80032191A9C4}"/>
+                <a16:creationId xmlns:a16="http://schemas.microsoft.com/office/drawing/2014/main" id="{10561676-1593-42BE-A65F-2976976F57E8}"/>
               </a:ext>
             </a:extLst>
           </p:cNvPr>
@@ -13821,7 +15129,7 @@
           <p:cNvPr id="9" name="method-1">
             <a:extLst xmlns:a="http://schemas.openxmlformats.org/drawingml/2006/main">
               <a:ext uri="{FF2B5EF4-FFF2-40B4-BE49-F238E27FC236}">
-                <a16:creationId xmlns:a16="http://schemas.microsoft.com/office/drawing/2014/main" id="{87EB6AFE-FCCC-4882-871F-3D32EC9CA142}"/>
+                <a16:creationId xmlns:a16="http://schemas.microsoft.com/office/drawing/2014/main" id="{65DD1186-3A49-438F-8816-727F94A156B7}"/>
               </a:ext>
             </a:extLst>
           </p:cNvPr>
@@ -13883,7 +15191,7 @@
           <p:cNvPr id="10" name="method-mark-2">
             <a:extLst xmlns:a="http://schemas.openxmlformats.org/drawingml/2006/main">
               <a:ext uri="{FF2B5EF4-FFF2-40B4-BE49-F238E27FC236}">
-                <a16:creationId xmlns:a16="http://schemas.microsoft.com/office/drawing/2014/main" id="{F32D1FEC-4F94-4574-842F-694045562C0D}"/>
+                <a16:creationId xmlns:a16="http://schemas.microsoft.com/office/drawing/2014/main" id="{DA16C2B1-BAC0-477F-B93B-C139B2EA736B}"/>
               </a:ext>
             </a:extLst>
           </p:cNvPr>
@@ -13945,7 +15253,7 @@
           <p:cNvPr id="11" name="method-2">
             <a:extLst xmlns:a="http://schemas.openxmlformats.org/drawingml/2006/main">
               <a:ext uri="{FF2B5EF4-FFF2-40B4-BE49-F238E27FC236}">
-                <a16:creationId xmlns:a16="http://schemas.microsoft.com/office/drawing/2014/main" id="{5FF02B3D-E1B7-41CC-97A4-C545F2CE0379}"/>
+                <a16:creationId xmlns:a16="http://schemas.microsoft.com/office/drawing/2014/main" id="{817BFF42-446A-4E91-8CA5-BA89D2D03D19}"/>
               </a:ext>
             </a:extLst>
           </p:cNvPr>
@@ -14007,7 +15315,7 @@
           <p:cNvPr id="12" name="method-mark-3">
             <a:extLst xmlns:a="http://schemas.openxmlformats.org/drawingml/2006/main">
               <a:ext uri="{FF2B5EF4-FFF2-40B4-BE49-F238E27FC236}">
-                <a16:creationId xmlns:a16="http://schemas.microsoft.com/office/drawing/2014/main" id="{FD8D1E05-A739-4316-99CE-355DB699AEFA}"/>
+                <a16:creationId xmlns:a16="http://schemas.microsoft.com/office/drawing/2014/main" id="{8CCEF24E-2200-4069-95B4-5D98BFA927F3}"/>
               </a:ext>
             </a:extLst>
           </p:cNvPr>
@@ -14069,7 +15377,7 @@
           <p:cNvPr id="13" name="method-3">
             <a:extLst xmlns:a="http://schemas.openxmlformats.org/drawingml/2006/main">
               <a:ext uri="{FF2B5EF4-FFF2-40B4-BE49-F238E27FC236}">
-                <a16:creationId xmlns:a16="http://schemas.microsoft.com/office/drawing/2014/main" id="{4C8EDA1E-8D21-4D64-BCEB-97E274915196}"/>
+                <a16:creationId xmlns:a16="http://schemas.microsoft.com/office/drawing/2014/main" id="{CC22DA58-36F4-4422-9A42-3932CB2257B1}"/>
               </a:ext>
             </a:extLst>
           </p:cNvPr>
@@ -14131,7 +15439,7 @@
           <p:cNvPr id="14" name="method-mark-4">
             <a:extLst xmlns:a="http://schemas.openxmlformats.org/drawingml/2006/main">
               <a:ext uri="{FF2B5EF4-FFF2-40B4-BE49-F238E27FC236}">
-                <a16:creationId xmlns:a16="http://schemas.microsoft.com/office/drawing/2014/main" id="{6D052BF6-A3D7-4111-AE06-ED4ED8FB9D12}"/>
+                <a16:creationId xmlns:a16="http://schemas.microsoft.com/office/drawing/2014/main" id="{7828C2EA-4F00-4E48-A048-B8AF2198D292}"/>
               </a:ext>
             </a:extLst>
           </p:cNvPr>
@@ -14193,7 +15501,7 @@
           <p:cNvPr id="15" name="method-4">
             <a:extLst xmlns:a="http://schemas.openxmlformats.org/drawingml/2006/main">
               <a:ext uri="{FF2B5EF4-FFF2-40B4-BE49-F238E27FC236}">
-                <a16:creationId xmlns:a16="http://schemas.microsoft.com/office/drawing/2014/main" id="{3EE696D1-5D26-4153-9B57-DCEAC6365B8A}"/>
+                <a16:creationId xmlns:a16="http://schemas.microsoft.com/office/drawing/2014/main" id="{27CA1DA3-4BA9-40CA-82CE-EACAB5A56736}"/>
               </a:ext>
             </a:extLst>
           </p:cNvPr>
@@ -14255,7 +15563,7 @@
           <p:cNvPr id="16" name="method-mark-5">
             <a:extLst xmlns:a="http://schemas.openxmlformats.org/drawingml/2006/main">
               <a:ext uri="{FF2B5EF4-FFF2-40B4-BE49-F238E27FC236}">
-                <a16:creationId xmlns:a16="http://schemas.microsoft.com/office/drawing/2014/main" id="{473AB649-553A-4E19-9BDE-A543DD26CF54}"/>
+                <a16:creationId xmlns:a16="http://schemas.microsoft.com/office/drawing/2014/main" id="{7C239883-6D34-49FA-BF06-22A2EB9605DA}"/>
               </a:ext>
             </a:extLst>
           </p:cNvPr>
@@ -14317,7 +15625,7 @@
           <p:cNvPr id="17" name="method-5">
             <a:extLst xmlns:a="http://schemas.openxmlformats.org/drawingml/2006/main">
               <a:ext uri="{FF2B5EF4-FFF2-40B4-BE49-F238E27FC236}">
-                <a16:creationId xmlns:a16="http://schemas.microsoft.com/office/drawing/2014/main" id="{838F2D9F-67DC-421F-9613-D8BFED08000C}"/>
+                <a16:creationId xmlns:a16="http://schemas.microsoft.com/office/drawing/2014/main" id="{36001981-86F9-4634-AF1C-D16C0068A47B}"/>
               </a:ext>
             </a:extLst>
           </p:cNvPr>
@@ -14379,7 +15687,7 @@
           <p:cNvPr id="18" name="method-mark-6">
             <a:extLst xmlns:a="http://schemas.openxmlformats.org/drawingml/2006/main">
               <a:ext uri="{FF2B5EF4-FFF2-40B4-BE49-F238E27FC236}">
-                <a16:creationId xmlns:a16="http://schemas.microsoft.com/office/drawing/2014/main" id="{99379972-5123-47A6-B6D4-DF5AA83F8A4B}"/>
+                <a16:creationId xmlns:a16="http://schemas.microsoft.com/office/drawing/2014/main" id="{E9331246-5573-4B25-BAED-75460B505306}"/>
               </a:ext>
             </a:extLst>
           </p:cNvPr>
@@ -14441,7 +15749,7 @@
           <p:cNvPr id="19" name="method-6">
             <a:extLst xmlns:a="http://schemas.openxmlformats.org/drawingml/2006/main">
               <a:ext uri="{FF2B5EF4-FFF2-40B4-BE49-F238E27FC236}">
-                <a16:creationId xmlns:a16="http://schemas.microsoft.com/office/drawing/2014/main" id="{9CAA3661-A12D-4165-BDBE-089E04711A08}"/>
+                <a16:creationId xmlns:a16="http://schemas.microsoft.com/office/drawing/2014/main" id="{B5CE9899-9221-472C-9AFC-7A6BA453340B}"/>
               </a:ext>
             </a:extLst>
           </p:cNvPr>
@@ -14503,7 +15811,7 @@
           <p:cNvPr id="20" name="next-chapter">
             <a:extLst xmlns:a="http://schemas.openxmlformats.org/drawingml/2006/main">
               <a:ext uri="{FF2B5EF4-FFF2-40B4-BE49-F238E27FC236}">
-                <a16:creationId xmlns:a16="http://schemas.microsoft.com/office/drawing/2014/main" id="{9B7DADB9-E68B-4D5E-B1F7-FA055E226DA8}"/>
+                <a16:creationId xmlns:a16="http://schemas.microsoft.com/office/drawing/2014/main" id="{A9C2444F-FE82-4490-8C11-54911FE4EDEC}"/>
               </a:ext>
             </a:extLst>
           </p:cNvPr>
@@ -14565,7 +15873,7 @@
           <p:cNvPr id="21" name="close-title">
             <a:extLst xmlns:a="http://schemas.openxmlformats.org/drawingml/2006/main">
               <a:ext uri="{FF2B5EF4-FFF2-40B4-BE49-F238E27FC236}">
-                <a16:creationId xmlns:a16="http://schemas.microsoft.com/office/drawing/2014/main" id="{3684207F-8FC1-45A1-907A-C6EF685E51D6}"/>
+                <a16:creationId xmlns:a16="http://schemas.microsoft.com/office/drawing/2014/main" id="{D691DAC0-8BAC-4C51-8117-4B05D4EBC504}"/>
               </a:ext>
             </a:extLst>
           </p:cNvPr>
@@ -14627,7 +15935,7 @@
           <p:cNvPr id="22" name="close-footer">
             <a:extLst xmlns:a="http://schemas.openxmlformats.org/drawingml/2006/main">
               <a:ext uri="{FF2B5EF4-FFF2-40B4-BE49-F238E27FC236}">
-                <a16:creationId xmlns:a16="http://schemas.microsoft.com/office/drawing/2014/main" id="{83C5D604-040B-4C91-AF90-7CE64F3FDF35}"/>
+                <a16:creationId xmlns:a16="http://schemas.microsoft.com/office/drawing/2014/main" id="{2777C18D-7D7A-4949-9261-CE19C655590E}"/>
               </a:ext>
             </a:extLst>
           </p:cNvPr>
@@ -14689,7 +15997,7 @@
           <p:cNvPr id="23" name="close-number">
             <a:extLst xmlns:a="http://schemas.openxmlformats.org/drawingml/2006/main">
               <a:ext uri="{FF2B5EF4-FFF2-40B4-BE49-F238E27FC236}">
-                <a16:creationId xmlns:a16="http://schemas.microsoft.com/office/drawing/2014/main" id="{BF3EDB96-2D6A-4796-A606-F838A9F6FCEF}"/>
+                <a16:creationId xmlns:a16="http://schemas.microsoft.com/office/drawing/2014/main" id="{392D06A6-A6AD-4488-BB79-7EF15C5A0A9A}"/>
               </a:ext>
             </a:extLst>
           </p:cNvPr>
@@ -14741,7 +16049,7 @@
                 <a:ea typeface="Aptos"/>
                 <a:cs typeface="Aptos"/>
               </a:rPr>
-              <a:t>21</a:t>
+              <a:t>22</a:t>
             </a:r>
           </a:p>
         </p:txBody>
@@ -14749,7 +16057,7 @@
     </p:spTree>
     <p:extLst>
       <p:ext uri="{BB962C8B-B14F-4D97-AF65-F5344CB8AC3E}">
-        <p14:creationId xmlns:p14="http://schemas.microsoft.com/office/powerpoint/2010/main" val="1233955412"/>
+        <p14:creationId xmlns:p14="http://schemas.microsoft.com/office/powerpoint/2010/main" val="429998594"/>
       </p:ext>
     </p:extLst>
   </p:cSld>
@@ -14780,7 +16088,7 @@
           <p:cNvPr id="19" name="accent-rule">
             <a:extLst xmlns:a="http://schemas.openxmlformats.org/drawingml/2006/main">
               <a:ext uri="{FF2B5EF4-FFF2-40B4-BE49-F238E27FC236}">
-                <a16:creationId xmlns:a16="http://schemas.microsoft.com/office/drawing/2014/main" id="{1F70FB30-2056-4B00-89A4-07C3699FAEC1}"/>
+                <a16:creationId xmlns:a16="http://schemas.microsoft.com/office/drawing/2014/main" id="{815DA487-2D2B-4F91-B1C9-CD84A168F743}"/>
               </a:ext>
             </a:extLst>
           </p:cNvPr>
@@ -14811,7 +16119,7 @@
           <p:cNvPr id="2" name="chapter-label">
             <a:extLst xmlns:a="http://schemas.openxmlformats.org/drawingml/2006/main">
               <a:ext uri="{FF2B5EF4-FFF2-40B4-BE49-F238E27FC236}">
-                <a16:creationId xmlns:a16="http://schemas.microsoft.com/office/drawing/2014/main" id="{BE237584-EA72-4359-A6AC-926A1AE68DC7}"/>
+                <a16:creationId xmlns:a16="http://schemas.microsoft.com/office/drawing/2014/main" id="{97C9EBFF-BB9A-40BC-A9BD-EA7EE0D4CFB7}"/>
               </a:ext>
             </a:extLst>
           </p:cNvPr>
@@ -14873,7 +16181,7 @@
           <p:cNvPr id="3" name="slide-title">
             <a:extLst xmlns:a="http://schemas.openxmlformats.org/drawingml/2006/main">
               <a:ext uri="{FF2B5EF4-FFF2-40B4-BE49-F238E27FC236}">
-                <a16:creationId xmlns:a16="http://schemas.microsoft.com/office/drawing/2014/main" id="{A8D6F381-C49B-4B52-837C-9E36C028CC11}"/>
+                <a16:creationId xmlns:a16="http://schemas.microsoft.com/office/drawing/2014/main" id="{C2AD722D-F7DC-4E48-A96B-512FF9BE7228}"/>
               </a:ext>
             </a:extLst>
           </p:cNvPr>
@@ -14935,7 +16243,7 @@
           <p:cNvPr id="4" name="footer-rule">
             <a:extLst xmlns:a="http://schemas.openxmlformats.org/drawingml/2006/main">
               <a:ext uri="{FF2B5EF4-FFF2-40B4-BE49-F238E27FC236}">
-                <a16:creationId xmlns:a16="http://schemas.microsoft.com/office/drawing/2014/main" id="{F9428ACE-DBD8-4E53-ACB1-AF01E687C691}"/>
+                <a16:creationId xmlns:a16="http://schemas.microsoft.com/office/drawing/2014/main" id="{244D1B3B-7107-4F91-B793-08799587E84E}"/>
               </a:ext>
             </a:extLst>
           </p:cNvPr>
@@ -14966,7 +16274,7 @@
           <p:cNvPr id="5" name="footer-book">
             <a:extLst xmlns:a="http://schemas.openxmlformats.org/drawingml/2006/main">
               <a:ext uri="{FF2B5EF4-FFF2-40B4-BE49-F238E27FC236}">
-                <a16:creationId xmlns:a16="http://schemas.microsoft.com/office/drawing/2014/main" id="{B75F89A6-EBFA-4B32-8822-CC8A6D35E813}"/>
+                <a16:creationId xmlns:a16="http://schemas.microsoft.com/office/drawing/2014/main" id="{C6DBF9D1-3FA2-4A84-AEA9-F11CC99A0117}"/>
               </a:ext>
             </a:extLst>
           </p:cNvPr>
@@ -15028,7 +16336,7 @@
           <p:cNvPr id="6" name="footer-number">
             <a:extLst xmlns:a="http://schemas.openxmlformats.org/drawingml/2006/main">
               <a:ext uri="{FF2B5EF4-FFF2-40B4-BE49-F238E27FC236}">
-                <a16:creationId xmlns:a16="http://schemas.microsoft.com/office/drawing/2014/main" id="{2EBE6F31-D410-48F6-A3E2-12EB800A29A9}"/>
+                <a16:creationId xmlns:a16="http://schemas.microsoft.com/office/drawing/2014/main" id="{E7DA886A-6725-4F0A-8270-133AEFB255E9}"/>
               </a:ext>
             </a:extLst>
           </p:cNvPr>
@@ -15090,7 +16398,7 @@
           <p:cNvPr id="7" name="zero-price">
             <a:extLst xmlns:a="http://schemas.openxmlformats.org/drawingml/2006/main">
               <a:ext uri="{FF2B5EF4-FFF2-40B4-BE49-F238E27FC236}">
-                <a16:creationId xmlns:a16="http://schemas.microsoft.com/office/drawing/2014/main" id="{D7459B50-B7DC-4636-BAA3-6A62339EB8F9}"/>
+                <a16:creationId xmlns:a16="http://schemas.microsoft.com/office/drawing/2014/main" id="{387D8357-4CE0-411F-A88B-585EB618538B}"/>
               </a:ext>
             </a:extLst>
           </p:cNvPr>
@@ -15152,7 +16460,7 @@
           <p:cNvPr id="8" name="parking-label">
             <a:extLst xmlns:a="http://schemas.openxmlformats.org/drawingml/2006/main">
               <a:ext uri="{FF2B5EF4-FFF2-40B4-BE49-F238E27FC236}">
-                <a16:creationId xmlns:a16="http://schemas.microsoft.com/office/drawing/2014/main" id="{9D807AD7-302C-4645-B793-D138BD8CD991}"/>
+                <a16:creationId xmlns:a16="http://schemas.microsoft.com/office/drawing/2014/main" id="{006F57FD-9833-461C-9777-4392ED779153}"/>
               </a:ext>
             </a:extLst>
           </p:cNvPr>
@@ -15214,7 +16522,7 @@
           <p:cNvPr id="9" name="parking-divider">
             <a:extLst xmlns:a="http://schemas.openxmlformats.org/drawingml/2006/main">
               <a:ext uri="{FF2B5EF4-FFF2-40B4-BE49-F238E27FC236}">
-                <a16:creationId xmlns:a16="http://schemas.microsoft.com/office/drawing/2014/main" id="{3F27E488-82DD-462C-9577-B060CA043B6B}"/>
+                <a16:creationId xmlns:a16="http://schemas.microsoft.com/office/drawing/2014/main" id="{DD2D0687-E717-4204-AB61-B7667BA350A6}"/>
               </a:ext>
             </a:extLst>
           </p:cNvPr>
@@ -15245,7 +16553,7 @@
           <p:cNvPr id="10" name="parking-cost-mark-1">
             <a:extLst xmlns:a="http://schemas.openxmlformats.org/drawingml/2006/main">
               <a:ext uri="{FF2B5EF4-FFF2-40B4-BE49-F238E27FC236}">
-                <a16:creationId xmlns:a16="http://schemas.microsoft.com/office/drawing/2014/main" id="{EC9AC0E1-01A0-4CED-8E17-CE540C144745}"/>
+                <a16:creationId xmlns:a16="http://schemas.microsoft.com/office/drawing/2014/main" id="{EB6E5E5D-CFF1-4F9D-8D7A-C71D13352248}"/>
               </a:ext>
             </a:extLst>
           </p:cNvPr>
@@ -15307,7 +16615,7 @@
           <p:cNvPr id="11" name="parking-cost-1">
             <a:extLst xmlns:a="http://schemas.openxmlformats.org/drawingml/2006/main">
               <a:ext uri="{FF2B5EF4-FFF2-40B4-BE49-F238E27FC236}">
-                <a16:creationId xmlns:a16="http://schemas.microsoft.com/office/drawing/2014/main" id="{DA74464F-B123-46CE-B8B8-59E287770A46}"/>
+                <a16:creationId xmlns:a16="http://schemas.microsoft.com/office/drawing/2014/main" id="{D89B8EF0-D26C-4736-9C89-008CFA8F334E}"/>
               </a:ext>
             </a:extLst>
           </p:cNvPr>
@@ -15369,7 +16677,7 @@
           <p:cNvPr id="12" name="parking-cost-mark-2">
             <a:extLst xmlns:a="http://schemas.openxmlformats.org/drawingml/2006/main">
               <a:ext uri="{FF2B5EF4-FFF2-40B4-BE49-F238E27FC236}">
-                <a16:creationId xmlns:a16="http://schemas.microsoft.com/office/drawing/2014/main" id="{2689CF26-BB76-45C4-A3F0-B0CF8D8E8B72}"/>
+                <a16:creationId xmlns:a16="http://schemas.microsoft.com/office/drawing/2014/main" id="{89564A7B-6622-454B-A269-DAD62A988F39}"/>
               </a:ext>
             </a:extLst>
           </p:cNvPr>
@@ -15431,7 +16739,7 @@
           <p:cNvPr id="13" name="parking-cost-2">
             <a:extLst xmlns:a="http://schemas.openxmlformats.org/drawingml/2006/main">
               <a:ext uri="{FF2B5EF4-FFF2-40B4-BE49-F238E27FC236}">
-                <a16:creationId xmlns:a16="http://schemas.microsoft.com/office/drawing/2014/main" id="{C5D27F28-70A6-4BCD-B638-1316C2562A16}"/>
+                <a16:creationId xmlns:a16="http://schemas.microsoft.com/office/drawing/2014/main" id="{1503DCCF-2F74-4E60-A610-BD43ABF73E6B}"/>
               </a:ext>
             </a:extLst>
           </p:cNvPr>
@@ -15493,7 +16801,7 @@
           <p:cNvPr id="14" name="parking-cost-mark-3">
             <a:extLst xmlns:a="http://schemas.openxmlformats.org/drawingml/2006/main">
               <a:ext uri="{FF2B5EF4-FFF2-40B4-BE49-F238E27FC236}">
-                <a16:creationId xmlns:a16="http://schemas.microsoft.com/office/drawing/2014/main" id="{33CEF952-DFDD-40B6-9DE3-16A17DBB696C}"/>
+                <a16:creationId xmlns:a16="http://schemas.microsoft.com/office/drawing/2014/main" id="{7083CECE-F096-42A1-BABC-748A75724BCC}"/>
               </a:ext>
             </a:extLst>
           </p:cNvPr>
@@ -15555,7 +16863,7 @@
           <p:cNvPr id="15" name="parking-cost-3">
             <a:extLst xmlns:a="http://schemas.openxmlformats.org/drawingml/2006/main">
               <a:ext uri="{FF2B5EF4-FFF2-40B4-BE49-F238E27FC236}">
-                <a16:creationId xmlns:a16="http://schemas.microsoft.com/office/drawing/2014/main" id="{87C13F27-2A5E-47DC-831D-029A22D5927B}"/>
+                <a16:creationId xmlns:a16="http://schemas.microsoft.com/office/drawing/2014/main" id="{374295D6-2AD1-42D4-BE4C-E1BD28374DAD}"/>
               </a:ext>
             </a:extLst>
           </p:cNvPr>
@@ -15617,7 +16925,7 @@
           <p:cNvPr id="16" name="parking-cost-mark-4">
             <a:extLst xmlns:a="http://schemas.openxmlformats.org/drawingml/2006/main">
               <a:ext uri="{FF2B5EF4-FFF2-40B4-BE49-F238E27FC236}">
-                <a16:creationId xmlns:a16="http://schemas.microsoft.com/office/drawing/2014/main" id="{0B2680FD-ABB0-4DC1-9AFD-37ACFB489BB3}"/>
+                <a16:creationId xmlns:a16="http://schemas.microsoft.com/office/drawing/2014/main" id="{2ED1A127-6F03-458D-8F3B-9BF85159965A}"/>
               </a:ext>
             </a:extLst>
           </p:cNvPr>
@@ -15679,7 +16987,7 @@
           <p:cNvPr id="17" name="parking-cost-4">
             <a:extLst xmlns:a="http://schemas.openxmlformats.org/drawingml/2006/main">
               <a:ext uri="{FF2B5EF4-FFF2-40B4-BE49-F238E27FC236}">
-                <a16:creationId xmlns:a16="http://schemas.microsoft.com/office/drawing/2014/main" id="{D9381A7E-8EC9-44F2-A9C3-4D704680F582}"/>
+                <a16:creationId xmlns:a16="http://schemas.microsoft.com/office/drawing/2014/main" id="{457F904B-2C9C-4FF5-8630-832B767ED5A7}"/>
               </a:ext>
             </a:extLst>
           </p:cNvPr>
@@ -15741,7 +17049,7 @@
           <p:cNvPr id="18" name="parking-conclusion">
             <a:extLst xmlns:a="http://schemas.openxmlformats.org/drawingml/2006/main">
               <a:ext uri="{FF2B5EF4-FFF2-40B4-BE49-F238E27FC236}">
-                <a16:creationId xmlns:a16="http://schemas.microsoft.com/office/drawing/2014/main" id="{6F226024-5D82-4938-AD70-44B07A91E4AE}"/>
+                <a16:creationId xmlns:a16="http://schemas.microsoft.com/office/drawing/2014/main" id="{350035B9-FE41-466F-B181-3FD278A2D4FB}"/>
               </a:ext>
             </a:extLst>
           </p:cNvPr>
@@ -15801,7 +17109,7 @@
     </p:spTree>
     <p:extLst>
       <p:ext uri="{BB962C8B-B14F-4D97-AF65-F5344CB8AC3E}">
-        <p14:creationId xmlns:p14="http://schemas.microsoft.com/office/powerpoint/2010/main" val="1920410535"/>
+        <p14:creationId xmlns:p14="http://schemas.microsoft.com/office/powerpoint/2010/main" val="1221507125"/>
       </p:ext>
     </p:extLst>
   </p:cSld>
@@ -15832,7 +17140,7 @@
           <p:cNvPr id="21" name="accent-rule">
             <a:extLst xmlns:a="http://schemas.openxmlformats.org/drawingml/2006/main">
               <a:ext uri="{FF2B5EF4-FFF2-40B4-BE49-F238E27FC236}">
-                <a16:creationId xmlns:a16="http://schemas.microsoft.com/office/drawing/2014/main" id="{F100F0AA-4DC6-4825-8920-6B16FAE1F3CE}"/>
+                <a16:creationId xmlns:a16="http://schemas.microsoft.com/office/drawing/2014/main" id="{876DD565-1ED1-4FB8-B40E-ADAEAFEE4BDE}"/>
               </a:ext>
             </a:extLst>
           </p:cNvPr>
@@ -15863,7 +17171,7 @@
           <p:cNvPr id="2" name="chapter-label">
             <a:extLst xmlns:a="http://schemas.openxmlformats.org/drawingml/2006/main">
               <a:ext uri="{FF2B5EF4-FFF2-40B4-BE49-F238E27FC236}">
-                <a16:creationId xmlns:a16="http://schemas.microsoft.com/office/drawing/2014/main" id="{92E1B748-01A9-4DAC-912B-CC94EF239555}"/>
+                <a16:creationId xmlns:a16="http://schemas.microsoft.com/office/drawing/2014/main" id="{5E79EF6E-2DBB-4516-9DD1-82B9C61E8AC3}"/>
               </a:ext>
             </a:extLst>
           </p:cNvPr>
@@ -15925,7 +17233,7 @@
           <p:cNvPr id="3" name="slide-title">
             <a:extLst xmlns:a="http://schemas.openxmlformats.org/drawingml/2006/main">
               <a:ext uri="{FF2B5EF4-FFF2-40B4-BE49-F238E27FC236}">
-                <a16:creationId xmlns:a16="http://schemas.microsoft.com/office/drawing/2014/main" id="{7AF19359-9B7B-4D65-9918-B71D26237EFA}"/>
+                <a16:creationId xmlns:a16="http://schemas.microsoft.com/office/drawing/2014/main" id="{27CD1FED-44BF-4E67-994F-E70008478B6B}"/>
               </a:ext>
             </a:extLst>
           </p:cNvPr>
@@ -15987,7 +17295,7 @@
           <p:cNvPr id="4" name="footer-rule">
             <a:extLst xmlns:a="http://schemas.openxmlformats.org/drawingml/2006/main">
               <a:ext uri="{FF2B5EF4-FFF2-40B4-BE49-F238E27FC236}">
-                <a16:creationId xmlns:a16="http://schemas.microsoft.com/office/drawing/2014/main" id="{CBBF030A-3BC0-487A-A41B-C9A192CD875C}"/>
+                <a16:creationId xmlns:a16="http://schemas.microsoft.com/office/drawing/2014/main" id="{11605E2F-6D0A-4F6C-A7A5-14205F560EDB}"/>
               </a:ext>
             </a:extLst>
           </p:cNvPr>
@@ -16018,7 +17326,7 @@
           <p:cNvPr id="5" name="footer-book">
             <a:extLst xmlns:a="http://schemas.openxmlformats.org/drawingml/2006/main">
               <a:ext uri="{FF2B5EF4-FFF2-40B4-BE49-F238E27FC236}">
-                <a16:creationId xmlns:a16="http://schemas.microsoft.com/office/drawing/2014/main" id="{040676DD-77D5-40D3-AFE3-C7A97DB21AB3}"/>
+                <a16:creationId xmlns:a16="http://schemas.microsoft.com/office/drawing/2014/main" id="{4A438552-137D-48A1-BEB1-1010C54563BB}"/>
               </a:ext>
             </a:extLst>
           </p:cNvPr>
@@ -16080,7 +17388,7 @@
           <p:cNvPr id="6" name="footer-number">
             <a:extLst xmlns:a="http://schemas.openxmlformats.org/drawingml/2006/main">
               <a:ext uri="{FF2B5EF4-FFF2-40B4-BE49-F238E27FC236}">
-                <a16:creationId xmlns:a16="http://schemas.microsoft.com/office/drawing/2014/main" id="{E6ABBB92-A3B5-49EE-B6D3-70078440BBA9}"/>
+                <a16:creationId xmlns:a16="http://schemas.microsoft.com/office/drawing/2014/main" id="{FED9C4A5-154E-4969-ACC1-74C07CB11F4E}"/>
               </a:ext>
             </a:extLst>
           </p:cNvPr>
@@ -16142,7 +17450,7 @@
           <p:cNvPr id="7" name="scarcity-word">
             <a:extLst xmlns:a="http://schemas.openxmlformats.org/drawingml/2006/main">
               <a:ext uri="{FF2B5EF4-FFF2-40B4-BE49-F238E27FC236}">
-                <a16:creationId xmlns:a16="http://schemas.microsoft.com/office/drawing/2014/main" id="{73AE0FDA-1E1F-459D-8F04-69C1A79001F1}"/>
+                <a16:creationId xmlns:a16="http://schemas.microsoft.com/office/drawing/2014/main" id="{BE6C3F22-71A5-4D1B-8B7B-DB26F727E168}"/>
               </a:ext>
             </a:extLst>
           </p:cNvPr>
@@ -16204,7 +17512,7 @@
           <p:cNvPr id="8" name="scarcity-definition">
             <a:extLst xmlns:a="http://schemas.openxmlformats.org/drawingml/2006/main">
               <a:ext uri="{FF2B5EF4-FFF2-40B4-BE49-F238E27FC236}">
-                <a16:creationId xmlns:a16="http://schemas.microsoft.com/office/drawing/2014/main" id="{329C0803-434B-48D4-A8AE-29432E94FB10}"/>
+                <a16:creationId xmlns:a16="http://schemas.microsoft.com/office/drawing/2014/main" id="{C73AF471-BA59-455B-A913-04E336BDC349}"/>
               </a:ext>
             </a:extLst>
           </p:cNvPr>
@@ -16266,7 +17574,7 @@
           <p:cNvPr id="9" name="">
             <a:extLst xmlns:a="http://schemas.openxmlformats.org/drawingml/2006/main">
               <a:ext uri="{FF2B5EF4-FFF2-40B4-BE49-F238E27FC236}">
-                <a16:creationId xmlns:a16="http://schemas.microsoft.com/office/drawing/2014/main" id="{85B74976-1911-4574-827C-F0FAE527ABA6}"/>
+                <a16:creationId xmlns:a16="http://schemas.microsoft.com/office/drawing/2014/main" id="{9D9661CC-1F56-4533-A8CE-DA1AA740F981}"/>
               </a:ext>
             </a:extLst>
           </p:cNvPr>
@@ -16328,7 +17636,7 @@
           <p:cNvPr id="10" name="scarce-examples-mark-1">
             <a:extLst xmlns:a="http://schemas.openxmlformats.org/drawingml/2006/main">
               <a:ext uri="{FF2B5EF4-FFF2-40B4-BE49-F238E27FC236}">
-                <a16:creationId xmlns:a16="http://schemas.microsoft.com/office/drawing/2014/main" id="{A2193574-2A86-42EC-8D21-A0314279488A}"/>
+                <a16:creationId xmlns:a16="http://schemas.microsoft.com/office/drawing/2014/main" id="{FAAA37DB-0A95-4DB5-93D6-DCE70526B162}"/>
               </a:ext>
             </a:extLst>
           </p:cNvPr>
@@ -16390,7 +17698,7 @@
           <p:cNvPr id="11" name="scarce-examples-1">
             <a:extLst xmlns:a="http://schemas.openxmlformats.org/drawingml/2006/main">
               <a:ext uri="{FF2B5EF4-FFF2-40B4-BE49-F238E27FC236}">
-                <a16:creationId xmlns:a16="http://schemas.microsoft.com/office/drawing/2014/main" id="{9124020B-D195-45CA-8534-E0150E6A21EB}"/>
+                <a16:creationId xmlns:a16="http://schemas.microsoft.com/office/drawing/2014/main" id="{8C3F7E8B-65DA-4F4C-81E1-D367CCFDA860}"/>
               </a:ext>
             </a:extLst>
           </p:cNvPr>
@@ -16452,7 +17760,7 @@
           <p:cNvPr id="12" name="scarce-examples-mark-2">
             <a:extLst xmlns:a="http://schemas.openxmlformats.org/drawingml/2006/main">
               <a:ext uri="{FF2B5EF4-FFF2-40B4-BE49-F238E27FC236}">
-                <a16:creationId xmlns:a16="http://schemas.microsoft.com/office/drawing/2014/main" id="{69FA7672-DBC9-4480-BA9F-A60A98E69164}"/>
+                <a16:creationId xmlns:a16="http://schemas.microsoft.com/office/drawing/2014/main" id="{0BE4A10E-C341-47EF-B187-75B9C72CA53A}"/>
               </a:ext>
             </a:extLst>
           </p:cNvPr>
@@ -16514,7 +17822,7 @@
           <p:cNvPr id="13" name="scarce-examples-2">
             <a:extLst xmlns:a="http://schemas.openxmlformats.org/drawingml/2006/main">
               <a:ext uri="{FF2B5EF4-FFF2-40B4-BE49-F238E27FC236}">
-                <a16:creationId xmlns:a16="http://schemas.microsoft.com/office/drawing/2014/main" id="{4675B512-09D3-4FBC-9E85-B8BD0A148E0C}"/>
+                <a16:creationId xmlns:a16="http://schemas.microsoft.com/office/drawing/2014/main" id="{0F2E531A-B949-4CD4-A3C5-A828FCEC3036}"/>
               </a:ext>
             </a:extLst>
           </p:cNvPr>
@@ -16576,7 +17884,7 @@
           <p:cNvPr id="14" name="scarce-examples-mark-3">
             <a:extLst xmlns:a="http://schemas.openxmlformats.org/drawingml/2006/main">
               <a:ext uri="{FF2B5EF4-FFF2-40B4-BE49-F238E27FC236}">
-                <a16:creationId xmlns:a16="http://schemas.microsoft.com/office/drawing/2014/main" id="{FCFBA215-9FBC-46D6-9109-1F041239DC48}"/>
+                <a16:creationId xmlns:a16="http://schemas.microsoft.com/office/drawing/2014/main" id="{5BEB7641-A552-4148-9295-A290DCF3E9D1}"/>
               </a:ext>
             </a:extLst>
           </p:cNvPr>
@@ -16638,7 +17946,7 @@
           <p:cNvPr id="15" name="scarce-examples-3">
             <a:extLst xmlns:a="http://schemas.openxmlformats.org/drawingml/2006/main">
               <a:ext uri="{FF2B5EF4-FFF2-40B4-BE49-F238E27FC236}">
-                <a16:creationId xmlns:a16="http://schemas.microsoft.com/office/drawing/2014/main" id="{BDE743A2-A104-4569-A087-3ABC582BAE38}"/>
+                <a16:creationId xmlns:a16="http://schemas.microsoft.com/office/drawing/2014/main" id="{187C8676-2D21-46BE-9B6C-F80266FB6DD6}"/>
               </a:ext>
             </a:extLst>
           </p:cNvPr>
@@ -16700,7 +18008,7 @@
           <p:cNvPr id="16" name="scarce-examples-mark-4">
             <a:extLst xmlns:a="http://schemas.openxmlformats.org/drawingml/2006/main">
               <a:ext uri="{FF2B5EF4-FFF2-40B4-BE49-F238E27FC236}">
-                <a16:creationId xmlns:a16="http://schemas.microsoft.com/office/drawing/2014/main" id="{68DA630D-E3CC-48D2-8786-D7AC9C9260DE}"/>
+                <a16:creationId xmlns:a16="http://schemas.microsoft.com/office/drawing/2014/main" id="{2C243FD7-6C43-406A-91E8-BCB95C3B5F2D}"/>
               </a:ext>
             </a:extLst>
           </p:cNvPr>
@@ -16762,7 +18070,7 @@
           <p:cNvPr id="17" name="scarce-examples-4">
             <a:extLst xmlns:a="http://schemas.openxmlformats.org/drawingml/2006/main">
               <a:ext uri="{FF2B5EF4-FFF2-40B4-BE49-F238E27FC236}">
-                <a16:creationId xmlns:a16="http://schemas.microsoft.com/office/drawing/2014/main" id="{BE1CAFDC-C4CF-48F9-872E-FB6A2EFB6CF0}"/>
+                <a16:creationId xmlns:a16="http://schemas.microsoft.com/office/drawing/2014/main" id="{6AD5687E-13B4-4A9A-BE0F-23FDF029E577}"/>
               </a:ext>
             </a:extLst>
           </p:cNvPr>
@@ -16824,7 +18132,7 @@
           <p:cNvPr id="18" name="scarce-examples-mark-5">
             <a:extLst xmlns:a="http://schemas.openxmlformats.org/drawingml/2006/main">
               <a:ext uri="{FF2B5EF4-FFF2-40B4-BE49-F238E27FC236}">
-                <a16:creationId xmlns:a16="http://schemas.microsoft.com/office/drawing/2014/main" id="{9D5ED492-5390-4B1C-A409-F2134F42C640}"/>
+                <a16:creationId xmlns:a16="http://schemas.microsoft.com/office/drawing/2014/main" id="{0C32D1ED-83DF-4262-A2E5-B16D28E53F7A}"/>
               </a:ext>
             </a:extLst>
           </p:cNvPr>
@@ -16886,7 +18194,7 @@
           <p:cNvPr id="19" name="scarce-examples-5">
             <a:extLst xmlns:a="http://schemas.openxmlformats.org/drawingml/2006/main">
               <a:ext uri="{FF2B5EF4-FFF2-40B4-BE49-F238E27FC236}">
-                <a16:creationId xmlns:a16="http://schemas.microsoft.com/office/drawing/2014/main" id="{D18D52AA-BE5E-4840-9467-5C6A0FA463F5}"/>
+                <a16:creationId xmlns:a16="http://schemas.microsoft.com/office/drawing/2014/main" id="{580C937C-4D24-4426-AD01-318884DEB6AD}"/>
               </a:ext>
             </a:extLst>
           </p:cNvPr>
@@ -16948,7 +18256,7 @@
           <p:cNvPr id="20" name="tradeoff-line">
             <a:extLst xmlns:a="http://schemas.openxmlformats.org/drawingml/2006/main">
               <a:ext uri="{FF2B5EF4-FFF2-40B4-BE49-F238E27FC236}">
-                <a16:creationId xmlns:a16="http://schemas.microsoft.com/office/drawing/2014/main" id="{E8EED6C6-93A0-4F1D-A27B-88AED47AF156}"/>
+                <a16:creationId xmlns:a16="http://schemas.microsoft.com/office/drawing/2014/main" id="{199642F7-7A26-4AA3-A60D-89A0CFEB54E4}"/>
               </a:ext>
             </a:extLst>
           </p:cNvPr>
@@ -17008,7 +18316,7 @@
     </p:spTree>
     <p:extLst>
       <p:ext uri="{BB962C8B-B14F-4D97-AF65-F5344CB8AC3E}">
-        <p14:creationId xmlns:p14="http://schemas.microsoft.com/office/powerpoint/2010/main" val="1190999779"/>
+        <p14:creationId xmlns:p14="http://schemas.microsoft.com/office/powerpoint/2010/main" val="1686695662"/>
       </p:ext>
     </p:extLst>
   </p:cSld>
@@ -17039,7 +18347,7 @@
           <p:cNvPr id="12" name="accent-rule">
             <a:extLst xmlns:a="http://schemas.openxmlformats.org/drawingml/2006/main">
               <a:ext uri="{FF2B5EF4-FFF2-40B4-BE49-F238E27FC236}">
-                <a16:creationId xmlns:a16="http://schemas.microsoft.com/office/drawing/2014/main" id="{5A086BE6-DBC3-4ED6-A107-1D6747E59818}"/>
+                <a16:creationId xmlns:a16="http://schemas.microsoft.com/office/drawing/2014/main" id="{2838C7DF-D523-4F1C-8C20-3B36BFBD0530}"/>
               </a:ext>
             </a:extLst>
           </p:cNvPr>
@@ -17070,7 +18378,7 @@
           <p:cNvPr id="2" name="chapter-label">
             <a:extLst xmlns:a="http://schemas.openxmlformats.org/drawingml/2006/main">
               <a:ext uri="{FF2B5EF4-FFF2-40B4-BE49-F238E27FC236}">
-                <a16:creationId xmlns:a16="http://schemas.microsoft.com/office/drawing/2014/main" id="{29F2C708-8933-4441-B51D-E4D4E4902A7A}"/>
+                <a16:creationId xmlns:a16="http://schemas.microsoft.com/office/drawing/2014/main" id="{15C85539-3C76-420C-B1A8-4CC757193838}"/>
               </a:ext>
             </a:extLst>
           </p:cNvPr>
@@ -17132,7 +18440,7 @@
           <p:cNvPr id="3" name="slide-title">
             <a:extLst xmlns:a="http://schemas.openxmlformats.org/drawingml/2006/main">
               <a:ext uri="{FF2B5EF4-FFF2-40B4-BE49-F238E27FC236}">
-                <a16:creationId xmlns:a16="http://schemas.microsoft.com/office/drawing/2014/main" id="{A193746D-3002-431B-82F7-33F770F40650}"/>
+                <a16:creationId xmlns:a16="http://schemas.microsoft.com/office/drawing/2014/main" id="{CD321AC7-1FC8-40CB-B095-522C1415BC02}"/>
               </a:ext>
             </a:extLst>
           </p:cNvPr>
@@ -17194,7 +18502,7 @@
           <p:cNvPr id="4" name="footer-rule">
             <a:extLst xmlns:a="http://schemas.openxmlformats.org/drawingml/2006/main">
               <a:ext uri="{FF2B5EF4-FFF2-40B4-BE49-F238E27FC236}">
-                <a16:creationId xmlns:a16="http://schemas.microsoft.com/office/drawing/2014/main" id="{0A084D66-DED5-4064-B1CB-9A65D303A633}"/>
+                <a16:creationId xmlns:a16="http://schemas.microsoft.com/office/drawing/2014/main" id="{F24768D1-855A-49C2-B57C-B87B94540032}"/>
               </a:ext>
             </a:extLst>
           </p:cNvPr>
@@ -17225,7 +18533,7 @@
           <p:cNvPr id="5" name="footer-book">
             <a:extLst xmlns:a="http://schemas.openxmlformats.org/drawingml/2006/main">
               <a:ext uri="{FF2B5EF4-FFF2-40B4-BE49-F238E27FC236}">
-                <a16:creationId xmlns:a16="http://schemas.microsoft.com/office/drawing/2014/main" id="{38F39F7B-D0A6-4E91-B7CB-EEB9A809170C}"/>
+                <a16:creationId xmlns:a16="http://schemas.microsoft.com/office/drawing/2014/main" id="{0460EEC7-393E-4111-9D24-8EBECEE0B88F}"/>
               </a:ext>
             </a:extLst>
           </p:cNvPr>
@@ -17287,7 +18595,7 @@
           <p:cNvPr id="6" name="footer-number">
             <a:extLst xmlns:a="http://schemas.openxmlformats.org/drawingml/2006/main">
               <a:ext uri="{FF2B5EF4-FFF2-40B4-BE49-F238E27FC236}">
-                <a16:creationId xmlns:a16="http://schemas.microsoft.com/office/drawing/2014/main" id="{41623B40-B262-45F7-9C60-820AD9A382DC}"/>
+                <a16:creationId xmlns:a16="http://schemas.microsoft.com/office/drawing/2014/main" id="{5021B2DA-B719-4CF9-8E32-B631BCF06513}"/>
               </a:ext>
             </a:extLst>
           </p:cNvPr>
@@ -17349,7 +18657,7 @@
           <p:cNvPr id="7" name="college-cost-question">
             <a:extLst xmlns:a="http://schemas.openxmlformats.org/drawingml/2006/main">
               <a:ext uri="{FF2B5EF4-FFF2-40B4-BE49-F238E27FC236}">
-                <a16:creationId xmlns:a16="http://schemas.microsoft.com/office/drawing/2014/main" id="{52D230B0-EEA1-438D-8A3D-D115B07DE0F9}"/>
+                <a16:creationId xmlns:a16="http://schemas.microsoft.com/office/drawing/2014/main" id="{90C4540B-C457-4C19-B65E-DBD2E893065F}"/>
               </a:ext>
             </a:extLst>
           </p:cNvPr>
@@ -17411,7 +18719,7 @@
           <p:cNvPr id="8" name="college-question-divider">
             <a:extLst xmlns:a="http://schemas.openxmlformats.org/drawingml/2006/main">
               <a:ext uri="{FF2B5EF4-FFF2-40B4-BE49-F238E27FC236}">
-                <a16:creationId xmlns:a16="http://schemas.microsoft.com/office/drawing/2014/main" id="{B0B25E5B-DC20-4DC6-84CE-7D352E21E68C}"/>
+                <a16:creationId xmlns:a16="http://schemas.microsoft.com/office/drawing/2014/main" id="{CE3C299F-2E8D-4FC2-9A08-34F7961047D7}"/>
               </a:ext>
             </a:extLst>
           </p:cNvPr>
@@ -17442,7 +18750,7 @@
           <p:cNvPr id="9" name="college-cost-prompt">
             <a:extLst xmlns:a="http://schemas.openxmlformats.org/drawingml/2006/main">
               <a:ext uri="{FF2B5EF4-FFF2-40B4-BE49-F238E27FC236}">
-                <a16:creationId xmlns:a16="http://schemas.microsoft.com/office/drawing/2014/main" id="{2B782906-AFE7-4067-B081-13D5E4290D55}"/>
+                <a16:creationId xmlns:a16="http://schemas.microsoft.com/office/drawing/2014/main" id="{A150E83F-FD80-470F-83E2-451B9CC09F27}"/>
               </a:ext>
             </a:extLst>
           </p:cNvPr>
@@ -17531,7 +18839,7 @@
           <p:cNvPr id="10" name="college-cost-hint">
             <a:extLst xmlns:a="http://schemas.openxmlformats.org/drawingml/2006/main">
               <a:ext uri="{FF2B5EF4-FFF2-40B4-BE49-F238E27FC236}">
-                <a16:creationId xmlns:a16="http://schemas.microsoft.com/office/drawing/2014/main" id="{71067ADE-E0A8-48AD-951E-98EB92F96033}"/>
+                <a16:creationId xmlns:a16="http://schemas.microsoft.com/office/drawing/2014/main" id="{BA4487F1-2CAE-4E00-A232-15A68C6FC913}"/>
               </a:ext>
             </a:extLst>
           </p:cNvPr>
@@ -17593,7 +18901,7 @@
           <p:cNvPr id="11" name="college-cost-reveal">
             <a:extLst xmlns:a="http://schemas.openxmlformats.org/drawingml/2006/main">
               <a:ext uri="{FF2B5EF4-FFF2-40B4-BE49-F238E27FC236}">
-                <a16:creationId xmlns:a16="http://schemas.microsoft.com/office/drawing/2014/main" id="{A7E19856-8E0D-442B-881E-F6DB5ED398E6}"/>
+                <a16:creationId xmlns:a16="http://schemas.microsoft.com/office/drawing/2014/main" id="{D0C1CD82-C38B-4153-BCE3-B7874233B523}"/>
               </a:ext>
             </a:extLst>
           </p:cNvPr>
@@ -17653,7 +18961,7 @@
     </p:spTree>
     <p:extLst>
       <p:ext uri="{BB962C8B-B14F-4D97-AF65-F5344CB8AC3E}">
-        <p14:creationId xmlns:p14="http://schemas.microsoft.com/office/powerpoint/2010/main" val="1817856176"/>
+        <p14:creationId xmlns:p14="http://schemas.microsoft.com/office/powerpoint/2010/main" val="1111893211"/>
       </p:ext>
     </p:extLst>
   </p:cSld>
@@ -17684,7 +18992,7 @@
           <p:cNvPr id="18" name="accent-rule">
             <a:extLst xmlns:a="http://schemas.openxmlformats.org/drawingml/2006/main">
               <a:ext uri="{FF2B5EF4-FFF2-40B4-BE49-F238E27FC236}">
-                <a16:creationId xmlns:a16="http://schemas.microsoft.com/office/drawing/2014/main" id="{22052277-60BA-4267-8F3C-D67826D96AB0}"/>
+                <a16:creationId xmlns:a16="http://schemas.microsoft.com/office/drawing/2014/main" id="{AA6797BE-2499-4E7D-A308-8AD56CB0D258}"/>
               </a:ext>
             </a:extLst>
           </p:cNvPr>
@@ -17715,7 +19023,7 @@
           <p:cNvPr id="2" name="chapter-label">
             <a:extLst xmlns:a="http://schemas.openxmlformats.org/drawingml/2006/main">
               <a:ext uri="{FF2B5EF4-FFF2-40B4-BE49-F238E27FC236}">
-                <a16:creationId xmlns:a16="http://schemas.microsoft.com/office/drawing/2014/main" id="{1290668D-230A-429E-98ED-CD7DD5F44C76}"/>
+                <a16:creationId xmlns:a16="http://schemas.microsoft.com/office/drawing/2014/main" id="{E9054F0E-52EB-464D-BD7E-56A868B7010B}"/>
               </a:ext>
             </a:extLst>
           </p:cNvPr>
@@ -17777,7 +19085,7 @@
           <p:cNvPr id="3" name="slide-title">
             <a:extLst xmlns:a="http://schemas.openxmlformats.org/drawingml/2006/main">
               <a:ext uri="{FF2B5EF4-FFF2-40B4-BE49-F238E27FC236}">
-                <a16:creationId xmlns:a16="http://schemas.microsoft.com/office/drawing/2014/main" id="{91A48BEC-0EF1-4292-986A-AF8E73230445}"/>
+                <a16:creationId xmlns:a16="http://schemas.microsoft.com/office/drawing/2014/main" id="{ECE9196F-5440-48BB-B376-A3BA1E4BF8A8}"/>
               </a:ext>
             </a:extLst>
           </p:cNvPr>
@@ -17839,7 +19147,7 @@
           <p:cNvPr id="4" name="footer-rule">
             <a:extLst xmlns:a="http://schemas.openxmlformats.org/drawingml/2006/main">
               <a:ext uri="{FF2B5EF4-FFF2-40B4-BE49-F238E27FC236}">
-                <a16:creationId xmlns:a16="http://schemas.microsoft.com/office/drawing/2014/main" id="{C43A2E0C-D095-41AC-A94D-A3EBD2A6D472}"/>
+                <a16:creationId xmlns:a16="http://schemas.microsoft.com/office/drawing/2014/main" id="{5A4C5720-B2F3-4260-A6D9-C69540634D07}"/>
               </a:ext>
             </a:extLst>
           </p:cNvPr>
@@ -17870,7 +19178,7 @@
           <p:cNvPr id="5" name="footer-book">
             <a:extLst xmlns:a="http://schemas.openxmlformats.org/drawingml/2006/main">
               <a:ext uri="{FF2B5EF4-FFF2-40B4-BE49-F238E27FC236}">
-                <a16:creationId xmlns:a16="http://schemas.microsoft.com/office/drawing/2014/main" id="{0F395D5B-2B31-48E4-B4EF-69F5C34C0C5E}"/>
+                <a16:creationId xmlns:a16="http://schemas.microsoft.com/office/drawing/2014/main" id="{D46264BB-D53E-412C-B1FF-13E1E3C51067}"/>
               </a:ext>
             </a:extLst>
           </p:cNvPr>
@@ -17932,7 +19240,7 @@
           <p:cNvPr id="6" name="footer-number">
             <a:extLst xmlns:a="http://schemas.openxmlformats.org/drawingml/2006/main">
               <a:ext uri="{FF2B5EF4-FFF2-40B4-BE49-F238E27FC236}">
-                <a16:creationId xmlns:a16="http://schemas.microsoft.com/office/drawing/2014/main" id="{C7AD7383-9111-4851-8299-F775FB837BBA}"/>
+                <a16:creationId xmlns:a16="http://schemas.microsoft.com/office/drawing/2014/main" id="{82489AF0-1CE6-42AD-BE15-E42726F5C9B4}"/>
               </a:ext>
             </a:extLst>
           </p:cNvPr>
@@ -17994,7 +19302,7 @@
           <p:cNvPr id="7" name="">
             <a:extLst xmlns:a="http://schemas.openxmlformats.org/drawingml/2006/main">
               <a:ext uri="{FF2B5EF4-FFF2-40B4-BE49-F238E27FC236}">
-                <a16:creationId xmlns:a16="http://schemas.microsoft.com/office/drawing/2014/main" id="{B8C71716-D7C2-40AF-8C43-1666BF424551}"/>
+                <a16:creationId xmlns:a16="http://schemas.microsoft.com/office/drawing/2014/main" id="{A007470F-9B5F-4BDA-A9EE-0738423C9C99}"/>
               </a:ext>
             </a:extLst>
           </p:cNvPr>
@@ -18056,7 +19364,7 @@
           <p:cNvPr id="8" name="direct-college-cost-mark-1">
             <a:extLst xmlns:a="http://schemas.openxmlformats.org/drawingml/2006/main">
               <a:ext uri="{FF2B5EF4-FFF2-40B4-BE49-F238E27FC236}">
-                <a16:creationId xmlns:a16="http://schemas.microsoft.com/office/drawing/2014/main" id="{30D59510-1B1D-49C4-8AF4-6F8D02168504}"/>
+                <a16:creationId xmlns:a16="http://schemas.microsoft.com/office/drawing/2014/main" id="{171BF317-397A-49E9-A9C7-D98D4DFFF45D}"/>
               </a:ext>
             </a:extLst>
           </p:cNvPr>
@@ -18118,7 +19426,7 @@
           <p:cNvPr id="9" name="direct-college-cost-1">
             <a:extLst xmlns:a="http://schemas.openxmlformats.org/drawingml/2006/main">
               <a:ext uri="{FF2B5EF4-FFF2-40B4-BE49-F238E27FC236}">
-                <a16:creationId xmlns:a16="http://schemas.microsoft.com/office/drawing/2014/main" id="{99BCA998-A31C-464B-B8E3-65F07D14100A}"/>
+                <a16:creationId xmlns:a16="http://schemas.microsoft.com/office/drawing/2014/main" id="{E03BB12C-FF9A-4A4A-981A-7C81AD1A2251}"/>
               </a:ext>
             </a:extLst>
           </p:cNvPr>
@@ -18180,7 +19488,7 @@
           <p:cNvPr id="10" name="direct-college-cost-mark-2">
             <a:extLst xmlns:a="http://schemas.openxmlformats.org/drawingml/2006/main">
               <a:ext uri="{FF2B5EF4-FFF2-40B4-BE49-F238E27FC236}">
-                <a16:creationId xmlns:a16="http://schemas.microsoft.com/office/drawing/2014/main" id="{9FA6C3CC-4ADE-4654-9C87-6108B388D27A}"/>
+                <a16:creationId xmlns:a16="http://schemas.microsoft.com/office/drawing/2014/main" id="{B2A66845-2754-434F-BDB3-D6996AD4C7FC}"/>
               </a:ext>
             </a:extLst>
           </p:cNvPr>
@@ -18242,7 +19550,7 @@
           <p:cNvPr id="11" name="direct-college-cost-2">
             <a:extLst xmlns:a="http://schemas.openxmlformats.org/drawingml/2006/main">
               <a:ext uri="{FF2B5EF4-FFF2-40B4-BE49-F238E27FC236}">
-                <a16:creationId xmlns:a16="http://schemas.microsoft.com/office/drawing/2014/main" id="{55388073-E731-4188-9504-0B41F7D8ED9B}"/>
+                <a16:creationId xmlns:a16="http://schemas.microsoft.com/office/drawing/2014/main" id="{DAFBA819-0081-49CA-A606-024E729A9B88}"/>
               </a:ext>
             </a:extLst>
           </p:cNvPr>
@@ -18304,7 +19612,7 @@
           <p:cNvPr id="12" name="direct-college-cost-mark-3">
             <a:extLst xmlns:a="http://schemas.openxmlformats.org/drawingml/2006/main">
               <a:ext uri="{FF2B5EF4-FFF2-40B4-BE49-F238E27FC236}">
-                <a16:creationId xmlns:a16="http://schemas.microsoft.com/office/drawing/2014/main" id="{BB14B297-8042-44B5-813E-05A8A454102C}"/>
+                <a16:creationId xmlns:a16="http://schemas.microsoft.com/office/drawing/2014/main" id="{864FAB9B-C052-4CB0-8AB0-D2218C329396}"/>
               </a:ext>
             </a:extLst>
           </p:cNvPr>
@@ -18366,7 +19674,7 @@
           <p:cNvPr id="13" name="direct-college-cost-3">
             <a:extLst xmlns:a="http://schemas.openxmlformats.org/drawingml/2006/main">
               <a:ext uri="{FF2B5EF4-FFF2-40B4-BE49-F238E27FC236}">
-                <a16:creationId xmlns:a16="http://schemas.microsoft.com/office/drawing/2014/main" id="{F6735D1F-CA8C-4B59-89CF-DEC6CFA2C453}"/>
+                <a16:creationId xmlns:a16="http://schemas.microsoft.com/office/drawing/2014/main" id="{7B7C066D-8C48-49AF-B036-315DAB3C74D5}"/>
               </a:ext>
             </a:extLst>
           </p:cNvPr>
@@ -18428,7 +19736,7 @@
           <p:cNvPr id="14" name="room-board-panel">
             <a:extLst xmlns:a="http://schemas.openxmlformats.org/drawingml/2006/main">
               <a:ext uri="{FF2B5EF4-FFF2-40B4-BE49-F238E27FC236}">
-                <a16:creationId xmlns:a16="http://schemas.microsoft.com/office/drawing/2014/main" id="{2FDE937D-967A-4E85-802E-B566D23E3A43}"/>
+                <a16:creationId xmlns:a16="http://schemas.microsoft.com/office/drawing/2014/main" id="{422F28D4-6479-4977-B711-0DA97415FC5E}"/>
               </a:ext>
             </a:extLst>
           </p:cNvPr>
@@ -18459,7 +19767,7 @@
           <p:cNvPr id="15" name="room-board-title">
             <a:extLst xmlns:a="http://schemas.openxmlformats.org/drawingml/2006/main">
               <a:ext uri="{FF2B5EF4-FFF2-40B4-BE49-F238E27FC236}">
-                <a16:creationId xmlns:a16="http://schemas.microsoft.com/office/drawing/2014/main" id="{20F2CD27-DAD6-49DA-B1A4-8AA4BF788EA3}"/>
+                <a16:creationId xmlns:a16="http://schemas.microsoft.com/office/drawing/2014/main" id="{14D9E720-3EF3-4240-B1AC-2349A24EFE36}"/>
               </a:ext>
             </a:extLst>
           </p:cNvPr>
@@ -18521,7 +19829,7 @@
           <p:cNvPr id="16" name="room-board-copy">
             <a:extLst xmlns:a="http://schemas.openxmlformats.org/drawingml/2006/main">
               <a:ext uri="{FF2B5EF4-FFF2-40B4-BE49-F238E27FC236}">
-                <a16:creationId xmlns:a16="http://schemas.microsoft.com/office/drawing/2014/main" id="{0026C581-EA77-4E52-9D08-517A684E625E}"/>
+                <a16:creationId xmlns:a16="http://schemas.microsoft.com/office/drawing/2014/main" id="{06104809-1382-46DB-B597-84826FC188D8}"/>
               </a:ext>
             </a:extLst>
           </p:cNvPr>
@@ -18583,7 +19891,7 @@
           <p:cNvPr id="17" name="direct-cost-close">
             <a:extLst xmlns:a="http://schemas.openxmlformats.org/drawingml/2006/main">
               <a:ext uri="{FF2B5EF4-FFF2-40B4-BE49-F238E27FC236}">
-                <a16:creationId xmlns:a16="http://schemas.microsoft.com/office/drawing/2014/main" id="{B3E985C2-A302-4E10-B3C9-647789427401}"/>
+                <a16:creationId xmlns:a16="http://schemas.microsoft.com/office/drawing/2014/main" id="{E49356A7-A0CC-4772-98D4-5387563E4502}"/>
               </a:ext>
             </a:extLst>
           </p:cNvPr>
@@ -18643,7 +19951,7 @@
     </p:spTree>
     <p:extLst>
       <p:ext uri="{BB962C8B-B14F-4D97-AF65-F5344CB8AC3E}">
-        <p14:creationId xmlns:p14="http://schemas.microsoft.com/office/powerpoint/2010/main" val="1753935491"/>
+        <p14:creationId xmlns:p14="http://schemas.microsoft.com/office/powerpoint/2010/main" val="1415768292"/>
       </p:ext>
     </p:extLst>
   </p:cSld>
@@ -18674,7 +19982,7 @@
           <p:cNvPr id="15" name="accent-rule">
             <a:extLst xmlns:a="http://schemas.openxmlformats.org/drawingml/2006/main">
               <a:ext uri="{FF2B5EF4-FFF2-40B4-BE49-F238E27FC236}">
-                <a16:creationId xmlns:a16="http://schemas.microsoft.com/office/drawing/2014/main" id="{81EC67F6-7C17-4795-AD12-F3490EC81397}"/>
+                <a16:creationId xmlns:a16="http://schemas.microsoft.com/office/drawing/2014/main" id="{64E28347-A37D-4047-9C05-EEDFFB6E79E4}"/>
               </a:ext>
             </a:extLst>
           </p:cNvPr>
@@ -18705,7 +20013,7 @@
           <p:cNvPr id="2" name="chapter-label">
             <a:extLst xmlns:a="http://schemas.openxmlformats.org/drawingml/2006/main">
               <a:ext uri="{FF2B5EF4-FFF2-40B4-BE49-F238E27FC236}">
-                <a16:creationId xmlns:a16="http://schemas.microsoft.com/office/drawing/2014/main" id="{7CC541FE-8AFE-45E1-BFE6-DC90A62F5872}"/>
+                <a16:creationId xmlns:a16="http://schemas.microsoft.com/office/drawing/2014/main" id="{5540BB31-8D84-4F03-B7A3-2DF503A06D0B}"/>
               </a:ext>
             </a:extLst>
           </p:cNvPr>
@@ -18767,7 +20075,7 @@
           <p:cNvPr id="3" name="slide-title">
             <a:extLst xmlns:a="http://schemas.openxmlformats.org/drawingml/2006/main">
               <a:ext uri="{FF2B5EF4-FFF2-40B4-BE49-F238E27FC236}">
-                <a16:creationId xmlns:a16="http://schemas.microsoft.com/office/drawing/2014/main" id="{619190D5-AC4D-494F-97C1-D125C8D0161D}"/>
+                <a16:creationId xmlns:a16="http://schemas.microsoft.com/office/drawing/2014/main" id="{DB4FB95A-4675-4CD4-9838-6F6F5690B393}"/>
               </a:ext>
             </a:extLst>
           </p:cNvPr>
@@ -18829,7 +20137,7 @@
           <p:cNvPr id="4" name="footer-rule">
             <a:extLst xmlns:a="http://schemas.openxmlformats.org/drawingml/2006/main">
               <a:ext uri="{FF2B5EF4-FFF2-40B4-BE49-F238E27FC236}">
-                <a16:creationId xmlns:a16="http://schemas.microsoft.com/office/drawing/2014/main" id="{FDF52B46-2916-4A9A-AC97-FB5EF965B65C}"/>
+                <a16:creationId xmlns:a16="http://schemas.microsoft.com/office/drawing/2014/main" id="{3A97506B-FB27-482B-863A-81B8C94957D5}"/>
               </a:ext>
             </a:extLst>
           </p:cNvPr>
@@ -18860,7 +20168,7 @@
           <p:cNvPr id="5" name="footer-book">
             <a:extLst xmlns:a="http://schemas.openxmlformats.org/drawingml/2006/main">
               <a:ext uri="{FF2B5EF4-FFF2-40B4-BE49-F238E27FC236}">
-                <a16:creationId xmlns:a16="http://schemas.microsoft.com/office/drawing/2014/main" id="{BE7AD14E-4133-43D2-8C50-54B274063DE5}"/>
+                <a16:creationId xmlns:a16="http://schemas.microsoft.com/office/drawing/2014/main" id="{FA0949B4-09AC-411C-86A8-49CA6ABFE634}"/>
               </a:ext>
             </a:extLst>
           </p:cNvPr>
@@ -18922,7 +20230,7 @@
           <p:cNvPr id="6" name="footer-number">
             <a:extLst xmlns:a="http://schemas.openxmlformats.org/drawingml/2006/main">
               <a:ext uri="{FF2B5EF4-FFF2-40B4-BE49-F238E27FC236}">
-                <a16:creationId xmlns:a16="http://schemas.microsoft.com/office/drawing/2014/main" id="{C2DC13DE-1849-4254-A9A4-84038B8464CB}"/>
+                <a16:creationId xmlns:a16="http://schemas.microsoft.com/office/drawing/2014/main" id="{7CA12125-1520-4F2E-A6E1-2240C11822F2}"/>
               </a:ext>
             </a:extLst>
           </p:cNvPr>
@@ -18984,7 +20292,7 @@
           <p:cNvPr id="7" name="">
             <a:extLst xmlns:a="http://schemas.openxmlformats.org/drawingml/2006/main">
               <a:ext uri="{FF2B5EF4-FFF2-40B4-BE49-F238E27FC236}">
-                <a16:creationId xmlns:a16="http://schemas.microsoft.com/office/drawing/2014/main" id="{5CC617BA-7152-4710-9446-39A2625FD235}"/>
+                <a16:creationId xmlns:a16="http://schemas.microsoft.com/office/drawing/2014/main" id="{8015D215-9B43-436F-BD2A-8CCB5D69C7D8}"/>
               </a:ext>
             </a:extLst>
           </p:cNvPr>
@@ -19046,7 +20354,7 @@
           <p:cNvPr id="8" name="college-path">
             <a:extLst xmlns:a="http://schemas.openxmlformats.org/drawingml/2006/main">
               <a:ext uri="{FF2B5EF4-FFF2-40B4-BE49-F238E27FC236}">
-                <a16:creationId xmlns:a16="http://schemas.microsoft.com/office/drawing/2014/main" id="{3ED449D4-AC26-443E-9700-15EE999D16AE}"/>
+                <a16:creationId xmlns:a16="http://schemas.microsoft.com/office/drawing/2014/main" id="{3528199C-E884-4CE1-89C0-003ACE8F84E5}"/>
               </a:ext>
             </a:extLst>
           </p:cNvPr>
@@ -19108,7 +20416,7 @@
           <p:cNvPr id="9" name="college-instead">
             <a:extLst xmlns:a="http://schemas.openxmlformats.org/drawingml/2006/main">
               <a:ext uri="{FF2B5EF4-FFF2-40B4-BE49-F238E27FC236}">
-                <a16:creationId xmlns:a16="http://schemas.microsoft.com/office/drawing/2014/main" id="{C5E62088-C2F3-44FA-A7AB-C8EF1444AAF8}"/>
+                <a16:creationId xmlns:a16="http://schemas.microsoft.com/office/drawing/2014/main" id="{F720A68F-F4F2-4324-B9C1-0783E5C8CADE}"/>
               </a:ext>
             </a:extLst>
           </p:cNvPr>
@@ -19170,7 +20478,7 @@
           <p:cNvPr id="10" name="">
             <a:extLst xmlns:a="http://schemas.openxmlformats.org/drawingml/2006/main">
               <a:ext uri="{FF2B5EF4-FFF2-40B4-BE49-F238E27FC236}">
-                <a16:creationId xmlns:a16="http://schemas.microsoft.com/office/drawing/2014/main" id="{0077205E-BEE7-4503-B0F6-A62ADFF1E611}"/>
+                <a16:creationId xmlns:a16="http://schemas.microsoft.com/office/drawing/2014/main" id="{9EA0F567-5663-42E8-BDD3-19BC6FF55CB5}"/>
               </a:ext>
             </a:extLst>
           </p:cNvPr>
@@ -19232,7 +20540,7 @@
           <p:cNvPr id="11" name="work-path">
             <a:extLst xmlns:a="http://schemas.openxmlformats.org/drawingml/2006/main">
               <a:ext uri="{FF2B5EF4-FFF2-40B4-BE49-F238E27FC236}">
-                <a16:creationId xmlns:a16="http://schemas.microsoft.com/office/drawing/2014/main" id="{21F925E8-19CE-49CF-85BE-F78B4A6BC2DE}"/>
+                <a16:creationId xmlns:a16="http://schemas.microsoft.com/office/drawing/2014/main" id="{8469D5FF-55BD-48E7-A670-F537F822376F}"/>
               </a:ext>
             </a:extLst>
           </p:cNvPr>
@@ -19294,7 +20602,7 @@
           <p:cNvPr id="12" name="college-opportunity-rule">
             <a:extLst xmlns:a="http://schemas.openxmlformats.org/drawingml/2006/main">
               <a:ext uri="{FF2B5EF4-FFF2-40B4-BE49-F238E27FC236}">
-                <a16:creationId xmlns:a16="http://schemas.microsoft.com/office/drawing/2014/main" id="{BCFD24EF-1DA9-41F2-BE16-A16BE9961771}"/>
+                <a16:creationId xmlns:a16="http://schemas.microsoft.com/office/drawing/2014/main" id="{E0C57B4A-CAEF-494F-8BF5-C5C9BD5C9AD8}"/>
               </a:ext>
             </a:extLst>
           </p:cNvPr>
@@ -19325,7 +20633,7 @@
           <p:cNvPr id="13" name="forgone-wages">
             <a:extLst xmlns:a="http://schemas.openxmlformats.org/drawingml/2006/main">
               <a:ext uri="{FF2B5EF4-FFF2-40B4-BE49-F238E27FC236}">
-                <a16:creationId xmlns:a16="http://schemas.microsoft.com/office/drawing/2014/main" id="{D7038311-2128-4C84-88E5-2C6FBDE2E6C7}"/>
+                <a16:creationId xmlns:a16="http://schemas.microsoft.com/office/drawing/2014/main" id="{062A1027-BD09-4AF3-B9CC-6A19CA6962A3}"/>
               </a:ext>
             </a:extLst>
           </p:cNvPr>
@@ -19387,7 +20695,7 @@
           <p:cNvPr id="14" name="forgone-wages-close">
             <a:extLst xmlns:a="http://schemas.openxmlformats.org/drawingml/2006/main">
               <a:ext uri="{FF2B5EF4-FFF2-40B4-BE49-F238E27FC236}">
-                <a16:creationId xmlns:a16="http://schemas.microsoft.com/office/drawing/2014/main" id="{A2C7CCF2-BB56-4C77-A7ED-91FE03D17867}"/>
+                <a16:creationId xmlns:a16="http://schemas.microsoft.com/office/drawing/2014/main" id="{954735BF-B69B-48D4-8BD7-B79975644F7F}"/>
               </a:ext>
             </a:extLst>
           </p:cNvPr>
@@ -19447,7 +20755,7 @@
     </p:spTree>
     <p:extLst>
       <p:ext uri="{BB962C8B-B14F-4D97-AF65-F5344CB8AC3E}">
-        <p14:creationId xmlns:p14="http://schemas.microsoft.com/office/powerpoint/2010/main" val="638708293"/>
+        <p14:creationId xmlns:p14="http://schemas.microsoft.com/office/powerpoint/2010/main" val="208437300"/>
       </p:ext>
     </p:extLst>
   </p:cSld>
@@ -19478,7 +20786,7 @@
           <p:cNvPr id="13" name="accent-rule">
             <a:extLst xmlns:a="http://schemas.openxmlformats.org/drawingml/2006/main">
               <a:ext uri="{FF2B5EF4-FFF2-40B4-BE49-F238E27FC236}">
-                <a16:creationId xmlns:a16="http://schemas.microsoft.com/office/drawing/2014/main" id="{AD81F558-716F-4734-979C-BC0CCF571D7B}"/>
+                <a16:creationId xmlns:a16="http://schemas.microsoft.com/office/drawing/2014/main" id="{FED0ED72-BF55-4722-A925-93E93E22A20E}"/>
               </a:ext>
             </a:extLst>
           </p:cNvPr>
@@ -19509,7 +20817,7 @@
           <p:cNvPr id="2" name="chapter-label">
             <a:extLst xmlns:a="http://schemas.openxmlformats.org/drawingml/2006/main">
               <a:ext uri="{FF2B5EF4-FFF2-40B4-BE49-F238E27FC236}">
-                <a16:creationId xmlns:a16="http://schemas.microsoft.com/office/drawing/2014/main" id="{65A0FD4C-39EE-43DD-9443-AD6D701C7829}"/>
+                <a16:creationId xmlns:a16="http://schemas.microsoft.com/office/drawing/2014/main" id="{93C55BAB-70FF-49FB-BE8F-2827C1D74B84}"/>
               </a:ext>
             </a:extLst>
           </p:cNvPr>
@@ -19571,7 +20879,7 @@
           <p:cNvPr id="3" name="slide-title">
             <a:extLst xmlns:a="http://schemas.openxmlformats.org/drawingml/2006/main">
               <a:ext uri="{FF2B5EF4-FFF2-40B4-BE49-F238E27FC236}">
-                <a16:creationId xmlns:a16="http://schemas.microsoft.com/office/drawing/2014/main" id="{B35A66A8-A1E1-4889-A9E1-4FF9E69E8005}"/>
+                <a16:creationId xmlns:a16="http://schemas.microsoft.com/office/drawing/2014/main" id="{52142FFD-0C77-4D3F-A984-260955C93B23}"/>
               </a:ext>
             </a:extLst>
           </p:cNvPr>
@@ -19633,7 +20941,7 @@
           <p:cNvPr id="4" name="footer-rule">
             <a:extLst xmlns:a="http://schemas.openxmlformats.org/drawingml/2006/main">
               <a:ext uri="{FF2B5EF4-FFF2-40B4-BE49-F238E27FC236}">
-                <a16:creationId xmlns:a16="http://schemas.microsoft.com/office/drawing/2014/main" id="{C7C78EA8-3135-49C7-B256-F0905D2B9176}"/>
+                <a16:creationId xmlns:a16="http://schemas.microsoft.com/office/drawing/2014/main" id="{19F3EA6C-6E90-4CD4-AD90-8AE728036408}"/>
               </a:ext>
             </a:extLst>
           </p:cNvPr>
@@ -19664,7 +20972,7 @@
           <p:cNvPr id="5" name="footer-book">
             <a:extLst xmlns:a="http://schemas.openxmlformats.org/drawingml/2006/main">
               <a:ext uri="{FF2B5EF4-FFF2-40B4-BE49-F238E27FC236}">
-                <a16:creationId xmlns:a16="http://schemas.microsoft.com/office/drawing/2014/main" id="{9C92DB4A-BC79-4E3D-AB0E-13C3C2948536}"/>
+                <a16:creationId xmlns:a16="http://schemas.microsoft.com/office/drawing/2014/main" id="{0F7E7B42-4BA1-49C9-983F-2DE5BC524859}"/>
               </a:ext>
             </a:extLst>
           </p:cNvPr>
@@ -19726,7 +21034,7 @@
           <p:cNvPr id="6" name="footer-number">
             <a:extLst xmlns:a="http://schemas.openxmlformats.org/drawingml/2006/main">
               <a:ext uri="{FF2B5EF4-FFF2-40B4-BE49-F238E27FC236}">
-                <a16:creationId xmlns:a16="http://schemas.microsoft.com/office/drawing/2014/main" id="{D07C70C8-9894-4DA0-AD17-E5EADA3A8347}"/>
+                <a16:creationId xmlns:a16="http://schemas.microsoft.com/office/drawing/2014/main" id="{3DA5EABB-24CF-41E6-A788-9F05AEAF2454}"/>
               </a:ext>
             </a:extLst>
           </p:cNvPr>
@@ -19788,7 +21096,7 @@
           <p:cNvPr id="7" name="environment-heading">
             <a:extLst xmlns:a="http://schemas.openxmlformats.org/drawingml/2006/main">
               <a:ext uri="{FF2B5EF4-FFF2-40B4-BE49-F238E27FC236}">
-                <a16:creationId xmlns:a16="http://schemas.microsoft.com/office/drawing/2014/main" id="{63780161-77C5-4682-A965-A66EB6BB1D7B}"/>
+                <a16:creationId xmlns:a16="http://schemas.microsoft.com/office/drawing/2014/main" id="{FD62EE21-1786-4333-BFD8-4DD8ED26816B}"/>
               </a:ext>
             </a:extLst>
           </p:cNvPr>
@@ -19850,7 +21158,7 @@
           <p:cNvPr id="8" name="environment-copy">
             <a:extLst xmlns:a="http://schemas.openxmlformats.org/drawingml/2006/main">
               <a:ext uri="{FF2B5EF4-FFF2-40B4-BE49-F238E27FC236}">
-                <a16:creationId xmlns:a16="http://schemas.microsoft.com/office/drawing/2014/main" id="{05784DCF-5E82-477D-B23C-335F8079A440}"/>
+                <a16:creationId xmlns:a16="http://schemas.microsoft.com/office/drawing/2014/main" id="{C23DAAF2-7757-4EBA-840D-51032A9D79F0}"/>
               </a:ext>
             </a:extLst>
           </p:cNvPr>
@@ -19912,7 +21220,7 @@
           <p:cNvPr id="9" name="policy-divider">
             <a:extLst xmlns:a="http://schemas.openxmlformats.org/drawingml/2006/main">
               <a:ext uri="{FF2B5EF4-FFF2-40B4-BE49-F238E27FC236}">
-                <a16:creationId xmlns:a16="http://schemas.microsoft.com/office/drawing/2014/main" id="{DF52D7B3-7005-450C-ADAE-9C001AAB58F6}"/>
+                <a16:creationId xmlns:a16="http://schemas.microsoft.com/office/drawing/2014/main" id="{36522443-09A4-460F-A9EF-5E35B3E84713}"/>
               </a:ext>
             </a:extLst>
           </p:cNvPr>
@@ -19943,7 +21251,7 @@
           <p:cNvPr id="10" name="pie-heading">
             <a:extLst xmlns:a="http://schemas.openxmlformats.org/drawingml/2006/main">
               <a:ext uri="{FF2B5EF4-FFF2-40B4-BE49-F238E27FC236}">
-                <a16:creationId xmlns:a16="http://schemas.microsoft.com/office/drawing/2014/main" id="{76E14BA6-7E4C-4BCD-A85F-5261DFDDA824}"/>
+                <a16:creationId xmlns:a16="http://schemas.microsoft.com/office/drawing/2014/main" id="{F9ADAD3D-E18C-460D-BE26-9ECFFE50B08A}"/>
               </a:ext>
             </a:extLst>
           </p:cNvPr>
@@ -20005,7 +21313,7 @@
           <p:cNvPr id="11" name="pie-copy">
             <a:extLst xmlns:a="http://schemas.openxmlformats.org/drawingml/2006/main">
               <a:ext uri="{FF2B5EF4-FFF2-40B4-BE49-F238E27FC236}">
-                <a16:creationId xmlns:a16="http://schemas.microsoft.com/office/drawing/2014/main" id="{3317F501-56EB-4F5D-AD01-72EBC6EFDEFF}"/>
+                <a16:creationId xmlns:a16="http://schemas.microsoft.com/office/drawing/2014/main" id="{A23668E6-E249-46AC-B9B4-A9757BD5BBD1}"/>
               </a:ext>
             </a:extLst>
           </p:cNvPr>
@@ -20067,7 +21375,7 @@
           <p:cNvPr id="12" name="policy-close">
             <a:extLst xmlns:a="http://schemas.openxmlformats.org/drawingml/2006/main">
               <a:ext uri="{FF2B5EF4-FFF2-40B4-BE49-F238E27FC236}">
-                <a16:creationId xmlns:a16="http://schemas.microsoft.com/office/drawing/2014/main" id="{934FB3C7-2722-4A5D-98AA-BDCBED06C586}"/>
+                <a16:creationId xmlns:a16="http://schemas.microsoft.com/office/drawing/2014/main" id="{229E15D9-0BB8-40D0-93F7-A1A5D4573639}"/>
               </a:ext>
             </a:extLst>
           </p:cNvPr>
@@ -20127,7 +21435,7 @@
     </p:spTree>
     <p:extLst>
       <p:ext uri="{BB962C8B-B14F-4D97-AF65-F5344CB8AC3E}">
-        <p14:creationId xmlns:p14="http://schemas.microsoft.com/office/powerpoint/2010/main" val="1545679908"/>
+        <p14:creationId xmlns:p14="http://schemas.microsoft.com/office/powerpoint/2010/main" val="1510364931"/>
       </p:ext>
     </p:extLst>
   </p:cSld>
@@ -20158,7 +21466,7 @@
           <p:cNvPr id="13" name="accent-rule">
             <a:extLst xmlns:a="http://schemas.openxmlformats.org/drawingml/2006/main">
               <a:ext uri="{FF2B5EF4-FFF2-40B4-BE49-F238E27FC236}">
-                <a16:creationId xmlns:a16="http://schemas.microsoft.com/office/drawing/2014/main" id="{8F612AE3-2B99-42E0-8CF3-96E86DB1BB38}"/>
+                <a16:creationId xmlns:a16="http://schemas.microsoft.com/office/drawing/2014/main" id="{06D32C5C-C22B-42E5-8985-075BD8DD0070}"/>
               </a:ext>
             </a:extLst>
           </p:cNvPr>
@@ -20189,7 +21497,7 @@
           <p:cNvPr id="2" name="chapter-label">
             <a:extLst xmlns:a="http://schemas.openxmlformats.org/drawingml/2006/main">
               <a:ext uri="{FF2B5EF4-FFF2-40B4-BE49-F238E27FC236}">
-                <a16:creationId xmlns:a16="http://schemas.microsoft.com/office/drawing/2014/main" id="{1206AF3D-70B4-4F67-B3A8-2BE3DF1B8154}"/>
+                <a16:creationId xmlns:a16="http://schemas.microsoft.com/office/drawing/2014/main" id="{BFA8FC7E-0918-4299-A659-38F0AD31BED7}"/>
               </a:ext>
             </a:extLst>
           </p:cNvPr>
@@ -20251,7 +21559,7 @@
           <p:cNvPr id="3" name="slide-title">
             <a:extLst xmlns:a="http://schemas.openxmlformats.org/drawingml/2006/main">
               <a:ext uri="{FF2B5EF4-FFF2-40B4-BE49-F238E27FC236}">
-                <a16:creationId xmlns:a16="http://schemas.microsoft.com/office/drawing/2014/main" id="{3AFBD197-5CE1-422E-9945-B40CEE6887DE}"/>
+                <a16:creationId xmlns:a16="http://schemas.microsoft.com/office/drawing/2014/main" id="{14AE2C76-300D-41F9-A0E4-1C0B4197EA34}"/>
               </a:ext>
             </a:extLst>
           </p:cNvPr>
@@ -20313,7 +21621,7 @@
           <p:cNvPr id="4" name="footer-rule">
             <a:extLst xmlns:a="http://schemas.openxmlformats.org/drawingml/2006/main">
               <a:ext uri="{FF2B5EF4-FFF2-40B4-BE49-F238E27FC236}">
-                <a16:creationId xmlns:a16="http://schemas.microsoft.com/office/drawing/2014/main" id="{A97B5CD7-11C6-4464-A77A-E7B339D9BC8D}"/>
+                <a16:creationId xmlns:a16="http://schemas.microsoft.com/office/drawing/2014/main" id="{54A89EA6-FE53-42E3-B7A7-E7B5DEE66503}"/>
               </a:ext>
             </a:extLst>
           </p:cNvPr>
@@ -20344,7 +21652,7 @@
           <p:cNvPr id="5" name="footer-book">
             <a:extLst xmlns:a="http://schemas.openxmlformats.org/drawingml/2006/main">
               <a:ext uri="{FF2B5EF4-FFF2-40B4-BE49-F238E27FC236}">
-                <a16:creationId xmlns:a16="http://schemas.microsoft.com/office/drawing/2014/main" id="{5BCCBA93-248D-48D7-9BBC-A2A0BDAFA528}"/>
+                <a16:creationId xmlns:a16="http://schemas.microsoft.com/office/drawing/2014/main" id="{AFCDC50E-00C4-4B4C-9CD5-08CC68001542}"/>
               </a:ext>
             </a:extLst>
           </p:cNvPr>
@@ -20406,7 +21714,7 @@
           <p:cNvPr id="6" name="footer-number">
             <a:extLst xmlns:a="http://schemas.openxmlformats.org/drawingml/2006/main">
               <a:ext uri="{FF2B5EF4-FFF2-40B4-BE49-F238E27FC236}">
-                <a16:creationId xmlns:a16="http://schemas.microsoft.com/office/drawing/2014/main" id="{C16D6114-78FA-46FC-B262-B3114AB723FC}"/>
+                <a16:creationId xmlns:a16="http://schemas.microsoft.com/office/drawing/2014/main" id="{EF56F81E-1E02-4BDE-B462-6A1FED96E9A9}"/>
               </a:ext>
             </a:extLst>
           </p:cNvPr>
@@ -20468,7 +21776,7 @@
           <p:cNvPr id="7" name="sunk-paid">
             <a:extLst xmlns:a="http://schemas.openxmlformats.org/drawingml/2006/main">
               <a:ext uri="{FF2B5EF4-FFF2-40B4-BE49-F238E27FC236}">
-                <a16:creationId xmlns:a16="http://schemas.microsoft.com/office/drawing/2014/main" id="{2010E8CE-E084-40EA-8BE6-3FBA1CC29148}"/>
+                <a16:creationId xmlns:a16="http://schemas.microsoft.com/office/drawing/2014/main" id="{6E10090B-DFBF-4546-9116-239751743D16}"/>
               </a:ext>
             </a:extLst>
           </p:cNvPr>
@@ -20530,7 +21838,7 @@
           <p:cNvPr id="8" name="sunk-plus">
             <a:extLst xmlns:a="http://schemas.openxmlformats.org/drawingml/2006/main">
               <a:ext uri="{FF2B5EF4-FFF2-40B4-BE49-F238E27FC236}">
-                <a16:creationId xmlns:a16="http://schemas.microsoft.com/office/drawing/2014/main" id="{66F832C8-1651-44EB-929E-A2427D1D6EFA}"/>
+                <a16:creationId xmlns:a16="http://schemas.microsoft.com/office/drawing/2014/main" id="{18A24CCA-57A0-4245-AA52-FD61C55BAE50}"/>
               </a:ext>
             </a:extLst>
           </p:cNvPr>
@@ -20592,7 +21900,7 @@
           <p:cNvPr id="9" name="sunk-unrecoverable">
             <a:extLst xmlns:a="http://schemas.openxmlformats.org/drawingml/2006/main">
               <a:ext uri="{FF2B5EF4-FFF2-40B4-BE49-F238E27FC236}">
-                <a16:creationId xmlns:a16="http://schemas.microsoft.com/office/drawing/2014/main" id="{9233C78B-D3E2-45DE-862F-5D12C48C2D42}"/>
+                <a16:creationId xmlns:a16="http://schemas.microsoft.com/office/drawing/2014/main" id="{1B90C69A-112E-4585-BC94-3A061742B982}"/>
               </a:ext>
             </a:extLst>
           </p:cNvPr>
@@ -20654,7 +21962,7 @@
           <p:cNvPr id="10" name="sunk-result">
             <a:extLst xmlns:a="http://schemas.openxmlformats.org/drawingml/2006/main">
               <a:ext uri="{FF2B5EF4-FFF2-40B4-BE49-F238E27FC236}">
-                <a16:creationId xmlns:a16="http://schemas.microsoft.com/office/drawing/2014/main" id="{D57E2360-285C-4F68-A73E-4F31B7BB45E9}"/>
+                <a16:creationId xmlns:a16="http://schemas.microsoft.com/office/drawing/2014/main" id="{E0094216-15B3-46C0-841C-22063497B8E4}"/>
               </a:ext>
             </a:extLst>
           </p:cNvPr>
@@ -20716,7 +22024,7 @@
           <p:cNvPr id="11" name="sunk-rule">
             <a:extLst xmlns:a="http://schemas.openxmlformats.org/drawingml/2006/main">
               <a:ext uri="{FF2B5EF4-FFF2-40B4-BE49-F238E27FC236}">
-                <a16:creationId xmlns:a16="http://schemas.microsoft.com/office/drawing/2014/main" id="{CBA817F5-901D-4833-BCF6-516DB32119CF}"/>
+                <a16:creationId xmlns:a16="http://schemas.microsoft.com/office/drawing/2014/main" id="{F94AF96B-02FD-43AC-9053-A4E33FF291C2}"/>
               </a:ext>
             </a:extLst>
           </p:cNvPr>
@@ -20747,7 +22055,7 @@
           <p:cNvPr id="12" name="sunk-question">
             <a:extLst xmlns:a="http://schemas.openxmlformats.org/drawingml/2006/main">
               <a:ext uri="{FF2B5EF4-FFF2-40B4-BE49-F238E27FC236}">
-                <a16:creationId xmlns:a16="http://schemas.microsoft.com/office/drawing/2014/main" id="{3A20F7DF-EEFB-4D11-A079-D89BA41DC661}"/>
+                <a16:creationId xmlns:a16="http://schemas.microsoft.com/office/drawing/2014/main" id="{9B5AFE16-AB44-48E1-A3F1-ED1ECAF26684}"/>
               </a:ext>
             </a:extLst>
           </p:cNvPr>
@@ -20807,7 +22115,7 @@
     </p:spTree>
     <p:extLst>
       <p:ext uri="{BB962C8B-B14F-4D97-AF65-F5344CB8AC3E}">
-        <p14:creationId xmlns:p14="http://schemas.microsoft.com/office/powerpoint/2010/main" val="789702569"/>
+        <p14:creationId xmlns:p14="http://schemas.microsoft.com/office/powerpoint/2010/main" val="769361655"/>
       </p:ext>
     </p:extLst>
   </p:cSld>
